--- a/70_Presentations/717_Learning Group-20260916/Velocity Filters Human.pptx
+++ b/70_Presentations/717_Learning Group-20260916/Velocity Filters Human.pptx
@@ -5,7 +5,7 @@
     <p:sldMasterId id="2147483648" r:id="rId1"/>
   </p:sldMasterIdLst>
   <p:notesMasterIdLst>
-    <p:notesMasterId r:id="rId21"/>
+    <p:notesMasterId r:id="rId20"/>
   </p:notesMasterIdLst>
   <p:sldIdLst>
     <p:sldId id="256" r:id="rId2"/>
@@ -14,18 +14,18 @@
     <p:sldId id="258" r:id="rId5"/>
     <p:sldId id="259" r:id="rId6"/>
     <p:sldId id="260" r:id="rId7"/>
-    <p:sldId id="262" r:id="rId9"/>
-    <p:sldId id="263" r:id="rId10"/>
-    <p:sldId id="264" r:id="rId11"/>
-    <p:sldId id="265" r:id="rId12"/>
-    <p:sldId id="266" r:id="rId13"/>
-    <p:sldId id="267" r:id="rId14"/>
-    <p:sldId id="268" r:id="rId15"/>
-    <p:sldId id="269" r:id="rId16"/>
-    <p:sldId id="270" r:id="rId17"/>
-    <p:sldId id="271" r:id="rId18"/>
-    <p:sldId id="272" r:id="rId19"/>
-    <p:sldId id="273" r:id="rId20"/>
+    <p:sldId id="262" r:id="rId8"/>
+    <p:sldId id="263" r:id="rId9"/>
+    <p:sldId id="264" r:id="rId10"/>
+    <p:sldId id="265" r:id="rId11"/>
+    <p:sldId id="266" r:id="rId12"/>
+    <p:sldId id="267" r:id="rId13"/>
+    <p:sldId id="268" r:id="rId14"/>
+    <p:sldId id="269" r:id="rId15"/>
+    <p:sldId id="270" r:id="rId16"/>
+    <p:sldId id="271" r:id="rId17"/>
+    <p:sldId id="272" r:id="rId18"/>
+    <p:sldId id="273" r:id="rId19"/>
   </p:sldIdLst>
   <p:sldSz cx="9144000" cy="5143500" type="screen16x9"/>
   <p:notesSz cx="5143500" cy="9144000"/>
@@ -300,7 +300,7 @@
           <a:p>
             <a:r>
               <a:rPr lang="en-US" dirty="0"/>
-              <a:t>Welcome to the learning group. Today we cover Section III.B of Chapter 11 on velocity filters. I will show you why a filter that ignores mass is the most sensitive way to find superheavy elements.</a:t>
+              <a:t>Welcome to the learning group. Today we cover velocity filters from Chapter 11. I will show you why a filter that ignores mass is the most sensitive way to find superheavy elements.</a:t>
             </a:r>
           </a:p>
         </p:txBody>
@@ -386,7 +386,8 @@
           <a:lstStyle/>
           <a:p>
             <a:r>
-              <a:t>Second of four. The unreacted beam is more than 10¹⁶ times stronger than the signal. How does the filter survive it?</a:t>
+              <a:rPr lang="en-US" dirty="0"/>
+              <a:t>This is SHIP at GSI. Notice it is not a crossed-field Wien filter. The electric condenser comes first. It deflects the primary beam away immediately, so the beam never hits the plates — no scattered background, no heat damage.</a:t>
             </a:r>
           </a:p>
         </p:txBody>
@@ -473,7 +474,7 @@
           <a:p>
             <a:r>
               <a:rPr lang="en-US" dirty="0"/>
-              <a:t>This is SHIP at GSI. Notice it is not a crossed-field Wien filter. The electric condenser comes first. It deflects the primary beam away immediately, so the beam never hits the plates — no scattered background, no heat damage.</a:t>
+              <a:t>In contrast, Daresbury uses crossed E and B fields, followed by a magnetic spectrometer to refocus the energy spread.</a:t>
             </a:r>
           </a:p>
         </p:txBody>
@@ -559,8 +560,7 @@
           <a:lstStyle/>
           <a:p>
             <a:r>
-              <a:rPr lang="en-US" dirty="0"/>
-              <a:t>In contrast, Daresbury uses crossed E and B fields, followed by a magnetic spectrometer to refocus the energy spread.</a:t>
+              <a:t>Third of four. Back to the trade-off from slide 8: the filter never measures mass in flight. So how do we know what we caught?</a:t>
             </a:r>
           </a:p>
         </p:txBody>
@@ -646,7 +646,8 @@
           <a:lstStyle/>
           <a:p>
             <a:r>
-              <a:t>Third of four. Back to the trade-off from slide 8: the filter never measures mass in flight. So how do we know what we caught?</a:t>
+              <a:rPr lang="en-US" dirty="0"/>
+              <a:t>Because SHIP separates in under 2 microseconds, we can implant short-lived residues into silicon. Here is the first ground-state proton decay from Lutetium-151, cleanly isolated from the alpha background.</a:t>
             </a:r>
           </a:p>
         </p:txBody>
@@ -732,8 +733,7 @@
           <a:lstStyle/>
           <a:p>
             <a:r>
-              <a:rPr lang="en-US" dirty="0"/>
-              <a:t>Because SHIP separates in under 2 microseconds, we can implant short-lived residues into silicon. Here is the first ground-state proton decay from Lutetium-151, cleanly isolated from the alpha background.</a:t>
+              <a:t>Back to the three atoms from the start. Out of 6 × 10¹⁷ projectiles over ten days, SHIP produced just three atoms of element 108. Because SHIP does not measure mass, we prove the isotope by watching it alpha-decay step by step into known daughters.</a:t>
             </a:r>
           </a:p>
         </p:txBody>
@@ -819,7 +819,7 @@
           <a:lstStyle/>
           <a:p>
             <a:r>
-              <a:t>Back to the three atoms from the start. Out of 6 × 10¹⁷ projectiles over ten days, SHIP produced just three atoms of element 108. Because SHIP does not measure mass, we prove the isotope by watching it alpha-decay step by step into known daughters.</a:t>
+              <a:t>At Daresbury, they surround the target with gamma detectors. By only looking at gammas coincident with a mass-selected recoil at the focal plane, the Coulomb-excitation and target-impurity background disappears.</a:t>
             </a:r>
           </a:p>
         </p:txBody>
@@ -905,7 +905,7 @@
           <a:lstStyle/>
           <a:p>
             <a:r>
-              <a:t>At Daresbury, they surround the target with gamma detectors. By only looking at gammas coincident with a recoil at the focal plane, the Coulomb-excitation and fission background disappears.</a:t>
+              <a:t>Last of four: when is a velocity filter the wrong tool?</a:t>
             </a:r>
           </a:p>
         </p:txBody>
@@ -991,7 +991,8 @@
           <a:lstStyle/>
           <a:p>
             <a:r>
-              <a:t>Last of four: when is a velocity filter the wrong tool?</a:t>
+              <a:rPr lang="en-US" dirty="0"/>
+              <a:t>Velocity filters are the best choice for Coulomb-barrier fusion where you need maximum transmission. If you need mass resolution in flight, use an RMS. If you have relativistic energies, use a fragment separator.</a:t>
             </a:r>
           </a:p>
         </p:txBody>
@@ -1078,7 +1079,7 @@
           <a:p>
             <a:r>
               <a:rPr lang="en-US" dirty="0"/>
-              <a:t>Velocity filters are the best choice for Coulomb-barrier fusion where you need maximum transmission. If you need mass resolution in flight, use an RMS. If you have relativistic energies, use a fragment separator.</a:t>
+              <a:t>To summarize: velocity filters ignore mass to achieve 100% charge-state transmission; SHIP's separated fields survive particle-microampere beams; and this extreme sensitivity makes single-atom discoveries possible.</a:t>
             </a:r>
           </a:p>
         </p:txBody>
@@ -1101,93 +1102,6 @@
             <a:fld id="{F7021451-1387-4CA6-816F-3879F97B5CBC}" type="slidenum">
               <a:rPr lang="en-US"/>
               <a:t>18</a:t>
-            </a:fld>
-            <a:endParaRPr lang="en-US"/>
-          </a:p>
-        </p:txBody>
-      </p:sp>
-    </p:spTree>
-    <p:extLst>
-      <p:ext uri="{BB962C8B-B14F-4D97-AF65-F5344CB8AC3E}">
-        <p14:creationId xmlns:p14="http://schemas.microsoft.com/office/powerpoint/2010/main" val="1024086991"/>
-      </p:ext>
-    </p:extLst>
-  </p:cSld>
-  <p:clrMapOvr>
-    <a:masterClrMapping/>
-  </p:clrMapOvr>
-</p:notes>
-</file>
-
-<file path=ppt/notesSlides/notesSlide19.xml><?xml version="1.0" encoding="utf-8"?>
-<p:notes xmlns:a="http://schemas.openxmlformats.org/drawingml/2006/main" xmlns:r="http://schemas.openxmlformats.org/officeDocument/2006/relationships" xmlns:p="http://schemas.openxmlformats.org/presentationml/2006/main">
-  <p:cSld>
-    <p:spTree>
-      <p:nvGrpSpPr>
-        <p:cNvPr id="1" name=""/>
-        <p:cNvGrpSpPr/>
-        <p:nvPr/>
-      </p:nvGrpSpPr>
-      <p:grpSpPr>
-        <a:xfrm>
-          <a:off x="0" y="0"/>
-          <a:ext cx="0" cy="0"/>
-          <a:chOff x="0" y="0"/>
-          <a:chExt cx="0" cy="0"/>
-        </a:xfrm>
-      </p:grpSpPr>
-      <p:sp>
-        <p:nvSpPr>
-          <p:cNvPr id="2" name="Slide Image Placeholder 1"/>
-          <p:cNvSpPr>
-            <a:spLocks noGrp="1" noRot="1" noChangeAspect="1"/>
-          </p:cNvSpPr>
-          <p:nvPr>
-            <p:ph type="sldImg"/>
-          </p:nvPr>
-        </p:nvSpPr>
-        <p:spPr/>
-      </p:sp>
-      <p:sp>
-        <p:nvSpPr>
-          <p:cNvPr id="3" name="Notes Placeholder 2"/>
-          <p:cNvSpPr>
-            <a:spLocks noGrp="1"/>
-          </p:cNvSpPr>
-          <p:nvPr>
-            <p:ph type="body" idx="1"/>
-          </p:nvPr>
-        </p:nvSpPr>
-        <p:spPr/>
-        <p:txBody>
-          <a:bodyPr/>
-          <a:lstStyle/>
-          <a:p>
-            <a:r>
-              <a:rPr lang="en-US" dirty="0"/>
-              <a:t>To summarize: velocity filters ignore mass to achieve 100% charge-state transmission; SHIP's separated fields survive particle-microampere beams; and this extreme sensitivity makes single-atom discoveries possible.</a:t>
-            </a:r>
-          </a:p>
-        </p:txBody>
-      </p:sp>
-      <p:sp>
-        <p:nvSpPr>
-          <p:cNvPr id="4" name="Slide Number Placeholder 3"/>
-          <p:cNvSpPr>
-            <a:spLocks noGrp="1"/>
-          </p:cNvSpPr>
-          <p:nvPr>
-            <p:ph type="sldNum" sz="quarter" idx="10"/>
-          </p:nvPr>
-        </p:nvSpPr>
-        <p:spPr/>
-        <p:txBody>
-          <a:bodyPr/>
-          <a:lstStyle/>
-          <a:p>
-            <a:fld id="{F7021451-1387-4CA6-816F-3879F97B5CBC}" type="slidenum">
-              <a:rPr lang="en-US"/>
-              <a:t>19</a:t>
             </a:fld>
             <a:endParaRPr lang="en-US"/>
           </a:p>
@@ -1239,6 +1153,7 @@
           <a:lstStyle/>
           <a:p>
             <a:r>
+              <a:rPr dirty="0"/>
               <a:t>At GSI, SHIP ran an iron beam on a lead target for ten days: 6 × 10¹⁷ projectiles. Three atoms of element 108 came out — flying in the same direction as the beam. How would you pick those three out? That is the job of a separator, and today's device does it by velocity.</a:t>
             </a:r>
           </a:p>
@@ -1297,6 +1212,7 @@
           <a:lstStyle/>
           <a:p>
             <a:r>
+              <a:rPr dirty="0"/>
               <a:t>Here is the plan: four questions, and each answer raises the next one.</a:t>
             </a:r>
           </a:p>
@@ -1383,6 +1299,7 @@
           <a:lstStyle/>
           <a:p>
             <a:r>
+              <a:rPr dirty="0"/>
               <a:t>First of four. A mass spectrometer is the tool we all learned. Why not use one here?</a:t>
             </a:r>
           </a:p>
@@ -1469,7 +1386,16 @@
           <a:lstStyle/>
           <a:p>
             <a:r>
-              <a:t>Recall how a mass spectrometer works: a magnet bends each ion by momentum over charge. Here is the catch. In complete fusion, the compound nucleus takes the full projectile momentum, so to a magnet the residue looks almost like the beam — the book shows their magnetic rigidities nearly coincide (Fig. 9). But that momentum now sits on a much heavier nucleus, so it moves at the centre-of-mass velocity: for iron on lead, about a fifth of the beam speed. Same momentum, lower speed — that is our handle.</a:t>
+              <a:rPr dirty="0"/>
+              <a:t>Recall how a mass spectrometer works: a magnet bends each ion by momentum over charge. Here is the catch. In complete fusion, the compound nucleus takes the full projectile momentum, so to a magnet the residue looks almost like the beam — the book shows their magnetic rigidities nearly coincide (Fig. 9). But that momentum now sits on a much heavier nucleus, so it moves at the </a:t>
+            </a:r>
+            <a:r>
+              <a:rPr dirty="0" err="1"/>
+              <a:t>centre</a:t>
+            </a:r>
+            <a:r>
+              <a:rPr dirty="0"/>
+              <a:t>-of-mass velocity: for iron on lead, about a fifth of the beam speed. Same momentum, lower speed — that is our handle.</a:t>
             </a:r>
           </a:p>
         </p:txBody>
@@ -1596,6 +1522,92 @@
 </p:notes>
 </file>
 
+<file path=ppt/notesSlides/notesSlide7.xml><?xml version="1.0" encoding="utf-8"?>
+<p:notes xmlns:a="http://schemas.openxmlformats.org/drawingml/2006/main" xmlns:r="http://schemas.openxmlformats.org/officeDocument/2006/relationships" xmlns:p="http://schemas.openxmlformats.org/presentationml/2006/main">
+  <p:cSld>
+    <p:spTree>
+      <p:nvGrpSpPr>
+        <p:cNvPr id="1" name=""/>
+        <p:cNvGrpSpPr/>
+        <p:nvPr/>
+      </p:nvGrpSpPr>
+      <p:grpSpPr>
+        <a:xfrm>
+          <a:off x="0" y="0"/>
+          <a:ext cx="0" cy="0"/>
+          <a:chOff x="0" y="0"/>
+          <a:chExt cx="0" cy="0"/>
+        </a:xfrm>
+      </p:grpSpPr>
+      <p:sp>
+        <p:nvSpPr>
+          <p:cNvPr id="2" name="Slide Image Placeholder 1"/>
+          <p:cNvSpPr>
+            <a:spLocks noGrp="1" noRot="1" noChangeAspect="1"/>
+          </p:cNvSpPr>
+          <p:nvPr>
+            <p:ph type="sldImg"/>
+          </p:nvPr>
+        </p:nvSpPr>
+        <p:spPr/>
+      </p:sp>
+      <p:sp>
+        <p:nvSpPr>
+          <p:cNvPr id="3" name="Notes Placeholder 2"/>
+          <p:cNvSpPr>
+            <a:spLocks noGrp="1"/>
+          </p:cNvSpPr>
+          <p:nvPr>
+            <p:ph type="body" idx="1"/>
+          </p:nvPr>
+        </p:nvSpPr>
+        <p:spPr/>
+        <p:txBody>
+          <a:bodyPr/>
+          <a:lstStyle/>
+          <a:p>
+            <a:r>
+              <a:t>But a magnet is not the whole story: recoil mass separators add electric fields, and they do separate residues from the beam. Their catch is the charge state. They disperse by A/q, and heavy ions emerge in a spread of charge states centred near q ≈ 20 — about five states carry the intensity. A mass separator keeps only one or two, losing most of the yield. On the left, schematically: one residue species arrives in about five charge states; the separator transmits the navy one, and the grey ones are lost.</a:t>
+            </a:r>
+          </a:p>
+        </p:txBody>
+      </p:sp>
+      <p:sp>
+        <p:nvSpPr>
+          <p:cNvPr id="4" name="Slide Number Placeholder 3"/>
+          <p:cNvSpPr>
+            <a:spLocks noGrp="1"/>
+          </p:cNvSpPr>
+          <p:nvPr>
+            <p:ph type="sldNum" sz="quarter" idx="10"/>
+          </p:nvPr>
+        </p:nvSpPr>
+        <p:spPr/>
+        <p:txBody>
+          <a:bodyPr/>
+          <a:lstStyle/>
+          <a:p>
+            <a:fld id="{F7021451-1387-4CA6-816F-3879F97B5CBC}" type="slidenum">
+              <a:rPr lang="en-US"/>
+              <a:t>7</a:t>
+            </a:fld>
+            <a:endParaRPr lang="en-US"/>
+          </a:p>
+        </p:txBody>
+      </p:sp>
+    </p:spTree>
+    <p:extLst>
+      <p:ext uri="{BB962C8B-B14F-4D97-AF65-F5344CB8AC3E}">
+        <p14:creationId xmlns:p14="http://schemas.microsoft.com/office/powerpoint/2010/main" val="1024086991"/>
+      </p:ext>
+    </p:extLst>
+  </p:cSld>
+  <p:clrMapOvr>
+    <a:masterClrMapping/>
+  </p:clrMapOvr>
+</p:notes>
+</file>
+
 <file path=ppt/notesSlides/notesSlide8.xml><?xml version="1.0" encoding="utf-8"?>
 <p:notes xmlns:a="http://schemas.openxmlformats.org/drawingml/2006/main" xmlns:r="http://schemas.openxmlformats.org/officeDocument/2006/relationships" xmlns:p="http://schemas.openxmlformats.org/presentationml/2006/main">
   <p:cSld>
@@ -1641,7 +1653,7 @@
           <a:lstStyle/>
           <a:p>
             <a:r>
-              <a:t>But a magnet is not the whole story: recoil mass separators add electric fields, and they do separate residues from the beam. Their catch is the charge state. They disperse by A/q, and heavy ions emerge in a spread of charge states centred near q ≈ 20 — about five states carry the intensity. A mass separator keeps only one or two, losing most of the yield. On the left, schematically: one residue species arrives in about five charge states; the separator transmits the navy one, and the grey ones are lost.</a:t>
+              <a:t>Second time, same idea: same momentum, lower speed. In a pure velocity filter, the condition v = E/B does not contain the charge. All charge states of the chosen velocity pass through, giving near-100% charge-state transmission and, at SHIP, suppressing unretarded projectiles by more than 10¹⁶. E here is the electric field, not kinetic energy.</a:t>
             </a:r>
           </a:p>
         </p:txBody>
@@ -1727,7 +1739,7 @@
           <a:lstStyle/>
           <a:p>
             <a:r>
-              <a:t>Second time, same idea: same momentum, lower speed. In a pure velocity filter, the condition v = E/B does not contain the charge. All charge states of the chosen velocity pass through, giving near-100% charge-state transmission and suppressing the unreacted beam by more than 10¹⁶. E here is the electric field, not kinetic energy.</a:t>
+              <a:t>Second of four. For element 108, about 2 × 10¹⁷ projectiles hit the target for every atom caught. How does the filter survive that beam?</a:t>
             </a:r>
           </a:p>
         </p:txBody>
@@ -2307,7 +2319,7 @@
                 <a:ea typeface="Times New Roman" pitchFamily="34" charset="-122"/>
                 <a:cs typeface="Times New Roman" pitchFamily="34" charset="-120"/>
               </a:rPr>
-              <a:t>Sep, 2026  ·  Exp. Techniques NP Ch. 11 §III.B</a:t>
+              <a:t>Sep 2026  ·  Exp. Techniques NP Ch. 11</a:t>
             </a:r>
             <a:endParaRPr lang="en-US" sz="1300" dirty="0"/>
           </a:p>
@@ -2698,7 +2710,7 @@
                 <a:ea typeface="Times New Roman" pitchFamily="34" charset="-122"/>
                 <a:cs typeface="Times New Roman" pitchFamily="34" charset="-120"/>
               </a:rPr>
-              <a:t>Fig. 12  ·  SHIP (GSI): the plate condenser comes first; dipoles send the projectile beam to the dump.</a:t>
+              <a:t>Fig. 12  ·  SHIP (GSI) and the separator NASE: the plate condenser comes first; dipoles send the projectile beam to the dump.</a:t>
             </a:r>
             <a:endParaRPr lang="en-US" sz="1000" dirty="0"/>
           </a:p>
@@ -2887,15 +2899,15 @@
           <p:nvPr/>
         </p:nvPicPr>
         <p:blipFill>
-          <a:blip r:embed="rId5"/>
+          <a:blip r:embed="rId7"/>
           <a:stretch>
             <a:fillRect/>
           </a:stretch>
         </p:blipFill>
         <p:spPr>
           <a:xfrm>
-            <a:off x="3355848" y="3703320"/>
-            <a:ext cx="2345802" cy="516910"/>
+            <a:off x="3355848" y="3717447"/>
+            <a:ext cx="2345801" cy="488655"/>
           </a:xfrm>
           <a:prstGeom prst="rect">
             <a:avLst/>
@@ -4032,13 +4044,15 @@
         </p:nvPicPr>
         <p:blipFill>
           <a:blip r:embed="rId4"/>
-          <a:srcRect/>
-          <a:stretch/>
+          <a:srcRect l="15396" r="4992"/>
+          <a:stretch>
+            <a:fillRect/>
+          </a:stretch>
         </p:blipFill>
         <p:spPr>
           <a:xfrm>
-            <a:off x="256032" y="658368"/>
-            <a:ext cx="4709160" cy="3840480"/>
+            <a:off x="256940" y="658368"/>
+            <a:ext cx="4473160" cy="3840480"/>
           </a:xfrm>
           <a:prstGeom prst="rect">
             <a:avLst/>
@@ -4061,8 +4075,8 @@
         </p:blipFill>
         <p:spPr>
           <a:xfrm>
-            <a:off x="1567830" y="4533184"/>
-            <a:ext cx="2085564" cy="159929"/>
+            <a:off x="1114044" y="4533184"/>
+            <a:ext cx="2993136" cy="161544"/>
           </a:xfrm>
           <a:prstGeom prst="rect">
             <a:avLst/>
@@ -4141,7 +4155,7 @@
           <p:nvPr/>
         </p:nvPicPr>
         <p:blipFill>
-          <a:blip r:embed="rId6"/>
+          <a:blip r:embed="rId11"/>
           <a:stretch>
             <a:fillRect/>
           </a:stretch>
@@ -4149,7 +4163,7 @@
         <p:spPr>
           <a:xfrm>
             <a:off x="5303520" y="773354"/>
-            <a:ext cx="1280434" cy="172364"/>
+            <a:ext cx="1241663" cy="172364"/>
           </a:xfrm>
           <a:prstGeom prst="rect">
             <a:avLst/>
@@ -4267,7 +4281,7 @@
           <p:nvPr/>
         </p:nvPicPr>
         <p:blipFill>
-          <a:blip r:embed="rId7"/>
+          <a:blip r:embed="rId6"/>
           <a:stretch>
             <a:fillRect/>
           </a:stretch>
@@ -4275,7 +4289,7 @@
         <p:spPr>
           <a:xfrm>
             <a:off x="5303520" y="1733657"/>
-            <a:ext cx="1489466" cy="171999"/>
+            <a:ext cx="1497970" cy="171998"/>
           </a:xfrm>
           <a:prstGeom prst="rect">
             <a:avLst/>
@@ -4504,15 +4518,15 @@
           <p:nvPr/>
         </p:nvPicPr>
         <p:blipFill>
-          <a:blip r:embed="rId10"/>
+          <a:blip r:embed="rId7"/>
           <a:stretch>
             <a:fillRect/>
           </a:stretch>
         </p:blipFill>
         <p:spPr>
           <a:xfrm>
-            <a:off x="5303520" y="3644753"/>
-            <a:ext cx="872703" cy="190287"/>
+            <a:off x="5303520" y="3652526"/>
+            <a:ext cx="848014" cy="174741"/>
           </a:xfrm>
           <a:prstGeom prst="rect">
             <a:avLst/>
@@ -4656,7 +4670,7 @@
                 <a:ea typeface="Times New Roman" pitchFamily="34" charset="-122"/>
                 <a:cs typeface="Times New Roman" pitchFamily="34" charset="-120"/>
               </a:rPr>
-              <a:t>Genetic decay-chain tagging isolated element 108 from just three atoms.</a:t>
+              <a:t>Genetic decay-chain tagging identified element 108 from just three atoms.</a:t>
             </a:r>
             <a:endParaRPr lang="en-US" sz="1600" dirty="0"/>
           </a:p>
@@ -4811,8 +4825,8 @@
         </p:blipFill>
         <p:spPr>
           <a:xfrm>
-            <a:off x="1494907" y="4533184"/>
-            <a:ext cx="2898922" cy="159929"/>
+            <a:off x="1624584" y="4533184"/>
+            <a:ext cx="2639568" cy="161544"/>
           </a:xfrm>
           <a:prstGeom prst="rect">
             <a:avLst/>
@@ -4938,7 +4952,7 @@
         <p:spPr>
           <a:xfrm>
             <a:off x="6053328" y="1005840"/>
-            <a:ext cx="2156064" cy="320131"/>
+            <a:ext cx="2368296" cy="347472"/>
           </a:xfrm>
           <a:prstGeom prst="rect">
             <a:avLst/>
@@ -5080,7 +5094,7 @@
                 <a:ea typeface="Times New Roman" pitchFamily="34" charset="-122"/>
                 <a:cs typeface="Times New Roman" pitchFamily="34" charset="-120"/>
               </a:rPr>
-              <a:t>Decay must match a prior implant in time and position.</a:t>
+              <a:t>Decay must follow an implant in time and position; 2 of the 3 atoms remain.</a:t>
             </a:r>
             <a:endParaRPr lang="en-US" sz="1000" dirty="0"/>
           </a:p>
@@ -5221,7 +5235,7 @@
                 <a:ea typeface="Times New Roman" pitchFamily="34" charset="-122"/>
                 <a:cs typeface="Times New Roman" pitchFamily="34" charset="-120"/>
               </a:rPr>
-              <a:t>TOF + implant energy select heavy-mass recoils; 2 of 3 atoms survive.</a:t>
+              <a:t>A TOF + implant-energy window keeps only heavy recoils (‘1st generation’ panel).</a:t>
             </a:r>
             <a:endParaRPr lang="en-US" sz="1000" dirty="0"/>
           </a:p>
@@ -5346,7 +5360,7 @@
         <p:spPr>
           <a:xfrm>
             <a:off x="6053328" y="3886200"/>
-            <a:ext cx="2528865" cy="320131"/>
+            <a:ext cx="2538984" cy="347472"/>
           </a:xfrm>
           <a:prstGeom prst="rect">
             <a:avLst/>
@@ -5451,7 +5465,29 @@
                 <a:ea typeface="Times New Roman" pitchFamily="34" charset="-122"/>
                 <a:cs typeface="Times New Roman" pitchFamily="34" charset="-120"/>
               </a:rPr>
-              <a:t>Recoil-gamma tagging reveals nuclear structure at the proton drip line.</a:t>
+              <a:t>Recoil-gamma tagging reveals high-spin states of the mirror nucleus </a:t>
+            </a:r>
+            <a:r>
+              <a:rPr lang="en-US" sz="1600" b="1" baseline="30000" dirty="0">
+                <a:solidFill>
+                  <a:srgbClr val="FFFFFF"/>
+                </a:solidFill>
+                <a:latin typeface="Times New Roman" pitchFamily="34" charset="0"/>
+                <a:ea typeface="Times New Roman" pitchFamily="34" charset="-122"/>
+                <a:cs typeface="Times New Roman" pitchFamily="34" charset="-120"/>
+              </a:rPr>
+              <a:t>49</a:t>
+            </a:r>
+            <a:r>
+              <a:rPr lang="en-US" sz="1600" b="1" dirty="0">
+                <a:solidFill>
+                  <a:srgbClr val="FFFFFF"/>
+                </a:solidFill>
+                <a:latin typeface="Times New Roman" pitchFamily="34" charset="0"/>
+                <a:ea typeface="Times New Roman" pitchFamily="34" charset="-122"/>
+                <a:cs typeface="Times New Roman" pitchFamily="34" charset="-120"/>
+              </a:rPr>
+              <a:t>Mn.</a:t>
             </a:r>
             <a:endParaRPr lang="en-US" sz="1600" dirty="0"/>
           </a:p>
@@ -5577,13 +5613,13 @@
         </p:nvPicPr>
         <p:blipFill>
           <a:blip r:embed="rId3"/>
-          <a:srcRect/>
+          <a:srcRect t="17857"/>
           <a:stretch/>
         </p:blipFill>
         <p:spPr>
           <a:xfrm>
-            <a:off x="274320" y="658368"/>
-            <a:ext cx="4572000" cy="3840480"/>
+            <a:off x="347472" y="857607"/>
+            <a:ext cx="4572000" cy="3154680"/>
           </a:xfrm>
           <a:prstGeom prst="rect">
             <a:avLst/>
@@ -5606,8 +5642,8 @@
         </p:blipFill>
         <p:spPr>
           <a:xfrm>
-            <a:off x="1142497" y="4533184"/>
-            <a:ext cx="2835646" cy="159929"/>
+            <a:off x="838200" y="4046623"/>
+            <a:ext cx="3590544" cy="161544"/>
           </a:xfrm>
           <a:prstGeom prst="rect">
             <a:avLst/>
@@ -5733,7 +5769,7 @@
         <p:spPr>
           <a:xfrm>
             <a:off x="5257800" y="1024128"/>
-            <a:ext cx="2443734" cy="373990"/>
+            <a:ext cx="3325368" cy="374904"/>
           </a:xfrm>
           <a:prstGeom prst="rect">
             <a:avLst/>
@@ -5875,7 +5911,7 @@
                 <a:ea typeface="Times New Roman" pitchFamily="34" charset="-122"/>
                 <a:cs typeface="Times New Roman" pitchFamily="34" charset="-120"/>
               </a:rPr>
-              <a:t>Coulomb excitation, fission, and target impurities drop out of the spectrum.</a:t>
+              <a:t>Coulomb excitation and target impurities drop out of the spectrum.</a:t>
             </a:r>
             <a:endParaRPr lang="en-US" sz="1200" dirty="0"/>
           </a:p>
@@ -5977,7 +6013,7 @@
                 <a:ea typeface="Times New Roman" pitchFamily="34" charset="-122"/>
                 <a:cs typeface="Times New Roman" pitchFamily="34" charset="-120"/>
               </a:rPr>
-              <a:t>Drip-line structure</a:t>
+              <a:t>Mirror nucleus</a:t>
             </a:r>
             <a:endParaRPr lang="en-US" sz="1300" dirty="0"/>
           </a:p>
@@ -6000,7 +6036,7 @@
         <p:spPr>
           <a:xfrm>
             <a:off x="5257800" y="2944368"/>
-            <a:ext cx="3400196" cy="388254"/>
+            <a:ext cx="3395472" cy="204216"/>
           </a:xfrm>
           <a:prstGeom prst="rect">
             <a:avLst/>
@@ -6126,7 +6162,7 @@
         <p:spPr>
           <a:xfrm>
             <a:off x="5257800" y="3904488"/>
-            <a:ext cx="3048244" cy="343266"/>
+            <a:ext cx="3212592" cy="374904"/>
           </a:xfrm>
           <a:prstGeom prst="rect">
             <a:avLst/>
@@ -6495,7 +6531,7 @@
                 <a:ea typeface="Times New Roman" pitchFamily="34" charset="-122"/>
                 <a:cs typeface="Times New Roman" pitchFamily="34" charset="-120"/>
               </a:rPr>
-              <a:t>Velocity filters fill a unique niche for low-energy fusion.</a:t>
+              <a:t>Velocity filters are the most sensitive separators for low-energy fusion.</a:t>
             </a:r>
             <a:endParaRPr lang="en-US" sz="1800" dirty="0"/>
           </a:p>
@@ -6647,7 +6683,7 @@
         <p:spPr>
           <a:xfrm>
             <a:off x="502920" y="731520"/>
-            <a:ext cx="1920240" cy="292608"/>
+            <a:ext cx="1554480" cy="292608"/>
           </a:xfrm>
           <a:prstGeom prst="rect">
             <a:avLst/>
@@ -6685,8 +6721,8 @@
         </p:nvSpPr>
         <p:spPr>
           <a:xfrm>
-            <a:off x="2468880" y="731520"/>
-            <a:ext cx="3017520" cy="292608"/>
+            <a:off x="2075688" y="731520"/>
+            <a:ext cx="3685032" cy="292608"/>
           </a:xfrm>
           <a:prstGeom prst="rect">
             <a:avLst/>
@@ -6724,8 +6760,8 @@
         </p:nvSpPr>
         <p:spPr>
           <a:xfrm>
-            <a:off x="5623560" y="731520"/>
-            <a:ext cx="3017520" cy="292608"/>
+            <a:off x="5806440" y="731520"/>
+            <a:ext cx="2880360" cy="292608"/>
           </a:xfrm>
           <a:prstGeom prst="rect">
             <a:avLst/>
@@ -6764,7 +6800,7 @@
         <p:spPr>
           <a:xfrm>
             <a:off x="365760" y="1115568"/>
-            <a:ext cx="8412480" cy="603504"/>
+            <a:ext cx="8412480" cy="676656"/>
           </a:xfrm>
           <a:prstGeom prst="rect">
             <a:avLst/>
@@ -6791,7 +6827,7 @@
         <p:spPr>
           <a:xfrm>
             <a:off x="365760" y="1115568"/>
-            <a:ext cx="73152" cy="603504"/>
+            <a:ext cx="73152" cy="676656"/>
           </a:xfrm>
           <a:prstGeom prst="rect">
             <a:avLst/>
@@ -6817,8 +6853,8 @@
         </p:nvSpPr>
         <p:spPr>
           <a:xfrm>
-            <a:off x="502920" y="1243584"/>
-            <a:ext cx="1920240" cy="347472"/>
+            <a:off x="502920" y="1280160"/>
+            <a:ext cx="1554480" cy="347472"/>
           </a:xfrm>
           <a:prstGeom prst="rect">
             <a:avLst/>
@@ -6856,8 +6892,8 @@
         </p:nvSpPr>
         <p:spPr>
           <a:xfrm>
-            <a:off x="2468880" y="1243584"/>
-            <a:ext cx="3017520" cy="347472"/>
+            <a:off x="2075688" y="1280160"/>
+            <a:ext cx="3685032" cy="347472"/>
           </a:xfrm>
           <a:prstGeom prst="rect">
             <a:avLst/>
@@ -6895,8 +6931,8 @@
         </p:nvSpPr>
         <p:spPr>
           <a:xfrm>
-            <a:off x="5623560" y="1243584"/>
-            <a:ext cx="3017520" cy="347472"/>
+            <a:off x="5806440" y="1280160"/>
+            <a:ext cx="2880360" cy="347472"/>
           </a:xfrm>
           <a:prstGeom prst="rect">
             <a:avLst/>
@@ -6920,7 +6956,7 @@
                 <a:ea typeface="Times New Roman" pitchFamily="34" charset="-122"/>
                 <a:cs typeface="Times New Roman" pitchFamily="34" charset="-120"/>
               </a:rPr>
-              <a:t>No in-flight mass ID — decay spectroscopy afterward</a:t>
+              <a:t>Mass must be resolved in flight</a:t>
             </a:r>
             <a:endParaRPr lang="en-US" sz="1200" dirty="0"/>
           </a:p>
@@ -6934,8 +6970,8 @@
         </p:nvSpPr>
         <p:spPr>
           <a:xfrm>
-            <a:off x="365760" y="1773936"/>
-            <a:ext cx="8412480" cy="603504"/>
+            <a:off x="365760" y="1847088"/>
+            <a:ext cx="8412480" cy="676656"/>
           </a:xfrm>
           <a:prstGeom prst="rect">
             <a:avLst/>
@@ -6961,8 +6997,8 @@
         </p:nvSpPr>
         <p:spPr>
           <a:xfrm>
-            <a:off x="502920" y="1901952"/>
-            <a:ext cx="1920240" cy="347472"/>
+            <a:off x="502920" y="2011680"/>
+            <a:ext cx="1554480" cy="347472"/>
           </a:xfrm>
           <a:prstGeom prst="rect">
             <a:avLst/>
@@ -7008,7 +7044,7 @@
         </p:blipFill>
         <p:spPr>
           <a:xfrm>
-            <a:off x="2468880" y="1994078"/>
+            <a:off x="2075688" y="2103806"/>
             <a:ext cx="1703802" cy="163220"/>
           </a:xfrm>
           <a:prstGeom prst="rect">
@@ -7032,7 +7068,7 @@
         </p:blipFill>
         <p:spPr>
           <a:xfrm>
-            <a:off x="5623560" y="1993986"/>
+            <a:off x="5806440" y="2103714"/>
             <a:ext cx="2339218" cy="163403"/>
           </a:xfrm>
           <a:prstGeom prst="rect">
@@ -7048,8 +7084,8 @@
         </p:nvSpPr>
         <p:spPr>
           <a:xfrm>
-            <a:off x="365760" y="2432304"/>
-            <a:ext cx="8412480" cy="603504"/>
+            <a:off x="365760" y="2578608"/>
+            <a:ext cx="8412480" cy="676656"/>
           </a:xfrm>
           <a:prstGeom prst="rect">
             <a:avLst/>
@@ -7075,8 +7111,8 @@
         </p:nvSpPr>
         <p:spPr>
           <a:xfrm>
-            <a:off x="502920" y="2560320"/>
-            <a:ext cx="1920240" cy="347472"/>
+            <a:off x="502920" y="2743200"/>
+            <a:ext cx="1554480" cy="347472"/>
           </a:xfrm>
           <a:prstGeom prst="rect">
             <a:avLst/>
@@ -7114,8 +7150,8 @@
         </p:nvSpPr>
         <p:spPr>
           <a:xfrm>
-            <a:off x="2468880" y="2560320"/>
-            <a:ext cx="3017520" cy="347472"/>
+            <a:off x="2075688" y="2743200"/>
+            <a:ext cx="3685032" cy="347472"/>
           </a:xfrm>
           <a:prstGeom prst="rect">
             <a:avLst/>
@@ -7161,7 +7197,7 @@
         </p:blipFill>
         <p:spPr>
           <a:xfrm>
-            <a:off x="5623560" y="2652354"/>
+            <a:off x="5806440" y="2835234"/>
             <a:ext cx="1796247" cy="163403"/>
           </a:xfrm>
           <a:prstGeom prst="rect">
@@ -7177,8 +7213,8 @@
         </p:nvSpPr>
         <p:spPr>
           <a:xfrm>
-            <a:off x="365760" y="3090672"/>
-            <a:ext cx="8412480" cy="603504"/>
+            <a:off x="365760" y="3310128"/>
+            <a:ext cx="8412480" cy="676656"/>
           </a:xfrm>
           <a:prstGeom prst="rect">
             <a:avLst/>
@@ -7204,8 +7240,8 @@
         </p:nvSpPr>
         <p:spPr>
           <a:xfrm>
-            <a:off x="502920" y="3218688"/>
-            <a:ext cx="1920240" cy="347472"/>
+            <a:off x="502920" y="3474719"/>
+            <a:ext cx="1554480" cy="347472"/>
           </a:xfrm>
           <a:prstGeom prst="rect">
             <a:avLst/>
@@ -7243,8 +7279,8 @@
         </p:nvSpPr>
         <p:spPr>
           <a:xfrm>
-            <a:off x="2468880" y="3218688"/>
-            <a:ext cx="3017520" cy="347472"/>
+            <a:off x="2075688" y="3474719"/>
+            <a:ext cx="3685032" cy="347472"/>
           </a:xfrm>
           <a:prstGeom prst="rect">
             <a:avLst/>
@@ -7282,8 +7318,8 @@
         </p:nvSpPr>
         <p:spPr>
           <a:xfrm>
-            <a:off x="5623560" y="3218688"/>
-            <a:ext cx="3017520" cy="347472"/>
+            <a:off x="5806440" y="3474719"/>
+            <a:ext cx="2880360" cy="347472"/>
           </a:xfrm>
           <a:prstGeom prst="rect">
             <a:avLst/>
@@ -7321,8 +7357,8 @@
         </p:nvSpPr>
         <p:spPr>
           <a:xfrm>
-            <a:off x="365760" y="3749040"/>
-            <a:ext cx="8412480" cy="603504"/>
+            <a:off x="365760" y="4041648"/>
+            <a:ext cx="8412480" cy="676656"/>
           </a:xfrm>
           <a:prstGeom prst="rect">
             <a:avLst/>
@@ -7348,8 +7384,8 @@
         </p:nvSpPr>
         <p:spPr>
           <a:xfrm>
-            <a:off x="502920" y="3877056"/>
-            <a:ext cx="1920240" cy="347472"/>
+            <a:off x="502920" y="4206240"/>
+            <a:ext cx="1554480" cy="347472"/>
           </a:xfrm>
           <a:prstGeom prst="rect">
             <a:avLst/>
@@ -7395,7 +7431,7 @@
         </p:blipFill>
         <p:spPr>
           <a:xfrm>
-            <a:off x="2468880" y="3974028"/>
+            <a:off x="2075688" y="4303212"/>
             <a:ext cx="1754094" cy="153528"/>
           </a:xfrm>
           <a:prstGeom prst="rect">
@@ -7411,8 +7447,8 @@
         </p:nvSpPr>
         <p:spPr>
           <a:xfrm>
-            <a:off x="5623560" y="3877056"/>
-            <a:ext cx="3017520" cy="347472"/>
+            <a:off x="5806440" y="4206240"/>
+            <a:ext cx="2880360" cy="347472"/>
           </a:xfrm>
           <a:prstGeom prst="rect">
             <a:avLst/>
@@ -7681,7 +7717,7 @@
                 <a:ea typeface="Times New Roman" pitchFamily="34" charset="-122"/>
                 <a:cs typeface="Times New Roman" pitchFamily="34" charset="-120"/>
               </a:rPr>
-              <a:t>All charge states at the selected velocity are transmitted together.</a:t>
+              <a:t>All charge states pass together, so cross sections below 10 pb become detectable.</a:t>
             </a:r>
             <a:endParaRPr lang="en-US" sz="1300" dirty="0"/>
           </a:p>
@@ -7854,7 +7890,7 @@
                 <a:ea typeface="Times New Roman" pitchFamily="34" charset="-122"/>
                 <a:cs typeface="Times New Roman" pitchFamily="34" charset="-120"/>
               </a:rPr>
-              <a:t>Condenser-first SHIP dumps the primary beam before it can hit the plates.</a:t>
+              <a:t>Condenser-first SHIP deflects the primary beam before it can hit the plates.</a:t>
             </a:r>
             <a:endParaRPr lang="en-US" sz="1300" dirty="0"/>
           </a:p>
@@ -7988,7 +8024,7 @@
                 <a:ea typeface="Times New Roman" pitchFamily="34" charset="-122"/>
                 <a:cs typeface="Times New Roman" pitchFamily="34" charset="-120"/>
               </a:rPr>
-              <a:t>Decay tagging enables picobarn sensitivity.</a:t>
+              <a:t>Decay tagging identifies single atoms.</a:t>
             </a:r>
             <a:endParaRPr lang="en-US" sz="1600" dirty="0"/>
           </a:p>
@@ -8011,7 +8047,7 @@
         <p:spPr>
           <a:xfrm>
             <a:off x="1371600" y="3735050"/>
-            <a:ext cx="6394491" cy="201717"/>
+            <a:ext cx="6446520" cy="201168"/>
           </a:xfrm>
           <a:prstGeom prst="rect">
             <a:avLst/>
@@ -8051,7 +8087,7 @@
                 <a:ea typeface="Times New Roman" pitchFamily="34" charset="-122"/>
                 <a:cs typeface="Times New Roman" pitchFamily="34" charset="-120"/>
               </a:rPr>
-              <a:t>Learning Group  ·  Zhiheng Hu  ·  16 Sep 2026</a:t>
+              <a:t>Learning Group  ·  Zhiheng Hu  ·  29 Sep 2026</a:t>
             </a:r>
             <a:endParaRPr lang="en-US" sz="1200" dirty="0"/>
           </a:p>
@@ -8304,30 +8340,6 @@
       </p:sp>
       <p:pic>
         <p:nvPicPr>
-          <p:cNvPr id="8" name="Picture 7" descr="stakes_beam.png"/>
-          <p:cNvPicPr>
-            <a:picLocks noChangeAspect="1"/>
-          </p:cNvPicPr>
-          <p:nvPr/>
-        </p:nvPicPr>
-        <p:blipFill>
-          <a:blip r:embed="rId3"/>
-          <a:stretch>
-            <a:fillRect/>
-          </a:stretch>
-        </p:blipFill>
-        <p:spPr>
-          <a:xfrm>
-            <a:off x="411480" y="1280160"/>
-            <a:ext cx="8321040" cy="2063843"/>
-          </a:xfrm>
-          <a:prstGeom prst="rect">
-            <a:avLst/>
-          </a:prstGeom>
-        </p:spPr>
-      </p:pic>
-      <p:pic>
-        <p:nvPicPr>
           <p:cNvPr id="9" name="Picture 8" descr="stakes_stat.png"/>
           <p:cNvPicPr>
             <a:picLocks noChangeAspect="1"/>
@@ -8389,6 +8401,197 @@
           </a:p>
         </p:txBody>
       </p:sp>
+      <p:grpSp>
+        <p:nvGrpSpPr>
+          <p:cNvPr id="15" name="Stakes figure + role labels"/>
+          <p:cNvGrpSpPr/>
+          <p:nvPr/>
+        </p:nvGrpSpPr>
+        <p:grpSpPr>
+          <a:xfrm>
+            <a:off x="73804" y="994910"/>
+            <a:ext cx="8658716" cy="2467965"/>
+            <a:chOff x="73804" y="994910"/>
+            <a:chExt cx="8658716" cy="2467965"/>
+          </a:xfrm>
+        </p:grpSpPr>
+        <p:pic>
+          <p:nvPicPr>
+            <p:cNvPr id="8" name="Picture 7" descr="stakes_beam.png"/>
+            <p:cNvPicPr>
+              <a:picLocks noChangeAspect="1"/>
+            </p:cNvPicPr>
+            <p:nvPr/>
+          </p:nvPicPr>
+          <p:blipFill>
+            <a:blip r:embed="rId3"/>
+            <a:stretch>
+              <a:fillRect/>
+            </a:stretch>
+          </p:blipFill>
+          <p:spPr>
+            <a:xfrm>
+              <a:off x="411480" y="1280160"/>
+              <a:ext cx="8321040" cy="2063843"/>
+            </a:xfrm>
+            <a:prstGeom prst="rect">
+              <a:avLst/>
+            </a:prstGeom>
+          </p:spPr>
+        </p:pic>
+        <p:sp>
+          <p:nvSpPr>
+            <p:cNvPr id="11" name="TextBox 10">
+              <a:extLst>
+                <a:ext uri="{FF2B5EF4-FFF2-40B4-BE49-F238E27FC236}">
+                  <a16:creationId xmlns:a16="http://schemas.microsoft.com/office/drawing/2014/main" id="{AC96EC0F-B8A1-EDCE-4A35-F0327527C86A}"/>
+                </a:ext>
+              </a:extLst>
+            </p:cNvPr>
+            <p:cNvSpPr txBox="1"/>
+            <p:nvPr/>
+          </p:nvSpPr>
+          <p:spPr>
+            <a:xfrm>
+              <a:off x="73804" y="3093543"/>
+              <a:ext cx="1579879" cy="369332"/>
+            </a:xfrm>
+            <a:prstGeom prst="rect">
+              <a:avLst/>
+            </a:prstGeom>
+            <a:noFill/>
+          </p:spPr>
+          <p:txBody>
+            <a:bodyPr wrap="none" rtlCol="0">
+              <a:spAutoFit/>
+            </a:bodyPr>
+            <a:lstStyle/>
+            <a:p>
+              <a:r>
+                <a:rPr lang="en-JP" dirty="0"/>
+                <a:t>Projectile: </a:t>
+              </a:r>
+              <a:r>
+                <a:rPr lang="en-JP" baseline="30000" dirty="0"/>
+                <a:t>58</a:t>
+              </a:r>
+              <a:r>
+                <a:rPr lang="en-JP" dirty="0"/>
+                <a:t>Fe</a:t>
+              </a:r>
+            </a:p>
+          </p:txBody>
+        </p:sp>
+        <p:sp>
+          <p:nvSpPr>
+            <p:cNvPr id="12" name="TextBox 11">
+              <a:extLst>
+                <a:ext uri="{FF2B5EF4-FFF2-40B4-BE49-F238E27FC236}">
+                  <a16:creationId xmlns:a16="http://schemas.microsoft.com/office/drawing/2014/main" id="{B402BA1C-ADF4-6AEB-B014-10BC22733E20}"/>
+                </a:ext>
+              </a:extLst>
+            </p:cNvPr>
+            <p:cNvSpPr txBox="1"/>
+            <p:nvPr/>
+          </p:nvSpPr>
+          <p:spPr>
+            <a:xfrm>
+              <a:off x="457200" y="994910"/>
+              <a:ext cx="1389443" cy="369332"/>
+            </a:xfrm>
+            <a:prstGeom prst="rect">
+              <a:avLst/>
+            </a:prstGeom>
+            <a:noFill/>
+          </p:spPr>
+          <p:txBody>
+            <a:bodyPr wrap="none" rtlCol="0">
+              <a:spAutoFit/>
+            </a:bodyPr>
+            <a:lstStyle/>
+            <a:p>
+              <a:r>
+                <a:rPr lang="en-JP" dirty="0"/>
+                <a:t>Target: </a:t>
+              </a:r>
+              <a:r>
+                <a:rPr lang="en-JP" baseline="30000" dirty="0"/>
+                <a:t>208</a:t>
+              </a:r>
+              <a:r>
+                <a:rPr lang="en-JP" dirty="0"/>
+                <a:t>Pb</a:t>
+              </a:r>
+            </a:p>
+          </p:txBody>
+        </p:sp>
+        <p:sp>
+          <p:nvSpPr>
+            <p:cNvPr id="13" name="TextBox 12"/>
+            <p:cNvSpPr txBox="1"/>
+            <p:nvPr/>
+          </p:nvSpPr>
+          <p:spPr>
+            <a:xfrm>
+              <a:off x="6243637" y="1298448"/>
+              <a:ext cx="1631061" cy="369332"/>
+            </a:xfrm>
+            <a:prstGeom prst="rect">
+              <a:avLst/>
+            </a:prstGeom>
+            <a:noFill/>
+          </p:spPr>
+          <p:txBody>
+            <a:bodyPr wrap="none" rtlCol="0">
+              <a:spAutoFit/>
+            </a:bodyPr>
+            <a:lstStyle/>
+            <a:p>
+              <a:r>
+                <a:rPr lang="en-JP" dirty="0"/>
+                <a:t>Residue: </a:t>
+              </a:r>
+              <a:r>
+                <a:rPr lang="en-JP" baseline="30000" dirty="0"/>
+                <a:t>265</a:t>
+              </a:r>
+              <a:r>
+                <a:rPr lang="en-JP" dirty="0"/>
+                <a:t>108</a:t>
+              </a:r>
+            </a:p>
+          </p:txBody>
+        </p:sp>
+        <p:sp>
+          <p:nvSpPr>
+            <p:cNvPr id="14" name="TextBox 13"/>
+            <p:cNvSpPr txBox="1"/>
+            <p:nvPr/>
+          </p:nvSpPr>
+          <p:spPr>
+            <a:xfrm>
+              <a:off x="6491859" y="2761488"/>
+              <a:ext cx="1134618" cy="369332"/>
+            </a:xfrm>
+            <a:prstGeom prst="rect">
+              <a:avLst/>
+            </a:prstGeom>
+            <a:noFill/>
+          </p:spPr>
+          <p:txBody>
+            <a:bodyPr wrap="none" rtlCol="0">
+              <a:spAutoFit/>
+            </a:bodyPr>
+            <a:lstStyle/>
+            <a:p>
+              <a:r>
+                <a:rPr lang="en-JP" dirty="0"/>
+                <a:t>Ejectile: n</a:t>
+              </a:r>
+            </a:p>
+          </p:txBody>
+        </p:sp>
+      </p:grpSp>
     </p:spTree>
   </p:cSld>
   <p:clrMapOvr>
@@ -8979,7 +9182,7 @@
                 <a:ea typeface="Times New Roman" pitchFamily="34" charset="-122"/>
                 <a:cs typeface="Times New Roman" pitchFamily="34" charset="-120"/>
               </a:rPr>
-              <a:t>A magnet cannot separate residues from the beam: same momentum, lower speed.</a:t>
+              <a:t>Residues share the beam’s momentum but not its speed, so a magnet fails.</a:t>
             </a:r>
             <a:endParaRPr lang="en-US" sz="1800" dirty="0"/>
           </a:p>
@@ -9111,8 +9314,8 @@
         </p:blipFill>
         <p:spPr>
           <a:xfrm>
-            <a:off x="411480" y="648355"/>
-            <a:ext cx="7451811" cy="202905"/>
+            <a:off x="411480" y="637032"/>
+            <a:ext cx="7187184" cy="225552"/>
           </a:xfrm>
           <a:prstGeom prst="rect">
             <a:avLst/>
@@ -9171,8 +9374,8 @@
         </p:blipFill>
         <p:spPr>
           <a:xfrm>
-            <a:off x="475488" y="969264"/>
-            <a:ext cx="4703905" cy="1133856"/>
+            <a:off x="605865" y="1094333"/>
+            <a:ext cx="4471416" cy="944880"/>
           </a:xfrm>
           <a:prstGeom prst="rect">
             <a:avLst/>
@@ -9188,7 +9391,7 @@
         <p:spPr>
           <a:xfrm>
             <a:off x="5285232" y="987552"/>
-            <a:ext cx="3246120" cy="1078992"/>
+            <a:ext cx="3246120" cy="1417320"/>
           </a:xfrm>
           <a:prstGeom prst="rect">
             <a:avLst/>
@@ -9201,6 +9404,9 @@
           <a:lstStyle/>
           <a:p>
             <a:pPr marL="0" indent="0">
+              <a:lnSpc>
+                <a:spcPts val="1300"/>
+              </a:lnSpc>
               <a:buNone/>
             </a:pPr>
             <a:r>
@@ -9246,18 +9452,471 @@
                 <a:ea typeface="Times New Roman" pitchFamily="34" charset="-122"/>
                 <a:cs typeface="Times New Roman" pitchFamily="34" charset="-120"/>
               </a:rPr>
-              <a:t>Er = (Ap/Ac) Ep</a:t>
+              <a:t>E</a:t>
+            </a:r>
+            <a:r>
+              <a:rPr lang="en-US" sz="1100" i="1" baseline="-25000" dirty="0">
+                <a:solidFill>
+                  <a:srgbClr val="0F2F5C"/>
+                </a:solidFill>
+                <a:latin typeface="Times New Roman" pitchFamily="34" charset="0"/>
+                <a:ea typeface="Times New Roman" pitchFamily="34" charset="-122"/>
+                <a:cs typeface="Times New Roman" pitchFamily="34" charset="-120"/>
+              </a:rPr>
+              <a:t>r</a:t>
             </a:r>
             <a:r>
               <a:rPr lang="en-US" sz="1100" i="1" dirty="0">
                 <a:solidFill>
+                  <a:srgbClr val="0F2F5C"/>
+                </a:solidFill>
+                <a:latin typeface="Times New Roman" pitchFamily="34" charset="0"/>
+                <a:ea typeface="Times New Roman" pitchFamily="34" charset="-122"/>
+                <a:cs typeface="Times New Roman" pitchFamily="34" charset="-120"/>
+              </a:rPr>
+              <a:t> = (A</a:t>
+            </a:r>
+            <a:r>
+              <a:rPr lang="en-US" sz="1100" i="1" baseline="-25000" dirty="0">
+                <a:solidFill>
+                  <a:srgbClr val="0F2F5C"/>
+                </a:solidFill>
+                <a:latin typeface="Times New Roman" pitchFamily="34" charset="0"/>
+                <a:ea typeface="Times New Roman" pitchFamily="34" charset="-122"/>
+                <a:cs typeface="Times New Roman" pitchFamily="34" charset="-120"/>
+              </a:rPr>
+              <a:t>p</a:t>
+            </a:r>
+            <a:r>
+              <a:rPr lang="en-US" sz="1100" i="1" dirty="0">
+                <a:solidFill>
+                  <a:srgbClr val="0F2F5C"/>
+                </a:solidFill>
+                <a:latin typeface="Times New Roman" pitchFamily="34" charset="0"/>
+                <a:ea typeface="Times New Roman" pitchFamily="34" charset="-122"/>
+                <a:cs typeface="Times New Roman" pitchFamily="34" charset="-120"/>
+              </a:rPr>
+              <a:t>/A</a:t>
+            </a:r>
+            <a:r>
+              <a:rPr lang="en-US" sz="1100" i="1" baseline="-25000" dirty="0">
+                <a:solidFill>
+                  <a:srgbClr val="0F2F5C"/>
+                </a:solidFill>
+                <a:latin typeface="Times New Roman" pitchFamily="34" charset="0"/>
+                <a:ea typeface="Times New Roman" pitchFamily="34" charset="-122"/>
+                <a:cs typeface="Times New Roman" pitchFamily="34" charset="-120"/>
+              </a:rPr>
+              <a:t>c</a:t>
+            </a:r>
+            <a:r>
+              <a:rPr lang="en-US" sz="1100" i="1" dirty="0">
+                <a:solidFill>
+                  <a:srgbClr val="0F2F5C"/>
+                </a:solidFill>
+                <a:latin typeface="Times New Roman" pitchFamily="34" charset="0"/>
+                <a:ea typeface="Times New Roman" pitchFamily="34" charset="-122"/>
+                <a:cs typeface="Times New Roman" pitchFamily="34" charset="-120"/>
+              </a:rPr>
+              <a:t>) E</a:t>
+            </a:r>
+            <a:r>
+              <a:rPr lang="en-US" sz="1100" i="1" baseline="-25000" dirty="0">
+                <a:solidFill>
+                  <a:srgbClr val="0F2F5C"/>
+                </a:solidFill>
+                <a:latin typeface="Times New Roman" pitchFamily="34" charset="0"/>
+                <a:ea typeface="Times New Roman" pitchFamily="34" charset="-122"/>
+                <a:cs typeface="Times New Roman" pitchFamily="34" charset="-120"/>
+              </a:rPr>
+              <a:t>p</a:t>
+            </a:r>
+            <a:r>
+              <a:rPr lang="en-US" sz="1100" i="1" dirty="0">
+                <a:solidFill>
                   <a:srgbClr val="5F6B73"/>
                 </a:solidFill>
                 <a:latin typeface="Times New Roman" pitchFamily="34" charset="0"/>
                 <a:ea typeface="Times New Roman" pitchFamily="34" charset="-122"/>
                 <a:cs typeface="Times New Roman" pitchFamily="34" charset="-120"/>
               </a:rPr>
-              <a:t> — the residue’s kinetic energy under full momentum transfer: motion at v_cm, slower than the beam.</a:t>
+              <a:t> — the residue’s kinetic energy under full momentum transfer: motion at v</a:t>
+            </a:r>
+            <a:r>
+              <a:rPr lang="en-US" sz="1100" i="1" baseline="-25000" dirty="0">
+                <a:solidFill>
+                  <a:srgbClr val="5F6B73"/>
+                </a:solidFill>
+                <a:latin typeface="Times New Roman" pitchFamily="34" charset="0"/>
+                <a:ea typeface="Times New Roman" pitchFamily="34" charset="-122"/>
+                <a:cs typeface="Times New Roman" pitchFamily="34" charset="-120"/>
+              </a:rPr>
+              <a:t>cm</a:t>
+            </a:r>
+            <a:r>
+              <a:rPr lang="en-US" sz="1100" i="1" dirty="0">
+                <a:solidFill>
+                  <a:srgbClr val="5F6B73"/>
+                </a:solidFill>
+                <a:latin typeface="Times New Roman" pitchFamily="34" charset="0"/>
+                <a:ea typeface="Times New Roman" pitchFamily="34" charset="-122"/>
+                <a:cs typeface="Times New Roman" pitchFamily="34" charset="-120"/>
+              </a:rPr>
+              <a:t>, slower than the beam.</a:t>
+            </a:r>
+            <a:r>
+              <a:rPr lang="en-US" sz="1100" dirty="0">
+                <a:solidFill>
+                  <a:srgbClr val="000000"/>
+                </a:solidFill>
+                <a:latin typeface="Times New Roman" pitchFamily="34" charset="0"/>
+                <a:ea typeface="Times New Roman" pitchFamily="34" charset="-122"/>
+                <a:cs typeface="Times New Roman" pitchFamily="34" charset="-120"/>
+              </a:rPr>
+              <a:t>
+</a:t>
+            </a:r>
+            <a:r>
+              <a:rPr lang="en-US" sz="1100" i="1" dirty="0">
+                <a:solidFill>
+                  <a:srgbClr val="5F6B73"/>
+                </a:solidFill>
+                <a:latin typeface="Times New Roman" pitchFamily="34" charset="0"/>
+                <a:ea typeface="Times New Roman" pitchFamily="34" charset="-122"/>
+                <a:cs typeface="Times New Roman" pitchFamily="34" charset="-120"/>
+              </a:rPr>
+              <a:t>A</a:t>
+            </a:r>
+            <a:r>
+              <a:rPr lang="en-US" sz="1100" i="1" dirty="0" baseline="-25000">
+                <a:solidFill>
+                  <a:srgbClr val="5F6B73"/>
+                </a:solidFill>
+                <a:latin typeface="Times New Roman" pitchFamily="34" charset="0"/>
+                <a:ea typeface="Times New Roman" pitchFamily="34" charset="-122"/>
+                <a:cs typeface="Times New Roman" pitchFamily="34" charset="-120"/>
+              </a:rPr>
+              <a:t>t</a:t>
+            </a:r>
+            <a:r>
+              <a:rPr lang="en-US" sz="1100" i="1" dirty="0">
+                <a:solidFill>
+                  <a:srgbClr val="5F6B73"/>
+                </a:solidFill>
+                <a:latin typeface="Times New Roman" pitchFamily="34" charset="0"/>
+                <a:ea typeface="Times New Roman" pitchFamily="34" charset="-122"/>
+                <a:cs typeface="Times New Roman" pitchFamily="34" charset="-120"/>
+              </a:rPr>
+              <a:t> = mass number of the target nucleus (</a:t>
+            </a:r>
+            <a:r>
+              <a:rPr lang="en-US" sz="1100" i="1" dirty="0" baseline="30000">
+                <a:solidFill>
+                  <a:srgbClr val="5F6B73"/>
+                </a:solidFill>
+                <a:latin typeface="Times New Roman" pitchFamily="34" charset="0"/>
+                <a:ea typeface="Times New Roman" pitchFamily="34" charset="-122"/>
+                <a:cs typeface="Times New Roman" pitchFamily="34" charset="-120"/>
+              </a:rPr>
+              <a:t>208</a:t>
+            </a:r>
+            <a:r>
+              <a:rPr lang="en-US" sz="1100" i="1" dirty="0">
+                <a:solidFill>
+                  <a:srgbClr val="5F6B73"/>
+                </a:solidFill>
+                <a:latin typeface="Times New Roman" pitchFamily="34" charset="0"/>
+                <a:ea typeface="Times New Roman" pitchFamily="34" charset="-122"/>
+                <a:cs typeface="Times New Roman" pitchFamily="34" charset="-120"/>
+              </a:rPr>
+              <a:t>Pb: 208).</a:t>
+            </a:r>
+            <a:r>
+              <a:rPr lang="en-US" sz="1100" dirty="0">
+                <a:solidFill>
+                  <a:srgbClr val="000000"/>
+                </a:solidFill>
+                <a:latin typeface="Times New Roman" pitchFamily="34" charset="0"/>
+                <a:ea typeface="Times New Roman" pitchFamily="34" charset="-122"/>
+                <a:cs typeface="Times New Roman" pitchFamily="34" charset="-120"/>
+              </a:rPr>
+              <a:t>
+</a:t>
+            </a:r>
+            <a:r>
+              <a:rPr lang="en-US" sz="1100" i="1" dirty="0">
+                <a:solidFill>
+                  <a:srgbClr val="5F6B73"/>
+                </a:solidFill>
+                <a:latin typeface="Times New Roman" pitchFamily="34" charset="0"/>
+                <a:ea typeface="Times New Roman" pitchFamily="34" charset="-122"/>
+                <a:cs typeface="Times New Roman" pitchFamily="34" charset="-120"/>
+              </a:rPr>
+              <a:t>v</a:t>
+            </a:r>
+            <a:r>
+              <a:rPr lang="en-US" sz="1100" i="1" dirty="0" baseline="-25000">
+                <a:solidFill>
+                  <a:srgbClr val="5F6B73"/>
+                </a:solidFill>
+                <a:latin typeface="Times New Roman" pitchFamily="34" charset="0"/>
+                <a:ea typeface="Times New Roman" pitchFamily="34" charset="-122"/>
+                <a:cs typeface="Times New Roman" pitchFamily="34" charset="-120"/>
+              </a:rPr>
+              <a:t>cm</a:t>
+            </a:r>
+            <a:r>
+              <a:rPr lang="en-US" sz="1100" i="1" dirty="0">
+                <a:solidFill>
+                  <a:srgbClr val="5F6B73"/>
+                </a:solidFill>
+                <a:latin typeface="Times New Roman" pitchFamily="34" charset="0"/>
+                <a:ea typeface="Times New Roman" pitchFamily="34" charset="-122"/>
+                <a:cs typeface="Times New Roman" pitchFamily="34" charset="-120"/>
+              </a:rPr>
+              <a:t> = (A</a:t>
+            </a:r>
+            <a:r>
+              <a:rPr lang="en-US" sz="1100" i="1" dirty="0" baseline="-25000">
+                <a:solidFill>
+                  <a:srgbClr val="5F6B73"/>
+                </a:solidFill>
+                <a:latin typeface="Times New Roman" pitchFamily="34" charset="0"/>
+                <a:ea typeface="Times New Roman" pitchFamily="34" charset="-122"/>
+                <a:cs typeface="Times New Roman" pitchFamily="34" charset="-120"/>
+              </a:rPr>
+              <a:t>p</a:t>
+            </a:r>
+            <a:r>
+              <a:rPr lang="en-US" sz="1100" i="1" dirty="0">
+                <a:solidFill>
+                  <a:srgbClr val="5F6B73"/>
+                </a:solidFill>
+                <a:latin typeface="Times New Roman" pitchFamily="34" charset="0"/>
+                <a:ea typeface="Times New Roman" pitchFamily="34" charset="-122"/>
+                <a:cs typeface="Times New Roman" pitchFamily="34" charset="-120"/>
+              </a:rPr>
+              <a:t>/A</a:t>
+            </a:r>
+            <a:r>
+              <a:rPr lang="en-US" sz="1100" i="1" dirty="0" baseline="-25000">
+                <a:solidFill>
+                  <a:srgbClr val="5F6B73"/>
+                </a:solidFill>
+                <a:latin typeface="Times New Roman" pitchFamily="34" charset="0"/>
+                <a:ea typeface="Times New Roman" pitchFamily="34" charset="-122"/>
+                <a:cs typeface="Times New Roman" pitchFamily="34" charset="-120"/>
+              </a:rPr>
+              <a:t>c</a:t>
+            </a:r>
+            <a:r>
+              <a:rPr lang="en-US" sz="1100" i="1" dirty="0">
+                <a:solidFill>
+                  <a:srgbClr val="5F6B73"/>
+                </a:solidFill>
+                <a:latin typeface="Times New Roman" pitchFamily="34" charset="0"/>
+                <a:ea typeface="Times New Roman" pitchFamily="34" charset="-122"/>
+                <a:cs typeface="Times New Roman" pitchFamily="34" charset="-120"/>
+              </a:rPr>
+              <a:t>) v</a:t>
+            </a:r>
+            <a:r>
+              <a:rPr lang="en-US" sz="1100" i="1" dirty="0" baseline="-25000">
+                <a:solidFill>
+                  <a:srgbClr val="5F6B73"/>
+                </a:solidFill>
+                <a:latin typeface="Times New Roman" pitchFamily="34" charset="0"/>
+                <a:ea typeface="Times New Roman" pitchFamily="34" charset="-122"/>
+                <a:cs typeface="Times New Roman" pitchFamily="34" charset="-120"/>
+              </a:rPr>
+              <a:t>p</a:t>
+            </a:r>
+            <a:r>
+              <a:rPr lang="en-US" sz="1100" i="1" dirty="0">
+                <a:solidFill>
+                  <a:srgbClr val="5F6B73"/>
+                </a:solidFill>
+                <a:latin typeface="Times New Roman" pitchFamily="34" charset="0"/>
+                <a:ea typeface="Times New Roman" pitchFamily="34" charset="-122"/>
+                <a:cs typeface="Times New Roman" pitchFamily="34" charset="-120"/>
+              </a:rPr>
+              <a:t>, so Δv/v</a:t>
+            </a:r>
+            <a:r>
+              <a:rPr lang="en-US" sz="1100" i="1" dirty="0" baseline="-25000">
+                <a:solidFill>
+                  <a:srgbClr val="5F6B73"/>
+                </a:solidFill>
+                <a:latin typeface="Times New Roman" pitchFamily="34" charset="0"/>
+                <a:ea typeface="Times New Roman" pitchFamily="34" charset="-122"/>
+                <a:cs typeface="Times New Roman" pitchFamily="34" charset="-120"/>
+              </a:rPr>
+              <a:t>p</a:t>
+            </a:r>
+            <a:r>
+              <a:rPr lang="en-US" sz="1100" i="1" dirty="0">
+                <a:solidFill>
+                  <a:srgbClr val="5F6B73"/>
+                </a:solidFill>
+                <a:latin typeface="Times New Roman" pitchFamily="34" charset="0"/>
+                <a:ea typeface="Times New Roman" pitchFamily="34" charset="-122"/>
+                <a:cs typeface="Times New Roman" pitchFamily="34" charset="-120"/>
+              </a:rPr>
+              <a:t> = 1 − A</a:t>
+            </a:r>
+            <a:r>
+              <a:rPr lang="en-US" sz="1100" i="1" dirty="0" baseline="-25000">
+                <a:solidFill>
+                  <a:srgbClr val="5F6B73"/>
+                </a:solidFill>
+                <a:latin typeface="Times New Roman" pitchFamily="34" charset="0"/>
+                <a:ea typeface="Times New Roman" pitchFamily="34" charset="-122"/>
+                <a:cs typeface="Times New Roman" pitchFamily="34" charset="-120"/>
+              </a:rPr>
+              <a:t>p</a:t>
+            </a:r>
+            <a:r>
+              <a:rPr lang="en-US" sz="1100" i="1" dirty="0">
+                <a:solidFill>
+                  <a:srgbClr val="5F6B73"/>
+                </a:solidFill>
+                <a:latin typeface="Times New Roman" pitchFamily="34" charset="0"/>
+                <a:ea typeface="Times New Roman" pitchFamily="34" charset="-122"/>
+                <a:cs typeface="Times New Roman" pitchFamily="34" charset="-120"/>
+              </a:rPr>
+              <a:t>/A</a:t>
+            </a:r>
+            <a:r>
+              <a:rPr lang="en-US" sz="1100" i="1" dirty="0" baseline="-25000">
+                <a:solidFill>
+                  <a:srgbClr val="5F6B73"/>
+                </a:solidFill>
+                <a:latin typeface="Times New Roman" pitchFamily="34" charset="0"/>
+                <a:ea typeface="Times New Roman" pitchFamily="34" charset="-122"/>
+                <a:cs typeface="Times New Roman" pitchFamily="34" charset="-120"/>
+              </a:rPr>
+              <a:t>c</a:t>
+            </a:r>
+            <a:r>
+              <a:rPr lang="en-US" sz="1100" i="1" dirty="0">
+                <a:solidFill>
+                  <a:srgbClr val="5F6B73"/>
+                </a:solidFill>
+                <a:latin typeface="Times New Roman" pitchFamily="34" charset="0"/>
+                <a:ea typeface="Times New Roman" pitchFamily="34" charset="-122"/>
+                <a:cs typeface="Times New Roman" pitchFamily="34" charset="-120"/>
+              </a:rPr>
+              <a:t> = A</a:t>
+            </a:r>
+            <a:r>
+              <a:rPr lang="en-US" sz="1100" i="1" dirty="0" baseline="-25000">
+                <a:solidFill>
+                  <a:srgbClr val="5F6B73"/>
+                </a:solidFill>
+                <a:latin typeface="Times New Roman" pitchFamily="34" charset="0"/>
+                <a:ea typeface="Times New Roman" pitchFamily="34" charset="-122"/>
+                <a:cs typeface="Times New Roman" pitchFamily="34" charset="-120"/>
+              </a:rPr>
+              <a:t>t</a:t>
+            </a:r>
+            <a:r>
+              <a:rPr lang="en-US" sz="1100" i="1" dirty="0">
+                <a:solidFill>
+                  <a:srgbClr val="5F6B73"/>
+                </a:solidFill>
+                <a:latin typeface="Times New Roman" pitchFamily="34" charset="0"/>
+                <a:ea typeface="Times New Roman" pitchFamily="34" charset="-122"/>
+                <a:cs typeface="Times New Roman" pitchFamily="34" charset="-120"/>
+              </a:rPr>
+              <a:t>/A</a:t>
+            </a:r>
+            <a:r>
+              <a:rPr lang="en-US" sz="1100" i="1" dirty="0" baseline="-25000">
+                <a:solidFill>
+                  <a:srgbClr val="5F6B73"/>
+                </a:solidFill>
+                <a:latin typeface="Times New Roman" pitchFamily="34" charset="0"/>
+                <a:ea typeface="Times New Roman" pitchFamily="34" charset="-122"/>
+                <a:cs typeface="Times New Roman" pitchFamily="34" charset="-120"/>
+              </a:rPr>
+              <a:t>c</a:t>
+            </a:r>
+            <a:r>
+              <a:rPr lang="en-US" sz="1100" i="1" dirty="0">
+                <a:solidFill>
+                  <a:srgbClr val="5F6B73"/>
+                </a:solidFill>
+                <a:latin typeface="Times New Roman" pitchFamily="34" charset="0"/>
+                <a:ea typeface="Times New Roman" pitchFamily="34" charset="-122"/>
+                <a:cs typeface="Times New Roman" pitchFamily="34" charset="-120"/>
+              </a:rPr>
+              <a:t>: the heavier the target, the slower the residue (</a:t>
+            </a:r>
+            <a:r>
+              <a:rPr lang="en-US" sz="1100" i="1" dirty="0" baseline="30000">
+                <a:solidFill>
+                  <a:srgbClr val="5F6B73"/>
+                </a:solidFill>
+                <a:latin typeface="Times New Roman" pitchFamily="34" charset="0"/>
+                <a:ea typeface="Times New Roman" pitchFamily="34" charset="-122"/>
+                <a:cs typeface="Times New Roman" pitchFamily="34" charset="-120"/>
+              </a:rPr>
+              <a:t>58</a:t>
+            </a:r>
+            <a:r>
+              <a:rPr lang="en-US" sz="1100" i="1" dirty="0">
+                <a:solidFill>
+                  <a:srgbClr val="5F6B73"/>
+                </a:solidFill>
+                <a:latin typeface="Times New Roman" pitchFamily="34" charset="0"/>
+                <a:ea typeface="Times New Roman" pitchFamily="34" charset="-122"/>
+                <a:cs typeface="Times New Roman" pitchFamily="34" charset="-120"/>
+              </a:rPr>
+              <a:t>Fe + </a:t>
+            </a:r>
+            <a:r>
+              <a:rPr lang="en-US" sz="1100" i="1" dirty="0" baseline="30000">
+                <a:solidFill>
+                  <a:srgbClr val="5F6B73"/>
+                </a:solidFill>
+                <a:latin typeface="Times New Roman" pitchFamily="34" charset="0"/>
+                <a:ea typeface="Times New Roman" pitchFamily="34" charset="-122"/>
+                <a:cs typeface="Times New Roman" pitchFamily="34" charset="-120"/>
+              </a:rPr>
+              <a:t>208</a:t>
+            </a:r>
+            <a:r>
+              <a:rPr lang="en-US" sz="1100" i="1" dirty="0">
+                <a:solidFill>
+                  <a:srgbClr val="5F6B73"/>
+                </a:solidFill>
+                <a:latin typeface="Times New Roman" pitchFamily="34" charset="0"/>
+                <a:ea typeface="Times New Roman" pitchFamily="34" charset="-122"/>
+                <a:cs typeface="Times New Roman" pitchFamily="34" charset="-120"/>
+              </a:rPr>
+              <a:t>Pb: Δv/v</a:t>
+            </a:r>
+            <a:r>
+              <a:rPr lang="en-US" sz="1100" i="1" dirty="0" baseline="-25000">
+                <a:solidFill>
+                  <a:srgbClr val="5F6B73"/>
+                </a:solidFill>
+                <a:latin typeface="Times New Roman" pitchFamily="34" charset="0"/>
+                <a:ea typeface="Times New Roman" pitchFamily="34" charset="-122"/>
+                <a:cs typeface="Times New Roman" pitchFamily="34" charset="-120"/>
+              </a:rPr>
+              <a:t>p</a:t>
+            </a:r>
+            <a:r>
+              <a:rPr lang="en-US" sz="1100" i="1" dirty="0">
+                <a:solidFill>
+                  <a:srgbClr val="5F6B73"/>
+                </a:solidFill>
+                <a:latin typeface="Times New Roman" pitchFamily="34" charset="0"/>
+                <a:ea typeface="Times New Roman" pitchFamily="34" charset="-122"/>
+                <a:cs typeface="Times New Roman" pitchFamily="34" charset="-120"/>
+              </a:rPr>
+              <a:t> = 208/266 ≈ 0.78).</a:t>
             </a:r>
             <a:endParaRPr lang="en-US" sz="1100" dirty="0"/>
           </a:p>
@@ -9279,8 +9938,8 @@
         </p:blipFill>
         <p:spPr>
           <a:xfrm>
-            <a:off x="1763403" y="2139696"/>
-            <a:ext cx="5617194" cy="950976"/>
+            <a:off x="672952" y="2227758"/>
+            <a:ext cx="3404616" cy="762000"/>
           </a:xfrm>
           <a:prstGeom prst="rect">
             <a:avLst/>
@@ -9303,8 +9962,8 @@
         </p:blipFill>
         <p:spPr>
           <a:xfrm>
-            <a:off x="3104867" y="3118104"/>
-            <a:ext cx="2934266" cy="182880"/>
+            <a:off x="1143000" y="3101558"/>
+            <a:ext cx="3377184" cy="213360"/>
           </a:xfrm>
           <a:prstGeom prst="rect">
             <a:avLst/>
@@ -9395,15 +10054,15 @@
           <p:nvPr/>
         </p:nvPicPr>
         <p:blipFill>
-          <a:blip r:embed="rId7"/>
+          <a:blip r:embed="rId9"/>
           <a:stretch>
             <a:fillRect/>
           </a:stretch>
         </p:blipFill>
         <p:spPr>
           <a:xfrm>
-            <a:off x="548640" y="4105656"/>
-            <a:ext cx="2296058" cy="373807"/>
+            <a:off x="612191" y="4105656"/>
+            <a:ext cx="2296058" cy="373806"/>
           </a:xfrm>
           <a:prstGeom prst="rect">
             <a:avLst/>
@@ -9494,15 +10153,15 @@
           <p:nvPr/>
         </p:nvPicPr>
         <p:blipFill>
-          <a:blip r:embed="rId8"/>
+          <a:blip r:embed="rId7"/>
           <a:stretch>
             <a:fillRect/>
           </a:stretch>
         </p:blipFill>
         <p:spPr>
           <a:xfrm>
-            <a:off x="3383280" y="4105656"/>
-            <a:ext cx="2369302" cy="373990"/>
+            <a:off x="3410209" y="4105656"/>
+            <a:ext cx="2369301" cy="373989"/>
           </a:xfrm>
           <a:prstGeom prst="rect">
             <a:avLst/>
@@ -9605,7 +10264,7 @@
           <a:bodyPr wrap="square" lIns="0" tIns="0" rIns="0" bIns="0" rtlCol="0" anchor="ctr"/>
           <a:lstStyle/>
           <a:p>
-            <a:pPr marL="0" indent="0">
+            <a:pPr marL="0" indent="0" algn="ctr">
               <a:buNone/>
             </a:pPr>
             <a:r>
@@ -9775,6 +10434,209 @@
                 <a:latin typeface="Times New Roman"/>
               </a:rPr>
               <a:t>Δv</a:t>
+            </a:r>
+          </a:p>
+        </p:txBody>
+      </p:sp>
+      <p:sp>
+        <p:nvSpPr>
+          <p:cNvPr id="25" name="User note (keep until confirmed)"/>
+          <p:cNvSpPr txBox="1"/>
+          <p:nvPr/>
+        </p:nvSpPr>
+        <p:spPr>
+          <a:xfrm>
+            <a:off x="5285232" y="2395728"/>
+            <a:ext cx="3310128" cy="1005840"/>
+          </a:xfrm>
+          <a:prstGeom prst="rect">
+            <a:avLst/>
+          </a:prstGeom>
+          <a:noFill/>
+        </p:spPr>
+        <p:txBody>
+          <a:bodyPr wrap="square" rtlCol="0">
+            <a:spAutoFit/>
+          </a:bodyPr>
+          <a:lstStyle/>
+          <a:p>
+            <a:r>
+              <a:rPr lang="en-JP" dirty="0"/>
+              <a:t>What is A_t?</a:t>
+            </a:r>
+            <a:br>
+              <a:rPr lang="en-JP" dirty="0"/>
+            </a:br>
+            <a:r>
+              <a:rPr lang="en-JP" dirty="0"/>
+              <a:t>You have not explained</a:t>
+            </a:r>
+          </a:p>
+          <a:p>
+            <a:pPr>
+              <a:spcBef>
+                <a:spcPts val="400"/>
+              </a:spcBef>
+            </a:pPr>
+            <a:r>
+              <a:rPr lang="en-JP" dirty="0" sz="1100" i="1">
+                <a:solidFill>
+                  <a:srgbClr val="0F2F5C"/>
+                </a:solidFill>
+              </a:rPr>
+              <a:t>↳ </a:t>
+            </a:r>
+            <a:r>
+              <a:rPr lang="en-JP" dirty="0" sz="1100" i="1">
+                <a:solidFill>
+                  <a:srgbClr val="0F2F5C"/>
+                </a:solidFill>
+              </a:rPr>
+              <a:t>A</a:t>
+            </a:r>
+            <a:r>
+              <a:rPr lang="en-JP" dirty="0" sz="1100" i="1" baseline="-25000">
+                <a:solidFill>
+                  <a:srgbClr val="0F2F5C"/>
+                </a:solidFill>
+              </a:rPr>
+              <a:t>t</a:t>
+            </a:r>
+            <a:r>
+              <a:rPr lang="en-JP" dirty="0" sz="1100" i="1">
+                <a:solidFill>
+                  <a:srgbClr val="0F2F5C"/>
+                </a:solidFill>
+              </a:rPr>
+              <a:t> = target mass number (</a:t>
+            </a:r>
+            <a:r>
+              <a:rPr lang="en-JP" dirty="0" sz="1100" i="1" baseline="30000">
+                <a:solidFill>
+                  <a:srgbClr val="0F2F5C"/>
+                </a:solidFill>
+              </a:rPr>
+              <a:t>208</a:t>
+            </a:r>
+            <a:r>
+              <a:rPr lang="en-JP" dirty="0" sz="1100" i="1">
+                <a:solidFill>
+                  <a:srgbClr val="0F2F5C"/>
+                </a:solidFill>
+              </a:rPr>
+              <a:t>Pb: 208). From v</a:t>
+            </a:r>
+            <a:r>
+              <a:rPr lang="en-JP" dirty="0" sz="1100" i="1" baseline="-25000">
+                <a:solidFill>
+                  <a:srgbClr val="0F2F5C"/>
+                </a:solidFill>
+              </a:rPr>
+              <a:t>cm</a:t>
+            </a:r>
+            <a:r>
+              <a:rPr lang="en-JP" dirty="0" sz="1100" i="1">
+                <a:solidFill>
+                  <a:srgbClr val="0F2F5C"/>
+                </a:solidFill>
+              </a:rPr>
+              <a:t> = (A</a:t>
+            </a:r>
+            <a:r>
+              <a:rPr lang="en-JP" dirty="0" sz="1100" i="1" baseline="-25000">
+                <a:solidFill>
+                  <a:srgbClr val="0F2F5C"/>
+                </a:solidFill>
+              </a:rPr>
+              <a:t>p</a:t>
+            </a:r>
+            <a:r>
+              <a:rPr lang="en-JP" dirty="0" sz="1100" i="1">
+                <a:solidFill>
+                  <a:srgbClr val="0F2F5C"/>
+                </a:solidFill>
+              </a:rPr>
+              <a:t>/A</a:t>
+            </a:r>
+            <a:r>
+              <a:rPr lang="en-JP" dirty="0" sz="1100" i="1" baseline="-25000">
+                <a:solidFill>
+                  <a:srgbClr val="0F2F5C"/>
+                </a:solidFill>
+              </a:rPr>
+              <a:t>c</a:t>
+            </a:r>
+            <a:r>
+              <a:rPr lang="en-JP" dirty="0" sz="1100" i="1">
+                <a:solidFill>
+                  <a:srgbClr val="0F2F5C"/>
+                </a:solidFill>
+              </a:rPr>
+              <a:t>) v</a:t>
+            </a:r>
+            <a:r>
+              <a:rPr lang="en-JP" dirty="0" sz="1100" i="1" baseline="-25000">
+                <a:solidFill>
+                  <a:srgbClr val="0F2F5C"/>
+                </a:solidFill>
+              </a:rPr>
+              <a:t>p</a:t>
+            </a:r>
+            <a:r>
+              <a:rPr lang="en-JP" dirty="0" sz="1100" i="1">
+                <a:solidFill>
+                  <a:srgbClr val="0F2F5C"/>
+                </a:solidFill>
+              </a:rPr>
+              <a:t>, Δv/v</a:t>
+            </a:r>
+            <a:r>
+              <a:rPr lang="en-JP" dirty="0" sz="1100" i="1" baseline="-25000">
+                <a:solidFill>
+                  <a:srgbClr val="0F2F5C"/>
+                </a:solidFill>
+              </a:rPr>
+              <a:t>p</a:t>
+            </a:r>
+            <a:r>
+              <a:rPr lang="en-JP" dirty="0" sz="1100" i="1">
+                <a:solidFill>
+                  <a:srgbClr val="0F2F5C"/>
+                </a:solidFill>
+              </a:rPr>
+              <a:t> = A</a:t>
+            </a:r>
+            <a:r>
+              <a:rPr lang="en-JP" dirty="0" sz="1100" i="1" baseline="-25000">
+                <a:solidFill>
+                  <a:srgbClr val="0F2F5C"/>
+                </a:solidFill>
+              </a:rPr>
+              <a:t>t</a:t>
+            </a:r>
+            <a:r>
+              <a:rPr lang="en-JP" dirty="0" sz="1100" i="1">
+                <a:solidFill>
+                  <a:srgbClr val="0F2F5C"/>
+                </a:solidFill>
+              </a:rPr>
+              <a:t>/A</a:t>
+            </a:r>
+            <a:r>
+              <a:rPr lang="en-JP" dirty="0" sz="1100" i="1" baseline="-25000">
+                <a:solidFill>
+                  <a:srgbClr val="0F2F5C"/>
+                </a:solidFill>
+              </a:rPr>
+              <a:t>c</a:t>
+            </a:r>
+            <a:r>
+              <a:rPr lang="en-JP" dirty="0" sz="1100" i="1">
+                <a:solidFill>
+                  <a:srgbClr val="0F2F5C"/>
+                </a:solidFill>
+              </a:rPr>
+              <a:t>; now in the aside.</a:t>
             </a:r>
           </a:p>
         </p:txBody>
@@ -10026,7 +10888,7 @@
                 <a:ea typeface="Times New Roman" pitchFamily="34" charset="-122"/>
                 <a:cs typeface="Times New Roman" pitchFamily="34" charset="-120"/>
               </a:rPr>
-              <a:t>A heavy compound nucleus carries large forward momentum; a few evaporated nucleons barely deflect it.</a:t>
+              <a:t>A heavy projectile brings large forward momentum; a few evaporated particles barely deflect the residue.</a:t>
             </a:r>
             <a:endParaRPr lang="en-US" sz="1300" dirty="0"/>
           </a:p>
@@ -10078,15 +10940,14 @@
         </p:nvPicPr>
         <p:blipFill>
           <a:blip r:embed="rId3"/>
-          <a:srcRect l="18081" r="22894"/>
           <a:stretch>
             <a:fillRect/>
           </a:stretch>
         </p:blipFill>
         <p:spPr>
           <a:xfrm>
-            <a:off x="548640" y="1024128"/>
-            <a:ext cx="3665551" cy="1353312"/>
+            <a:off x="548640" y="1063833"/>
+            <a:ext cx="3685032" cy="1395984"/>
           </a:xfrm>
           <a:prstGeom prst="rect">
             <a:avLst/>
@@ -10109,7 +10970,7 @@
         </p:blipFill>
         <p:spPr>
           <a:xfrm>
-            <a:off x="2121252" y="2455804"/>
+            <a:off x="2121252" y="2501524"/>
             <a:ext cx="344454" cy="172456"/>
           </a:xfrm>
           <a:prstGeom prst="rect">
@@ -10161,7 +11022,7 @@
         </p:nvSpPr>
         <p:spPr>
           <a:xfrm>
-            <a:off x="1463040" y="2980944"/>
+            <a:off x="1463040" y="3131820"/>
             <a:ext cx="457200" cy="457200"/>
           </a:xfrm>
           <a:prstGeom prst="ellipse">
@@ -10196,7 +11057,7 @@
         </p:blipFill>
         <p:spPr>
           <a:xfrm>
-            <a:off x="1627906" y="3138358"/>
+            <a:off x="1627906" y="3289234"/>
             <a:ext cx="127467" cy="142372"/>
           </a:xfrm>
           <a:prstGeom prst="rect">
@@ -10212,7 +11073,7 @@
         </p:nvSpPr>
         <p:spPr>
           <a:xfrm>
-            <a:off x="548640" y="3511296"/>
+            <a:off x="548640" y="3662172"/>
             <a:ext cx="2423160" cy="292608"/>
           </a:xfrm>
           <a:prstGeom prst="rect">
@@ -10246,6 +11107,156 @@
       <p:pic>
         <p:nvPicPr>
           <p:cNvPr id="15" name="Image 3" descr="/Users/Reid Hu/OrbitOS/70_Presentations/717_Learning Group-20260916/assets/eq/focus_theta_d.png"/>
+          <p:cNvPicPr>
+            <a:picLocks noChangeAspect="1"/>
+          </p:cNvPicPr>
+          <p:nvPr/>
+        </p:nvPicPr>
+        <p:blipFill>
+          <a:blip r:embed="rId11"/>
+          <a:stretch>
+            <a:fillRect/>
+          </a:stretch>
+        </p:blipFill>
+        <p:spPr>
+          <a:xfrm>
+            <a:off x="539953" y="3991356"/>
+            <a:ext cx="2440533" cy="373989"/>
+          </a:xfrm>
+          <a:prstGeom prst="rect">
+            <a:avLst/>
+          </a:prstGeom>
+        </p:spPr>
+      </p:pic>
+      <p:sp>
+        <p:nvSpPr>
+          <p:cNvPr id="16" name="Shape 10"/>
+          <p:cNvSpPr/>
+          <p:nvPr/>
+        </p:nvSpPr>
+        <p:spPr>
+          <a:xfrm>
+            <a:off x="3246120" y="2871216"/>
+            <a:ext cx="2697480" cy="1755648"/>
+          </a:xfrm>
+          <a:prstGeom prst="roundRect">
+            <a:avLst>
+              <a:gd name="adj" fmla="val 4167"/>
+            </a:avLst>
+          </a:prstGeom>
+          <a:solidFill>
+            <a:srgbClr val="F7F9FC"/>
+          </a:solidFill>
+          <a:ln/>
+          <a:effectLst>
+            <a:outerShdw blurRad="101600" dist="25400" dir="8100000" algn="bl" rotWithShape="0">
+              <a:srgbClr val="000000">
+                <a:alpha val="12000"/>
+              </a:srgbClr>
+            </a:outerShdw>
+          </a:effectLst>
+        </p:spPr>
+        <p:txBody>
+          <a:bodyPr/>
+          <a:lstStyle/>
+          <a:p>
+            <a:endParaRPr lang="en-JP"/>
+          </a:p>
+        </p:txBody>
+      </p:sp>
+      <p:sp>
+        <p:nvSpPr>
+          <p:cNvPr id="17" name="Shape 11"/>
+          <p:cNvSpPr/>
+          <p:nvPr/>
+        </p:nvSpPr>
+        <p:spPr>
+          <a:xfrm>
+            <a:off x="4297680" y="3131820"/>
+            <a:ext cx="457200" cy="457200"/>
+          </a:xfrm>
+          <a:prstGeom prst="ellipse">
+            <a:avLst/>
+          </a:prstGeom>
+          <a:solidFill>
+            <a:srgbClr val="0F2F5C"/>
+          </a:solidFill>
+          <a:ln/>
+        </p:spPr>
+        <p:txBody>
+          <a:bodyPr/>
+          <a:lstStyle/>
+          <a:p>
+            <a:endParaRPr lang="en-JP"/>
+          </a:p>
+        </p:txBody>
+      </p:sp>
+      <p:pic>
+        <p:nvPicPr>
+          <p:cNvPr id="18" name="Image 4" descr="/Users/Reid Hu/OrbitOS/70_Presentations/717_Learning Group-20260916/assets/eq/chip_omega.png"/>
+          <p:cNvPicPr>
+            <a:picLocks noChangeAspect="1"/>
+          </p:cNvPicPr>
+          <p:nvPr/>
+        </p:nvPicPr>
+        <p:blipFill>
+          <a:blip r:embed="rId7"/>
+          <a:stretch>
+            <a:fillRect/>
+          </a:stretch>
+        </p:blipFill>
+        <p:spPr>
+          <a:xfrm>
+            <a:off x="4438086" y="3287908"/>
+            <a:ext cx="176388" cy="145024"/>
+          </a:xfrm>
+          <a:prstGeom prst="rect">
+            <a:avLst/>
+          </a:prstGeom>
+        </p:spPr>
+      </p:pic>
+      <p:sp>
+        <p:nvSpPr>
+          <p:cNvPr id="19" name="Text 12"/>
+          <p:cNvSpPr/>
+          <p:nvPr/>
+        </p:nvSpPr>
+        <p:spPr>
+          <a:xfrm>
+            <a:off x="3383280" y="3662172"/>
+            <a:ext cx="2423160" cy="292608"/>
+          </a:xfrm>
+          <a:prstGeom prst="rect">
+            <a:avLst/>
+          </a:prstGeom>
+          <a:noFill/>
+          <a:ln/>
+        </p:spPr>
+        <p:txBody>
+          <a:bodyPr wrap="square" lIns="0" tIns="0" rIns="0" bIns="0" rtlCol="0" anchor="ctr"/>
+          <a:lstStyle/>
+          <a:p>
+            <a:pPr marL="0" indent="0" algn="ctr">
+              <a:buNone/>
+            </a:pPr>
+            <a:r>
+              <a:rPr lang="en-US" sz="1400" b="1" dirty="0">
+                <a:solidFill>
+                  <a:srgbClr val="0F2F5C"/>
+                </a:solidFill>
+                <a:latin typeface="Times New Roman" pitchFamily="34" charset="0"/>
+                <a:ea typeface="Times New Roman" pitchFamily="34" charset="-122"/>
+                <a:cs typeface="Times New Roman" pitchFamily="34" charset="-120"/>
+              </a:rPr>
+              <a:t>Small solid angle</a:t>
+            </a:r>
+            <a:endParaRPr lang="en-US" sz="1400" dirty="0"/>
+          </a:p>
+        </p:txBody>
+      </p:sp>
+      <p:pic>
+        <p:nvPicPr>
+          <p:cNvPr id="20" name="Image 5" descr="/Users/Reid Hu/OrbitOS/70_Presentations/717_Learning Group-20260916/assets/eq/focus_omega_d.png"/>
           <p:cNvPicPr>
             <a:picLocks noChangeAspect="1"/>
           </p:cNvPicPr>
@@ -10259,8 +11270,8 @@
         </p:blipFill>
         <p:spPr>
           <a:xfrm>
-            <a:off x="548640" y="3840480"/>
-            <a:ext cx="2423160" cy="366345"/>
+            <a:off x="3401294" y="3991356"/>
+            <a:ext cx="2387132" cy="343540"/>
           </a:xfrm>
           <a:prstGeom prst="rect">
             <a:avLst/>
@@ -10269,13 +11280,13 @@
       </p:pic>
       <p:sp>
         <p:nvSpPr>
-          <p:cNvPr id="16" name="Shape 10"/>
-          <p:cNvSpPr/>
-          <p:nvPr/>
-        </p:nvSpPr>
-        <p:spPr>
-          <a:xfrm>
-            <a:off x="3246120" y="2871216"/>
+          <p:cNvPr id="21" name="Shape 13"/>
+          <p:cNvSpPr/>
+          <p:nvPr/>
+        </p:nvSpPr>
+        <p:spPr>
+          <a:xfrm>
+            <a:off x="6080760" y="2871216"/>
             <a:ext cx="2697480" cy="1755648"/>
           </a:xfrm>
           <a:prstGeom prst="roundRect">
@@ -10305,163 +11316,13 @@
       </p:sp>
       <p:sp>
         <p:nvSpPr>
-          <p:cNvPr id="17" name="Shape 11"/>
-          <p:cNvSpPr/>
-          <p:nvPr/>
-        </p:nvSpPr>
-        <p:spPr>
-          <a:xfrm>
-            <a:off x="4297680" y="2980944"/>
-            <a:ext cx="457200" cy="457200"/>
-          </a:xfrm>
-          <a:prstGeom prst="ellipse">
-            <a:avLst/>
-          </a:prstGeom>
-          <a:solidFill>
-            <a:srgbClr val="0F2F5C"/>
-          </a:solidFill>
-          <a:ln/>
-        </p:spPr>
-        <p:txBody>
-          <a:bodyPr/>
-          <a:lstStyle/>
-          <a:p>
-            <a:endParaRPr lang="en-JP"/>
-          </a:p>
-        </p:txBody>
-      </p:sp>
-      <p:pic>
-        <p:nvPicPr>
-          <p:cNvPr id="18" name="Image 4" descr="/Users/Reid Hu/OrbitOS/70_Presentations/717_Learning Group-20260916/assets/eq/chip_omega.png"/>
-          <p:cNvPicPr>
-            <a:picLocks noChangeAspect="1"/>
-          </p:cNvPicPr>
-          <p:nvPr/>
-        </p:nvPicPr>
-        <p:blipFill>
-          <a:blip r:embed="rId7"/>
-          <a:stretch>
-            <a:fillRect/>
-          </a:stretch>
-        </p:blipFill>
-        <p:spPr>
-          <a:xfrm>
-            <a:off x="4438086" y="3137032"/>
-            <a:ext cx="176388" cy="145024"/>
-          </a:xfrm>
-          <a:prstGeom prst="rect">
-            <a:avLst/>
-          </a:prstGeom>
-        </p:spPr>
-      </p:pic>
-      <p:sp>
-        <p:nvSpPr>
-          <p:cNvPr id="19" name="Text 12"/>
-          <p:cNvSpPr/>
-          <p:nvPr/>
-        </p:nvSpPr>
-        <p:spPr>
-          <a:xfrm>
-            <a:off x="3383280" y="3511296"/>
-            <a:ext cx="2423160" cy="292608"/>
-          </a:xfrm>
-          <a:prstGeom prst="rect">
-            <a:avLst/>
-          </a:prstGeom>
-          <a:noFill/>
-          <a:ln/>
-        </p:spPr>
-        <p:txBody>
-          <a:bodyPr wrap="square" lIns="0" tIns="0" rIns="0" bIns="0" rtlCol="0" anchor="ctr"/>
-          <a:lstStyle/>
-          <a:p>
-            <a:pPr marL="0" indent="0" algn="ctr">
-              <a:buNone/>
-            </a:pPr>
-            <a:r>
-              <a:rPr lang="en-US" sz="1400" b="1" dirty="0">
-                <a:solidFill>
-                  <a:srgbClr val="0F2F5C"/>
-                </a:solidFill>
-                <a:latin typeface="Times New Roman" pitchFamily="34" charset="0"/>
-                <a:ea typeface="Times New Roman" pitchFamily="34" charset="-122"/>
-                <a:cs typeface="Times New Roman" pitchFamily="34" charset="-120"/>
-              </a:rPr>
-              <a:t>Small solid angle</a:t>
-            </a:r>
-            <a:endParaRPr lang="en-US" sz="1400" dirty="0"/>
-          </a:p>
-        </p:txBody>
-      </p:sp>
-      <p:pic>
-        <p:nvPicPr>
-          <p:cNvPr id="20" name="Image 5" descr="/Users/Reid Hu/OrbitOS/70_Presentations/717_Learning Group-20260916/assets/eq/focus_omega_d.png"/>
-          <p:cNvPicPr>
-            <a:picLocks noChangeAspect="1"/>
-          </p:cNvPicPr>
-          <p:nvPr/>
-        </p:nvPicPr>
-        <p:blipFill>
-          <a:blip r:embed="rId8"/>
-          <a:stretch>
-            <a:fillRect/>
-          </a:stretch>
-        </p:blipFill>
-        <p:spPr>
-          <a:xfrm>
-            <a:off x="3383280" y="3840480"/>
-            <a:ext cx="2423160" cy="371062"/>
-          </a:xfrm>
-          <a:prstGeom prst="rect">
-            <a:avLst/>
-          </a:prstGeom>
-        </p:spPr>
-      </p:pic>
-      <p:sp>
-        <p:nvSpPr>
-          <p:cNvPr id="21" name="Shape 13"/>
-          <p:cNvSpPr/>
-          <p:nvPr/>
-        </p:nvSpPr>
-        <p:spPr>
-          <a:xfrm>
-            <a:off x="6080760" y="2871216"/>
-            <a:ext cx="2697480" cy="1755648"/>
-          </a:xfrm>
-          <a:prstGeom prst="roundRect">
-            <a:avLst>
-              <a:gd name="adj" fmla="val 4167"/>
-            </a:avLst>
-          </a:prstGeom>
-          <a:solidFill>
-            <a:srgbClr val="F7F9FC"/>
-          </a:solidFill>
-          <a:ln/>
-          <a:effectLst>
-            <a:outerShdw blurRad="101600" dist="25400" dir="8100000" algn="bl" rotWithShape="0">
-              <a:srgbClr val="000000">
-                <a:alpha val="12000"/>
-              </a:srgbClr>
-            </a:outerShdw>
-          </a:effectLst>
-        </p:spPr>
-        <p:txBody>
-          <a:bodyPr/>
-          <a:lstStyle/>
-          <a:p>
-            <a:endParaRPr lang="en-JP"/>
-          </a:p>
-        </p:txBody>
-      </p:sp>
-      <p:sp>
-        <p:nvSpPr>
           <p:cNvPr id="22" name="Shape 14"/>
           <p:cNvSpPr/>
           <p:nvPr/>
         </p:nvSpPr>
         <p:spPr>
           <a:xfrm>
-            <a:off x="7132320" y="2980944"/>
+            <a:off x="7132320" y="3131820"/>
             <a:ext cx="457200" cy="457200"/>
           </a:xfrm>
           <a:prstGeom prst="ellipse">
@@ -10496,7 +11357,7 @@
         </p:blipFill>
         <p:spPr>
           <a:xfrm>
-            <a:off x="7298009" y="3156509"/>
+            <a:off x="7298009" y="3307385"/>
             <a:ext cx="125821" cy="106070"/>
           </a:xfrm>
           <a:prstGeom prst="rect">
@@ -10512,7 +11373,7 @@
         </p:nvSpPr>
         <p:spPr>
           <a:xfrm>
-            <a:off x="6217920" y="3511296"/>
+            <a:off x="6217920" y="3662172"/>
             <a:ext cx="2423160" cy="292608"/>
           </a:xfrm>
           <a:prstGeom prst="rect">
@@ -10559,8 +11420,8 @@
         </p:blipFill>
         <p:spPr>
           <a:xfrm>
-            <a:off x="6264783" y="3840480"/>
-            <a:ext cx="2329434" cy="343449"/>
+            <a:off x="6222492" y="3991356"/>
+            <a:ext cx="2414016" cy="374904"/>
           </a:xfrm>
           <a:prstGeom prst="rect">
             <a:avLst/>
@@ -10906,6 +11767,7 @@
           <a:lstStyle/>
           <a:p>
             <a:pPr algn="ctr"/>
+            <a:endParaRPr/>
           </a:p>
         </p:txBody>
       </p:sp>
@@ -10926,7 +11788,7 @@
           <a:noFill/>
         </p:spPr>
         <p:txBody>
-          <a:bodyPr wrap="none" lIns="0" rIns="0" tIns="0" bIns="0" anchor="ctr">
+          <a:bodyPr wrap="none" lIns="0" tIns="0" rIns="0" bIns="0" anchor="ctr">
             <a:spAutoFit/>
           </a:bodyPr>
           <a:lstStyle/>
@@ -10961,7 +11823,7 @@
           <a:noFill/>
         </p:spPr>
         <p:txBody>
-          <a:bodyPr wrap="none" lIns="0" rIns="0" tIns="0" bIns="0" anchor="ctr">
+          <a:bodyPr wrap="none" lIns="0" tIns="0" rIns="0" bIns="0" anchor="ctr">
             <a:spAutoFit/>
           </a:bodyPr>
           <a:lstStyle/>
@@ -11020,6 +11882,7 @@
           <a:lstStyle/>
           <a:p>
             <a:pPr algn="ctr"/>
+            <a:endParaRPr/>
           </a:p>
         </p:txBody>
       </p:sp>
@@ -11040,7 +11903,7 @@
           <a:noFill/>
         </p:spPr>
         <p:txBody>
-          <a:bodyPr wrap="none" lIns="0" rIns="0" tIns="0" bIns="0" anchor="ctr">
+          <a:bodyPr wrap="none" lIns="0" tIns="0" rIns="0" bIns="0" anchor="ctr">
             <a:spAutoFit/>
           </a:bodyPr>
           <a:lstStyle/>
@@ -11075,7 +11938,7 @@
           <a:noFill/>
         </p:spPr>
         <p:txBody>
-          <a:bodyPr wrap="none" lIns="0" rIns="0" tIns="0" bIns="0" anchor="ctr">
+          <a:bodyPr wrap="none" lIns="0" tIns="0" rIns="0" bIns="0" anchor="ctr">
             <a:spAutoFit/>
           </a:bodyPr>
           <a:lstStyle/>
@@ -11134,6 +11997,7 @@
           <a:lstStyle/>
           <a:p>
             <a:pPr algn="ctr"/>
+            <a:endParaRPr/>
           </a:p>
         </p:txBody>
       </p:sp>
@@ -11154,7 +12018,7 @@
           <a:noFill/>
         </p:spPr>
         <p:txBody>
-          <a:bodyPr wrap="none" lIns="0" rIns="0" tIns="0" bIns="0" anchor="ctr">
+          <a:bodyPr wrap="none" lIns="0" tIns="0" rIns="0" bIns="0" anchor="ctr">
             <a:spAutoFit/>
           </a:bodyPr>
           <a:lstStyle/>
@@ -11189,7 +12053,7 @@
           <a:noFill/>
         </p:spPr>
         <p:txBody>
-          <a:bodyPr wrap="none" lIns="0" rIns="0" tIns="0" bIns="0" anchor="ctr">
+          <a:bodyPr wrap="none" lIns="0" tIns="0" rIns="0" bIns="0" anchor="ctr">
             <a:spAutoFit/>
           </a:bodyPr>
           <a:lstStyle/>
@@ -11248,6 +12112,7 @@
           <a:lstStyle/>
           <a:p>
             <a:pPr algn="ctr"/>
+            <a:endParaRPr/>
           </a:p>
         </p:txBody>
       </p:sp>
@@ -11268,7 +12133,7 @@
           <a:noFill/>
         </p:spPr>
         <p:txBody>
-          <a:bodyPr wrap="none" lIns="0" rIns="0" tIns="0" bIns="0" anchor="ctr">
+          <a:bodyPr wrap="none" lIns="0" tIns="0" rIns="0" bIns="0" anchor="ctr">
             <a:spAutoFit/>
           </a:bodyPr>
           <a:lstStyle/>
@@ -11303,7 +12168,7 @@
           <a:noFill/>
         </p:spPr>
         <p:txBody>
-          <a:bodyPr wrap="none" lIns="0" rIns="0" tIns="0" bIns="0" anchor="ctr">
+          <a:bodyPr wrap="none" lIns="0" tIns="0" rIns="0" bIns="0" anchor="ctr">
             <a:spAutoFit/>
           </a:bodyPr>
           <a:lstStyle/>
@@ -11362,6 +12227,7 @@
           <a:lstStyle/>
           <a:p>
             <a:pPr algn="ctr"/>
+            <a:endParaRPr/>
           </a:p>
         </p:txBody>
       </p:sp>
@@ -11382,7 +12248,7 @@
           <a:noFill/>
         </p:spPr>
         <p:txBody>
-          <a:bodyPr wrap="none" lIns="0" rIns="0" tIns="0" bIns="0" anchor="ctr">
+          <a:bodyPr wrap="none" lIns="0" tIns="0" rIns="0" bIns="0" anchor="ctr">
             <a:spAutoFit/>
           </a:bodyPr>
           <a:lstStyle/>
@@ -11417,7 +12283,7 @@
           <a:noFill/>
         </p:spPr>
         <p:txBody>
-          <a:bodyPr wrap="none" lIns="0" rIns="0" tIns="0" bIns="0" anchor="ctr">
+          <a:bodyPr wrap="none" lIns="0" tIns="0" rIns="0" bIns="0" anchor="ctr">
             <a:spAutoFit/>
           </a:bodyPr>
           <a:lstStyle/>
@@ -11479,7 +12345,7 @@
           <p:nvPr/>
         </p:nvPicPr>
         <p:blipFill>
-          <a:blip r:embed="rId6"/>
+          <a:blip r:embed="rId3"/>
           <a:stretch>
             <a:fillRect/>
           </a:stretch>
@@ -11503,7 +12369,7 @@
           <p:nvPr/>
         </p:nvPicPr>
         <p:blipFill>
-          <a:blip r:embed="rId7"/>
+          <a:blip r:embed="rId4"/>
           <a:stretch>
             <a:fillRect/>
           </a:stretch>
@@ -11629,7 +12495,7 @@
           <p:nvPr/>
         </p:nvPicPr>
         <p:blipFill>
-          <a:blip r:embed="rId8"/>
+          <a:blip r:embed="rId5"/>
           <a:stretch>
             <a:fillRect/>
           </a:stretch>
@@ -11755,7 +12621,7 @@
           <p:nvPr/>
         </p:nvPicPr>
         <p:blipFill>
-          <a:blip r:embed="rId9"/>
+          <a:blip r:embed="rId6"/>
           <a:stretch>
             <a:fillRect/>
           </a:stretch>
@@ -11881,7 +12747,7 @@
           <p:nvPr/>
         </p:nvPicPr>
         <p:blipFill>
-          <a:blip r:embed="rId10"/>
+          <a:blip r:embed="rId7"/>
           <a:stretch>
             <a:fillRect/>
           </a:stretch>
@@ -12303,8 +13169,8 @@
         </p:blipFill>
         <p:spPr>
           <a:xfrm>
-            <a:off x="817248" y="667512"/>
-            <a:ext cx="7509503" cy="1280160"/>
+            <a:off x="2107967" y="920637"/>
+            <a:ext cx="5309616" cy="731520"/>
           </a:xfrm>
           <a:prstGeom prst="rect">
             <a:avLst/>
@@ -12649,7 +13515,7 @@
         <p:spPr>
           <a:xfrm>
             <a:off x="6217920" y="2980944"/>
-            <a:ext cx="2297796" cy="373807"/>
+            <a:ext cx="2447544" cy="560832"/>
           </a:xfrm>
           <a:prstGeom prst="rect">
             <a:avLst/>
@@ -12718,7 +13584,7 @@
                 <a:ea typeface="Times New Roman" pitchFamily="34" charset="-122"/>
                 <a:cs typeface="Times New Roman" pitchFamily="34" charset="-120"/>
               </a:rPr>
-              <a:t>Trade-off: the filter does not measure mass in flight. The isotope is identified later — by decay spectroscopy at the focal plane.</a:t>
+              <a:t>Trade-off: no mass dispersion. SHIP identifies isotopes by decay; Daresbury adds a spectrometer for mass.</a:t>
             </a:r>
             <a:endParaRPr lang="en-US" sz="1300" dirty="0"/>
           </a:p>

--- a/70_Presentations/717_Learning Group-20260916/Velocity Filters Human.pptx
+++ b/70_Presentations/717_Learning Group-20260916/Velocity Filters Human.pptx
@@ -1,31 +1,32 @@
 
 <file path=ppt/presentation.xml><?xml version="1.0" encoding="utf-8"?>
-<p:presentation xmlns:a="http://schemas.openxmlformats.org/drawingml/2006/main" xmlns:r="http://schemas.openxmlformats.org/officeDocument/2006/relationships" xmlns:p="http://schemas.openxmlformats.org/presentationml/2006/main" saveSubsetFonts="1" autoCompressPictures="0">
+<p:presentation xmlns:a="http://schemas.openxmlformats.org/drawingml/2006/main" xmlns:r="http://schemas.openxmlformats.org/officeDocument/2006/relationships" xmlns:p="http://schemas.openxmlformats.org/presentationml/2006/main" showSpecialPlsOnTitleSld="0" saveSubsetFonts="1" autoCompressPictures="0">
   <p:sldMasterIdLst>
     <p:sldMasterId id="2147483648" r:id="rId1"/>
   </p:sldMasterIdLst>
   <p:notesMasterIdLst>
-    <p:notesMasterId r:id="rId20"/>
+    <p:notesMasterId r:id="rId21"/>
   </p:notesMasterIdLst>
   <p:sldIdLst>
     <p:sldId id="256" r:id="rId2"/>
     <p:sldId id="274" r:id="rId3"/>
     <p:sldId id="257" r:id="rId4"/>
     <p:sldId id="258" r:id="rId5"/>
-    <p:sldId id="259" r:id="rId6"/>
-    <p:sldId id="260" r:id="rId7"/>
-    <p:sldId id="262" r:id="rId8"/>
-    <p:sldId id="263" r:id="rId9"/>
-    <p:sldId id="264" r:id="rId10"/>
-    <p:sldId id="265" r:id="rId11"/>
-    <p:sldId id="266" r:id="rId12"/>
-    <p:sldId id="267" r:id="rId13"/>
-    <p:sldId id="268" r:id="rId14"/>
-    <p:sldId id="269" r:id="rId15"/>
-    <p:sldId id="270" r:id="rId16"/>
-    <p:sldId id="271" r:id="rId17"/>
-    <p:sldId id="272" r:id="rId18"/>
-    <p:sldId id="273" r:id="rId19"/>
+    <p:sldId id="275" r:id="rId6"/>
+    <p:sldId id="259" r:id="rId7"/>
+    <p:sldId id="260" r:id="rId8"/>
+    <p:sldId id="262" r:id="rId9"/>
+    <p:sldId id="263" r:id="rId10"/>
+    <p:sldId id="264" r:id="rId11"/>
+    <p:sldId id="265" r:id="rId12"/>
+    <p:sldId id="266" r:id="rId13"/>
+    <p:sldId id="267" r:id="rId14"/>
+    <p:sldId id="268" r:id="rId15"/>
+    <p:sldId id="269" r:id="rId16"/>
+    <p:sldId id="270" r:id="rId17"/>
+    <p:sldId id="271" r:id="rId18"/>
+    <p:sldId id="272" r:id="rId19"/>
+    <p:sldId id="273" r:id="rId20"/>
   </p:sldIdLst>
   <p:sldSz cx="9144000" cy="5143500" type="screen16x9"/>
   <p:notesSz cx="5143500" cy="9144000"/>
@@ -386,8 +387,7 @@
           <a:lstStyle/>
           <a:p>
             <a:r>
-              <a:rPr lang="en-US" dirty="0"/>
-              <a:t>This is SHIP at GSI. Notice it is not a crossed-field Wien filter. The electric condenser comes first. It deflects the primary beam away immediately, so the beam never hits the plates — no scattered background, no heat damage.</a:t>
+              <a:t>Second of four. For element 108, about 2 × 10¹⁷ projectiles hit the target for every atom caught. How does the filter survive that beam?</a:t>
             </a:r>
           </a:p>
         </p:txBody>
@@ -474,7 +474,7 @@
           <a:p>
             <a:r>
               <a:rPr lang="en-US" dirty="0"/>
-              <a:t>In contrast, Daresbury uses crossed E and B fields, followed by a magnetic spectrometer to refocus the energy spread.</a:t>
+              <a:t>This is SHIP at GSI. Notice it is not a crossed-field Wien filter. The electric condenser comes first. It deflects the primary beam away immediately, so the beam never hits the plates — no scattered background, no heat damage.</a:t>
             </a:r>
           </a:p>
         </p:txBody>
@@ -560,7 +560,8 @@
           <a:lstStyle/>
           <a:p>
             <a:r>
-              <a:t>Third of four. Back to the trade-off from slide 8: the filter never measures mass in flight. So how do we know what we caught?</a:t>
+              <a:rPr lang="en-US" dirty="0"/>
+              <a:t>In contrast, Daresbury uses crossed E and B fields, followed by a magnetic spectrometer to refocus the energy spread.</a:t>
             </a:r>
           </a:p>
         </p:txBody>
@@ -646,8 +647,7 @@
           <a:lstStyle/>
           <a:p>
             <a:r>
-              <a:rPr lang="en-US" dirty="0"/>
-              <a:t>Because SHIP separates in under 2 microseconds, we can implant short-lived residues into silicon. Here is the first ground-state proton decay from Lutetium-151, cleanly isolated from the alpha background.</a:t>
+              <a:t>Third of four. Back to the trade-off from slide 8: the filter never measures mass in flight. So how do we know what we caught?</a:t>
             </a:r>
           </a:p>
         </p:txBody>
@@ -733,7 +733,8 @@
           <a:lstStyle/>
           <a:p>
             <a:r>
-              <a:t>Back to the three atoms from the start. Out of 6 × 10¹⁷ projectiles over ten days, SHIP produced just three atoms of element 108. Because SHIP does not measure mass, we prove the isotope by watching it alpha-decay step by step into known daughters.</a:t>
+              <a:rPr lang="en-US" dirty="0"/>
+              <a:t>Because SHIP separates in under 2 microseconds, we can implant short-lived residues into silicon. Here is the first ground-state proton decay from Lutetium-151, cleanly isolated from the alpha background.</a:t>
             </a:r>
           </a:p>
         </p:txBody>
@@ -819,7 +820,7 @@
           <a:lstStyle/>
           <a:p>
             <a:r>
-              <a:t>At Daresbury, they surround the target with gamma detectors. By only looking at gammas coincident with a mass-selected recoil at the focal plane, the Coulomb-excitation and target-impurity background disappears.</a:t>
+              <a:t>Back to the three atoms from the start. Out of 6 × 10¹⁷ projectiles over ten days, SHIP produced just three atoms of element 108. Because SHIP does not measure mass, we prove the isotope by watching it alpha-decay step by step into known daughters.</a:t>
             </a:r>
           </a:p>
         </p:txBody>
@@ -905,7 +906,7 @@
           <a:lstStyle/>
           <a:p>
             <a:r>
-              <a:t>Last of four: when is a velocity filter the wrong tool?</a:t>
+              <a:t>At Daresbury, they surround the target with gamma detectors. By only looking at gammas coincident with a mass-selected recoil at the focal plane, the Coulomb-excitation and target-impurity background disappears.</a:t>
             </a:r>
           </a:p>
         </p:txBody>
@@ -991,8 +992,7 @@
           <a:lstStyle/>
           <a:p>
             <a:r>
-              <a:rPr lang="en-US" dirty="0"/>
-              <a:t>Velocity filters are the best choice for Coulomb-barrier fusion where you need maximum transmission. If you need mass resolution in flight, use an RMS. If you have relativistic energies, use a fragment separator.</a:t>
+              <a:t>Last of four: when is a velocity filter the wrong tool?</a:t>
             </a:r>
           </a:p>
         </p:txBody>
@@ -1079,7 +1079,7 @@
           <a:p>
             <a:r>
               <a:rPr lang="en-US" dirty="0"/>
-              <a:t>To summarize: velocity filters ignore mass to achieve 100% charge-state transmission; SHIP's separated fields survive particle-microampere beams; and this extreme sensitivity makes single-atom discoveries possible.</a:t>
+              <a:t>Velocity filters are the best choice for Coulomb-barrier fusion where you need maximum transmission. If you need mass resolution in flight, use an RMS. If you have relativistic energies, use a fragment separator.</a:t>
             </a:r>
           </a:p>
         </p:txBody>
@@ -1102,6 +1102,93 @@
             <a:fld id="{F7021451-1387-4CA6-816F-3879F97B5CBC}" type="slidenum">
               <a:rPr lang="en-US"/>
               <a:t>18</a:t>
+            </a:fld>
+            <a:endParaRPr lang="en-US"/>
+          </a:p>
+        </p:txBody>
+      </p:sp>
+    </p:spTree>
+    <p:extLst>
+      <p:ext uri="{BB962C8B-B14F-4D97-AF65-F5344CB8AC3E}">
+        <p14:creationId xmlns:p14="http://schemas.microsoft.com/office/powerpoint/2010/main" val="1024086991"/>
+      </p:ext>
+    </p:extLst>
+  </p:cSld>
+  <p:clrMapOvr>
+    <a:masterClrMapping/>
+  </p:clrMapOvr>
+</p:notes>
+</file>
+
+<file path=ppt/notesSlides/notesSlide19.xml><?xml version="1.0" encoding="utf-8"?>
+<p:notes xmlns:a="http://schemas.openxmlformats.org/drawingml/2006/main" xmlns:r="http://schemas.openxmlformats.org/officeDocument/2006/relationships" xmlns:p="http://schemas.openxmlformats.org/presentationml/2006/main">
+  <p:cSld>
+    <p:spTree>
+      <p:nvGrpSpPr>
+        <p:cNvPr id="1" name=""/>
+        <p:cNvGrpSpPr/>
+        <p:nvPr/>
+      </p:nvGrpSpPr>
+      <p:grpSpPr>
+        <a:xfrm>
+          <a:off x="0" y="0"/>
+          <a:ext cx="0" cy="0"/>
+          <a:chOff x="0" y="0"/>
+          <a:chExt cx="0" cy="0"/>
+        </a:xfrm>
+      </p:grpSpPr>
+      <p:sp>
+        <p:nvSpPr>
+          <p:cNvPr id="2" name="Slide Image Placeholder 1"/>
+          <p:cNvSpPr>
+            <a:spLocks noGrp="1" noRot="1" noChangeAspect="1"/>
+          </p:cNvSpPr>
+          <p:nvPr>
+            <p:ph type="sldImg"/>
+          </p:nvPr>
+        </p:nvSpPr>
+        <p:spPr/>
+      </p:sp>
+      <p:sp>
+        <p:nvSpPr>
+          <p:cNvPr id="3" name="Notes Placeholder 2"/>
+          <p:cNvSpPr>
+            <a:spLocks noGrp="1"/>
+          </p:cNvSpPr>
+          <p:nvPr>
+            <p:ph type="body" idx="1"/>
+          </p:nvPr>
+        </p:nvSpPr>
+        <p:spPr/>
+        <p:txBody>
+          <a:bodyPr/>
+          <a:lstStyle/>
+          <a:p>
+            <a:r>
+              <a:rPr lang="en-US" dirty="0"/>
+              <a:t>To summarize: the charge cancels out of the velocity condition, so velocity filters pass every charge state together; SHIP's separated fields survive particle-microampere beams; and this extreme sensitivity makes single-atom discoveries possible.</a:t>
+            </a:r>
+          </a:p>
+        </p:txBody>
+      </p:sp>
+      <p:sp>
+        <p:nvSpPr>
+          <p:cNvPr id="4" name="Slide Number Placeholder 3"/>
+          <p:cNvSpPr>
+            <a:spLocks noGrp="1"/>
+          </p:cNvSpPr>
+          <p:nvPr>
+            <p:ph type="sldNum" sz="quarter" idx="10"/>
+          </p:nvPr>
+        </p:nvSpPr>
+        <p:spPr/>
+        <p:txBody>
+          <a:bodyPr/>
+          <a:lstStyle/>
+          <a:p>
+            <a:fld id="{F7021451-1387-4CA6-816F-3879F97B5CBC}" type="slidenum">
+              <a:rPr lang="en-US"/>
+              <a:t>19</a:t>
             </a:fld>
             <a:endParaRPr lang="en-US"/>
           </a:p>
@@ -1346,7 +1433,13 @@
   <p:cSld>
     <p:spTree>
       <p:nvGrpSpPr>
-        <p:cNvPr id="1" name=""/>
+        <p:cNvPr id="1" name="">
+          <a:extLst>
+            <a:ext uri="{FF2B5EF4-FFF2-40B4-BE49-F238E27FC236}">
+              <a16:creationId xmlns:a16="http://schemas.microsoft.com/office/drawing/2014/main" id="{97E245F7-AB87-0E55-ACAE-506182E7036F}"/>
+            </a:ext>
+          </a:extLst>
+        </p:cNvPr>
         <p:cNvGrpSpPr/>
         <p:nvPr/>
       </p:nvGrpSpPr>
@@ -1360,7 +1453,13 @@
       </p:grpSpPr>
       <p:sp>
         <p:nvSpPr>
-          <p:cNvPr id="2" name="Slide Image Placeholder 1"/>
+          <p:cNvPr id="2" name="Slide Image Placeholder 1">
+            <a:extLst>
+              <a:ext uri="{FF2B5EF4-FFF2-40B4-BE49-F238E27FC236}">
+                <a16:creationId xmlns:a16="http://schemas.microsoft.com/office/drawing/2014/main" id="{1E3C84A9-353C-769C-7243-104E380FC02C}"/>
+              </a:ext>
+            </a:extLst>
+          </p:cNvPr>
           <p:cNvSpPr>
             <a:spLocks noGrp="1" noRot="1" noChangeAspect="1"/>
           </p:cNvSpPr>
@@ -1372,7 +1471,13 @@
       </p:sp>
       <p:sp>
         <p:nvSpPr>
-          <p:cNvPr id="3" name="Notes Placeholder 2"/>
+          <p:cNvPr id="3" name="Notes Placeholder 2">
+            <a:extLst>
+              <a:ext uri="{FF2B5EF4-FFF2-40B4-BE49-F238E27FC236}">
+                <a16:creationId xmlns:a16="http://schemas.microsoft.com/office/drawing/2014/main" id="{4CB9A7F9-A192-6298-8C4D-1F55C4006CD6}"/>
+              </a:ext>
+            </a:extLst>
+          </p:cNvPr>
           <p:cNvSpPr>
             <a:spLocks noGrp="1"/>
           </p:cNvSpPr>
@@ -1387,22 +1492,20 @@
           <a:p>
             <a:r>
               <a:rPr dirty="0"/>
-              <a:t>Recall how a mass spectrometer works: a magnet bends each ion by momentum over charge. Here is the catch. In complete fusion, the compound nucleus takes the full projectile momentum, so to a magnet the residue looks almost like the beam — the book shows their magnetic rigidities nearly coincide (Fig. 9). But that momentum now sits on a much heavier nucleus, so it moves at the </a:t>
-            </a:r>
-            <a:r>
-              <a:rPr dirty="0" err="1"/>
-              <a:t>centre</a:t>
-            </a:r>
-            <a:r>
-              <a:rPr dirty="0"/>
-              <a:t>-of-mass velocity: for iron on lead, about a fifth of the beam speed. Same momentum, lower speed — that is our handle.</a:t>
-            </a:r>
-          </a:p>
-        </p:txBody>
-      </p:sp>
-      <p:sp>
-        <p:nvSpPr>
-          <p:cNvPr id="4" name="Slide Number Placeholder 3"/>
+              <a:t>Recall how a mass spectrometer works: a magnet bends each ion by momentum over charge. Here is the catch. In complete fusion, the compound nucleus takes the full projectile momentum, so to a magnet the residue looks almost like the beam — the book shows their magnetic rigidities nearly coincide (Fig. 9).</a:t>
+            </a:r>
+          </a:p>
+        </p:txBody>
+      </p:sp>
+      <p:sp>
+        <p:nvSpPr>
+          <p:cNvPr id="4" name="Slide Number Placeholder 3">
+            <a:extLst>
+              <a:ext uri="{FF2B5EF4-FFF2-40B4-BE49-F238E27FC236}">
+                <a16:creationId xmlns:a16="http://schemas.microsoft.com/office/drawing/2014/main" id="{5D577850-BAE1-5AAB-2464-2C755CC4BEE5}"/>
+              </a:ext>
+            </a:extLst>
+          </p:cNvPr>
           <p:cNvSpPr>
             <a:spLocks noGrp="1"/>
           </p:cNvSpPr>
@@ -1426,7 +1529,7 @@
     </p:spTree>
     <p:extLst>
       <p:ext uri="{BB962C8B-B14F-4D97-AF65-F5344CB8AC3E}">
-        <p14:creationId xmlns:p14="http://schemas.microsoft.com/office/powerpoint/2010/main" val="1024086991"/>
+        <p14:creationId xmlns:p14="http://schemas.microsoft.com/office/powerpoint/2010/main" val="3413703988"/>
       </p:ext>
     </p:extLst>
   </p:cSld>
@@ -1481,7 +1584,16 @@
           <a:lstStyle/>
           <a:p>
             <a:r>
-              <a:t>Evaporation is how the hot compound nucleus cools down: it boils off a few neutrons, protons or alphas. Each one kicks the residue in a random direction. Random kicks add in quadrature, and the 3 keeps the part along one axis. Compare that with the projectile momentum in the denominator: a heavy beam makes it large, so the residues stay in a narrow forward cone.</a:t>
+              <a:rPr dirty="0"/>
+              <a:t>But that momentum now sits on a much heavier nucleus, so it moves at the </a:t>
+            </a:r>
+            <a:r>
+              <a:rPr dirty="0" err="1"/>
+              <a:t>centre</a:t>
+            </a:r>
+            <a:r>
+              <a:rPr dirty="0"/>
+              <a:t>-of-mass velocity: for iron on lead, about a fifth of the beam speed. Same momentum, lower speed — that is our handle.</a:t>
             </a:r>
           </a:p>
         </p:txBody>
@@ -1567,7 +1679,8 @@
           <a:lstStyle/>
           <a:p>
             <a:r>
-              <a:t>But a magnet is not the whole story: recoil mass separators add electric fields, and they do separate residues from the beam. Their catch is the charge state. They disperse by A/q, and heavy ions emerge in a spread of charge states centred near q ≈ 20 — about five states carry the intensity. A mass separator keeps only one or two, losing most of the yield. On the left, schematically: one residue species arrives in about five charge states; the separator transmits the navy one, and the grey ones are lost.</a:t>
+              <a:rPr dirty="0"/>
+              <a:t>Evaporation is how the hot compound nucleus cools down: it boils off a few neutrons, protons or alphas. Each one kicks the residue in a random direction. Random kicks add in quadrature, and the 3 keeps the part along one axis. Compare that with the projectile momentum in the denominator: a heavy beam makes it large, so the residues stay in a narrow forward cone.</a:t>
             </a:r>
           </a:p>
         </p:txBody>
@@ -1653,7 +1766,7 @@
           <a:lstStyle/>
           <a:p>
             <a:r>
-              <a:t>Second time, same idea: same momentum, lower speed. In a pure velocity filter, the condition v = E/B does not contain the charge. All charge states of the chosen velocity pass through, giving near-100% charge-state transmission and, at SHIP, suppressing unretarded projectiles by more than 10¹⁶. E here is the electric field, not kinetic energy.</a:t>
+              <a:t>But a magnet is not the whole story: recoil mass separators add electric fields, and they do separate residues from the beam. Their catch is the charge state. They disperse by A/q, and heavy ions emerge in a spread of charge states centred near q ≈ 20 — about five states carry the intensity. A mass separator keeps only one or two, losing most of the yield. On the left, schematically: one residue species arrives in about five charge states; the separator transmits the navy one, and the grey ones are lost.</a:t>
             </a:r>
           </a:p>
         </p:txBody>
@@ -1739,7 +1852,7 @@
           <a:lstStyle/>
           <a:p>
             <a:r>
-              <a:t>Second of four. For element 108, about 2 × 10¹⁷ projectiles hit the target for every atom caught. How does the filter survive that beam?</a:t>
+              <a:t>Second time, same idea: same momentum, lower speed. In a pure velocity filter, the condition v = E/B does not contain the charge. All charge states of the chosen velocity pass through, giving near-100% charge-state transmission and, at SHIP, suppressing unretarded projectiles by more than 10¹⁶. E here is the electric field, not kinetic energy.</a:t>
             </a:r>
           </a:p>
         </p:txBody>
@@ -1802,6 +1915,28 @@
           <a:chExt cx="0" cy="0"/>
         </a:xfrm>
       </p:grpSpPr>
+      <p:sp>
+        <p:nvSpPr>
+          <p:cNvPr id="2" name="Date Placeholder 1"/>
+          <p:cNvSpPr>
+            <a:spLocks noGrp="1"/>
+          </p:cNvSpPr>
+          <p:nvPr>
+            <p:ph type="dt" sz="half" idx="10"/>
+          </p:nvPr>
+        </p:nvSpPr>
+        <p:spPr/>
+        <p:txBody>
+          <a:bodyPr/>
+          <a:lstStyle/>
+          <a:p>
+            <a:r>
+              <a:rPr lang="en-US" dirty="0"/>
+              <a:t>29 Sep 2026</a:t>
+            </a:r>
+          </a:p>
+        </p:txBody>
+      </p:sp>
     </p:spTree>
   </p:cSld>
   <p:clrMapOvr>
@@ -1832,13 +1967,55 @@
           <a:chExt cx="0" cy="0"/>
         </a:xfrm>
       </p:grpSpPr>
+      <p:sp>
+        <p:nvSpPr>
+          <p:cNvPr id="2" name="Date Placeholder 1"/>
+          <p:cNvSpPr>
+            <a:spLocks noGrp="1"/>
+          </p:cNvSpPr>
+          <p:nvPr>
+            <p:ph type="dt" sz="half" idx="2"/>
+          </p:nvPr>
+        </p:nvSpPr>
+        <p:spPr>
+          <a:xfrm>
+            <a:off x="3840480" y="4892040"/>
+            <a:ext cx="1463040" cy="201168"/>
+          </a:xfrm>
+          <a:prstGeom prst="rect">
+            <a:avLst/>
+          </a:prstGeom>
+        </p:spPr>
+        <p:txBody>
+          <a:bodyPr vert="horz" wrap="square" lIns="0" tIns="0" rIns="0" bIns="0" rtlCol="0" anchor="ctr"/>
+          <a:lstStyle>
+            <a:lvl1pPr marL="0" indent="0" algn="ctr">
+              <a:buNone/>
+              <a:defRPr sz="1000">
+                <a:solidFill>
+                  <a:srgbClr val="5F6B73"/>
+                </a:solidFill>
+                <a:latin typeface="Times New Roman" pitchFamily="34" charset="0"/>
+                <a:ea typeface="Times New Roman" pitchFamily="34" charset="-122"/>
+                <a:cs typeface="Times New Roman" pitchFamily="34" charset="-120"/>
+              </a:defRPr>
+            </a:lvl1pPr>
+          </a:lstStyle>
+          <a:p>
+            <a:r>
+              <a:rPr lang="en-US" dirty="0"/>
+              <a:t>29 Sep 2026</a:t>
+            </a:r>
+          </a:p>
+        </p:txBody>
+      </p:sp>
     </p:spTree>
   </p:cSld>
   <p:clrMap bg1="lt1" tx1="dk1" bg2="lt2" tx2="dk2" accent1="accent1" accent2="accent2" accent3="accent3" accent4="accent4" accent5="accent5" accent6="accent6" hlink="hlink" folHlink="folHlink"/>
   <p:sldLayoutIdLst>
     <p:sldLayoutId id="2147483649" r:id="rId1"/>
   </p:sldLayoutIdLst>
-  <p:hf sldNum="0" hdr="0" ftr="0" dt="0"/>
+  <p:hf sldNum="0" hdr="0" ftr="0"/>
   <p:txStyles>
     <p:titleStyle>
       <a:lvl1pPr algn="ctr" defTabSz="914400" rtl="0" eaLnBrk="1" latinLnBrk="0" hangingPunct="1">
@@ -2450,6 +2627,270 @@
 
 <file path=ppt/slides/slide10.xml><?xml version="1.0" encoding="utf-8"?>
 <p:sld xmlns:a="http://schemas.openxmlformats.org/drawingml/2006/main" xmlns:r="http://schemas.openxmlformats.org/officeDocument/2006/relationships" xmlns:p="http://schemas.openxmlformats.org/presentationml/2006/main">
+  <p:cSld name="Slide 9">
+    <p:bg>
+      <p:bgPr>
+        <a:solidFill>
+          <a:srgbClr val="0F2F5C"/>
+        </a:solidFill>
+        <a:effectLst/>
+      </p:bgPr>
+    </p:bg>
+    <p:spTree>
+      <p:nvGrpSpPr>
+        <p:cNvPr id="1" name=""/>
+        <p:cNvGrpSpPr/>
+        <p:nvPr/>
+      </p:nvGrpSpPr>
+      <p:grpSpPr>
+        <a:xfrm>
+          <a:off x="0" y="0"/>
+          <a:ext cx="0" cy="0"/>
+          <a:chOff x="0" y="0"/>
+          <a:chExt cx="0" cy="0"/>
+        </a:xfrm>
+      </p:grpSpPr>
+      <p:sp>
+        <p:nvSpPr>
+          <p:cNvPr id="2" name="Text 0"/>
+          <p:cNvSpPr/>
+          <p:nvPr/>
+        </p:nvSpPr>
+        <p:spPr>
+          <a:xfrm>
+            <a:off x="411480" y="256032"/>
+            <a:ext cx="3657600" cy="457200"/>
+          </a:xfrm>
+          <a:prstGeom prst="rect">
+            <a:avLst/>
+          </a:prstGeom>
+          <a:noFill/>
+          <a:ln/>
+        </p:spPr>
+        <p:txBody>
+          <a:bodyPr wrap="square" lIns="0" tIns="0" rIns="0" bIns="0" rtlCol="0" anchor="ctr"/>
+          <a:lstStyle/>
+          <a:p>
+            <a:pPr marL="0" indent="0">
+              <a:buNone/>
+            </a:pPr>
+            <a:r>
+              <a:rPr lang="en-US" sz="2800" b="1" dirty="0">
+                <a:solidFill>
+                  <a:srgbClr val="FFFFFF"/>
+                </a:solidFill>
+                <a:latin typeface="Times New Roman" pitchFamily="34" charset="0"/>
+                <a:ea typeface="Times New Roman" pitchFamily="34" charset="-122"/>
+                <a:cs typeface="Times New Roman" pitchFamily="34" charset="-120"/>
+              </a:rPr>
+              <a:t>Outline</a:t>
+            </a:r>
+            <a:endParaRPr lang="en-US" sz="2800" dirty="0"/>
+          </a:p>
+        </p:txBody>
+      </p:sp>
+      <p:sp>
+        <p:nvSpPr>
+          <p:cNvPr id="3" name="Text 1"/>
+          <p:cNvSpPr/>
+          <p:nvPr/>
+        </p:nvSpPr>
+        <p:spPr>
+          <a:xfrm>
+            <a:off x="594360" y="960120"/>
+            <a:ext cx="7680960" cy="365760"/>
+          </a:xfrm>
+          <a:prstGeom prst="rect">
+            <a:avLst/>
+          </a:prstGeom>
+          <a:noFill/>
+          <a:ln/>
+        </p:spPr>
+        <p:txBody>
+          <a:bodyPr wrap="square" lIns="0" tIns="0" rIns="0" bIns="0" rtlCol="0" anchor="ctr"/>
+          <a:lstStyle/>
+          <a:p>
+            <a:pPr marL="0" indent="0">
+              <a:buNone/>
+            </a:pPr>
+            <a:r>
+              <a:rPr lang="en-US" sz="1800" dirty="0">
+                <a:solidFill>
+                  <a:srgbClr val="A8C4E8"/>
+                </a:solidFill>
+                <a:latin typeface="Times New Roman" pitchFamily="34" charset="0"/>
+                <a:ea typeface="Times New Roman" pitchFamily="34" charset="-122"/>
+                <a:cs typeface="Times New Roman" pitchFamily="34" charset="-120"/>
+              </a:rPr>
+              <a:t>1. Why not just use a mass spectrometer?</a:t>
+            </a:r>
+            <a:endParaRPr lang="en-US" sz="1800" dirty="0"/>
+          </a:p>
+        </p:txBody>
+      </p:sp>
+      <p:sp>
+        <p:nvSpPr>
+          <p:cNvPr id="5" name="Shape 3"/>
+          <p:cNvSpPr/>
+          <p:nvPr/>
+        </p:nvSpPr>
+        <p:spPr>
+          <a:xfrm>
+            <a:off x="365760" y="1901952"/>
+            <a:ext cx="8046720" cy="566928"/>
+          </a:xfrm>
+          <a:prstGeom prst="roundRect">
+            <a:avLst>
+              <a:gd name="adj" fmla="val 12903"/>
+            </a:avLst>
+          </a:prstGeom>
+          <a:solidFill>
+            <a:srgbClr val="FFFFFF"/>
+          </a:solidFill>
+          <a:ln/>
+          <a:effectLst>
+            <a:outerShdw blurRad="101600" dist="25400" dir="8100000" algn="bl" rotWithShape="0">
+              <a:srgbClr val="000000">
+                <a:alpha val="12000"/>
+              </a:srgbClr>
+            </a:outerShdw>
+          </a:effectLst>
+        </p:spPr>
+        <p:txBody>
+          <a:bodyPr/>
+          <a:lstStyle/>
+          <a:p>
+            <a:endParaRPr lang="en-JP"/>
+          </a:p>
+        </p:txBody>
+      </p:sp>
+      <p:sp>
+        <p:nvSpPr>
+          <p:cNvPr id="6" name="Text 4"/>
+          <p:cNvSpPr/>
+          <p:nvPr/>
+        </p:nvSpPr>
+        <p:spPr>
+          <a:xfrm>
+            <a:off x="594360" y="1993392"/>
+            <a:ext cx="7680960" cy="384048"/>
+          </a:xfrm>
+          <a:prstGeom prst="rect">
+            <a:avLst/>
+          </a:prstGeom>
+          <a:noFill/>
+          <a:ln/>
+        </p:spPr>
+        <p:txBody>
+          <a:bodyPr wrap="square" lIns="0" tIns="0" rIns="0" bIns="0" rtlCol="0" anchor="ctr"/>
+          <a:lstStyle/>
+          <a:p>
+            <a:pPr marL="0" indent="0">
+              <a:buNone/>
+            </a:pPr>
+            <a:r>
+              <a:rPr lang="en-US" sz="1800" b="1" dirty="0">
+                <a:solidFill>
+                  <a:srgbClr val="0F2F5C"/>
+                </a:solidFill>
+                <a:latin typeface="Times New Roman" pitchFamily="34" charset="0"/>
+                <a:ea typeface="Times New Roman" pitchFamily="34" charset="-122"/>
+                <a:cs typeface="Times New Roman" pitchFamily="34" charset="-120"/>
+              </a:rPr>
+              <a:t>2. How does a filter survive the beam?</a:t>
+            </a:r>
+            <a:endParaRPr lang="en-US" sz="1800" dirty="0"/>
+          </a:p>
+        </p:txBody>
+      </p:sp>
+      <p:sp>
+        <p:nvSpPr>
+          <p:cNvPr id="7" name="Text 5"/>
+          <p:cNvSpPr/>
+          <p:nvPr/>
+        </p:nvSpPr>
+        <p:spPr>
+          <a:xfrm>
+            <a:off x="594360" y="3063240"/>
+            <a:ext cx="7680960" cy="365760"/>
+          </a:xfrm>
+          <a:prstGeom prst="rect">
+            <a:avLst/>
+          </a:prstGeom>
+          <a:noFill/>
+          <a:ln/>
+        </p:spPr>
+        <p:txBody>
+          <a:bodyPr wrap="square" lIns="0" tIns="0" rIns="0" bIns="0" rtlCol="0" anchor="ctr"/>
+          <a:lstStyle/>
+          <a:p>
+            <a:pPr marL="0" indent="0">
+              <a:buNone/>
+            </a:pPr>
+            <a:r>
+              <a:rPr lang="en-US" sz="1800" dirty="0">
+                <a:solidFill>
+                  <a:srgbClr val="A8C4E8"/>
+                </a:solidFill>
+                <a:latin typeface="Times New Roman" pitchFamily="34" charset="0"/>
+                <a:ea typeface="Times New Roman" pitchFamily="34" charset="-122"/>
+                <a:cs typeface="Times New Roman" pitchFamily="34" charset="-120"/>
+              </a:rPr>
+              <a:t>3. Without mass, how do we know what we caught?</a:t>
+            </a:r>
+            <a:endParaRPr lang="en-US" sz="1800" dirty="0"/>
+          </a:p>
+        </p:txBody>
+      </p:sp>
+      <p:sp>
+        <p:nvSpPr>
+          <p:cNvPr id="8" name="Text 6"/>
+          <p:cNvSpPr/>
+          <p:nvPr/>
+        </p:nvSpPr>
+        <p:spPr>
+          <a:xfrm>
+            <a:off x="594360" y="4114799"/>
+            <a:ext cx="7680960" cy="365760"/>
+          </a:xfrm>
+          <a:prstGeom prst="rect">
+            <a:avLst/>
+          </a:prstGeom>
+          <a:noFill/>
+          <a:ln/>
+        </p:spPr>
+        <p:txBody>
+          <a:bodyPr wrap="square" lIns="0" tIns="0" rIns="0" bIns="0" rtlCol="0" anchor="ctr"/>
+          <a:lstStyle/>
+          <a:p>
+            <a:pPr marL="0" indent="0">
+              <a:buNone/>
+            </a:pPr>
+            <a:r>
+              <a:rPr lang="en-US" sz="1800" dirty="0">
+                <a:solidFill>
+                  <a:srgbClr val="A8C4E8"/>
+                </a:solidFill>
+                <a:latin typeface="Times New Roman" pitchFamily="34" charset="0"/>
+                <a:ea typeface="Times New Roman" pitchFamily="34" charset="-122"/>
+                <a:cs typeface="Times New Roman" pitchFamily="34" charset="-120"/>
+              </a:rPr>
+              <a:t>4. When is a velocity filter the wrong tool?</a:t>
+            </a:r>
+            <a:endParaRPr lang="en-US" sz="1800" dirty="0"/>
+          </a:p>
+        </p:txBody>
+      </p:sp>
+    </p:spTree>
+  </p:cSld>
+  <p:clrMapOvr>
+    <a:masterClrMapping/>
+  </p:clrMapOvr>
+</p:sld>
+</file>
+
+<file path=ppt/slides/slide11.xml><?xml version="1.0" encoding="utf-8"?>
+<p:sld xmlns:a="http://schemas.openxmlformats.org/drawingml/2006/main" xmlns:r="http://schemas.openxmlformats.org/officeDocument/2006/relationships" xmlns:p="http://schemas.openxmlformats.org/presentationml/2006/main">
   <p:cSld name="Slide 10">
     <p:bg>
       <p:bgPr>
@@ -2648,7 +3089,7 @@
                 <a:ea typeface="Times New Roman" pitchFamily="34" charset="-122"/>
                 <a:cs typeface="Times New Roman" pitchFamily="34" charset="-120"/>
               </a:rPr>
-              <a:t>Content 5 / 10</a:t>
+              <a:t>Content 6 / 11</a:t>
             </a:r>
             <a:endParaRPr lang="en-US" sz="1000" dirty="0"/>
           </a:p>
@@ -2677,6 +3118,110 @@
           </a:prstGeom>
         </p:spPr>
       </p:pic>
+      <p:sp>
+        <p:nvSpPr>
+          <p:cNvPr id="20" name="Highlight SHIP"/>
+          <p:cNvSpPr/>
+          <p:nvPr/>
+        </p:nvSpPr>
+        <p:spPr>
+          <a:xfrm>
+            <a:off x="385176" y="864246"/>
+            <a:ext cx="5779047" cy="2015836"/>
+          </a:xfrm>
+          <a:custGeom>
+            <a:avLst/>
+            <a:gdLst/>
+            <a:ahLst/>
+            <a:cxnLst/>
+            <a:rect l="0" t="0" r="r" b="b"/>
+            <a:pathLst>
+              <a:path w="5779047" h="2015836">
+                <a:moveTo>
+                  <a:pt x="0" y="0"/>
+                </a:moveTo>
+                <a:lnTo>
+                  <a:pt x="5779047" y="0"/>
+                </a:lnTo>
+                <a:lnTo>
+                  <a:pt x="5779047" y="1385455"/>
+                </a:lnTo>
+                <a:lnTo>
+                  <a:pt x="5652393" y="1385455"/>
+                </a:lnTo>
+                <a:lnTo>
+                  <a:pt x="5652393" y="2015836"/>
+                </a:lnTo>
+                <a:lnTo>
+                  <a:pt x="0" y="2015836"/>
+                </a:lnTo>
+                <a:close/>
+              </a:path>
+            </a:pathLst>
+          </a:custGeom>
+          <a:solidFill>
+            <a:srgbClr val="A8C4E8">
+              <a:alpha val="28000"/>
+            </a:srgbClr>
+          </a:solidFill>
+          <a:ln w="22225">
+            <a:solidFill>
+              <a:srgbClr val="0F2F5C"/>
+            </a:solidFill>
+            <a:miter lim="800000"/>
+          </a:ln>
+        </p:spPr>
+        <p:txBody>
+          <a:bodyPr rtlCol="0" anchor="ctr"/>
+          <a:lstStyle/>
+          <a:p>
+            <a:endParaRPr lang="en-US"/>
+          </a:p>
+        </p:txBody>
+      </p:sp>
+      <p:sp>
+        <p:nvSpPr>
+          <p:cNvPr id="21" name="Tag SHIP"/>
+          <p:cNvSpPr/>
+          <p:nvPr/>
+        </p:nvSpPr>
+        <p:spPr>
+          <a:xfrm>
+            <a:off x="494904" y="768234"/>
+            <a:ext cx="566928" cy="192024"/>
+          </a:xfrm>
+          <a:prstGeom prst="roundRect">
+            <a:avLst>
+              <a:gd name="adj" fmla="val 50000"/>
+            </a:avLst>
+          </a:prstGeom>
+          <a:solidFill>
+            <a:srgbClr val="0F2F5C"/>
+          </a:solidFill>
+          <a:ln/>
+        </p:spPr>
+        <p:txBody>
+          <a:bodyPr wrap="none" lIns="0" tIns="0" rIns="0" bIns="0" rtlCol="0" anchor="ctr"/>
+          <a:lstStyle/>
+          <a:p>
+            <a:pPr marL="0" indent="0" algn="ctr">
+              <a:buNone/>
+            </a:pPr>
+            <a:r>
+              <a:rPr lang="en-US" sz="1200" b="1" dirty="0">
+                <a:solidFill>
+                  <a:srgbClr val="FFFFFF"/>
+                </a:solidFill>
+                <a:latin typeface="Times New Roman" pitchFamily="34" charset="0"/>
+                <a:ea typeface="Times New Roman" pitchFamily="34" charset="-122"/>
+                <a:cs typeface="Times New Roman" pitchFamily="34" charset="-120"/>
+              </a:rPr>
+              <a:t>SHIP</a:t>
+            </a:r>
+            <a:endParaRPr lang="en-US" sz="1200" dirty="0"/>
+          </a:p>
+        </p:txBody>
+      </p:sp>
       <p:sp>
         <p:nvSpPr>
           <p:cNvPr id="8" name="Text 5"/>
@@ -2791,30 +3336,56 @@
           </a:p>
         </p:txBody>
       </p:sp>
-      <p:pic>
-        <p:nvPicPr>
-          <p:cNvPr id="11" name="Image 1" descr="/Users/Reid Hu/OrbitOS/70_Presentations/717_Learning Group-20260916/assets/eq/ship_cond_b.png"/>
-          <p:cNvPicPr>
-            <a:picLocks noChangeAspect="1"/>
-          </p:cNvPicPr>
-          <p:nvPr/>
-        </p:nvPicPr>
-        <p:blipFill>
-          <a:blip r:embed="rId4"/>
-          <a:stretch>
-            <a:fillRect/>
-          </a:stretch>
-        </p:blipFill>
-        <p:spPr>
-          <a:xfrm>
-            <a:off x="475488" y="3703320"/>
-            <a:ext cx="2395637" cy="346832"/>
-          </a:xfrm>
-          <a:prstGeom prst="rect">
-            <a:avLst/>
-          </a:prstGeom>
-        </p:spPr>
-      </p:pic>
+      <p:sp>
+        <p:nvSpPr>
+          <p:cNvPr id="11" name="Text 11"/>
+          <p:cNvSpPr txBox="1"/>
+          <p:nvPr/>
+        </p:nvSpPr>
+        <p:spPr>
+          <a:xfrm>
+            <a:off x="503906" y="3683000"/>
+            <a:ext cx="2523744" cy="346832"/>
+          </a:xfrm>
+          <a:prstGeom prst="rect">
+            <a:avLst/>
+          </a:prstGeom>
+          <a:noFill/>
+          <a:ln/>
+        </p:spPr>
+        <p:txBody>
+          <a:bodyPr wrap="square" lIns="0" tIns="0" rIns="0" bIns="0" rtlCol="0" anchor="t"/>
+          <a:lstStyle/>
+          <a:p>
+            <a:pPr marL="0" indent="0" algn="l">
+              <a:buNone/>
+            </a:pPr>
+            <a:r>
+              <a:rPr lang="en-US" sz="1100" i="1" dirty="0">
+                <a:solidFill>
+                  <a:srgbClr val="1A2332"/>
+                </a:solidFill>
+                <a:latin typeface="Times New Roman" pitchFamily="34" charset="0"/>
+                <a:ea typeface="Times New Roman" pitchFamily="34" charset="-122"/>
+                <a:cs typeface="Times New Roman" pitchFamily="34" charset="-120"/>
+              </a:rPr>
+              <a:t>E</a:t>
+            </a:r>
+            <a:r>
+              <a:rPr lang="en-US" sz="1100" dirty="0">
+                <a:solidFill>
+                  <a:srgbClr val="1A2332"/>
+                </a:solidFill>
+                <a:latin typeface="Times New Roman" pitchFamily="34" charset="0"/>
+                <a:ea typeface="Times New Roman" pitchFamily="34" charset="-122"/>
+                <a:cs typeface="Times New Roman" pitchFamily="34" charset="-120"/>
+              </a:rPr>
+              <a:t>-field deflects the primary beam at once. The beam never strikes the plates.</a:t>
+            </a:r>
+            <a:endParaRPr lang="en-US" sz="1100" dirty="0"/>
+          </a:p>
+        </p:txBody>
+      </p:sp>
       <p:sp>
         <p:nvSpPr>
           <p:cNvPr id="12" name="Shape 8"/>
@@ -2890,30 +3461,133 @@
           </a:p>
         </p:txBody>
       </p:sp>
-      <p:pic>
-        <p:nvPicPr>
-          <p:cNvPr id="14" name="Image 2" descr="/Users/Reid Hu/OrbitOS/70_Presentations/717_Learning Group-20260916/assets/eq/ship_wien_b.png"/>
-          <p:cNvPicPr>
-            <a:picLocks noChangeAspect="1"/>
-          </p:cNvPicPr>
-          <p:nvPr/>
-        </p:nvPicPr>
-        <p:blipFill>
-          <a:blip r:embed="rId7"/>
-          <a:stretch>
-            <a:fillRect/>
-          </a:stretch>
-        </p:blipFill>
-        <p:spPr>
-          <a:xfrm>
-            <a:off x="3355848" y="3717447"/>
-            <a:ext cx="2345801" cy="488655"/>
-          </a:xfrm>
-          <a:prstGeom prst="rect">
-            <a:avLst/>
-          </a:prstGeom>
-        </p:spPr>
-      </p:pic>
+      <p:sp>
+        <p:nvSpPr>
+          <p:cNvPr id="14" name="Text 14"/>
+          <p:cNvSpPr txBox="1"/>
+          <p:nvPr/>
+        </p:nvSpPr>
+        <p:spPr>
+          <a:xfrm>
+            <a:off x="3381248" y="3697127"/>
+            <a:ext cx="2523744" cy="488655"/>
+          </a:xfrm>
+          <a:prstGeom prst="rect">
+            <a:avLst/>
+          </a:prstGeom>
+          <a:noFill/>
+          <a:ln/>
+        </p:spPr>
+        <p:txBody>
+          <a:bodyPr wrap="square" lIns="0" tIns="0" rIns="0" bIns="0" rtlCol="0" anchor="t"/>
+          <a:lstStyle/>
+          <a:p>
+            <a:pPr marL="0" indent="0" algn="l">
+              <a:buNone/>
+            </a:pPr>
+            <a:r>
+              <a:rPr lang="en-US" sz="1100" dirty="0">
+                <a:solidFill>
+                  <a:srgbClr val="1A2332"/>
+                </a:solidFill>
+                <a:latin typeface="Times New Roman" pitchFamily="34" charset="0"/>
+                <a:ea typeface="Times New Roman" pitchFamily="34" charset="-122"/>
+                <a:cs typeface="Times New Roman" pitchFamily="34" charset="-120"/>
+              </a:rPr>
+              <a:t>Separated </a:t>
+            </a:r>
+            <a:r>
+              <a:rPr lang="en-US" sz="1100" i="1" dirty="0">
+                <a:solidFill>
+                  <a:srgbClr val="1A2332"/>
+                </a:solidFill>
+                <a:latin typeface="Times New Roman" pitchFamily="34" charset="0"/>
+                <a:ea typeface="Times New Roman" pitchFamily="34" charset="-122"/>
+                <a:cs typeface="Times New Roman" pitchFamily="34" charset="-120"/>
+              </a:rPr>
+              <a:t>E</a:t>
+            </a:r>
+            <a:r>
+              <a:rPr lang="en-US" sz="1100" dirty="0">
+                <a:solidFill>
+                  <a:srgbClr val="1A2332"/>
+                </a:solidFill>
+                <a:latin typeface="Times New Roman" pitchFamily="34" charset="0"/>
+                <a:ea typeface="Times New Roman" pitchFamily="34" charset="-122"/>
+                <a:cs typeface="Times New Roman" pitchFamily="34" charset="-120"/>
+              </a:rPr>
+              <a:t> then </a:t>
+            </a:r>
+            <a:r>
+              <a:rPr lang="en-US" sz="1100" i="1" dirty="0">
+                <a:solidFill>
+                  <a:srgbClr val="1A2332"/>
+                </a:solidFill>
+                <a:latin typeface="Times New Roman" pitchFamily="34" charset="0"/>
+                <a:ea typeface="Times New Roman" pitchFamily="34" charset="-122"/>
+                <a:cs typeface="Times New Roman" pitchFamily="34" charset="-120"/>
+              </a:rPr>
+              <a:t>B</a:t>
+            </a:r>
+            <a:r>
+              <a:rPr lang="en-US" sz="1100" dirty="0">
+                <a:solidFill>
+                  <a:srgbClr val="1A2332"/>
+                </a:solidFill>
+                <a:latin typeface="Times New Roman" pitchFamily="34" charset="0"/>
+                <a:ea typeface="Times New Roman" pitchFamily="34" charset="-122"/>
+                <a:cs typeface="Times New Roman" pitchFamily="34" charset="-120"/>
+              </a:rPr>
+              <a:t> — not crossed </a:t>
+            </a:r>
+            <a:r>
+              <a:rPr lang="en-US" sz="1100" i="1" dirty="0">
+                <a:solidFill>
+                  <a:srgbClr val="1A2332"/>
+                </a:solidFill>
+                <a:latin typeface="Times New Roman" pitchFamily="34" charset="0"/>
+                <a:ea typeface="Times New Roman" pitchFamily="34" charset="-122"/>
+                <a:cs typeface="Times New Roman" pitchFamily="34" charset="-120"/>
+              </a:rPr>
+              <a:t>E</a:t>
+            </a:r>
+            <a:r>
+              <a:rPr lang="en-US" sz="1100" dirty="0">
+                <a:solidFill>
+                  <a:srgbClr val="1A2332"/>
+                </a:solidFill>
+                <a:latin typeface="Times New Roman" pitchFamily="34" charset="0"/>
+                <a:ea typeface="Times New Roman" pitchFamily="34" charset="-122"/>
+                <a:cs typeface="Times New Roman" pitchFamily="34" charset="-120"/>
+              </a:rPr>
+              <a:t> × </a:t>
+            </a:r>
+            <a:r>
+              <a:rPr lang="en-US" sz="1100" i="1" dirty="0">
+                <a:solidFill>
+                  <a:srgbClr val="1A2332"/>
+                </a:solidFill>
+                <a:latin typeface="Times New Roman" pitchFamily="34" charset="0"/>
+                <a:ea typeface="Times New Roman" pitchFamily="34" charset="-122"/>
+                <a:cs typeface="Times New Roman" pitchFamily="34" charset="-120"/>
+              </a:rPr>
+              <a:t>B</a:t>
+            </a:r>
+            <a:r>
+              <a:rPr lang="en-US" sz="1100" dirty="0">
+                <a:solidFill>
+                  <a:srgbClr val="1A2332"/>
+                </a:solidFill>
+                <a:latin typeface="Times New Roman" pitchFamily="34" charset="0"/>
+                <a:ea typeface="Times New Roman" pitchFamily="34" charset="-122"/>
+                <a:cs typeface="Times New Roman" pitchFamily="34" charset="-120"/>
+              </a:rPr>
+              <a:t>. Two low-dispersion stages give high transmission.</a:t>
+            </a:r>
+            <a:endParaRPr lang="en-US" sz="1100" dirty="0"/>
+          </a:p>
+        </p:txBody>
+      </p:sp>
       <p:sp>
         <p:nvSpPr>
           <p:cNvPr id="15" name="Shape 10"/>
@@ -2989,30 +3663,133 @@
           </a:p>
         </p:txBody>
       </p:sp>
-      <p:pic>
-        <p:nvPicPr>
-          <p:cNvPr id="17" name="Image 3" descr="/Users/Reid Hu/OrbitOS/70_Presentations/717_Learning Group-20260916/assets/eq/ship_current_b.png"/>
-          <p:cNvPicPr>
-            <a:picLocks noChangeAspect="1"/>
-          </p:cNvPicPr>
-          <p:nvPr/>
-        </p:nvPicPr>
-        <p:blipFill>
-          <a:blip r:embed="rId6"/>
-          <a:stretch>
-            <a:fillRect/>
-          </a:stretch>
-        </p:blipFill>
-        <p:spPr>
-          <a:xfrm>
-            <a:off x="6236208" y="3703320"/>
+      <p:sp>
+        <p:nvSpPr>
+          <p:cNvPr id="17" name="Text 17"/>
+          <p:cNvSpPr txBox="1"/>
+          <p:nvPr/>
+        </p:nvSpPr>
+        <p:spPr>
+          <a:xfrm>
+            <a:off x="6261608" y="3683000"/>
             <a:ext cx="2523744" cy="532102"/>
           </a:xfrm>
           <a:prstGeom prst="rect">
             <a:avLst/>
           </a:prstGeom>
-        </p:spPr>
-      </p:pic>
+          <a:noFill/>
+          <a:ln/>
+        </p:spPr>
+        <p:txBody>
+          <a:bodyPr wrap="square" lIns="0" tIns="0" rIns="0" bIns="0" rtlCol="0" anchor="t"/>
+          <a:lstStyle/>
+          <a:p>
+            <a:pPr marL="0" indent="0" algn="l">
+              <a:buNone/>
+            </a:pPr>
+            <a:r>
+              <a:rPr lang="en-US" sz="1100" dirty="0">
+                <a:solidFill>
+                  <a:srgbClr val="1A2332"/>
+                </a:solidFill>
+                <a:latin typeface="Times New Roman" pitchFamily="34" charset="0"/>
+                <a:ea typeface="Times New Roman" pitchFamily="34" charset="-122"/>
+                <a:cs typeface="Times New Roman" pitchFamily="34" charset="-120"/>
+              </a:rPr>
+              <a:t>Survives particle-</a:t>
+            </a:r>
+            <a:r>
+              <a:rPr lang="en-US" sz="1100" i="1" dirty="0">
+                <a:solidFill>
+                  <a:srgbClr val="1A2332"/>
+                </a:solidFill>
+                <a:latin typeface="Times New Roman" pitchFamily="34" charset="0"/>
+                <a:ea typeface="Times New Roman" pitchFamily="34" charset="-122"/>
+                <a:cs typeface="Times New Roman" pitchFamily="34" charset="-120"/>
+              </a:rPr>
+              <a:t>μ</a:t>
+            </a:r>
+            <a:r>
+              <a:rPr lang="en-US" sz="1100" dirty="0">
+                <a:solidFill>
+                  <a:srgbClr val="1A2332"/>
+                </a:solidFill>
+                <a:latin typeface="Times New Roman" pitchFamily="34" charset="0"/>
+                <a:ea typeface="Times New Roman" pitchFamily="34" charset="-122"/>
+                <a:cs typeface="Times New Roman" pitchFamily="34" charset="-120"/>
+              </a:rPr>
+              <a:t>A beams (</a:t>
+            </a:r>
+            <a:r>
+              <a:rPr lang="en-US" sz="1100" dirty="0">
+                <a:solidFill>
+                  <a:srgbClr val="1A2332"/>
+                </a:solidFill>
+                <a:latin typeface="Cambria Math" pitchFamily="34" charset="0"/>
+                <a:ea typeface="Cambria Math" pitchFamily="34" charset="-122"/>
+                <a:cs typeface="Cambria Math" pitchFamily="34" charset="-120"/>
+              </a:rPr>
+              <a:t>∼</a:t>
+            </a:r>
+            <a:r>
+              <a:rPr lang="en-US" sz="1100" dirty="0">
+                <a:solidFill>
+                  <a:srgbClr val="1A2332"/>
+                </a:solidFill>
+                <a:latin typeface="Times New Roman" pitchFamily="34" charset="0"/>
+                <a:ea typeface="Times New Roman" pitchFamily="34" charset="-122"/>
+                <a:cs typeface="Times New Roman" pitchFamily="34" charset="-120"/>
+              </a:rPr>
+              <a:t> 10</a:t>
+            </a:r>
+            <a:r>
+              <a:rPr lang="en-US" sz="1100" baseline="30000" dirty="0">
+                <a:solidFill>
+                  <a:srgbClr val="1A2332"/>
+                </a:solidFill>
+                <a:latin typeface="Times New Roman" pitchFamily="34" charset="0"/>
+                <a:ea typeface="Times New Roman" pitchFamily="34" charset="-122"/>
+                <a:cs typeface="Times New Roman" pitchFamily="34" charset="-120"/>
+              </a:rPr>
+              <a:t>13</a:t>
+            </a:r>
+            <a:r>
+              <a:rPr lang="en-US" sz="1100" dirty="0">
+                <a:solidFill>
+                  <a:srgbClr val="1A2332"/>
+                </a:solidFill>
+                <a:latin typeface="Times New Roman" pitchFamily="34" charset="0"/>
+                <a:ea typeface="Times New Roman" pitchFamily="34" charset="-122"/>
+                <a:cs typeface="Times New Roman" pitchFamily="34" charset="-120"/>
+              </a:rPr>
+              <a:t> ions/s). Scattered beam is stopped on stage-2 diaphragms.</a:t>
+            </a:r>
+            <a:endParaRPr lang="en-US" sz="1100" dirty="0"/>
+          </a:p>
+        </p:txBody>
+      </p:sp>
+      <p:sp>
+        <p:nvSpPr>
+          <p:cNvPr id="18" name="Date Placeholder 17"/>
+          <p:cNvSpPr>
+            <a:spLocks noGrp="1"/>
+          </p:cNvSpPr>
+          <p:nvPr>
+            <p:ph type="dt" sz="half" idx="10"/>
+          </p:nvPr>
+        </p:nvSpPr>
+        <p:spPr/>
+        <p:txBody>
+          <a:bodyPr/>
+          <a:lstStyle/>
+          <a:p>
+            <a:r>
+              <a:rPr lang="en-US" dirty="0"/>
+              <a:t>29 Sep 2026</a:t>
+            </a:r>
+          </a:p>
+        </p:txBody>
+      </p:sp>
     </p:spTree>
   </p:cSld>
   <p:clrMapOvr>
@@ -3021,7 +3798,7 @@
 </p:sld>
 </file>
 
-<file path=ppt/slides/slide11.xml><?xml version="1.0" encoding="utf-8"?>
+<file path=ppt/slides/slide12.xml><?xml version="1.0" encoding="utf-8"?>
 <p:sld xmlns:a="http://schemas.openxmlformats.org/drawingml/2006/main" xmlns:r="http://schemas.openxmlformats.org/officeDocument/2006/relationships" xmlns:p="http://schemas.openxmlformats.org/presentationml/2006/main">
   <p:cSld name="Slide 11">
     <p:bg>
@@ -3103,7 +3880,7 @@
               <a:buNone/>
             </a:pPr>
             <a:r>
-              <a:rPr lang="en-US" sz="1600" b="1" dirty="0">
+              <a:rPr lang="en-US" sz="1800" b="1" dirty="0">
                 <a:solidFill>
                   <a:srgbClr val="FFFFFF"/>
                 </a:solidFill>
@@ -3113,7 +3890,7 @@
               </a:rPr>
               <a:t>The Daresbury separator uses crossed fields and energy refocusing.</a:t>
             </a:r>
-            <a:endParaRPr lang="en-US" sz="1600" dirty="0"/>
+            <a:endParaRPr lang="en-US" sz="1800" dirty="0"/>
           </a:p>
         </p:txBody>
       </p:sp>
@@ -3221,7 +3998,7 @@
                 <a:ea typeface="Times New Roman" pitchFamily="34" charset="-122"/>
                 <a:cs typeface="Times New Roman" pitchFamily="34" charset="-120"/>
               </a:rPr>
-              <a:t>Content 6 / 10</a:t>
+              <a:t>Content 7 / 11</a:t>
             </a:r>
             <a:endParaRPr lang="en-US" sz="1000" dirty="0"/>
           </a:p>
@@ -3325,54 +4102,161 @@
           </a:p>
         </p:txBody>
       </p:sp>
-      <p:pic>
-        <p:nvPicPr>
-          <p:cNvPr id="10" name="Image 1" descr="/Users/Reid Hu/OrbitOS/70_Presentations/717_Learning Group-20260916/assets/eq/dar_exb_h.png"/>
-          <p:cNvPicPr>
-            <a:picLocks noChangeAspect="1"/>
-          </p:cNvPicPr>
-          <p:nvPr/>
-        </p:nvPicPr>
-        <p:blipFill>
-          <a:blip r:embed="rId4"/>
-          <a:stretch>
-            <a:fillRect/>
-          </a:stretch>
-        </p:blipFill>
-        <p:spPr>
-          <a:xfrm>
-            <a:off x="475488" y="3459998"/>
-            <a:ext cx="1003828" cy="139172"/>
-          </a:xfrm>
-          <a:prstGeom prst="rect">
-            <a:avLst/>
-          </a:prstGeom>
-        </p:spPr>
-      </p:pic>
-      <p:pic>
-        <p:nvPicPr>
-          <p:cNvPr id="11" name="Image 2" descr="/Users/Reid Hu/OrbitOS/70_Presentations/717_Learning Group-20260916/assets/eq/dar_exb_b.png"/>
-          <p:cNvPicPr>
-            <a:picLocks noChangeAspect="1"/>
-          </p:cNvPicPr>
-          <p:nvPr/>
-        </p:nvPicPr>
-        <p:blipFill>
-          <a:blip r:embed="rId5"/>
-          <a:stretch>
-            <a:fillRect/>
-          </a:stretch>
-        </p:blipFill>
-        <p:spPr>
-          <a:xfrm>
-            <a:off x="475488" y="3703320"/>
-            <a:ext cx="2309957" cy="346832"/>
-          </a:xfrm>
-          <a:prstGeom prst="rect">
-            <a:avLst/>
-          </a:prstGeom>
-        </p:spPr>
-      </p:pic>
+      <p:sp>
+        <p:nvSpPr>
+          <p:cNvPr id="10" name="Text 10"/>
+          <p:cNvSpPr txBox="1"/>
+          <p:nvPr/>
+        </p:nvSpPr>
+        <p:spPr>
+          <a:xfrm>
+            <a:off x="485170" y="3423869"/>
+            <a:ext cx="1278148" cy="139172"/>
+          </a:xfrm>
+          <a:prstGeom prst="rect">
+            <a:avLst/>
+          </a:prstGeom>
+          <a:noFill/>
+          <a:ln/>
+        </p:spPr>
+        <p:txBody>
+          <a:bodyPr wrap="none" lIns="0" tIns="0" rIns="0" bIns="0" rtlCol="0" anchor="t"/>
+          <a:lstStyle/>
+          <a:p>
+            <a:pPr marL="0" indent="0" algn="l">
+              <a:buNone/>
+            </a:pPr>
+            <a:r>
+              <a:rPr lang="en-US" sz="1300" b="1" dirty="0">
+                <a:solidFill>
+                  <a:srgbClr val="174994"/>
+                </a:solidFill>
+                <a:latin typeface="Times New Roman" pitchFamily="34" charset="0"/>
+                <a:ea typeface="Times New Roman" pitchFamily="34" charset="-122"/>
+                <a:cs typeface="Times New Roman" pitchFamily="34" charset="-120"/>
+              </a:rPr>
+              <a:t>Crossed </a:t>
+            </a:r>
+            <a:r>
+              <a:rPr lang="en-US" sz="1300" b="1" i="1" dirty="0">
+                <a:solidFill>
+                  <a:srgbClr val="174994"/>
+                </a:solidFill>
+                <a:latin typeface="Times New Roman" pitchFamily="34" charset="0"/>
+                <a:ea typeface="Times New Roman" pitchFamily="34" charset="-122"/>
+                <a:cs typeface="Times New Roman" pitchFamily="34" charset="-120"/>
+              </a:rPr>
+              <a:t>E</a:t>
+            </a:r>
+            <a:r>
+              <a:rPr lang="en-US" sz="1300" b="1" dirty="0">
+                <a:solidFill>
+                  <a:srgbClr val="174994"/>
+                </a:solidFill>
+                <a:latin typeface="Times New Roman" pitchFamily="34" charset="0"/>
+                <a:ea typeface="Times New Roman" pitchFamily="34" charset="-122"/>
+                <a:cs typeface="Times New Roman" pitchFamily="34" charset="-120"/>
+              </a:rPr>
+              <a:t> × </a:t>
+            </a:r>
+            <a:r>
+              <a:rPr lang="en-US" sz="1300" b="1" i="1" dirty="0">
+                <a:solidFill>
+                  <a:srgbClr val="174994"/>
+                </a:solidFill>
+                <a:latin typeface="Times New Roman" pitchFamily="34" charset="0"/>
+                <a:ea typeface="Times New Roman" pitchFamily="34" charset="-122"/>
+                <a:cs typeface="Times New Roman" pitchFamily="34" charset="-120"/>
+              </a:rPr>
+              <a:t>B</a:t>
+            </a:r>
+            <a:endParaRPr lang="en-US" sz="1300" dirty="0"/>
+          </a:p>
+        </p:txBody>
+      </p:sp>
+      <p:sp>
+        <p:nvSpPr>
+          <p:cNvPr id="11" name="Text 11"/>
+          <p:cNvSpPr txBox="1"/>
+          <p:nvPr/>
+        </p:nvSpPr>
+        <p:spPr>
+          <a:xfrm>
+            <a:off x="503906" y="3683000"/>
+            <a:ext cx="2523744" cy="346832"/>
+          </a:xfrm>
+          <a:prstGeom prst="rect">
+            <a:avLst/>
+          </a:prstGeom>
+          <a:noFill/>
+          <a:ln/>
+        </p:spPr>
+        <p:txBody>
+          <a:bodyPr wrap="square" lIns="0" tIns="0" rIns="0" bIns="0" rtlCol="0" anchor="t"/>
+          <a:lstStyle/>
+          <a:p>
+            <a:pPr marL="0" indent="0" algn="l">
+              <a:buNone/>
+            </a:pPr>
+            <a:r>
+              <a:rPr lang="en-US" sz="1100" dirty="0">
+                <a:solidFill>
+                  <a:srgbClr val="1A2332"/>
+                </a:solidFill>
+                <a:latin typeface="Times New Roman" pitchFamily="34" charset="0"/>
+                <a:ea typeface="Times New Roman" pitchFamily="34" charset="-122"/>
+                <a:cs typeface="Times New Roman" pitchFamily="34" charset="-120"/>
+              </a:rPr>
+              <a:t>Wien filters: </a:t>
+            </a:r>
+            <a:r>
+              <a:rPr lang="en-US" sz="1100" i="1" dirty="0">
+                <a:solidFill>
+                  <a:srgbClr val="1A2332"/>
+                </a:solidFill>
+                <a:latin typeface="Times New Roman" pitchFamily="34" charset="0"/>
+                <a:ea typeface="Times New Roman" pitchFamily="34" charset="-122"/>
+                <a:cs typeface="Times New Roman" pitchFamily="34" charset="-120"/>
+              </a:rPr>
+              <a:t>E</a:t>
+            </a:r>
+            <a:r>
+              <a:rPr lang="en-US" sz="1100" dirty="0">
+                <a:solidFill>
+                  <a:srgbClr val="1A2332"/>
+                </a:solidFill>
+                <a:latin typeface="Times New Roman" pitchFamily="34" charset="0"/>
+                <a:ea typeface="Times New Roman" pitchFamily="34" charset="-122"/>
+                <a:cs typeface="Times New Roman" pitchFamily="34" charset="-120"/>
+              </a:rPr>
+              <a:t> and </a:t>
+            </a:r>
+            <a:r>
+              <a:rPr lang="en-US" sz="1100" i="1" dirty="0">
+                <a:solidFill>
+                  <a:srgbClr val="1A2332"/>
+                </a:solidFill>
+                <a:latin typeface="Times New Roman" pitchFamily="34" charset="0"/>
+                <a:ea typeface="Times New Roman" pitchFamily="34" charset="-122"/>
+                <a:cs typeface="Times New Roman" pitchFamily="34" charset="-120"/>
+              </a:rPr>
+              <a:t>B</a:t>
+            </a:r>
+            <a:r>
+              <a:rPr lang="en-US" sz="1100" dirty="0">
+                <a:solidFill>
+                  <a:srgbClr val="1A2332"/>
+                </a:solidFill>
+                <a:latin typeface="Times New Roman" pitchFamily="34" charset="0"/>
+                <a:ea typeface="Times New Roman" pitchFamily="34" charset="-122"/>
+                <a:cs typeface="Times New Roman" pitchFamily="34" charset="-120"/>
+              </a:rPr>
+              <a:t> occupy the same chamber, unlike SHIP's separated fields.</a:t>
+            </a:r>
+            <a:endParaRPr lang="en-US" sz="1100" dirty="0"/>
+          </a:p>
+        </p:txBody>
+      </p:sp>
       <p:sp>
         <p:nvSpPr>
           <p:cNvPr id="12" name="Shape 7"/>
@@ -3523,54 +4407,139 @@
           </a:p>
         </p:txBody>
       </p:sp>
-      <p:pic>
-        <p:nvPicPr>
-          <p:cNvPr id="16" name="Image 3" descr="/Users/Reid Hu/OrbitOS/70_Presentations/717_Learning Group-20260916/assets/eq/dar_gamma_h.png"/>
-          <p:cNvPicPr>
-            <a:picLocks noChangeAspect="1"/>
-          </p:cNvPicPr>
-          <p:nvPr/>
-        </p:nvPicPr>
-        <p:blipFill>
-          <a:blip r:embed="rId6"/>
-          <a:stretch>
-            <a:fillRect/>
-          </a:stretch>
-        </p:blipFill>
-        <p:spPr>
-          <a:xfrm>
-            <a:off x="6236208" y="3447242"/>
-            <a:ext cx="1210940" cy="164683"/>
-          </a:xfrm>
-          <a:prstGeom prst="rect">
-            <a:avLst/>
-          </a:prstGeom>
-        </p:spPr>
-      </p:pic>
-      <p:pic>
-        <p:nvPicPr>
-          <p:cNvPr id="17" name="Image 4" descr="/Users/Reid Hu/OrbitOS/70_Presentations/717_Learning Group-20260916/assets/eq/dar_gamma_b.png"/>
-          <p:cNvPicPr>
-            <a:picLocks noChangeAspect="1"/>
-          </p:cNvPicPr>
-          <p:nvPr/>
-        </p:nvPicPr>
-        <p:blipFill>
-          <a:blip r:embed="rId7"/>
-          <a:stretch>
-            <a:fillRect/>
-          </a:stretch>
-        </p:blipFill>
-        <p:spPr>
-          <a:xfrm>
-            <a:off x="6236208" y="3703320"/>
-            <a:ext cx="2444008" cy="488655"/>
-          </a:xfrm>
-          <a:prstGeom prst="rect">
-            <a:avLst/>
-          </a:prstGeom>
-        </p:spPr>
-      </p:pic>
+      <p:sp>
+        <p:nvSpPr>
+          <p:cNvPr id="16" name="Text 16"/>
+          <p:cNvSpPr txBox="1"/>
+          <p:nvPr/>
+        </p:nvSpPr>
+        <p:spPr>
+          <a:xfrm>
+            <a:off x="6264178" y="3389808"/>
+            <a:ext cx="1485260" cy="164683"/>
+          </a:xfrm>
+          <a:prstGeom prst="rect">
+            <a:avLst/>
+          </a:prstGeom>
+          <a:noFill/>
+          <a:ln/>
+        </p:spPr>
+        <p:txBody>
+          <a:bodyPr wrap="none" lIns="0" tIns="0" rIns="0" bIns="0" rtlCol="0" anchor="t"/>
+          <a:lstStyle/>
+          <a:p>
+            <a:pPr marL="0" indent="0" algn="l">
+              <a:buNone/>
+            </a:pPr>
+            <a:r>
+              <a:rPr lang="en-US" sz="1300" b="1" i="1" dirty="0">
+                <a:solidFill>
+                  <a:srgbClr val="174994"/>
+                </a:solidFill>
+                <a:latin typeface="Times New Roman" pitchFamily="34" charset="0"/>
+                <a:ea typeface="Times New Roman" pitchFamily="34" charset="-122"/>
+                <a:cs typeface="Times New Roman" pitchFamily="34" charset="-120"/>
+              </a:rPr>
+              <a:t>γ</a:t>
+            </a:r>
+            <a:r>
+              <a:rPr lang="en-US" sz="1300" b="1" dirty="0">
+                <a:solidFill>
+                  <a:srgbClr val="174994"/>
+                </a:solidFill>
+                <a:latin typeface="Times New Roman" pitchFamily="34" charset="0"/>
+                <a:ea typeface="Times New Roman" pitchFamily="34" charset="-122"/>
+                <a:cs typeface="Times New Roman" pitchFamily="34" charset="-120"/>
+              </a:rPr>
+              <a:t> array at target</a:t>
+            </a:r>
+            <a:endParaRPr lang="en-US" sz="1300" dirty="0"/>
+          </a:p>
+        </p:txBody>
+      </p:sp>
+      <p:sp>
+        <p:nvSpPr>
+          <p:cNvPr id="17" name="Text 17"/>
+          <p:cNvSpPr txBox="1"/>
+          <p:nvPr/>
+        </p:nvSpPr>
+        <p:spPr>
+          <a:xfrm>
+            <a:off x="6264626" y="3683000"/>
+            <a:ext cx="2523744" cy="488655"/>
+          </a:xfrm>
+          <a:prstGeom prst="rect">
+            <a:avLst/>
+          </a:prstGeom>
+          <a:noFill/>
+          <a:ln/>
+        </p:spPr>
+        <p:txBody>
+          <a:bodyPr wrap="square" lIns="0" tIns="0" rIns="0" bIns="0" rtlCol="0" anchor="t"/>
+          <a:lstStyle/>
+          <a:p>
+            <a:pPr marL="0" indent="0" algn="l">
+              <a:buNone/>
+            </a:pPr>
+            <a:r>
+              <a:rPr lang="en-US" sz="1100" dirty="0">
+                <a:solidFill>
+                  <a:srgbClr val="1A2332"/>
+                </a:solidFill>
+                <a:latin typeface="Times New Roman" pitchFamily="34" charset="0"/>
+                <a:ea typeface="Times New Roman" pitchFamily="34" charset="-122"/>
+                <a:cs typeface="Times New Roman" pitchFamily="34" charset="-120"/>
+              </a:rPr>
+              <a:t>A high-efficiency germanium array around the target enables prompt recoil-</a:t>
+            </a:r>
+            <a:r>
+              <a:rPr lang="en-US" sz="1100" i="1" dirty="0">
+                <a:solidFill>
+                  <a:srgbClr val="1A2332"/>
+                </a:solidFill>
+                <a:latin typeface="Times New Roman" pitchFamily="34" charset="0"/>
+                <a:ea typeface="Times New Roman" pitchFamily="34" charset="-122"/>
+                <a:cs typeface="Times New Roman" pitchFamily="34" charset="-120"/>
+              </a:rPr>
+              <a:t>γ</a:t>
+            </a:r>
+            <a:r>
+              <a:rPr lang="en-US" sz="1100" dirty="0">
+                <a:solidFill>
+                  <a:srgbClr val="1A2332"/>
+                </a:solidFill>
+                <a:latin typeface="Times New Roman" pitchFamily="34" charset="0"/>
+                <a:ea typeface="Times New Roman" pitchFamily="34" charset="-122"/>
+                <a:cs typeface="Times New Roman" pitchFamily="34" charset="-120"/>
+              </a:rPr>
+              <a:t> coincidences.</a:t>
+            </a:r>
+            <a:endParaRPr lang="en-US" sz="1100" dirty="0"/>
+          </a:p>
+        </p:txBody>
+      </p:sp>
+      <p:sp>
+        <p:nvSpPr>
+          <p:cNvPr id="18" name="Date Placeholder 17"/>
+          <p:cNvSpPr>
+            <a:spLocks noGrp="1"/>
+          </p:cNvSpPr>
+          <p:nvPr>
+            <p:ph type="dt" sz="half" idx="10"/>
+          </p:nvPr>
+        </p:nvSpPr>
+        <p:spPr/>
+        <p:txBody>
+          <a:bodyPr/>
+          <a:lstStyle/>
+          <a:p>
+            <a:r>
+              <a:rPr lang="en-US" dirty="0"/>
+              <a:t>29 Sep 2026</a:t>
+            </a:r>
+          </a:p>
+        </p:txBody>
+      </p:sp>
     </p:spTree>
   </p:cSld>
   <p:clrMapOvr>
@@ -3579,7 +4548,7 @@
 </p:sld>
 </file>
 
-<file path=ppt/slides/slide12.xml><?xml version="1.0" encoding="utf-8"?>
+<file path=ppt/slides/slide13.xml><?xml version="1.0" encoding="utf-8"?>
 <p:sld xmlns:a="http://schemas.openxmlformats.org/drawingml/2006/main" xmlns:r="http://schemas.openxmlformats.org/officeDocument/2006/relationships" xmlns:p="http://schemas.openxmlformats.org/presentationml/2006/main">
   <p:cSld name="Slide 12">
     <p:bg>
@@ -3843,7 +4812,7 @@
 </p:sld>
 </file>
 
-<file path=ppt/slides/slide13.xml><?xml version="1.0" encoding="utf-8"?>
+<file path=ppt/slides/slide14.xml><?xml version="1.0" encoding="utf-8"?>
 <p:sld xmlns:a="http://schemas.openxmlformats.org/drawingml/2006/main" xmlns:r="http://schemas.openxmlformats.org/officeDocument/2006/relationships" xmlns:p="http://schemas.openxmlformats.org/presentationml/2006/main">
   <p:cSld name="Slide 13">
     <p:bg>
@@ -3900,30 +4869,67 @@
           </a:p>
         </p:txBody>
       </p:sp>
-      <p:pic>
-        <p:nvPicPr>
-          <p:cNvPr id="3" name="Image 0" descr="/Users/Reid Hu/OrbitOS/70_Presentations/717_Learning Group-20260916/assets/eq/hdr_lu.png"/>
-          <p:cNvPicPr>
-            <a:picLocks noChangeAspect="1"/>
-          </p:cNvPicPr>
-          <p:nvPr/>
-        </p:nvPicPr>
-        <p:blipFill>
-          <a:blip r:embed="rId3"/>
-          <a:stretch>
-            <a:fillRect/>
-          </a:stretch>
-        </p:blipFill>
-        <p:spPr>
-          <a:xfrm>
-            <a:off x="411480" y="134508"/>
-            <a:ext cx="5422392" cy="261336"/>
-          </a:xfrm>
-          <a:prstGeom prst="rect">
-            <a:avLst/>
-          </a:prstGeom>
-        </p:spPr>
-      </p:pic>
+      <p:sp>
+        <p:nvSpPr>
+          <p:cNvPr id="3" name="Text 3"/>
+          <p:cNvSpPr txBox="1"/>
+          <p:nvPr/>
+        </p:nvSpPr>
+        <p:spPr>
+          <a:xfrm>
+            <a:off x="423642" y="24414"/>
+            <a:ext cx="8321040" cy="384048"/>
+          </a:xfrm>
+          <a:prstGeom prst="rect">
+            <a:avLst/>
+          </a:prstGeom>
+          <a:noFill/>
+          <a:ln/>
+        </p:spPr>
+        <p:txBody>
+          <a:bodyPr wrap="square" lIns="0" tIns="0" rIns="0" bIns="0" rtlCol="0" anchor="ctr"/>
+          <a:lstStyle/>
+          <a:p>
+            <a:pPr marL="0" indent="0" algn="l">
+              <a:buNone/>
+            </a:pPr>
+            <a:r>
+              <a:rPr lang="en-US" sz="1800" b="1" dirty="0">
+                <a:solidFill>
+                  <a:srgbClr val="FFFFFF"/>
+                </a:solidFill>
+                <a:latin typeface="Times New Roman" pitchFamily="34" charset="0"/>
+                <a:ea typeface="Times New Roman" pitchFamily="34" charset="-122"/>
+                <a:cs typeface="Times New Roman" pitchFamily="34" charset="-120"/>
+              </a:rPr>
+              <a:t>SHIP found the first ground-state proton emitter, </a:t>
+            </a:r>
+            <a:r>
+              <a:rPr lang="en-US" sz="1800" b="1" baseline="30000" dirty="0">
+                <a:solidFill>
+                  <a:srgbClr val="FFFFFF"/>
+                </a:solidFill>
+                <a:latin typeface="Times New Roman" pitchFamily="34" charset="0"/>
+                <a:ea typeface="Times New Roman" pitchFamily="34" charset="-122"/>
+                <a:cs typeface="Times New Roman" pitchFamily="34" charset="-120"/>
+              </a:rPr>
+              <a:t>151</a:t>
+            </a:r>
+            <a:r>
+              <a:rPr lang="en-US" sz="1800" b="1" dirty="0">
+                <a:solidFill>
+                  <a:srgbClr val="FFFFFF"/>
+                </a:solidFill>
+                <a:latin typeface="Times New Roman" pitchFamily="34" charset="0"/>
+                <a:ea typeface="Times New Roman" pitchFamily="34" charset="-122"/>
+                <a:cs typeface="Times New Roman" pitchFamily="34" charset="-120"/>
+              </a:rPr>
+              <a:t>Lu.</a:t>
+            </a:r>
+            <a:endParaRPr lang="en-US" sz="1800" dirty="0"/>
+          </a:p>
+        </p:txBody>
+      </p:sp>
       <p:sp>
         <p:nvSpPr>
           <p:cNvPr id="4" name="Shape 1"/>
@@ -4028,7 +5034,7 @@
                 <a:ea typeface="Times New Roman" pitchFamily="34" charset="-122"/>
                 <a:cs typeface="Times New Roman" pitchFamily="34" charset="-120"/>
               </a:rPr>
-              <a:t>Content 7 / 10</a:t>
+              <a:t>Content 8 / 11</a:t>
             </a:r>
             <a:endParaRPr lang="en-US" sz="1000" dirty="0"/>
           </a:p>
@@ -4051,38 +5057,119 @@
         </p:blipFill>
         <p:spPr>
           <a:xfrm>
-            <a:off x="256940" y="658368"/>
-            <a:ext cx="4473160" cy="3840480"/>
+            <a:off x="75570" y="692674"/>
+            <a:ext cx="4843902" cy="3670630"/>
           </a:xfrm>
           <a:prstGeom prst="rect">
             <a:avLst/>
           </a:prstGeom>
         </p:spPr>
       </p:pic>
-      <p:pic>
-        <p:nvPicPr>
-          <p:cNvPr id="8" name="Image 2" descr="/Users/Reid Hu/OrbitOS/70_Presentations/717_Learning Group-20260916/assets/eq/cap_lu.png"/>
-          <p:cNvPicPr>
-            <a:picLocks noChangeAspect="1"/>
-          </p:cNvPicPr>
-          <p:nvPr/>
-        </p:nvPicPr>
-        <p:blipFill>
-          <a:blip r:embed="rId5"/>
-          <a:stretch>
-            <a:fillRect/>
-          </a:stretch>
-        </p:blipFill>
-        <p:spPr>
-          <a:xfrm>
-            <a:off x="1114044" y="4533184"/>
-            <a:ext cx="2993136" cy="161544"/>
-          </a:xfrm>
-          <a:prstGeom prst="rect">
-            <a:avLst/>
-          </a:prstGeom>
-        </p:spPr>
-      </p:pic>
+      <p:sp>
+        <p:nvSpPr>
+          <p:cNvPr id="8" name="Text 8"/>
+          <p:cNvSpPr txBox="1"/>
+          <p:nvPr/>
+        </p:nvSpPr>
+        <p:spPr>
+          <a:xfrm>
+            <a:off x="976884" y="4506290"/>
+            <a:ext cx="3267456" cy="161544"/>
+          </a:xfrm>
+          <a:prstGeom prst="rect">
+            <a:avLst/>
+          </a:prstGeom>
+          <a:noFill/>
+          <a:ln/>
+        </p:spPr>
+        <p:txBody>
+          <a:bodyPr wrap="none" lIns="0" tIns="0" rIns="0" bIns="0" rtlCol="0" anchor="t"/>
+          <a:lstStyle/>
+          <a:p>
+            <a:pPr marL="0" indent="0" algn="ctr">
+              <a:buNone/>
+            </a:pPr>
+            <a:r>
+              <a:rPr lang="en-US" sz="1000" dirty="0">
+                <a:solidFill>
+                  <a:srgbClr val="8A96A0"/>
+                </a:solidFill>
+                <a:latin typeface="Times New Roman" pitchFamily="34" charset="0"/>
+                <a:ea typeface="Times New Roman" pitchFamily="34" charset="-122"/>
+                <a:cs typeface="Times New Roman" pitchFamily="34" charset="-120"/>
+              </a:rPr>
+              <a:t>Fig. 13  ·  Implant-decay spectrum  ·  </a:t>
+            </a:r>
+            <a:r>
+              <a:rPr lang="en-US" sz="1000" baseline="30000" dirty="0">
+                <a:solidFill>
+                  <a:srgbClr val="8A96A0"/>
+                </a:solidFill>
+                <a:latin typeface="Times New Roman" pitchFamily="34" charset="0"/>
+                <a:ea typeface="Times New Roman" pitchFamily="34" charset="-122"/>
+                <a:cs typeface="Times New Roman" pitchFamily="34" charset="-120"/>
+              </a:rPr>
+              <a:t>96</a:t>
+            </a:r>
+            <a:r>
+              <a:rPr lang="en-US" sz="1000" dirty="0">
+                <a:solidFill>
+                  <a:srgbClr val="8A96A0"/>
+                </a:solidFill>
+                <a:latin typeface="Times New Roman" pitchFamily="34" charset="0"/>
+                <a:ea typeface="Times New Roman" pitchFamily="34" charset="-122"/>
+                <a:cs typeface="Times New Roman" pitchFamily="34" charset="-120"/>
+              </a:rPr>
+              <a:t>Ru(</a:t>
+            </a:r>
+            <a:r>
+              <a:rPr lang="en-US" sz="1000" baseline="30000" dirty="0">
+                <a:solidFill>
+                  <a:srgbClr val="8A96A0"/>
+                </a:solidFill>
+                <a:latin typeface="Times New Roman" pitchFamily="34" charset="0"/>
+                <a:ea typeface="Times New Roman" pitchFamily="34" charset="-122"/>
+                <a:cs typeface="Times New Roman" pitchFamily="34" charset="-120"/>
+              </a:rPr>
+              <a:t>58</a:t>
+            </a:r>
+            <a:r>
+              <a:rPr lang="en-US" sz="1000" dirty="0">
+                <a:solidFill>
+                  <a:srgbClr val="8A96A0"/>
+                </a:solidFill>
+                <a:latin typeface="Times New Roman" pitchFamily="34" charset="0"/>
+                <a:ea typeface="Times New Roman" pitchFamily="34" charset="-122"/>
+                <a:cs typeface="Times New Roman" pitchFamily="34" charset="-120"/>
+              </a:rPr>
+              <a:t>Ni, p2n)</a:t>
+            </a:r>
+            <a:r>
+              <a:rPr lang="en-US" sz="1000" baseline="30000" dirty="0">
+                <a:solidFill>
+                  <a:srgbClr val="8A96A0"/>
+                </a:solidFill>
+                <a:latin typeface="Times New Roman" pitchFamily="34" charset="0"/>
+                <a:ea typeface="Times New Roman" pitchFamily="34" charset="-122"/>
+                <a:cs typeface="Times New Roman" pitchFamily="34" charset="-120"/>
+              </a:rPr>
+              <a:t>151</a:t>
+            </a:r>
+            <a:r>
+              <a:rPr lang="en-US" sz="1000" dirty="0">
+                <a:solidFill>
+                  <a:srgbClr val="8A96A0"/>
+                </a:solidFill>
+                <a:latin typeface="Times New Roman" pitchFamily="34" charset="0"/>
+                <a:ea typeface="Times New Roman" pitchFamily="34" charset="-122"/>
+                <a:cs typeface="Times New Roman" pitchFamily="34" charset="-120"/>
+              </a:rPr>
+              <a:t>Lu</a:t>
+            </a:r>
+            <a:endParaRPr lang="en-US" sz="1000" dirty="0"/>
+          </a:p>
+        </p:txBody>
+      </p:sp>
       <p:sp>
         <p:nvSpPr>
           <p:cNvPr id="9" name="Shape 4"/>
@@ -4146,30 +5233,45 @@
           </a:p>
         </p:txBody>
       </p:sp>
-      <p:pic>
-        <p:nvPicPr>
-          <p:cNvPr id="11" name="Image 3" descr="/Users/Reid Hu/OrbitOS/70_Presentations/717_Learning Group-20260916/assets/eq/lu_flight_h.png"/>
-          <p:cNvPicPr>
-            <a:picLocks noChangeAspect="1"/>
-          </p:cNvPicPr>
-          <p:nvPr/>
-        </p:nvPicPr>
-        <p:blipFill>
-          <a:blip r:embed="rId11"/>
-          <a:stretch>
-            <a:fillRect/>
-          </a:stretch>
-        </p:blipFill>
-        <p:spPr>
-          <a:xfrm>
-            <a:off x="5303520" y="773354"/>
-            <a:ext cx="1241663" cy="172364"/>
-          </a:xfrm>
-          <a:prstGeom prst="rect">
-            <a:avLst/>
-          </a:prstGeom>
-        </p:spPr>
-      </p:pic>
+      <p:sp>
+        <p:nvSpPr>
+          <p:cNvPr id="11" name="Text 11"/>
+          <p:cNvSpPr txBox="1"/>
+          <p:nvPr/>
+        </p:nvSpPr>
+        <p:spPr>
+          <a:xfrm>
+            <a:off x="5316220" y="734208"/>
+            <a:ext cx="1515983" cy="172364"/>
+          </a:xfrm>
+          <a:prstGeom prst="rect">
+            <a:avLst/>
+          </a:prstGeom>
+          <a:noFill/>
+          <a:ln/>
+        </p:spPr>
+        <p:txBody>
+          <a:bodyPr wrap="none" lIns="0" tIns="0" rIns="0" bIns="0" rtlCol="0" anchor="t"/>
+          <a:lstStyle/>
+          <a:p>
+            <a:pPr marL="0" indent="0" algn="l">
+              <a:buNone/>
+            </a:pPr>
+            <a:r>
+              <a:rPr lang="en-US" sz="1300" b="1" dirty="0">
+                <a:solidFill>
+                  <a:srgbClr val="0F2F5C"/>
+                </a:solidFill>
+                <a:latin typeface="Times New Roman" pitchFamily="34" charset="0"/>
+                <a:ea typeface="Times New Roman" pitchFamily="34" charset="-122"/>
+                <a:cs typeface="Times New Roman" pitchFamily="34" charset="-120"/>
+              </a:rPr>
+              <a:t>Flight time &lt; 2 µs</a:t>
+            </a:r>
+            <a:endParaRPr lang="en-US" sz="1300" dirty="0"/>
+          </a:p>
+        </p:txBody>
+      </p:sp>
       <p:sp>
         <p:nvSpPr>
           <p:cNvPr id="12" name="Text 6"/>
@@ -4272,54 +5374,106 @@
           </a:p>
         </p:txBody>
       </p:sp>
-      <p:pic>
-        <p:nvPicPr>
-          <p:cNvPr id="15" name="Image 4" descr="/Users/Reid Hu/OrbitOS/70_Presentations/717_Learning Group-20260916/assets/eq/lu_proton_h.png"/>
-          <p:cNvPicPr>
-            <a:picLocks noChangeAspect="1"/>
-          </p:cNvPicPr>
-          <p:nvPr/>
-        </p:nvPicPr>
-        <p:blipFill>
-          <a:blip r:embed="rId6"/>
-          <a:stretch>
-            <a:fillRect/>
-          </a:stretch>
-        </p:blipFill>
-        <p:spPr>
-          <a:xfrm>
-            <a:off x="5303520" y="1733657"/>
-            <a:ext cx="1497970" cy="171998"/>
-          </a:xfrm>
-          <a:prstGeom prst="rect">
-            <a:avLst/>
-          </a:prstGeom>
-        </p:spPr>
-      </p:pic>
-      <p:pic>
-        <p:nvPicPr>
-          <p:cNvPr id="16" name="Image 5" descr="/Users/Reid Hu/OrbitOS/70_Presentations/717_Learning Group-20260916/assets/eq/lu_proton_b.png"/>
-          <p:cNvPicPr>
-            <a:picLocks noChangeAspect="1"/>
-          </p:cNvPicPr>
-          <p:nvPr/>
-        </p:nvPicPr>
-        <p:blipFill>
-          <a:blip r:embed="rId8"/>
-          <a:stretch>
-            <a:fillRect/>
-          </a:stretch>
-        </p:blipFill>
-        <p:spPr>
-          <a:xfrm>
-            <a:off x="5303520" y="1984248"/>
-            <a:ext cx="3383280" cy="338211"/>
-          </a:xfrm>
-          <a:prstGeom prst="rect">
-            <a:avLst/>
-          </a:prstGeom>
-        </p:spPr>
-      </p:pic>
+      <p:sp>
+        <p:nvSpPr>
+          <p:cNvPr id="15" name="Text 15"/>
+          <p:cNvSpPr txBox="1"/>
+          <p:nvPr/>
+        </p:nvSpPr>
+        <p:spPr>
+          <a:xfrm>
+            <a:off x="5316220" y="1694511"/>
+            <a:ext cx="1772290" cy="171998"/>
+          </a:xfrm>
+          <a:prstGeom prst="rect">
+            <a:avLst/>
+          </a:prstGeom>
+          <a:noFill/>
+          <a:ln/>
+        </p:spPr>
+        <p:txBody>
+          <a:bodyPr wrap="none" lIns="0" tIns="0" rIns="0" bIns="0" rtlCol="0" anchor="t"/>
+          <a:lstStyle/>
+          <a:p>
+            <a:pPr marL="0" indent="0" algn="l">
+              <a:buNone/>
+            </a:pPr>
+            <a:r>
+              <a:rPr lang="en-US" sz="1300" b="1" dirty="0">
+                <a:solidFill>
+                  <a:srgbClr val="0F2F5C"/>
+                </a:solidFill>
+                <a:latin typeface="Times New Roman" pitchFamily="34" charset="0"/>
+                <a:ea typeface="Times New Roman" pitchFamily="34" charset="-122"/>
+                <a:cs typeface="Times New Roman" pitchFamily="34" charset="-120"/>
+              </a:rPr>
+              <a:t>1.23 MeV proton line</a:t>
+            </a:r>
+            <a:endParaRPr lang="en-US" sz="1300" dirty="0"/>
+          </a:p>
+        </p:txBody>
+      </p:sp>
+      <p:sp>
+        <p:nvSpPr>
+          <p:cNvPr id="16" name="Text 16"/>
+          <p:cNvSpPr txBox="1"/>
+          <p:nvPr/>
+        </p:nvSpPr>
+        <p:spPr>
+          <a:xfrm>
+            <a:off x="5328920" y="1960910"/>
+            <a:ext cx="3438144" cy="338211"/>
+          </a:xfrm>
+          <a:prstGeom prst="rect">
+            <a:avLst/>
+          </a:prstGeom>
+          <a:noFill/>
+          <a:ln/>
+        </p:spPr>
+        <p:txBody>
+          <a:bodyPr wrap="square" lIns="0" tIns="0" rIns="0" bIns="0" rtlCol="0" anchor="t"/>
+          <a:lstStyle/>
+          <a:p>
+            <a:pPr marL="0" indent="0" algn="l">
+              <a:buNone/>
+            </a:pPr>
+            <a:r>
+              <a:rPr lang="en-US" sz="1200" dirty="0">
+                <a:solidFill>
+                  <a:srgbClr val="1A2332"/>
+                </a:solidFill>
+                <a:latin typeface="Times New Roman" pitchFamily="34" charset="0"/>
+                <a:ea typeface="Times New Roman" pitchFamily="34" charset="-122"/>
+                <a:cs typeface="Times New Roman" pitchFamily="34" charset="-120"/>
+              </a:rPr>
+              <a:t>Sharp isolated peak: ground-state proton emission from </a:t>
+            </a:r>
+            <a:r>
+              <a:rPr lang="en-US" sz="1200" baseline="30000" dirty="0">
+                <a:solidFill>
+                  <a:srgbClr val="1A2332"/>
+                </a:solidFill>
+                <a:latin typeface="Times New Roman" pitchFamily="34" charset="0"/>
+                <a:ea typeface="Times New Roman" pitchFamily="34" charset="-122"/>
+                <a:cs typeface="Times New Roman" pitchFamily="34" charset="-120"/>
+              </a:rPr>
+              <a:t>151</a:t>
+            </a:r>
+            <a:r>
+              <a:rPr lang="en-US" sz="1200" dirty="0">
+                <a:solidFill>
+                  <a:srgbClr val="1A2332"/>
+                </a:solidFill>
+                <a:latin typeface="Times New Roman" pitchFamily="34" charset="0"/>
+                <a:ea typeface="Times New Roman" pitchFamily="34" charset="-122"/>
+                <a:cs typeface="Times New Roman" pitchFamily="34" charset="-120"/>
+              </a:rPr>
+              <a:t>Lu.</a:t>
+            </a:r>
+            <a:endParaRPr lang="en-US" sz="1200" dirty="0"/>
+          </a:p>
+        </p:txBody>
+      </p:sp>
       <p:sp>
         <p:nvSpPr>
           <p:cNvPr id="17" name="Shape 9"/>
@@ -4422,30 +5576,67 @@
           </a:p>
         </p:txBody>
       </p:sp>
-      <p:pic>
-        <p:nvPicPr>
-          <p:cNvPr id="20" name="Image 6" descr="/Users/Reid Hu/OrbitOS/70_Presentations/717_Learning Group-20260916/assets/eq/lu_alpha_b.png"/>
-          <p:cNvPicPr>
-            <a:picLocks noChangeAspect="1"/>
-          </p:cNvPicPr>
-          <p:nvPr/>
-        </p:nvPicPr>
-        <p:blipFill>
-          <a:blip r:embed="rId9"/>
-          <a:stretch>
-            <a:fillRect/>
-          </a:stretch>
-        </p:blipFill>
-        <p:spPr>
-          <a:xfrm>
-            <a:off x="5303520" y="2944368"/>
-            <a:ext cx="3175620" cy="373990"/>
-          </a:xfrm>
-          <a:prstGeom prst="rect">
-            <a:avLst/>
-          </a:prstGeom>
-        </p:spPr>
-      </p:pic>
+      <p:sp>
+        <p:nvSpPr>
+          <p:cNvPr id="20" name="Text 20"/>
+          <p:cNvSpPr txBox="1"/>
+          <p:nvPr/>
+        </p:nvSpPr>
+        <p:spPr>
+          <a:xfrm>
+            <a:off x="5328920" y="2921030"/>
+            <a:ext cx="3383280" cy="373990"/>
+          </a:xfrm>
+          <a:prstGeom prst="rect">
+            <a:avLst/>
+          </a:prstGeom>
+          <a:noFill/>
+          <a:ln/>
+        </p:spPr>
+        <p:txBody>
+          <a:bodyPr wrap="square" lIns="0" tIns="0" rIns="0" bIns="0" rtlCol="0" anchor="t"/>
+          <a:lstStyle/>
+          <a:p>
+            <a:pPr marL="0" indent="0" algn="l">
+              <a:buNone/>
+            </a:pPr>
+            <a:r>
+              <a:rPr lang="en-US" sz="1200" dirty="0">
+                <a:solidFill>
+                  <a:srgbClr val="1A2332"/>
+                </a:solidFill>
+                <a:latin typeface="Times New Roman" pitchFamily="34" charset="0"/>
+                <a:ea typeface="Times New Roman" pitchFamily="34" charset="-122"/>
+                <a:cs typeface="Times New Roman" pitchFamily="34" charset="-120"/>
+              </a:rPr>
+              <a:t>Broad shelf from backward-emitted </a:t>
+            </a:r>
+            <a:r>
+              <a:rPr lang="en-US" sz="1200" i="1" dirty="0">
+                <a:solidFill>
+                  <a:srgbClr val="1A2332"/>
+                </a:solidFill>
+                <a:latin typeface="Times New Roman" pitchFamily="34" charset="0"/>
+                <a:ea typeface="Times New Roman" pitchFamily="34" charset="-122"/>
+                <a:cs typeface="Times New Roman" pitchFamily="34" charset="-120"/>
+              </a:rPr>
+              <a:t>α</a:t>
+            </a:r>
+            <a:r>
+              <a:rPr lang="en-US" sz="1200" dirty="0">
+                <a:solidFill>
+                  <a:srgbClr val="1A2332"/>
+                </a:solidFill>
+                <a:latin typeface="Times New Roman" pitchFamily="34" charset="0"/>
+                <a:ea typeface="Times New Roman" pitchFamily="34" charset="-122"/>
+                <a:cs typeface="Times New Roman" pitchFamily="34" charset="-120"/>
+              </a:rPr>
+              <a:t> particles that deposit only part of their energy.</a:t>
+            </a:r>
+            <a:endParaRPr lang="en-US" sz="1200" dirty="0"/>
+          </a:p>
+        </p:txBody>
+      </p:sp>
       <p:sp>
         <p:nvSpPr>
           <p:cNvPr id="21" name="Shape 12"/>
@@ -4509,30 +5700,67 @@
           </a:p>
         </p:txBody>
       </p:sp>
-      <p:pic>
-        <p:nvPicPr>
-          <p:cNvPr id="23" name="Image 7" descr="/Users/Reid Hu/OrbitOS/70_Presentations/717_Learning Group-20260916/assets/eq/lu_half_h.png"/>
-          <p:cNvPicPr>
-            <a:picLocks noChangeAspect="1"/>
-          </p:cNvPicPr>
-          <p:nvPr/>
-        </p:nvPicPr>
-        <p:blipFill>
-          <a:blip r:embed="rId7"/>
-          <a:stretch>
-            <a:fillRect/>
-          </a:stretch>
-        </p:blipFill>
-        <p:spPr>
-          <a:xfrm>
-            <a:off x="5303520" y="3652526"/>
-            <a:ext cx="848014" cy="174741"/>
-          </a:xfrm>
-          <a:prstGeom prst="rect">
-            <a:avLst/>
-          </a:prstGeom>
-        </p:spPr>
-      </p:pic>
+      <p:sp>
+        <p:nvSpPr>
+          <p:cNvPr id="23" name="Text 23"/>
+          <p:cNvSpPr txBox="1"/>
+          <p:nvPr/>
+        </p:nvSpPr>
+        <p:spPr>
+          <a:xfrm>
+            <a:off x="5316220" y="3610362"/>
+            <a:ext cx="1122334" cy="174741"/>
+          </a:xfrm>
+          <a:prstGeom prst="rect">
+            <a:avLst/>
+          </a:prstGeom>
+          <a:noFill/>
+          <a:ln/>
+        </p:spPr>
+        <p:txBody>
+          <a:bodyPr wrap="none" lIns="0" tIns="0" rIns="0" bIns="0" rtlCol="0" anchor="t"/>
+          <a:lstStyle/>
+          <a:p>
+            <a:pPr marL="0" indent="0" algn="l">
+              <a:buNone/>
+            </a:pPr>
+            <a:r>
+              <a:rPr lang="en-US" sz="1300" b="1" i="1" dirty="0">
+                <a:solidFill>
+                  <a:srgbClr val="0F2F5C"/>
+                </a:solidFill>
+                <a:latin typeface="Times New Roman" pitchFamily="34" charset="0"/>
+                <a:ea typeface="Times New Roman" pitchFamily="34" charset="-122"/>
+                <a:cs typeface="Times New Roman" pitchFamily="34" charset="-120"/>
+              </a:rPr>
+              <a:t>T</a:t>
+            </a:r>
+            <a:r>
+              <a:rPr lang="en-US" sz="1300" b="1" baseline="-25000" dirty="0">
+                <a:solidFill>
+                  <a:srgbClr val="0F2F5C"/>
+                </a:solidFill>
+                <a:latin typeface="Times New Roman" pitchFamily="34" charset="0"/>
+                <a:ea typeface="Times New Roman" pitchFamily="34" charset="-122"/>
+                <a:cs typeface="Times New Roman" pitchFamily="34" charset="-120"/>
+              </a:rPr>
+              <a:t>1/2</a:t>
+            </a:r>
+            <a:r>
+              <a:rPr lang="en-US" sz="1300" b="1" dirty="0">
+                <a:solidFill>
+                  <a:srgbClr val="0F2F5C"/>
+                </a:solidFill>
+                <a:latin typeface="Times New Roman" pitchFamily="34" charset="0"/>
+                <a:ea typeface="Times New Roman" pitchFamily="34" charset="-122"/>
+                <a:cs typeface="Times New Roman" pitchFamily="34" charset="-120"/>
+              </a:rPr>
+              <a:t> = 0.08 s</a:t>
+            </a:r>
+            <a:endParaRPr lang="en-US" sz="1300" dirty="0"/>
+          </a:p>
+        </p:txBody>
+      </p:sp>
       <p:sp>
         <p:nvSpPr>
           <p:cNvPr id="24" name="Text 14"/>
@@ -4569,6 +5797,28 @@
               <a:t>Implant time-tag gives the half-life event by event.</a:t>
             </a:r>
             <a:endParaRPr lang="en-US" sz="1200" dirty="0"/>
+          </a:p>
+        </p:txBody>
+      </p:sp>
+      <p:sp>
+        <p:nvSpPr>
+          <p:cNvPr id="25" name="Date Placeholder 24"/>
+          <p:cNvSpPr>
+            <a:spLocks noGrp="1"/>
+          </p:cNvSpPr>
+          <p:nvPr>
+            <p:ph type="dt" sz="half" idx="10"/>
+          </p:nvPr>
+        </p:nvSpPr>
+        <p:spPr/>
+        <p:txBody>
+          <a:bodyPr/>
+          <a:lstStyle/>
+          <a:p>
+            <a:r>
+              <a:rPr lang="en-US" dirty="0"/>
+              <a:t>29 Sep 2026</a:t>
+            </a:r>
           </a:p>
         </p:txBody>
       </p:sp>
@@ -4580,7 +5830,7 @@
 </p:sld>
 </file>
 
-<file path=ppt/slides/slide14.xml><?xml version="1.0" encoding="utf-8"?>
+<file path=ppt/slides/slide15.xml><?xml version="1.0" encoding="utf-8"?>
 <p:sld xmlns:a="http://schemas.openxmlformats.org/drawingml/2006/main" xmlns:r="http://schemas.openxmlformats.org/officeDocument/2006/relationships" xmlns:p="http://schemas.openxmlformats.org/presentationml/2006/main">
   <p:cSld name="Slide 14">
     <p:bg>
@@ -4662,7 +5912,7 @@
               <a:buNone/>
             </a:pPr>
             <a:r>
-              <a:rPr lang="en-US" sz="1600" b="1" dirty="0">
+              <a:rPr lang="en-US" sz="1800" b="1" dirty="0">
                 <a:solidFill>
                   <a:srgbClr val="FFFFFF"/>
                 </a:solidFill>
@@ -4672,7 +5922,7 @@
               </a:rPr>
               <a:t>Genetic decay-chain tagging identified element 108 from just three atoms.</a:t>
             </a:r>
-            <a:endParaRPr lang="en-US" sz="1600" dirty="0"/>
+            <a:endParaRPr lang="en-US" sz="1800" dirty="0"/>
           </a:p>
         </p:txBody>
       </p:sp>
@@ -4780,7 +6030,7 @@
                 <a:ea typeface="Times New Roman" pitchFamily="34" charset="-122"/>
                 <a:cs typeface="Times New Roman" pitchFamily="34" charset="-120"/>
               </a:rPr>
-              <a:t>Content 8 / 10</a:t>
+              <a:t>Content 9 / 11</a:t>
             </a:r>
             <a:endParaRPr lang="en-US" sz="1000" dirty="0"/>
           </a:p>
@@ -4809,30 +6059,133 @@
           </a:prstGeom>
         </p:spPr>
       </p:pic>
-      <p:pic>
-        <p:nvPicPr>
-          <p:cNvPr id="8" name="Image 1" descr="/Users/Reid Hu/OrbitOS/70_Presentations/717_Learning Group-20260916/assets/eq/cap_hs.png"/>
-          <p:cNvPicPr>
-            <a:picLocks noChangeAspect="1"/>
-          </p:cNvPicPr>
-          <p:nvPr/>
-        </p:nvPicPr>
-        <p:blipFill>
-          <a:blip r:embed="rId4"/>
-          <a:stretch>
-            <a:fillRect/>
-          </a:stretch>
-        </p:blipFill>
-        <p:spPr>
-          <a:xfrm>
-            <a:off x="1624584" y="4533184"/>
-            <a:ext cx="2639568" cy="161544"/>
-          </a:xfrm>
-          <a:prstGeom prst="rect">
-            <a:avLst/>
-          </a:prstGeom>
-        </p:spPr>
-      </p:pic>
+      <p:sp>
+        <p:nvSpPr>
+          <p:cNvPr id="8" name="Text 8"/>
+          <p:cNvSpPr txBox="1"/>
+          <p:nvPr/>
+        </p:nvSpPr>
+        <p:spPr>
+          <a:xfrm>
+            <a:off x="1484315" y="4506290"/>
+            <a:ext cx="2913888" cy="161544"/>
+          </a:xfrm>
+          <a:prstGeom prst="rect">
+            <a:avLst/>
+          </a:prstGeom>
+          <a:noFill/>
+          <a:ln/>
+        </p:spPr>
+        <p:txBody>
+          <a:bodyPr wrap="none" lIns="0" tIns="0" rIns="0" bIns="0" rtlCol="0" anchor="t"/>
+          <a:lstStyle/>
+          <a:p>
+            <a:pPr marL="0" indent="0" algn="ctr">
+              <a:buNone/>
+            </a:pPr>
+            <a:r>
+              <a:rPr lang="en-US" sz="1000" dirty="0">
+                <a:solidFill>
+                  <a:srgbClr val="8A96A0"/>
+                </a:solidFill>
+                <a:latin typeface="Times New Roman" pitchFamily="34" charset="0"/>
+                <a:ea typeface="Times New Roman" pitchFamily="34" charset="-122"/>
+                <a:cs typeface="Times New Roman" pitchFamily="34" charset="-120"/>
+              </a:rPr>
+              <a:t>Fig. 14  ·  Four-tier </a:t>
+            </a:r>
+            <a:r>
+              <a:rPr lang="en-US" sz="1000" i="1" dirty="0">
+                <a:solidFill>
+                  <a:srgbClr val="8A96A0"/>
+                </a:solidFill>
+                <a:latin typeface="Times New Roman" pitchFamily="34" charset="0"/>
+                <a:ea typeface="Times New Roman" pitchFamily="34" charset="-122"/>
+                <a:cs typeface="Times New Roman" pitchFamily="34" charset="-120"/>
+              </a:rPr>
+              <a:t>α</a:t>
+            </a:r>
+            <a:r>
+              <a:rPr lang="en-US" sz="1000" dirty="0">
+                <a:solidFill>
+                  <a:srgbClr val="8A96A0"/>
+                </a:solidFill>
+                <a:latin typeface="Times New Roman" pitchFamily="34" charset="0"/>
+                <a:ea typeface="Times New Roman" pitchFamily="34" charset="-122"/>
+                <a:cs typeface="Times New Roman" pitchFamily="34" charset="-120"/>
+              </a:rPr>
+              <a:t> gating  ·  </a:t>
+            </a:r>
+            <a:r>
+              <a:rPr lang="en-US" sz="1000" baseline="30000" dirty="0">
+                <a:solidFill>
+                  <a:srgbClr val="8A96A0"/>
+                </a:solidFill>
+                <a:latin typeface="Times New Roman" pitchFamily="34" charset="0"/>
+                <a:ea typeface="Times New Roman" pitchFamily="34" charset="-122"/>
+                <a:cs typeface="Times New Roman" pitchFamily="34" charset="-120"/>
+              </a:rPr>
+              <a:t>208</a:t>
+            </a:r>
+            <a:r>
+              <a:rPr lang="en-US" sz="1000" dirty="0">
+                <a:solidFill>
+                  <a:srgbClr val="8A96A0"/>
+                </a:solidFill>
+                <a:latin typeface="Times New Roman" pitchFamily="34" charset="0"/>
+                <a:ea typeface="Times New Roman" pitchFamily="34" charset="-122"/>
+                <a:cs typeface="Times New Roman" pitchFamily="34" charset="-120"/>
+              </a:rPr>
+              <a:t>Pb(</a:t>
+            </a:r>
+            <a:r>
+              <a:rPr lang="en-US" sz="1000" baseline="30000" dirty="0">
+                <a:solidFill>
+                  <a:srgbClr val="8A96A0"/>
+                </a:solidFill>
+                <a:latin typeface="Times New Roman" pitchFamily="34" charset="0"/>
+                <a:ea typeface="Times New Roman" pitchFamily="34" charset="-122"/>
+                <a:cs typeface="Times New Roman" pitchFamily="34" charset="-120"/>
+              </a:rPr>
+              <a:t>58</a:t>
+            </a:r>
+            <a:r>
+              <a:rPr lang="en-US" sz="1000" dirty="0">
+                <a:solidFill>
+                  <a:srgbClr val="8A96A0"/>
+                </a:solidFill>
+                <a:latin typeface="Times New Roman" pitchFamily="34" charset="0"/>
+                <a:ea typeface="Times New Roman" pitchFamily="34" charset="-122"/>
+                <a:cs typeface="Times New Roman" pitchFamily="34" charset="-120"/>
+              </a:rPr>
+              <a:t>Fe, n)</a:t>
+            </a:r>
+            <a:r>
+              <a:rPr lang="en-US" sz="1000" baseline="30000" dirty="0">
+                <a:solidFill>
+                  <a:srgbClr val="8A96A0"/>
+                </a:solidFill>
+                <a:latin typeface="Times New Roman" pitchFamily="34" charset="0"/>
+                <a:ea typeface="Times New Roman" pitchFamily="34" charset="-122"/>
+                <a:cs typeface="Times New Roman" pitchFamily="34" charset="-120"/>
+              </a:rPr>
+              <a:t>265</a:t>
+            </a:r>
+            <a:r>
+              <a:rPr lang="en-US" sz="1000" dirty="0">
+                <a:solidFill>
+                  <a:srgbClr val="8A96A0"/>
+                </a:solidFill>
+                <a:latin typeface="Times New Roman" pitchFamily="34" charset="0"/>
+                <a:ea typeface="Times New Roman" pitchFamily="34" charset="-122"/>
+                <a:cs typeface="Times New Roman" pitchFamily="34" charset="-120"/>
+              </a:rPr>
+              <a:t>108</a:t>
+            </a:r>
+            <a:endParaRPr lang="en-US" sz="1000" dirty="0"/>
+          </a:p>
+        </p:txBody>
+      </p:sp>
       <p:sp>
         <p:nvSpPr>
           <p:cNvPr id="9" name="Shape 5"/>
@@ -4935,30 +6288,67 @@
           </a:p>
         </p:txBody>
       </p:sp>
-      <p:pic>
-        <p:nvPicPr>
-          <p:cNvPr id="12" name="Image 2" descr="/Users/Reid Hu/OrbitOS/70_Presentations/717_Learning Group-20260916/assets/eq/hs_ungated_b.png"/>
-          <p:cNvPicPr>
-            <a:picLocks noChangeAspect="1"/>
-          </p:cNvPicPr>
-          <p:nvPr/>
-        </p:nvPicPr>
-        <p:blipFill>
-          <a:blip r:embed="rId5"/>
-          <a:stretch>
-            <a:fillRect/>
-          </a:stretch>
-        </p:blipFill>
-        <p:spPr>
-          <a:xfrm>
-            <a:off x="6053328" y="1005840"/>
-            <a:ext cx="2368296" cy="347472"/>
-          </a:xfrm>
-          <a:prstGeom prst="rect">
-            <a:avLst/>
-          </a:prstGeom>
-        </p:spPr>
-      </p:pic>
+      <p:sp>
+        <p:nvSpPr>
+          <p:cNvPr id="12" name="Text 12"/>
+          <p:cNvSpPr txBox="1"/>
+          <p:nvPr/>
+        </p:nvSpPr>
+        <p:spPr>
+          <a:xfrm>
+            <a:off x="6078728" y="985520"/>
+            <a:ext cx="2633472" cy="347472"/>
+          </a:xfrm>
+          <a:prstGeom prst="rect">
+            <a:avLst/>
+          </a:prstGeom>
+          <a:noFill/>
+          <a:ln/>
+        </p:spPr>
+        <p:txBody>
+          <a:bodyPr wrap="square" lIns="0" tIns="0" rIns="0" bIns="0" rtlCol="0" anchor="t"/>
+          <a:lstStyle/>
+          <a:p>
+            <a:pPr marL="0" indent="0" algn="l">
+              <a:buNone/>
+            </a:pPr>
+            <a:r>
+              <a:rPr lang="en-US" sz="1100" dirty="0">
+                <a:solidFill>
+                  <a:srgbClr val="1A2332"/>
+                </a:solidFill>
+                <a:latin typeface="Times New Roman" pitchFamily="34" charset="0"/>
+                <a:ea typeface="Times New Roman" pitchFamily="34" charset="-122"/>
+                <a:cs typeface="Times New Roman" pitchFamily="34" charset="-120"/>
+              </a:rPr>
+              <a:t>Raw </a:t>
+            </a:r>
+            <a:r>
+              <a:rPr lang="en-US" sz="1100" i="1" dirty="0">
+                <a:solidFill>
+                  <a:srgbClr val="1A2332"/>
+                </a:solidFill>
+                <a:latin typeface="Times New Roman" pitchFamily="34" charset="0"/>
+                <a:ea typeface="Times New Roman" pitchFamily="34" charset="-122"/>
+                <a:cs typeface="Times New Roman" pitchFamily="34" charset="-120"/>
+              </a:rPr>
+              <a:t>α</a:t>
+            </a:r>
+            <a:r>
+              <a:rPr lang="en-US" sz="1100" dirty="0">
+                <a:solidFill>
+                  <a:srgbClr val="1A2332"/>
+                </a:solidFill>
+                <a:latin typeface="Times New Roman" pitchFamily="34" charset="0"/>
+                <a:ea typeface="Times New Roman" pitchFamily="34" charset="-122"/>
+                <a:cs typeface="Times New Roman" pitchFamily="34" charset="-120"/>
+              </a:rPr>
+              <a:t> spectrum between beam pulses — background dominates.</a:t>
+            </a:r>
+            <a:endParaRPr lang="en-US" sz="1100" dirty="0"/>
+          </a:p>
+        </p:txBody>
+      </p:sp>
       <p:sp>
         <p:nvSpPr>
           <p:cNvPr id="13" name="Shape 8"/>
@@ -5343,30 +6733,103 @@
           </a:p>
         </p:txBody>
       </p:sp>
-      <p:pic>
-        <p:nvPicPr>
-          <p:cNvPr id="24" name="Image 3" descr="/Users/Reid Hu/OrbitOS/70_Presentations/717_Learning Group-20260916/assets/eq/hs_daughter_b.png"/>
-          <p:cNvPicPr>
-            <a:picLocks noChangeAspect="1"/>
-          </p:cNvPicPr>
-          <p:nvPr/>
-        </p:nvPicPr>
-        <p:blipFill>
-          <a:blip r:embed="rId6"/>
-          <a:stretch>
-            <a:fillRect/>
-          </a:stretch>
-        </p:blipFill>
-        <p:spPr>
-          <a:xfrm>
-            <a:off x="6053328" y="3886200"/>
-            <a:ext cx="2538984" cy="347472"/>
-          </a:xfrm>
-          <a:prstGeom prst="rect">
-            <a:avLst/>
-          </a:prstGeom>
-        </p:spPr>
-      </p:pic>
+      <p:sp>
+        <p:nvSpPr>
+          <p:cNvPr id="24" name="Text 24"/>
+          <p:cNvSpPr txBox="1"/>
+          <p:nvPr/>
+        </p:nvSpPr>
+        <p:spPr>
+          <a:xfrm>
+            <a:off x="6078728" y="3865880"/>
+            <a:ext cx="2633472" cy="347472"/>
+          </a:xfrm>
+          <a:prstGeom prst="rect">
+            <a:avLst/>
+          </a:prstGeom>
+          <a:noFill/>
+          <a:ln/>
+        </p:spPr>
+        <p:txBody>
+          <a:bodyPr wrap="square" lIns="0" tIns="0" rIns="0" bIns="0" rtlCol="0" anchor="t"/>
+          <a:lstStyle/>
+          <a:p>
+            <a:pPr marL="0" indent="0" algn="l">
+              <a:buNone/>
+            </a:pPr>
+            <a:r>
+              <a:rPr lang="en-US" sz="1100" dirty="0">
+                <a:solidFill>
+                  <a:srgbClr val="1A2332"/>
+                </a:solidFill>
+                <a:latin typeface="Times New Roman" pitchFamily="34" charset="0"/>
+                <a:ea typeface="Times New Roman" pitchFamily="34" charset="-122"/>
+                <a:cs typeface="Times New Roman" pitchFamily="34" charset="-120"/>
+              </a:rPr>
+              <a:t>SHIP does not resolve the mass;</a:t>
+            </a:r>
+            <a:br>
+              <a:rPr lang="en-US" sz="1100" dirty="0"/>
+            </a:br>
+            <a:r>
+              <a:rPr lang="en-US" sz="1100" dirty="0">
+                <a:solidFill>
+                  <a:srgbClr val="1A2332"/>
+                </a:solidFill>
+                <a:latin typeface="Times New Roman" pitchFamily="34" charset="0"/>
+                <a:ea typeface="Times New Roman" pitchFamily="34" charset="-122"/>
+                <a:cs typeface="Times New Roman" pitchFamily="34" charset="-120"/>
+              </a:rPr>
+              <a:t>parent–daughter </a:t>
+            </a:r>
+            <a:r>
+              <a:rPr lang="en-US" sz="1100" i="1" dirty="0">
+                <a:solidFill>
+                  <a:srgbClr val="1A2332"/>
+                </a:solidFill>
+                <a:latin typeface="Times New Roman" pitchFamily="34" charset="0"/>
+                <a:ea typeface="Times New Roman" pitchFamily="34" charset="-122"/>
+                <a:cs typeface="Times New Roman" pitchFamily="34" charset="-120"/>
+              </a:rPr>
+              <a:t>α</a:t>
+            </a:r>
+            <a:r>
+              <a:rPr lang="en-US" sz="1100" dirty="0">
+                <a:solidFill>
+                  <a:srgbClr val="1A2332"/>
+                </a:solidFill>
+                <a:latin typeface="Times New Roman" pitchFamily="34" charset="0"/>
+                <a:ea typeface="Times New Roman" pitchFamily="34" charset="-122"/>
+                <a:cs typeface="Times New Roman" pitchFamily="34" charset="-120"/>
+              </a:rPr>
+              <a:t> steps identify the isotope.</a:t>
+            </a:r>
+            <a:endParaRPr lang="en-US" sz="1100" dirty="0"/>
+          </a:p>
+        </p:txBody>
+      </p:sp>
+      <p:sp>
+        <p:nvSpPr>
+          <p:cNvPr id="25" name="Date Placeholder 24"/>
+          <p:cNvSpPr>
+            <a:spLocks noGrp="1"/>
+          </p:cNvSpPr>
+          <p:nvPr>
+            <p:ph type="dt" sz="half" idx="10"/>
+          </p:nvPr>
+        </p:nvSpPr>
+        <p:spPr/>
+        <p:txBody>
+          <a:bodyPr/>
+          <a:lstStyle/>
+          <a:p>
+            <a:r>
+              <a:rPr lang="en-US" dirty="0"/>
+              <a:t>29 Sep 2026</a:t>
+            </a:r>
+          </a:p>
+        </p:txBody>
+      </p:sp>
     </p:spTree>
   </p:cSld>
   <p:clrMapOvr>
@@ -5375,7 +6838,7 @@
 </p:sld>
 </file>
 
-<file path=ppt/slides/slide15.xml><?xml version="1.0" encoding="utf-8"?>
+<file path=ppt/slides/slide16.xml><?xml version="1.0" encoding="utf-8"?>
 <p:sld xmlns:a="http://schemas.openxmlformats.org/drawingml/2006/main" xmlns:r="http://schemas.openxmlformats.org/officeDocument/2006/relationships" xmlns:p="http://schemas.openxmlformats.org/presentationml/2006/main">
   <p:cSld name="Slide 15">
     <p:bg>
@@ -5457,7 +6920,7 @@
               <a:buNone/>
             </a:pPr>
             <a:r>
-              <a:rPr lang="en-US" sz="1600" b="1" dirty="0">
+              <a:rPr lang="en-US" sz="1800" b="1" dirty="0">
                 <a:solidFill>
                   <a:srgbClr val="FFFFFF"/>
                 </a:solidFill>
@@ -5468,7 +6931,7 @@
               <a:t>Recoil-gamma tagging reveals high-spin states of the mirror nucleus </a:t>
             </a:r>
             <a:r>
-              <a:rPr lang="en-US" sz="1600" b="1" baseline="30000" dirty="0">
+              <a:rPr lang="en-US" sz="1800" b="1" baseline="30000" dirty="0">
                 <a:solidFill>
                   <a:srgbClr val="FFFFFF"/>
                 </a:solidFill>
@@ -5479,7 +6942,7 @@
               <a:t>49</a:t>
             </a:r>
             <a:r>
-              <a:rPr lang="en-US" sz="1600" b="1" dirty="0">
+              <a:rPr lang="en-US" sz="1800" b="1" dirty="0">
                 <a:solidFill>
                   <a:srgbClr val="FFFFFF"/>
                 </a:solidFill>
@@ -5489,7 +6952,7 @@
               </a:rPr>
               <a:t>Mn.</a:t>
             </a:r>
-            <a:endParaRPr lang="en-US" sz="1600" dirty="0"/>
+            <a:endParaRPr lang="en-US" sz="1800" dirty="0"/>
           </a:p>
         </p:txBody>
       </p:sp>
@@ -5597,7 +7060,7 @@
                 <a:ea typeface="Times New Roman" pitchFamily="34" charset="-122"/>
                 <a:cs typeface="Times New Roman" pitchFamily="34" charset="-120"/>
               </a:rPr>
-              <a:t>Content 9 / 10</a:t>
+              <a:t>Content 10 / 11</a:t>
             </a:r>
             <a:endParaRPr lang="en-US" sz="1000" dirty="0"/>
           </a:p>
@@ -5626,30 +7089,133 @@
           </a:prstGeom>
         </p:spPr>
       </p:pic>
-      <p:pic>
-        <p:nvPicPr>
-          <p:cNvPr id="8" name="Image 1" descr="/Users/Reid Hu/OrbitOS/70_Presentations/717_Learning Group-20260916/assets/eq/cap_mn.png"/>
-          <p:cNvPicPr>
-            <a:picLocks noChangeAspect="1"/>
-          </p:cNvPicPr>
-          <p:nvPr/>
-        </p:nvPicPr>
-        <p:blipFill>
-          <a:blip r:embed="rId4"/>
-          <a:stretch>
-            <a:fillRect/>
-          </a:stretch>
-        </p:blipFill>
-        <p:spPr>
-          <a:xfrm>
-            <a:off x="838200" y="4046623"/>
-            <a:ext cx="3590544" cy="161544"/>
-          </a:xfrm>
-          <a:prstGeom prst="rect">
-            <a:avLst/>
-          </a:prstGeom>
-        </p:spPr>
-      </p:pic>
+      <p:sp>
+        <p:nvSpPr>
+          <p:cNvPr id="8" name="Text 8"/>
+          <p:cNvSpPr txBox="1"/>
+          <p:nvPr/>
+        </p:nvSpPr>
+        <p:spPr>
+          <a:xfrm>
+            <a:off x="697931" y="4019638"/>
+            <a:ext cx="3864864" cy="161544"/>
+          </a:xfrm>
+          <a:prstGeom prst="rect">
+            <a:avLst/>
+          </a:prstGeom>
+          <a:noFill/>
+          <a:ln/>
+        </p:spPr>
+        <p:txBody>
+          <a:bodyPr wrap="none" lIns="0" tIns="0" rIns="0" bIns="0" rtlCol="0" anchor="t"/>
+          <a:lstStyle/>
+          <a:p>
+            <a:pPr marL="0" indent="0" algn="ctr">
+              <a:buNone/>
+            </a:pPr>
+            <a:r>
+              <a:rPr lang="en-US" sz="1000" dirty="0">
+                <a:solidFill>
+                  <a:srgbClr val="8A96A0"/>
+                </a:solidFill>
+                <a:latin typeface="Times New Roman" pitchFamily="34" charset="0"/>
+                <a:ea typeface="Times New Roman" pitchFamily="34" charset="-122"/>
+                <a:cs typeface="Times New Roman" pitchFamily="34" charset="-120"/>
+              </a:rPr>
+              <a:t>Fig. 17  ·  Recoil-correlated prompt </a:t>
+            </a:r>
+            <a:r>
+              <a:rPr lang="en-US" sz="1000" i="1" dirty="0">
+                <a:solidFill>
+                  <a:srgbClr val="8A96A0"/>
+                </a:solidFill>
+                <a:latin typeface="Times New Roman" pitchFamily="34" charset="0"/>
+                <a:ea typeface="Times New Roman" pitchFamily="34" charset="-122"/>
+                <a:cs typeface="Times New Roman" pitchFamily="34" charset="-120"/>
+              </a:rPr>
+              <a:t>γ</a:t>
+            </a:r>
+            <a:r>
+              <a:rPr lang="en-US" sz="1000" dirty="0">
+                <a:solidFill>
+                  <a:srgbClr val="8A96A0"/>
+                </a:solidFill>
+                <a:latin typeface="Times New Roman" pitchFamily="34" charset="0"/>
+                <a:ea typeface="Times New Roman" pitchFamily="34" charset="-122"/>
+                <a:cs typeface="Times New Roman" pitchFamily="34" charset="-120"/>
+              </a:rPr>
+              <a:t> spectrum  ·  </a:t>
+            </a:r>
+            <a:r>
+              <a:rPr lang="en-US" sz="1000" baseline="30000" dirty="0">
+                <a:solidFill>
+                  <a:srgbClr val="8A96A0"/>
+                </a:solidFill>
+                <a:latin typeface="Times New Roman" pitchFamily="34" charset="0"/>
+                <a:ea typeface="Times New Roman" pitchFamily="34" charset="-122"/>
+                <a:cs typeface="Times New Roman" pitchFamily="34" charset="-120"/>
+              </a:rPr>
+              <a:t>12</a:t>
+            </a:r>
+            <a:r>
+              <a:rPr lang="en-US" sz="1000" dirty="0">
+                <a:solidFill>
+                  <a:srgbClr val="8A96A0"/>
+                </a:solidFill>
+                <a:latin typeface="Times New Roman" pitchFamily="34" charset="0"/>
+                <a:ea typeface="Times New Roman" pitchFamily="34" charset="-122"/>
+                <a:cs typeface="Times New Roman" pitchFamily="34" charset="-120"/>
+              </a:rPr>
+              <a:t>C(</a:t>
+            </a:r>
+            <a:r>
+              <a:rPr lang="en-US" sz="1000" baseline="30000" dirty="0">
+                <a:solidFill>
+                  <a:srgbClr val="8A96A0"/>
+                </a:solidFill>
+                <a:latin typeface="Times New Roman" pitchFamily="34" charset="0"/>
+                <a:ea typeface="Times New Roman" pitchFamily="34" charset="-122"/>
+                <a:cs typeface="Times New Roman" pitchFamily="34" charset="-120"/>
+              </a:rPr>
+              <a:t>40</a:t>
+            </a:r>
+            <a:r>
+              <a:rPr lang="en-US" sz="1000" dirty="0">
+                <a:solidFill>
+                  <a:srgbClr val="8A96A0"/>
+                </a:solidFill>
+                <a:latin typeface="Times New Roman" pitchFamily="34" charset="0"/>
+                <a:ea typeface="Times New Roman" pitchFamily="34" charset="-122"/>
+                <a:cs typeface="Times New Roman" pitchFamily="34" charset="-120"/>
+              </a:rPr>
+              <a:t>Ca, p2n)</a:t>
+            </a:r>
+            <a:r>
+              <a:rPr lang="en-US" sz="1000" baseline="30000" dirty="0">
+                <a:solidFill>
+                  <a:srgbClr val="8A96A0"/>
+                </a:solidFill>
+                <a:latin typeface="Times New Roman" pitchFamily="34" charset="0"/>
+                <a:ea typeface="Times New Roman" pitchFamily="34" charset="-122"/>
+                <a:cs typeface="Times New Roman" pitchFamily="34" charset="-120"/>
+              </a:rPr>
+              <a:t>49</a:t>
+            </a:r>
+            <a:r>
+              <a:rPr lang="en-US" sz="1000" dirty="0">
+                <a:solidFill>
+                  <a:srgbClr val="8A96A0"/>
+                </a:solidFill>
+                <a:latin typeface="Times New Roman" pitchFamily="34" charset="0"/>
+                <a:ea typeface="Times New Roman" pitchFamily="34" charset="-122"/>
+                <a:cs typeface="Times New Roman" pitchFamily="34" charset="-120"/>
+              </a:rPr>
+              <a:t>Mn</a:t>
+            </a:r>
+            <a:endParaRPr lang="en-US" sz="1000" dirty="0"/>
+          </a:p>
+        </p:txBody>
+      </p:sp>
       <p:sp>
         <p:nvSpPr>
           <p:cNvPr id="9" name="Shape 5"/>
@@ -5752,30 +7318,67 @@
           </a:p>
         </p:txBody>
       </p:sp>
-      <p:pic>
-        <p:nvPicPr>
-          <p:cNvPr id="12" name="Image 2" descr="/Users/Reid Hu/OrbitOS/70_Presentations/717_Learning Group-20260916/assets/eq/mn_tag_b.png"/>
-          <p:cNvPicPr>
-            <a:picLocks noChangeAspect="1"/>
-          </p:cNvPicPr>
-          <p:nvPr/>
-        </p:nvPicPr>
-        <p:blipFill>
-          <a:blip r:embed="rId5"/>
-          <a:stretch>
-            <a:fillRect/>
-          </a:stretch>
-        </p:blipFill>
-        <p:spPr>
-          <a:xfrm>
-            <a:off x="5257800" y="1024128"/>
-            <a:ext cx="3325368" cy="374904"/>
-          </a:xfrm>
-          <a:prstGeom prst="rect">
-            <a:avLst/>
-          </a:prstGeom>
-        </p:spPr>
-      </p:pic>
+      <p:sp>
+        <p:nvSpPr>
+          <p:cNvPr id="12" name="Text 12"/>
+          <p:cNvSpPr txBox="1"/>
+          <p:nvPr/>
+        </p:nvSpPr>
+        <p:spPr>
+          <a:xfrm>
+            <a:off x="5280182" y="1000790"/>
+            <a:ext cx="3429000" cy="374904"/>
+          </a:xfrm>
+          <a:prstGeom prst="rect">
+            <a:avLst/>
+          </a:prstGeom>
+          <a:noFill/>
+          <a:ln/>
+        </p:spPr>
+        <p:txBody>
+          <a:bodyPr wrap="square" lIns="0" tIns="0" rIns="0" bIns="0" rtlCol="0" anchor="t"/>
+          <a:lstStyle/>
+          <a:p>
+            <a:pPr marL="0" indent="0" algn="l">
+              <a:buNone/>
+            </a:pPr>
+            <a:r>
+              <a:rPr lang="en-US" sz="1200" dirty="0">
+                <a:solidFill>
+                  <a:srgbClr val="1A2332"/>
+                </a:solidFill>
+                <a:latin typeface="Times New Roman" pitchFamily="34" charset="0"/>
+                <a:ea typeface="Times New Roman" pitchFamily="34" charset="-122"/>
+                <a:cs typeface="Times New Roman" pitchFamily="34" charset="-120"/>
+              </a:rPr>
+              <a:t>Keep only </a:t>
+            </a:r>
+            <a:r>
+              <a:rPr lang="en-US" sz="1200" i="1" dirty="0">
+                <a:solidFill>
+                  <a:srgbClr val="1A2332"/>
+                </a:solidFill>
+                <a:latin typeface="Times New Roman" pitchFamily="34" charset="0"/>
+                <a:ea typeface="Times New Roman" pitchFamily="34" charset="-122"/>
+                <a:cs typeface="Times New Roman" pitchFamily="34" charset="-120"/>
+              </a:rPr>
+              <a:t>γ</a:t>
+            </a:r>
+            <a:r>
+              <a:rPr lang="en-US" sz="1200" dirty="0">
+                <a:solidFill>
+                  <a:srgbClr val="1A2332"/>
+                </a:solidFill>
+                <a:latin typeface="Times New Roman" pitchFamily="34" charset="0"/>
+                <a:ea typeface="Times New Roman" pitchFamily="34" charset="-122"/>
+                <a:cs typeface="Times New Roman" pitchFamily="34" charset="-120"/>
+              </a:rPr>
+              <a:t> rays in coincidence with a mass-selected recoil at the focal plane.</a:t>
+            </a:r>
+            <a:endParaRPr lang="en-US" sz="1200" dirty="0"/>
+          </a:p>
+        </p:txBody>
+      </p:sp>
       <p:sp>
         <p:nvSpPr>
           <p:cNvPr id="13" name="Shape 8"/>
@@ -6019,30 +7622,166 @@
           </a:p>
         </p:txBody>
       </p:sp>
-      <p:pic>
-        <p:nvPicPr>
-          <p:cNvPr id="20" name="Image 3" descr="/Users/Reid Hu/OrbitOS/70_Presentations/717_Learning Group-20260916/assets/eq/mn_drip_b.png"/>
-          <p:cNvPicPr>
-            <a:picLocks noChangeAspect="1"/>
-          </p:cNvPicPr>
-          <p:nvPr/>
-        </p:nvPicPr>
-        <p:blipFill>
-          <a:blip r:embed="rId6"/>
-          <a:stretch>
-            <a:fillRect/>
-          </a:stretch>
-        </p:blipFill>
-        <p:spPr>
-          <a:xfrm>
-            <a:off x="5257800" y="2944368"/>
-            <a:ext cx="3395472" cy="204216"/>
-          </a:xfrm>
-          <a:prstGeom prst="rect">
-            <a:avLst/>
-          </a:prstGeom>
-        </p:spPr>
-      </p:pic>
+      <p:sp>
+        <p:nvSpPr>
+          <p:cNvPr id="20" name="Text 20"/>
+          <p:cNvSpPr txBox="1"/>
+          <p:nvPr/>
+        </p:nvSpPr>
+        <p:spPr>
+          <a:xfrm>
+            <a:off x="5280182" y="2924048"/>
+            <a:ext cx="3429000" cy="204216"/>
+          </a:xfrm>
+          <a:prstGeom prst="rect">
+            <a:avLst/>
+          </a:prstGeom>
+          <a:noFill/>
+          <a:ln/>
+        </p:spPr>
+        <p:txBody>
+          <a:bodyPr wrap="square" lIns="0" tIns="0" rIns="0" bIns="0" rtlCol="0" anchor="t"/>
+          <a:lstStyle/>
+          <a:p>
+            <a:pPr marL="0" indent="0" algn="l">
+              <a:buNone/>
+            </a:pPr>
+            <a:r>
+              <a:rPr lang="en-US" sz="1200" baseline="30000" dirty="0">
+                <a:solidFill>
+                  <a:srgbClr val="1A2332"/>
+                </a:solidFill>
+                <a:latin typeface="Times New Roman" pitchFamily="34" charset="0"/>
+                <a:ea typeface="Times New Roman" pitchFamily="34" charset="-122"/>
+                <a:cs typeface="Times New Roman" pitchFamily="34" charset="-120"/>
+              </a:rPr>
+              <a:t>49</a:t>
+            </a:r>
+            <a:r>
+              <a:rPr lang="en-US" sz="1200" dirty="0">
+                <a:solidFill>
+                  <a:srgbClr val="1A2332"/>
+                </a:solidFill>
+                <a:latin typeface="Times New Roman" pitchFamily="34" charset="0"/>
+                <a:ea typeface="Times New Roman" pitchFamily="34" charset="-122"/>
+                <a:cs typeface="Times New Roman" pitchFamily="34" charset="-120"/>
+              </a:rPr>
+              <a:t>Mn is </a:t>
+            </a:r>
+            <a:r>
+              <a:rPr lang="en-US" sz="1200" baseline="30000" dirty="0">
+                <a:solidFill>
+                  <a:srgbClr val="1A2332"/>
+                </a:solidFill>
+                <a:latin typeface="Times New Roman" pitchFamily="34" charset="0"/>
+                <a:ea typeface="Times New Roman" pitchFamily="34" charset="-122"/>
+                <a:cs typeface="Times New Roman" pitchFamily="34" charset="-120"/>
+              </a:rPr>
+              <a:t>49</a:t>
+            </a:r>
+            <a:r>
+              <a:rPr lang="en-US" sz="1200" dirty="0">
+                <a:solidFill>
+                  <a:srgbClr val="1A2332"/>
+                </a:solidFill>
+                <a:latin typeface="Times New Roman" pitchFamily="34" charset="0"/>
+                <a:ea typeface="Times New Roman" pitchFamily="34" charset="-122"/>
+                <a:cs typeface="Times New Roman" pitchFamily="34" charset="-120"/>
+              </a:rPr>
+              <a:t>Cr with </a:t>
+            </a:r>
+            <a:r>
+              <a:rPr lang="en-US" sz="1200" i="1" dirty="0">
+                <a:solidFill>
+                  <a:srgbClr val="1A2332"/>
+                </a:solidFill>
+                <a:latin typeface="Times New Roman" pitchFamily="34" charset="0"/>
+                <a:ea typeface="Times New Roman" pitchFamily="34" charset="-122"/>
+                <a:cs typeface="Times New Roman" pitchFamily="34" charset="-120"/>
+              </a:rPr>
+              <a:t>Z</a:t>
+            </a:r>
+            <a:r>
+              <a:rPr lang="en-US" sz="1200" dirty="0">
+                <a:solidFill>
+                  <a:srgbClr val="1A2332"/>
+                </a:solidFill>
+                <a:latin typeface="Times New Roman" pitchFamily="34" charset="0"/>
+                <a:ea typeface="Times New Roman" pitchFamily="34" charset="-122"/>
+                <a:cs typeface="Times New Roman" pitchFamily="34" charset="-120"/>
+              </a:rPr>
+              <a:t> and </a:t>
+            </a:r>
+            <a:r>
+              <a:rPr lang="en-US" sz="1200" i="1" dirty="0">
+                <a:solidFill>
+                  <a:srgbClr val="1A2332"/>
+                </a:solidFill>
+                <a:latin typeface="Times New Roman" pitchFamily="34" charset="0"/>
+                <a:ea typeface="Times New Roman" pitchFamily="34" charset="-122"/>
+                <a:cs typeface="Times New Roman" pitchFamily="34" charset="-120"/>
+              </a:rPr>
+              <a:t>N</a:t>
+            </a:r>
+            <a:r>
+              <a:rPr lang="en-US" sz="1200" dirty="0">
+                <a:solidFill>
+                  <a:srgbClr val="1A2332"/>
+                </a:solidFill>
+                <a:latin typeface="Times New Roman" pitchFamily="34" charset="0"/>
+                <a:ea typeface="Times New Roman" pitchFamily="34" charset="-122"/>
+                <a:cs typeface="Times New Roman" pitchFamily="34" charset="-120"/>
+              </a:rPr>
+              <a:t> swapped (</a:t>
+            </a:r>
+            <a:r>
+              <a:rPr lang="en-US" sz="1200" i="1" dirty="0">
+                <a:solidFill>
+                  <a:srgbClr val="1A2332"/>
+                </a:solidFill>
+                <a:latin typeface="Times New Roman" pitchFamily="34" charset="0"/>
+                <a:ea typeface="Times New Roman" pitchFamily="34" charset="-122"/>
+                <a:cs typeface="Times New Roman" pitchFamily="34" charset="-120"/>
+              </a:rPr>
+              <a:t>Z</a:t>
+            </a:r>
+            <a:r>
+              <a:rPr lang="en-US" sz="1200" dirty="0">
+                <a:solidFill>
+                  <a:srgbClr val="1A2332"/>
+                </a:solidFill>
+                <a:latin typeface="Times New Roman" pitchFamily="34" charset="0"/>
+                <a:ea typeface="Times New Roman" pitchFamily="34" charset="-122"/>
+                <a:cs typeface="Times New Roman" pitchFamily="34" charset="-120"/>
+              </a:rPr>
+              <a:t> = 25, </a:t>
+            </a:r>
+            <a:r>
+              <a:rPr lang="en-US" sz="1200" i="1" dirty="0">
+                <a:solidFill>
+                  <a:srgbClr val="1A2332"/>
+                </a:solidFill>
+                <a:latin typeface="Times New Roman" pitchFamily="34" charset="0"/>
+                <a:ea typeface="Times New Roman" pitchFamily="34" charset="-122"/>
+                <a:cs typeface="Times New Roman" pitchFamily="34" charset="-120"/>
+              </a:rPr>
+              <a:t>N</a:t>
+            </a:r>
+            <a:r>
+              <a:rPr lang="en-US" sz="1200" dirty="0">
+                <a:solidFill>
+                  <a:srgbClr val="1A2332"/>
+                </a:solidFill>
+                <a:latin typeface="Times New Roman" pitchFamily="34" charset="0"/>
+                <a:ea typeface="Times New Roman" pitchFamily="34" charset="-122"/>
+                <a:cs typeface="Times New Roman" pitchFamily="34" charset="-120"/>
+              </a:rPr>
+              <a:t> = 24).</a:t>
+            </a:r>
+            <a:endParaRPr lang="en-US" sz="1200" dirty="0"/>
+          </a:p>
+        </p:txBody>
+      </p:sp>
       <p:sp>
         <p:nvSpPr>
           <p:cNvPr id="21" name="Shape 15"/>
@@ -6145,30 +7884,89 @@
           </a:p>
         </p:txBody>
       </p:sp>
-      <p:pic>
-        <p:nvPicPr>
-          <p:cNvPr id="24" name="Image 4" descr="/Users/Reid Hu/OrbitOS/70_Presentations/717_Learning Group-20260916/assets/eq/mn_why_b.png"/>
-          <p:cNvPicPr>
-            <a:picLocks noChangeAspect="1"/>
-          </p:cNvPicPr>
-          <p:nvPr/>
-        </p:nvPicPr>
-        <p:blipFill>
-          <a:blip r:embed="rId7"/>
-          <a:stretch>
-            <a:fillRect/>
-          </a:stretch>
-        </p:blipFill>
-        <p:spPr>
-          <a:xfrm>
-            <a:off x="5257800" y="3904488"/>
-            <a:ext cx="3212592" cy="374904"/>
-          </a:xfrm>
-          <a:prstGeom prst="rect">
-            <a:avLst/>
-          </a:prstGeom>
-        </p:spPr>
-      </p:pic>
+      <p:sp>
+        <p:nvSpPr>
+          <p:cNvPr id="24" name="Text 24"/>
+          <p:cNvSpPr txBox="1"/>
+          <p:nvPr/>
+        </p:nvSpPr>
+        <p:spPr>
+          <a:xfrm>
+            <a:off x="5277074" y="3881150"/>
+            <a:ext cx="3429000" cy="374904"/>
+          </a:xfrm>
+          <a:prstGeom prst="rect">
+            <a:avLst/>
+          </a:prstGeom>
+          <a:noFill/>
+          <a:ln/>
+        </p:spPr>
+        <p:txBody>
+          <a:bodyPr wrap="square" lIns="0" tIns="0" rIns="0" bIns="0" rtlCol="0" anchor="t"/>
+          <a:lstStyle/>
+          <a:p>
+            <a:pPr marL="0" indent="0" algn="l">
+              <a:buNone/>
+            </a:pPr>
+            <a:r>
+              <a:rPr lang="en-US" sz="1200" dirty="0">
+                <a:solidFill>
+                  <a:srgbClr val="1A2332"/>
+                </a:solidFill>
+                <a:latin typeface="Times New Roman" pitchFamily="34" charset="0"/>
+                <a:ea typeface="Times New Roman" pitchFamily="34" charset="-122"/>
+                <a:cs typeface="Times New Roman" pitchFamily="34" charset="-120"/>
+              </a:rPr>
+              <a:t>Its spectrometer selects recoils by mass; </a:t>
+            </a:r>
+            <a:r>
+              <a:rPr lang="en-US" sz="1200" i="1" dirty="0">
+                <a:solidFill>
+                  <a:srgbClr val="1A2332"/>
+                </a:solidFill>
+                <a:latin typeface="Times New Roman" pitchFamily="34" charset="0"/>
+                <a:ea typeface="Times New Roman" pitchFamily="34" charset="-122"/>
+                <a:cs typeface="Times New Roman" pitchFamily="34" charset="-120"/>
+              </a:rPr>
+              <a:t>γ</a:t>
+            </a:r>
+            <a:r>
+              <a:rPr lang="en-US" sz="1200" dirty="0">
+                <a:solidFill>
+                  <a:srgbClr val="1A2332"/>
+                </a:solidFill>
+                <a:latin typeface="Times New Roman" pitchFamily="34" charset="0"/>
+                <a:ea typeface="Times New Roman" pitchFamily="34" charset="-122"/>
+                <a:cs typeface="Times New Roman" pitchFamily="34" charset="-120"/>
+              </a:rPr>
+              <a:t> detectors surround the target.</a:t>
+            </a:r>
+            <a:endParaRPr lang="en-US" sz="1200" dirty="0"/>
+          </a:p>
+        </p:txBody>
+      </p:sp>
+      <p:sp>
+        <p:nvSpPr>
+          <p:cNvPr id="25" name="Date Placeholder 24"/>
+          <p:cNvSpPr>
+            <a:spLocks noGrp="1"/>
+          </p:cNvSpPr>
+          <p:nvPr>
+            <p:ph type="dt" sz="half" idx="10"/>
+          </p:nvPr>
+        </p:nvSpPr>
+        <p:spPr/>
+        <p:txBody>
+          <a:bodyPr/>
+          <a:lstStyle/>
+          <a:p>
+            <a:r>
+              <a:rPr lang="en-US" dirty="0"/>
+              <a:t>29 Sep 2026</a:t>
+            </a:r>
+          </a:p>
+        </p:txBody>
+      </p:sp>
     </p:spTree>
   </p:cSld>
   <p:clrMapOvr>
@@ -6177,7 +7975,7 @@
 </p:sld>
 </file>
 
-<file path=ppt/slides/slide16.xml><?xml version="1.0" encoding="utf-8"?>
+<file path=ppt/slides/slide17.xml><?xml version="1.0" encoding="utf-8"?>
 <p:sld xmlns:a="http://schemas.openxmlformats.org/drawingml/2006/main" xmlns:r="http://schemas.openxmlformats.org/officeDocument/2006/relationships" xmlns:p="http://schemas.openxmlformats.org/presentationml/2006/main">
   <p:cSld name="Slide 16">
     <p:bg>
@@ -6441,7 +8239,7 @@
 </p:sld>
 </file>
 
-<file path=ppt/slides/slide17.xml><?xml version="1.0" encoding="utf-8"?>
+<file path=ppt/slides/slide18.xml><?xml version="1.0" encoding="utf-8"?>
 <p:sld xmlns:a="http://schemas.openxmlformats.org/drawingml/2006/main" xmlns:r="http://schemas.openxmlformats.org/officeDocument/2006/relationships" xmlns:p="http://schemas.openxmlformats.org/presentationml/2006/main">
   <p:cSld name="Slide 17">
     <p:bg>
@@ -6641,7 +8439,7 @@
                 <a:ea typeface="Times New Roman" pitchFamily="34" charset="-122"/>
                 <a:cs typeface="Times New Roman" pitchFamily="34" charset="-120"/>
               </a:rPr>
-              <a:t>Content 10 / 10</a:t>
+              <a:t>Content 11 / 11</a:t>
             </a:r>
             <a:endParaRPr lang="en-US" sz="1000" dirty="0"/>
           </a:p>
@@ -7028,54 +8826,139 @@
           </a:p>
         </p:txBody>
       </p:sp>
-      <p:pic>
-        <p:nvPicPr>
-          <p:cNvPr id="18" name="Image 0" descr="/Users/Reid Hu/OrbitOS/70_Presentations/717_Learning Group-20260916/assets/eq/row_rms_w.png"/>
-          <p:cNvPicPr>
-            <a:picLocks noChangeAspect="1"/>
-          </p:cNvPicPr>
-          <p:nvPr/>
-        </p:nvPicPr>
-        <p:blipFill>
-          <a:blip r:embed="rId3"/>
-          <a:stretch>
-            <a:fillRect/>
-          </a:stretch>
-        </p:blipFill>
-        <p:spPr>
-          <a:xfrm>
-            <a:off x="2075688" y="2103806"/>
-            <a:ext cx="1703802" cy="163220"/>
-          </a:xfrm>
-          <a:prstGeom prst="rect">
-            <a:avLst/>
-          </a:prstGeom>
-        </p:spPr>
-      </p:pic>
-      <p:pic>
-        <p:nvPicPr>
-          <p:cNvPr id="19" name="Image 1" descr="/Users/Reid Hu/OrbitOS/70_Presentations/717_Learning Group-20260916/assets/eq/row_rms_n.png"/>
-          <p:cNvPicPr>
-            <a:picLocks noChangeAspect="1"/>
-          </p:cNvPicPr>
-          <p:nvPr/>
-        </p:nvPicPr>
-        <p:blipFill>
-          <a:blip r:embed="rId4"/>
-          <a:stretch>
-            <a:fillRect/>
-          </a:stretch>
-        </p:blipFill>
-        <p:spPr>
-          <a:xfrm>
-            <a:off x="5806440" y="2103714"/>
-            <a:ext cx="2339218" cy="163403"/>
-          </a:xfrm>
-          <a:prstGeom prst="rect">
-            <a:avLst/>
-          </a:prstGeom>
-        </p:spPr>
-      </p:pic>
+      <p:sp>
+        <p:nvSpPr>
+          <p:cNvPr id="18" name="Text 18"/>
+          <p:cNvSpPr txBox="1"/>
+          <p:nvPr/>
+        </p:nvSpPr>
+        <p:spPr>
+          <a:xfrm>
+            <a:off x="2082262" y="2070786"/>
+            <a:ext cx="1978122" cy="163220"/>
+          </a:xfrm>
+          <a:prstGeom prst="rect">
+            <a:avLst/>
+          </a:prstGeom>
+          <a:noFill/>
+          <a:ln/>
+        </p:spPr>
+        <p:txBody>
+          <a:bodyPr wrap="none" lIns="0" tIns="0" rIns="0" bIns="0" rtlCol="0" anchor="t"/>
+          <a:lstStyle/>
+          <a:p>
+            <a:pPr marL="0" indent="0" algn="l">
+              <a:buNone/>
+            </a:pPr>
+            <a:r>
+              <a:rPr lang="en-US" sz="1200" dirty="0">
+                <a:solidFill>
+                  <a:srgbClr val="1A2332"/>
+                </a:solidFill>
+                <a:latin typeface="Times New Roman" pitchFamily="34" charset="0"/>
+                <a:ea typeface="Times New Roman" pitchFamily="34" charset="-122"/>
+                <a:cs typeface="Times New Roman" pitchFamily="34" charset="-120"/>
+              </a:rPr>
+              <a:t>Need </a:t>
+            </a:r>
+            <a:r>
+              <a:rPr lang="en-US" sz="1200" i="1" dirty="0">
+                <a:solidFill>
+                  <a:srgbClr val="1A2332"/>
+                </a:solidFill>
+                <a:latin typeface="Times New Roman" pitchFamily="34" charset="0"/>
+                <a:ea typeface="Times New Roman" pitchFamily="34" charset="-122"/>
+                <a:cs typeface="Times New Roman" pitchFamily="34" charset="-120"/>
+              </a:rPr>
+              <a:t>A</a:t>
+            </a:r>
+            <a:r>
+              <a:rPr lang="en-US" sz="1200" dirty="0">
+                <a:solidFill>
+                  <a:srgbClr val="1A2332"/>
+                </a:solidFill>
+                <a:latin typeface="Times New Roman" pitchFamily="34" charset="0"/>
+                <a:ea typeface="Times New Roman" pitchFamily="34" charset="-122"/>
+                <a:cs typeface="Times New Roman" pitchFamily="34" charset="-120"/>
+              </a:rPr>
+              <a:t>/</a:t>
+            </a:r>
+            <a:r>
+              <a:rPr lang="en-US" sz="1200" i="1" dirty="0">
+                <a:solidFill>
+                  <a:srgbClr val="1A2332"/>
+                </a:solidFill>
+                <a:latin typeface="Times New Roman" pitchFamily="34" charset="0"/>
+                <a:ea typeface="Times New Roman" pitchFamily="34" charset="-122"/>
+                <a:cs typeface="Times New Roman" pitchFamily="34" charset="-120"/>
+              </a:rPr>
+              <a:t>q</a:t>
+            </a:r>
+            <a:r>
+              <a:rPr lang="en-US" sz="1200" dirty="0">
+                <a:solidFill>
+                  <a:srgbClr val="1A2332"/>
+                </a:solidFill>
+                <a:latin typeface="Times New Roman" pitchFamily="34" charset="0"/>
+                <a:ea typeface="Times New Roman" pitchFamily="34" charset="-122"/>
+                <a:cs typeface="Times New Roman" pitchFamily="34" charset="-120"/>
+              </a:rPr>
+              <a:t> at the focal plane</a:t>
+            </a:r>
+            <a:endParaRPr lang="en-US" sz="1200" dirty="0"/>
+          </a:p>
+        </p:txBody>
+      </p:sp>
+      <p:sp>
+        <p:nvSpPr>
+          <p:cNvPr id="19" name="Text 19"/>
+          <p:cNvSpPr txBox="1"/>
+          <p:nvPr/>
+        </p:nvSpPr>
+        <p:spPr>
+          <a:xfrm>
+            <a:off x="5819140" y="2070694"/>
+            <a:ext cx="2613538" cy="163403"/>
+          </a:xfrm>
+          <a:prstGeom prst="rect">
+            <a:avLst/>
+          </a:prstGeom>
+          <a:noFill/>
+          <a:ln/>
+        </p:spPr>
+        <p:txBody>
+          <a:bodyPr wrap="none" lIns="0" tIns="0" rIns="0" bIns="0" rtlCol="0" anchor="t"/>
+          <a:lstStyle/>
+          <a:p>
+            <a:pPr marL="0" indent="0" algn="l">
+              <a:buNone/>
+            </a:pPr>
+            <a:r>
+              <a:rPr lang="en-US" sz="1200" dirty="0">
+                <a:solidFill>
+                  <a:srgbClr val="1A2332"/>
+                </a:solidFill>
+                <a:latin typeface="Times New Roman" pitchFamily="34" charset="0"/>
+                <a:ea typeface="Times New Roman" pitchFamily="34" charset="-122"/>
+                <a:cs typeface="Times New Roman" pitchFamily="34" charset="-120"/>
+              </a:rPr>
+              <a:t>Charge-state splitting; need to know </a:t>
+            </a:r>
+            <a:r>
+              <a:rPr lang="en-US" sz="1200" i="1" dirty="0">
+                <a:solidFill>
+                  <a:srgbClr val="1A2332"/>
+                </a:solidFill>
+                <a:latin typeface="Times New Roman" pitchFamily="34" charset="0"/>
+                <a:ea typeface="Times New Roman" pitchFamily="34" charset="-122"/>
+                <a:cs typeface="Times New Roman" pitchFamily="34" charset="-120"/>
+              </a:rPr>
+              <a:t>q̄</a:t>
+            </a:r>
+            <a:endParaRPr lang="en-US" sz="1200" dirty="0"/>
+          </a:p>
+        </p:txBody>
+      </p:sp>
       <p:sp>
         <p:nvSpPr>
           <p:cNvPr id="20" name="Shape 16"/>
@@ -7181,30 +9064,45 @@
           </a:p>
         </p:txBody>
       </p:sp>
-      <p:pic>
-        <p:nvPicPr>
-          <p:cNvPr id="23" name="Image 2" descr="/Users/Reid Hu/OrbitOS/70_Presentations/717_Learning Group-20260916/assets/eq/row_rf_n.png"/>
-          <p:cNvPicPr>
-            <a:picLocks noChangeAspect="1"/>
-          </p:cNvPicPr>
-          <p:nvPr/>
-        </p:nvPicPr>
-        <p:blipFill>
-          <a:blip r:embed="rId5"/>
-          <a:stretch>
-            <a:fillRect/>
-          </a:stretch>
-        </p:blipFill>
-        <p:spPr>
-          <a:xfrm>
-            <a:off x="5806440" y="2835234"/>
-            <a:ext cx="1796247" cy="163403"/>
-          </a:xfrm>
-          <a:prstGeom prst="rect">
-            <a:avLst/>
-          </a:prstGeom>
-        </p:spPr>
-      </p:pic>
+      <p:sp>
+        <p:nvSpPr>
+          <p:cNvPr id="23" name="Text 23"/>
+          <p:cNvSpPr txBox="1"/>
+          <p:nvPr/>
+        </p:nvSpPr>
+        <p:spPr>
+          <a:xfrm>
+            <a:off x="5813014" y="2802214"/>
+            <a:ext cx="2070567" cy="163403"/>
+          </a:xfrm>
+          <a:prstGeom prst="rect">
+            <a:avLst/>
+          </a:prstGeom>
+          <a:noFill/>
+          <a:ln/>
+        </p:spPr>
+        <p:txBody>
+          <a:bodyPr wrap="none" lIns="0" tIns="0" rIns="0" bIns="0" rtlCol="0" anchor="t"/>
+          <a:lstStyle/>
+          <a:p>
+            <a:pPr marL="0" indent="0" algn="l">
+              <a:buNone/>
+            </a:pPr>
+            <a:r>
+              <a:rPr lang="en-US" sz="1200" dirty="0">
+                <a:solidFill>
+                  <a:srgbClr val="1A2332"/>
+                </a:solidFill>
+                <a:latin typeface="Times New Roman" pitchFamily="34" charset="0"/>
+                <a:ea typeface="Times New Roman" pitchFamily="34" charset="-122"/>
+                <a:cs typeface="Times New Roman" pitchFamily="34" charset="-120"/>
+              </a:rPr>
+              <a:t>Needs sharp ns beam pulsing</a:t>
+            </a:r>
+            <a:endParaRPr lang="en-US" sz="1200" dirty="0"/>
+          </a:p>
+        </p:txBody>
+      </p:sp>
       <p:sp>
         <p:nvSpPr>
           <p:cNvPr id="24" name="Shape 19"/>
@@ -7415,30 +9313,111 @@
           </a:p>
         </p:txBody>
       </p:sp>
-      <p:pic>
-        <p:nvPicPr>
-          <p:cNvPr id="30" name="Image 3" descr="/Users/Reid Hu/OrbitOS/70_Presentations/717_Learning Group-20260916/assets/eq/row_frag_w.png"/>
-          <p:cNvPicPr>
-            <a:picLocks noChangeAspect="1"/>
-          </p:cNvPicPr>
-          <p:nvPr/>
-        </p:nvPicPr>
-        <p:blipFill>
-          <a:blip r:embed="rId6"/>
-          <a:stretch>
-            <a:fillRect/>
-          </a:stretch>
-        </p:blipFill>
-        <p:spPr>
-          <a:xfrm>
-            <a:off x="2075688" y="4303212"/>
-            <a:ext cx="1754094" cy="153528"/>
-          </a:xfrm>
-          <a:prstGeom prst="rect">
-            <a:avLst/>
-          </a:prstGeom>
-        </p:spPr>
-      </p:pic>
+      <p:sp>
+        <p:nvSpPr>
+          <p:cNvPr id="30" name="Text 30"/>
+          <p:cNvSpPr txBox="1"/>
+          <p:nvPr/>
+        </p:nvSpPr>
+        <p:spPr>
+          <a:xfrm>
+            <a:off x="2085370" y="4267174"/>
+            <a:ext cx="2028414" cy="153528"/>
+          </a:xfrm>
+          <a:prstGeom prst="rect">
+            <a:avLst/>
+          </a:prstGeom>
+          <a:noFill/>
+          <a:ln/>
+        </p:spPr>
+        <p:txBody>
+          <a:bodyPr wrap="none" lIns="0" tIns="0" rIns="0" bIns="0" rtlCol="0" anchor="t"/>
+          <a:lstStyle/>
+          <a:p>
+            <a:pPr marL="0" indent="0" algn="l">
+              <a:buNone/>
+            </a:pPr>
+            <a:r>
+              <a:rPr lang="en-US" sz="1200" dirty="0">
+                <a:solidFill>
+                  <a:srgbClr val="1A2332"/>
+                </a:solidFill>
+                <a:latin typeface="Times New Roman" pitchFamily="34" charset="0"/>
+                <a:ea typeface="Times New Roman" pitchFamily="34" charset="-122"/>
+                <a:cs typeface="Times New Roman" pitchFamily="34" charset="-120"/>
+              </a:rPr>
+              <a:t>Relativistic </a:t>
+            </a:r>
+            <a:r>
+              <a:rPr lang="en-US" sz="1200" i="1" dirty="0">
+                <a:solidFill>
+                  <a:srgbClr val="1A2332"/>
+                </a:solidFill>
+                <a:latin typeface="Times New Roman" pitchFamily="34" charset="0"/>
+                <a:ea typeface="Times New Roman" pitchFamily="34" charset="-122"/>
+                <a:cs typeface="Times New Roman" pitchFamily="34" charset="-120"/>
+              </a:rPr>
+              <a:t>E</a:t>
+            </a:r>
+            <a:r>
+              <a:rPr lang="en-US" sz="1200" dirty="0">
+                <a:solidFill>
+                  <a:srgbClr val="1A2332"/>
+                </a:solidFill>
+                <a:latin typeface="Times New Roman" pitchFamily="34" charset="0"/>
+                <a:ea typeface="Times New Roman" pitchFamily="34" charset="-122"/>
+                <a:cs typeface="Times New Roman" pitchFamily="34" charset="-120"/>
+              </a:rPr>
+              <a:t>/</a:t>
+            </a:r>
+            <a:r>
+              <a:rPr lang="en-US" sz="1200" i="1" dirty="0">
+                <a:solidFill>
+                  <a:srgbClr val="1A2332"/>
+                </a:solidFill>
+                <a:latin typeface="Times New Roman" pitchFamily="34" charset="0"/>
+                <a:ea typeface="Times New Roman" pitchFamily="34" charset="-122"/>
+                <a:cs typeface="Times New Roman" pitchFamily="34" charset="-120"/>
+              </a:rPr>
+              <a:t>u</a:t>
+            </a:r>
+            <a:r>
+              <a:rPr lang="en-US" sz="1200" dirty="0">
+                <a:solidFill>
+                  <a:srgbClr val="1A2332"/>
+                </a:solidFill>
+                <a:latin typeface="Times New Roman" pitchFamily="34" charset="0"/>
+                <a:ea typeface="Times New Roman" pitchFamily="34" charset="-122"/>
+                <a:cs typeface="Times New Roman" pitchFamily="34" charset="-120"/>
+              </a:rPr>
+              <a:t> </a:t>
+            </a:r>
+            <a:r>
+              <a:rPr lang="en-US" sz="1200" dirty="0">
+                <a:solidFill>
+                  <a:srgbClr val="1A2332"/>
+                </a:solidFill>
+                <a:latin typeface="Cambria Math" pitchFamily="34" charset="0"/>
+                <a:ea typeface="Cambria Math" pitchFamily="34" charset="-122"/>
+                <a:cs typeface="Cambria Math" pitchFamily="34" charset="-120"/>
+              </a:rPr>
+              <a:t>≳</a:t>
+            </a:r>
+            <a:r>
+              <a:rPr lang="en-US" sz="1200" dirty="0">
+                <a:solidFill>
+                  <a:srgbClr val="1A2332"/>
+                </a:solidFill>
+                <a:latin typeface="Times New Roman" pitchFamily="34" charset="0"/>
+                <a:ea typeface="Times New Roman" pitchFamily="34" charset="-122"/>
+                <a:cs typeface="Times New Roman" pitchFamily="34" charset="-120"/>
+              </a:rPr>
+              <a:t> 100 MeV</a:t>
+            </a:r>
+            <a:endParaRPr lang="en-US" sz="1200" dirty="0"/>
+          </a:p>
+        </p:txBody>
+      </p:sp>
       <p:sp>
         <p:nvSpPr>
           <p:cNvPr id="31" name="Text 25"/>
@@ -7475,6 +9454,28 @@
               <a:t>Wrong energy regime; degraders destroy slow beams</a:t>
             </a:r>
             <a:endParaRPr lang="en-US" sz="1200" dirty="0"/>
+          </a:p>
+        </p:txBody>
+      </p:sp>
+      <p:sp>
+        <p:nvSpPr>
+          <p:cNvPr id="32" name="Date Placeholder 31"/>
+          <p:cNvSpPr>
+            <a:spLocks noGrp="1"/>
+          </p:cNvSpPr>
+          <p:nvPr>
+            <p:ph type="dt" sz="half" idx="10"/>
+          </p:nvPr>
+        </p:nvSpPr>
+        <p:spPr/>
+        <p:txBody>
+          <a:bodyPr/>
+          <a:lstStyle/>
+          <a:p>
+            <a:r>
+              <a:rPr lang="en-US" dirty="0"/>
+              <a:t>29 Sep 2026</a:t>
+            </a:r>
           </a:p>
         </p:txBody>
       </p:sp>
@@ -7486,7 +9487,7 @@
 </p:sld>
 </file>
 
-<file path=ppt/slides/slide18.xml><?xml version="1.0" encoding="utf-8"?>
+<file path=ppt/slides/slide19.xml><?xml version="1.0" encoding="utf-8"?>
 <p:sld xmlns:a="http://schemas.openxmlformats.org/drawingml/2006/main" xmlns:r="http://schemas.openxmlformats.org/officeDocument/2006/relationships" xmlns:p="http://schemas.openxmlformats.org/presentationml/2006/main">
   <p:cSld name="Slide 18">
     <p:bg>
@@ -8030,30 +10031,67 @@
           </a:p>
         </p:txBody>
       </p:sp>
-      <p:pic>
-        <p:nvPicPr>
-          <p:cNvPr id="17" name="Image 0" descr="/Users/Reid Hu/OrbitOS/70_Presentations/717_Learning Group-20260916/assets/eq/contrib_decay.png"/>
-          <p:cNvPicPr>
-            <a:picLocks noChangeAspect="1"/>
-          </p:cNvPicPr>
-          <p:nvPr/>
-        </p:nvPicPr>
-        <p:blipFill>
-          <a:blip r:embed="rId3"/>
-          <a:stretch>
-            <a:fillRect/>
-          </a:stretch>
-        </p:blipFill>
-        <p:spPr>
-          <a:xfrm>
-            <a:off x="1371600" y="3735050"/>
-            <a:ext cx="6446520" cy="201168"/>
-          </a:xfrm>
-          <a:prstGeom prst="rect">
-            <a:avLst/>
-          </a:prstGeom>
-        </p:spPr>
-      </p:pic>
+      <p:sp>
+        <p:nvSpPr>
+          <p:cNvPr id="17" name="Text 17"/>
+          <p:cNvSpPr txBox="1"/>
+          <p:nvPr/>
+        </p:nvSpPr>
+        <p:spPr>
+          <a:xfrm>
+            <a:off x="1390874" y="3711712"/>
+            <a:ext cx="7040880" cy="201168"/>
+          </a:xfrm>
+          <a:prstGeom prst="rect">
+            <a:avLst/>
+          </a:prstGeom>
+          <a:noFill/>
+          <a:ln/>
+        </p:spPr>
+        <p:txBody>
+          <a:bodyPr wrap="square" lIns="0" tIns="0" rIns="0" bIns="0" rtlCol="0" anchor="t"/>
+          <a:lstStyle/>
+          <a:p>
+            <a:pPr marL="0" indent="0" algn="l">
+              <a:buNone/>
+            </a:pPr>
+            <a:r>
+              <a:rPr lang="en-US" sz="1300" dirty="0">
+                <a:solidFill>
+                  <a:srgbClr val="1A2332"/>
+                </a:solidFill>
+                <a:latin typeface="Times New Roman" pitchFamily="34" charset="0"/>
+                <a:ea typeface="Times New Roman" pitchFamily="34" charset="-122"/>
+                <a:cs typeface="Times New Roman" pitchFamily="34" charset="-120"/>
+              </a:rPr>
+              <a:t>SHIP does not resolve the mass; parent–daughter </a:t>
+            </a:r>
+            <a:r>
+              <a:rPr lang="en-US" sz="1300" i="1" dirty="0">
+                <a:solidFill>
+                  <a:srgbClr val="1A2332"/>
+                </a:solidFill>
+                <a:latin typeface="Times New Roman" pitchFamily="34" charset="0"/>
+                <a:ea typeface="Times New Roman" pitchFamily="34" charset="-122"/>
+                <a:cs typeface="Times New Roman" pitchFamily="34" charset="-120"/>
+              </a:rPr>
+              <a:t>α</a:t>
+            </a:r>
+            <a:r>
+              <a:rPr lang="en-US" sz="1300" dirty="0">
+                <a:solidFill>
+                  <a:srgbClr val="1A2332"/>
+                </a:solidFill>
+                <a:latin typeface="Times New Roman" pitchFamily="34" charset="0"/>
+                <a:ea typeface="Times New Roman" pitchFamily="34" charset="-122"/>
+                <a:cs typeface="Times New Roman" pitchFamily="34" charset="-120"/>
+              </a:rPr>
+              <a:t> chains proved element 108 from three atoms.</a:t>
+            </a:r>
+            <a:endParaRPr lang="en-US" sz="1300" dirty="0"/>
+          </a:p>
+        </p:txBody>
+      </p:sp>
       <p:sp>
         <p:nvSpPr>
           <p:cNvPr id="18" name="Text 15"/>
@@ -8183,7 +10221,7 @@
                 <a:ea typeface="Times New Roman" pitchFamily="34" charset="-122"/>
                 <a:cs typeface="Times New Roman" pitchFamily="34" charset="-120"/>
               </a:rPr>
-              <a:t>Ten days of beam produced three atoms of element 108.</a:t>
+              <a:t>Ten days of beam produced three atoms of hassium (element 108).</a:t>
             </a:r>
             <a:endParaRPr lang="en-US" sz="1800" dirty="0"/>
           </a:p>
@@ -8338,30 +10376,67 @@
           </a:p>
         </p:txBody>
       </p:sp>
-      <p:pic>
-        <p:nvPicPr>
-          <p:cNvPr id="9" name="Picture 8" descr="stakes_stat.png"/>
-          <p:cNvPicPr>
-            <a:picLocks noChangeAspect="1"/>
-          </p:cNvPicPr>
-          <p:nvPr/>
-        </p:nvPicPr>
-        <p:blipFill>
-          <a:blip r:embed="rId4"/>
-          <a:stretch>
-            <a:fillRect/>
-          </a:stretch>
-        </p:blipFill>
-        <p:spPr>
-          <a:xfrm>
-            <a:off x="1303628" y="3545171"/>
-            <a:ext cx="6536743" cy="402336"/>
-          </a:xfrm>
-          <a:prstGeom prst="rect">
-            <a:avLst/>
-          </a:prstGeom>
-        </p:spPr>
-      </p:pic>
+      <p:sp>
+        <p:nvSpPr>
+          <p:cNvPr id="9" name="Text 9"/>
+          <p:cNvSpPr txBox="1"/>
+          <p:nvPr/>
+        </p:nvSpPr>
+        <p:spPr>
+          <a:xfrm>
+            <a:off x="1160342" y="3473005"/>
+            <a:ext cx="6811063" cy="402336"/>
+          </a:xfrm>
+          <a:prstGeom prst="rect">
+            <a:avLst/>
+          </a:prstGeom>
+          <a:noFill/>
+          <a:ln/>
+        </p:spPr>
+        <p:txBody>
+          <a:bodyPr wrap="none" lIns="0" tIns="0" rIns="0" bIns="0" rtlCol="0" anchor="t"/>
+          <a:lstStyle/>
+          <a:p>
+            <a:pPr marL="0" indent="0" algn="ctr">
+              <a:buNone/>
+            </a:pPr>
+            <a:r>
+              <a:rPr lang="en-US" sz="2650" dirty="0">
+                <a:solidFill>
+                  <a:srgbClr val="0F2F5C"/>
+                </a:solidFill>
+                <a:latin typeface="Times New Roman" pitchFamily="34" charset="0"/>
+                <a:ea typeface="Times New Roman" pitchFamily="34" charset="-122"/>
+                <a:cs typeface="Times New Roman" pitchFamily="34" charset="-120"/>
+              </a:rPr>
+              <a:t>6 × 10</a:t>
+            </a:r>
+            <a:r>
+              <a:rPr lang="en-US" sz="2650" baseline="30000" dirty="0">
+                <a:solidFill>
+                  <a:srgbClr val="0F2F5C"/>
+                </a:solidFill>
+                <a:latin typeface="Times New Roman" pitchFamily="34" charset="0"/>
+                <a:ea typeface="Times New Roman" pitchFamily="34" charset="-122"/>
+                <a:cs typeface="Times New Roman" pitchFamily="34" charset="-120"/>
+              </a:rPr>
+              <a:t>17</a:t>
+            </a:r>
+            <a:r>
+              <a:rPr lang="en-US" sz="2650" dirty="0">
+                <a:solidFill>
+                  <a:srgbClr val="0F2F5C"/>
+                </a:solidFill>
+                <a:latin typeface="Times New Roman" pitchFamily="34" charset="0"/>
+                <a:ea typeface="Times New Roman" pitchFamily="34" charset="-122"/>
+                <a:cs typeface="Times New Roman" pitchFamily="34" charset="-120"/>
+              </a:rPr>
+              <a:t> projectiles  →  3 atoms of element 108</a:t>
+            </a:r>
+            <a:endParaRPr lang="en-US" sz="2650" dirty="0"/>
+          </a:p>
+        </p:txBody>
+      </p:sp>
       <p:sp>
         <p:nvSpPr>
           <p:cNvPr id="10" name="Text 5"/>
@@ -8424,7 +10499,7 @@
             <p:nvPr/>
           </p:nvPicPr>
           <p:blipFill>
-            <a:blip r:embed="rId3"/>
+            <a:blip r:embed="rId4"/>
             <a:stretch>
               <a:fillRect/>
             </a:stretch>
@@ -8592,6 +10667,28 @@
           </p:txBody>
         </p:sp>
       </p:grpSp>
+      <p:sp>
+        <p:nvSpPr>
+          <p:cNvPr id="16" name="Date Placeholder 15"/>
+          <p:cNvSpPr>
+            <a:spLocks noGrp="1"/>
+          </p:cNvSpPr>
+          <p:nvPr>
+            <p:ph type="dt" sz="half" idx="10"/>
+          </p:nvPr>
+        </p:nvSpPr>
+        <p:spPr/>
+        <p:txBody>
+          <a:bodyPr/>
+          <a:lstStyle/>
+          <a:p>
+            <a:r>
+              <a:rPr lang="en-US" dirty="0"/>
+              <a:t>29 Sep 2026</a:t>
+            </a:r>
+          </a:p>
+        </p:txBody>
+      </p:sp>
     </p:spTree>
   </p:cSld>
   <p:clrMapOvr>
@@ -9094,6 +11191,435 @@
 
 <file path=ppt/slides/slide5.xml><?xml version="1.0" encoding="utf-8"?>
 <p:sld xmlns:a="http://schemas.openxmlformats.org/drawingml/2006/main" xmlns:r="http://schemas.openxmlformats.org/officeDocument/2006/relationships" xmlns:p="http://schemas.openxmlformats.org/presentationml/2006/main">
+  <p:cSld>
+    <p:spTree>
+      <p:nvGrpSpPr>
+        <p:cNvPr id="1" name="">
+          <a:extLst>
+            <a:ext uri="{FF2B5EF4-FFF2-40B4-BE49-F238E27FC236}">
+              <a16:creationId xmlns:a16="http://schemas.microsoft.com/office/drawing/2014/main" id="{45AD8F59-0B42-9C6C-4C7E-C66CDB800FF4}"/>
+            </a:ext>
+          </a:extLst>
+        </p:cNvPr>
+        <p:cNvGrpSpPr/>
+        <p:nvPr/>
+      </p:nvGrpSpPr>
+      <p:grpSpPr>
+        <a:xfrm>
+          <a:off x="0" y="0"/>
+          <a:ext cx="0" cy="0"/>
+          <a:chOff x="0" y="0"/>
+          <a:chExt cx="0" cy="0"/>
+        </a:xfrm>
+      </p:grpSpPr>
+      <p:sp>
+        <p:nvSpPr>
+          <p:cNvPr id="2" name="Shape 0">
+            <a:extLst>
+              <a:ext uri="{FF2B5EF4-FFF2-40B4-BE49-F238E27FC236}">
+                <a16:creationId xmlns:a16="http://schemas.microsoft.com/office/drawing/2014/main" id="{77C89379-E562-6001-FFEA-A837ECD71135}"/>
+              </a:ext>
+            </a:extLst>
+          </p:cNvPr>
+          <p:cNvSpPr/>
+          <p:nvPr/>
+        </p:nvSpPr>
+        <p:spPr>
+          <a:xfrm>
+            <a:off x="0" y="0"/>
+            <a:ext cx="9144000" cy="521208"/>
+          </a:xfrm>
+          <a:prstGeom prst="rect">
+            <a:avLst/>
+          </a:prstGeom>
+          <a:solidFill>
+            <a:srgbClr val="0F2F5C"/>
+          </a:solidFill>
+          <a:ln w="12700">
+            <a:solidFill>
+              <a:srgbClr val="0F2F5C"/>
+            </a:solidFill>
+            <a:prstDash val="solid"/>
+          </a:ln>
+        </p:spPr>
+        <p:txBody>
+          <a:bodyPr/>
+          <a:lstStyle/>
+          <a:p>
+            <a:endParaRPr lang="en-JP"/>
+          </a:p>
+        </p:txBody>
+      </p:sp>
+      <p:sp>
+        <p:nvSpPr>
+          <p:cNvPr id="3" name="Text 1">
+            <a:extLst>
+              <a:ext uri="{FF2B5EF4-FFF2-40B4-BE49-F238E27FC236}">
+                <a16:creationId xmlns:a16="http://schemas.microsoft.com/office/drawing/2014/main" id="{BA24E546-098F-4E7B-B7FC-50B26DF00DC8}"/>
+              </a:ext>
+            </a:extLst>
+          </p:cNvPr>
+          <p:cNvSpPr/>
+          <p:nvPr/>
+        </p:nvSpPr>
+        <p:spPr>
+          <a:xfrm>
+            <a:off x="411480" y="73152"/>
+            <a:ext cx="8321040" cy="384048"/>
+          </a:xfrm>
+          <a:prstGeom prst="rect">
+            <a:avLst/>
+          </a:prstGeom>
+          <a:noFill/>
+          <a:ln/>
+        </p:spPr>
+        <p:txBody>
+          <a:bodyPr wrap="square" lIns="0" tIns="0" rIns="0" bIns="0" rtlCol="0" anchor="ctr"/>
+          <a:lstStyle/>
+          <a:p>
+            <a:pPr marL="0" indent="0">
+              <a:buNone/>
+            </a:pPr>
+            <a:r>
+              <a:rPr lang="en-US" sz="1800" b="1" dirty="0">
+                <a:solidFill>
+                  <a:srgbClr val="FFFFFF"/>
+                </a:solidFill>
+                <a:latin typeface="Times New Roman" pitchFamily="34" charset="0"/>
+                <a:ea typeface="Times New Roman" pitchFamily="34" charset="-122"/>
+                <a:cs typeface="Times New Roman" pitchFamily="34" charset="-120"/>
+              </a:rPr>
+              <a:t>A magnet cannot separate the residues from the beam.</a:t>
+            </a:r>
+            <a:endParaRPr lang="en-US" sz="1800" dirty="0"/>
+          </a:p>
+        </p:txBody>
+      </p:sp>
+      <p:sp>
+        <p:nvSpPr>
+          <p:cNvPr id="4" name="Shape 2">
+            <a:extLst>
+              <a:ext uri="{FF2B5EF4-FFF2-40B4-BE49-F238E27FC236}">
+                <a16:creationId xmlns:a16="http://schemas.microsoft.com/office/drawing/2014/main" id="{1416291B-A032-22E8-2D0D-B2BDC8A145CA}"/>
+              </a:ext>
+            </a:extLst>
+          </p:cNvPr>
+          <p:cNvSpPr/>
+          <p:nvPr/>
+        </p:nvSpPr>
+        <p:spPr>
+          <a:xfrm>
+            <a:off x="347472" y="4864608"/>
+            <a:ext cx="8458200" cy="13716"/>
+          </a:xfrm>
+          <a:prstGeom prst="rect">
+            <a:avLst/>
+          </a:prstGeom>
+          <a:solidFill>
+            <a:srgbClr val="0F2F5C"/>
+          </a:solidFill>
+          <a:ln w="12700">
+            <a:solidFill>
+              <a:srgbClr val="0F2F5C"/>
+            </a:solidFill>
+            <a:prstDash val="solid"/>
+          </a:ln>
+        </p:spPr>
+        <p:txBody>
+          <a:bodyPr/>
+          <a:lstStyle/>
+          <a:p>
+            <a:endParaRPr lang="en-JP"/>
+          </a:p>
+        </p:txBody>
+      </p:sp>
+      <p:sp>
+        <p:nvSpPr>
+          <p:cNvPr id="5" name="Text 3">
+            <a:extLst>
+              <a:ext uri="{FF2B5EF4-FFF2-40B4-BE49-F238E27FC236}">
+                <a16:creationId xmlns:a16="http://schemas.microsoft.com/office/drawing/2014/main" id="{3AEAC1DB-352F-37C6-FD37-988506CCA57A}"/>
+              </a:ext>
+            </a:extLst>
+          </p:cNvPr>
+          <p:cNvSpPr/>
+          <p:nvPr/>
+        </p:nvSpPr>
+        <p:spPr>
+          <a:xfrm>
+            <a:off x="457200" y="4892040"/>
+            <a:ext cx="6858000" cy="201168"/>
+          </a:xfrm>
+          <a:prstGeom prst="rect">
+            <a:avLst/>
+          </a:prstGeom>
+          <a:noFill/>
+          <a:ln/>
+        </p:spPr>
+        <p:txBody>
+          <a:bodyPr wrap="square" lIns="0" tIns="0" rIns="0" bIns="0" rtlCol="0" anchor="ctr"/>
+          <a:lstStyle/>
+          <a:p>
+            <a:pPr marL="0" indent="0">
+              <a:buNone/>
+            </a:pPr>
+            <a:r>
+              <a:rPr lang="en-US" sz="1000" dirty="0">
+                <a:solidFill>
+                  <a:srgbClr val="5F6B73"/>
+                </a:solidFill>
+                <a:latin typeface="Times New Roman" pitchFamily="34" charset="0"/>
+                <a:ea typeface="Times New Roman" pitchFamily="34" charset="-122"/>
+                <a:cs typeface="Times New Roman" pitchFamily="34" charset="-120"/>
+              </a:rPr>
+              <a:t>Learning Group</a:t>
+            </a:r>
+            <a:endParaRPr lang="en-US" sz="1000" dirty="0"/>
+          </a:p>
+        </p:txBody>
+      </p:sp>
+      <p:sp>
+        <p:nvSpPr>
+          <p:cNvPr id="6" name="Text 4">
+            <a:extLst>
+              <a:ext uri="{FF2B5EF4-FFF2-40B4-BE49-F238E27FC236}">
+                <a16:creationId xmlns:a16="http://schemas.microsoft.com/office/drawing/2014/main" id="{531581C4-6D18-9B11-0712-1CF77C687E69}"/>
+              </a:ext>
+            </a:extLst>
+          </p:cNvPr>
+          <p:cNvSpPr/>
+          <p:nvPr/>
+        </p:nvSpPr>
+        <p:spPr>
+          <a:xfrm>
+            <a:off x="7269480" y="4892040"/>
+            <a:ext cx="1508760" cy="201168"/>
+          </a:xfrm>
+          <a:prstGeom prst="rect">
+            <a:avLst/>
+          </a:prstGeom>
+          <a:noFill/>
+          <a:ln/>
+        </p:spPr>
+        <p:txBody>
+          <a:bodyPr wrap="square" lIns="0" tIns="0" rIns="0" bIns="0" rtlCol="0" anchor="ctr"/>
+          <a:lstStyle/>
+          <a:p>
+            <a:pPr marL="0" indent="0" algn="r">
+              <a:buNone/>
+            </a:pPr>
+            <a:r>
+              <a:rPr lang="en-US" sz="1000" dirty="0">
+                <a:solidFill>
+                  <a:srgbClr val="5F6B73"/>
+                </a:solidFill>
+                <a:latin typeface="Times New Roman" pitchFamily="34" charset="0"/>
+                <a:ea typeface="Times New Roman" pitchFamily="34" charset="-122"/>
+                <a:cs typeface="Times New Roman" pitchFamily="34" charset="-120"/>
+              </a:rPr>
+              <a:t>Content 1 / 11</a:t>
+            </a:r>
+            <a:endParaRPr lang="en-US" sz="1000" dirty="0"/>
+          </a:p>
+        </p:txBody>
+      </p:sp>
+      <p:pic>
+        <p:nvPicPr>
+          <p:cNvPr id="26" name="Picture 25">
+            <a:extLst>
+              <a:ext uri="{FF2B5EF4-FFF2-40B4-BE49-F238E27FC236}">
+                <a16:creationId xmlns:a16="http://schemas.microsoft.com/office/drawing/2014/main" id="{FA8CF638-64F5-14BC-2E98-03FC4A6F4A80}"/>
+              </a:ext>
+            </a:extLst>
+          </p:cNvPr>
+          <p:cNvPicPr>
+            <a:picLocks noChangeAspect="1"/>
+          </p:cNvPicPr>
+          <p:nvPr/>
+        </p:nvPicPr>
+        <p:blipFill>
+          <a:blip r:embed="rId3"/>
+          <a:stretch>
+            <a:fillRect/>
+          </a:stretch>
+        </p:blipFill>
+        <p:spPr>
+          <a:xfrm>
+            <a:off x="457201" y="595254"/>
+            <a:ext cx="3296652" cy="4045891"/>
+          </a:xfrm>
+          <a:prstGeom prst="rect">
+            <a:avLst/>
+          </a:prstGeom>
+        </p:spPr>
+      </p:pic>
+      <p:pic>
+        <p:nvPicPr>
+          <p:cNvPr id="27" name="Picture 26" descr="eq_rigidity.png">
+            <a:extLst>
+              <a:ext uri="{FF2B5EF4-FFF2-40B4-BE49-F238E27FC236}">
+                <a16:creationId xmlns:a16="http://schemas.microsoft.com/office/drawing/2014/main" id="{4852F821-EBAE-AEA7-1C8B-A042EA6D65EE}"/>
+              </a:ext>
+            </a:extLst>
+          </p:cNvPr>
+          <p:cNvPicPr>
+            <a:picLocks noChangeAspect="1"/>
+          </p:cNvPicPr>
+          <p:nvPr/>
+        </p:nvPicPr>
+        <p:blipFill>
+          <a:blip r:embed="rId4"/>
+          <a:stretch>
+            <a:fillRect/>
+          </a:stretch>
+        </p:blipFill>
+        <p:spPr>
+          <a:xfrm>
+            <a:off x="3988392" y="594360"/>
+            <a:ext cx="3691158" cy="1414302"/>
+          </a:xfrm>
+          <a:prstGeom prst="rect">
+            <a:avLst/>
+          </a:prstGeom>
+        </p:spPr>
+      </p:pic>
+      <p:sp>
+        <p:nvSpPr>
+          <p:cNvPr id="29" name="Text 29"/>
+          <p:cNvSpPr txBox="1"/>
+          <p:nvPr/>
+        </p:nvSpPr>
+        <p:spPr>
+          <a:xfrm>
+            <a:off x="5218946" y="2034062"/>
+            <a:ext cx="1217798" cy="187178"/>
+          </a:xfrm>
+          <a:prstGeom prst="rect">
+            <a:avLst/>
+          </a:prstGeom>
+          <a:noFill/>
+          <a:ln/>
+        </p:spPr>
+        <p:txBody>
+          <a:bodyPr wrap="none" lIns="0" tIns="0" rIns="0" bIns="0" rtlCol="0" anchor="t"/>
+          <a:lstStyle/>
+          <a:p>
+            <a:pPr marL="0" indent="0" algn="ctr">
+              <a:buNone/>
+            </a:pPr>
+            <a:r>
+              <a:rPr lang="en-US" sz="1200" dirty="0">
+                <a:solidFill>
+                  <a:srgbClr val="5F6B73"/>
+                </a:solidFill>
+                <a:latin typeface="Times New Roman" pitchFamily="34" charset="0"/>
+                <a:ea typeface="Times New Roman" pitchFamily="34" charset="-122"/>
+                <a:cs typeface="Times New Roman" pitchFamily="34" charset="-120"/>
+              </a:rPr>
+              <a:t>Eq. 9  ·  </a:t>
+            </a:r>
+            <a:r>
+              <a:rPr lang="en-US" sz="1200" i="1" dirty="0">
+                <a:solidFill>
+                  <a:srgbClr val="5F6B73"/>
+                </a:solidFill>
+                <a:latin typeface="Times New Roman" pitchFamily="34" charset="0"/>
+                <a:ea typeface="Times New Roman" pitchFamily="34" charset="-122"/>
+                <a:cs typeface="Times New Roman" pitchFamily="34" charset="-120"/>
+              </a:rPr>
+              <a:t>γ</a:t>
+            </a:r>
+            <a:r>
+              <a:rPr lang="en-US" sz="1200" dirty="0">
+                <a:solidFill>
+                  <a:srgbClr val="5F6B73"/>
+                </a:solidFill>
+                <a:latin typeface="Times New Roman" pitchFamily="34" charset="0"/>
+                <a:ea typeface="Times New Roman" pitchFamily="34" charset="-122"/>
+                <a:cs typeface="Times New Roman" pitchFamily="34" charset="-120"/>
+              </a:rPr>
+              <a:t> ≈ 1</a:t>
+            </a:r>
+            <a:endParaRPr lang="en-US" sz="1200" dirty="0"/>
+          </a:p>
+        </p:txBody>
+      </p:sp>
+      <p:sp>
+        <p:nvSpPr>
+          <p:cNvPr id="30" name="Text 29"/>
+          <p:cNvSpPr/>
+          <p:nvPr/>
+        </p:nvSpPr>
+        <p:spPr>
+          <a:xfrm>
+            <a:off x="4044663" y="4275385"/>
+            <a:ext cx="3429000" cy="365760"/>
+          </a:xfrm>
+          <a:prstGeom prst="rect">
+            <a:avLst/>
+          </a:prstGeom>
+          <a:noFill/>
+          <a:ln/>
+        </p:spPr>
+        <p:txBody>
+          <a:bodyPr wrap="square" lIns="0" tIns="0" rIns="0" bIns="0" rtlCol="0" anchor="b"/>
+          <a:lstStyle/>
+          <a:p>
+            <a:pPr marL="0" indent="0" algn="l">
+              <a:buNone/>
+            </a:pPr>
+            <a:r>
+              <a:rPr lang="en-US" sz="1100" dirty="0">
+                <a:solidFill>
+                  <a:srgbClr val="8A96A0"/>
+                </a:solidFill>
+                <a:latin typeface="Times New Roman" pitchFamily="34" charset="0"/>
+                <a:ea typeface="Times New Roman" pitchFamily="34" charset="-122"/>
+                <a:cs typeface="Times New Roman" pitchFamily="34" charset="-120"/>
+              </a:rPr>
+              <a:t>Fig. 9  ·  Magnetic rigidity at constant momentum near the Coulomb barrier, vs recoil mass.</a:t>
+            </a:r>
+            <a:endParaRPr lang="en-US" sz="1000" dirty="0"/>
+          </a:p>
+        </p:txBody>
+      </p:sp>
+      <p:sp>
+        <p:nvSpPr>
+          <p:cNvPr id="31" name="Date Placeholder 30"/>
+          <p:cNvSpPr>
+            <a:spLocks noGrp="1"/>
+          </p:cNvSpPr>
+          <p:nvPr>
+            <p:ph type="dt" sz="half" idx="10"/>
+          </p:nvPr>
+        </p:nvSpPr>
+        <p:spPr/>
+        <p:txBody>
+          <a:bodyPr/>
+          <a:lstStyle/>
+          <a:p>
+            <a:r>
+              <a:rPr lang="en-US" dirty="0"/>
+              <a:t>29 Sep 2026</a:t>
+            </a:r>
+          </a:p>
+        </p:txBody>
+      </p:sp>
+    </p:spTree>
+    <p:extLst>
+      <p:ext uri="{BB962C8B-B14F-4D97-AF65-F5344CB8AC3E}">
+        <p14:creationId xmlns:p14="http://schemas.microsoft.com/office/powerpoint/2010/main" val="1730819235"/>
+      </p:ext>
+    </p:extLst>
+  </p:cSld>
+  <p:clrMapOvr>
+    <a:masterClrMapping/>
+  </p:clrMapOvr>
+</p:sld>
+</file>
+
+<file path=ppt/slides/slide6.xml><?xml version="1.0" encoding="utf-8"?>
+<p:sld xmlns:a="http://schemas.openxmlformats.org/drawingml/2006/main" xmlns:r="http://schemas.openxmlformats.org/officeDocument/2006/relationships" xmlns:p="http://schemas.openxmlformats.org/presentationml/2006/main">
   <p:cSld name="Slide 4">
     <p:bg>
       <p:bgPr>
@@ -9182,7 +11708,7 @@
                 <a:ea typeface="Times New Roman" pitchFamily="34" charset="-122"/>
                 <a:cs typeface="Times New Roman" pitchFamily="34" charset="-120"/>
               </a:rPr>
-              <a:t>Residues share the beam’s momentum but not its speed, so a magnet fails.</a:t>
+              <a:t>But the residues are much slower than the beam.</a:t>
             </a:r>
             <a:endParaRPr lang="en-US" sz="1800" dirty="0"/>
           </a:p>
@@ -9292,36 +11818,161 @@
                 <a:ea typeface="Times New Roman" pitchFamily="34" charset="-122"/>
                 <a:cs typeface="Times New Roman" pitchFamily="34" charset="-120"/>
               </a:rPr>
-              <a:t>Content 1 / 10</a:t>
+              <a:t>Content 2 / 11</a:t>
             </a:r>
             <a:endParaRPr lang="en-US" sz="1000" dirty="0"/>
           </a:p>
         </p:txBody>
       </p:sp>
-      <p:pic>
-        <p:nvPicPr>
-          <p:cNvPr id="7" name="Image 0" descr="/Users/Reid Hu/OrbitOS/70_Presentations/717_Learning Group-20260916/assets/eq/lead_vcm.png"/>
-          <p:cNvPicPr>
-            <a:picLocks noChangeAspect="1"/>
-          </p:cNvPicPr>
-          <p:nvPr/>
-        </p:nvPicPr>
-        <p:blipFill>
-          <a:blip r:embed="rId3"/>
-          <a:stretch>
-            <a:fillRect/>
-          </a:stretch>
-        </p:blipFill>
-        <p:spPr>
-          <a:xfrm>
-            <a:off x="411480" y="637032"/>
-            <a:ext cx="7187184" cy="225552"/>
-          </a:xfrm>
-          <a:prstGeom prst="rect">
-            <a:avLst/>
-          </a:prstGeom>
-        </p:spPr>
-      </p:pic>
+      <p:sp>
+        <p:nvSpPr>
+          <p:cNvPr id="7" name="Text 7"/>
+          <p:cNvSpPr txBox="1"/>
+          <p:nvPr/>
+        </p:nvSpPr>
+        <p:spPr>
+          <a:xfrm>
+            <a:off x="433862" y="610586"/>
+            <a:ext cx="8321040" cy="225552"/>
+          </a:xfrm>
+          <a:prstGeom prst="rect">
+            <a:avLst/>
+          </a:prstGeom>
+          <a:noFill/>
+          <a:ln/>
+        </p:spPr>
+        <p:txBody>
+          <a:bodyPr wrap="square" lIns="0" tIns="0" rIns="0" bIns="0" rtlCol="0" anchor="t"/>
+          <a:lstStyle/>
+          <a:p>
+            <a:pPr marL="0" indent="0" algn="l">
+              <a:buNone/>
+            </a:pPr>
+            <a:r>
+              <a:rPr lang="en-US" sz="1300" i="1" dirty="0">
+                <a:solidFill>
+                  <a:srgbClr val="1A2332"/>
+                </a:solidFill>
+                <a:latin typeface="Times New Roman" pitchFamily="34" charset="0"/>
+                <a:ea typeface="Times New Roman" pitchFamily="34" charset="-122"/>
+                <a:cs typeface="Times New Roman" pitchFamily="34" charset="-120"/>
+              </a:rPr>
+              <a:t>Fusion: projectile (A</a:t>
+            </a:r>
+            <a:r>
+              <a:rPr lang="en-US" sz="1300" i="1" baseline="-25000" dirty="0">
+                <a:solidFill>
+                  <a:srgbClr val="1A2332"/>
+                </a:solidFill>
+                <a:latin typeface="Times New Roman" pitchFamily="34" charset="0"/>
+                <a:ea typeface="Times New Roman" pitchFamily="34" charset="-122"/>
+                <a:cs typeface="Times New Roman" pitchFamily="34" charset="-120"/>
+              </a:rPr>
+              <a:t>p</a:t>
+            </a:r>
+            <a:r>
+              <a:rPr lang="en-US" sz="1300" i="1" dirty="0">
+                <a:solidFill>
+                  <a:srgbClr val="1A2332"/>
+                </a:solidFill>
+                <a:latin typeface="Times New Roman" pitchFamily="34" charset="0"/>
+                <a:ea typeface="Times New Roman" pitchFamily="34" charset="-122"/>
+                <a:cs typeface="Times New Roman" pitchFamily="34" charset="-120"/>
+              </a:rPr>
+              <a:t>) + target at rest (A</a:t>
+            </a:r>
+            <a:r>
+              <a:rPr lang="en-US" sz="1300" i="1" baseline="-25000" dirty="0">
+                <a:solidFill>
+                  <a:srgbClr val="1A2332"/>
+                </a:solidFill>
+                <a:latin typeface="Times New Roman" pitchFamily="34" charset="0"/>
+                <a:ea typeface="Times New Roman" pitchFamily="34" charset="-122"/>
+                <a:cs typeface="Times New Roman" pitchFamily="34" charset="-120"/>
+              </a:rPr>
+              <a:t>t</a:t>
+            </a:r>
+            <a:r>
+              <a:rPr lang="en-US" sz="1300" i="1" dirty="0">
+                <a:solidFill>
+                  <a:srgbClr val="1A2332"/>
+                </a:solidFill>
+                <a:latin typeface="Times New Roman" pitchFamily="34" charset="0"/>
+                <a:ea typeface="Times New Roman" pitchFamily="34" charset="-122"/>
+                <a:cs typeface="Times New Roman" pitchFamily="34" charset="-120"/>
+              </a:rPr>
+              <a:t>) </a:t>
+            </a:r>
+            <a:r>
+              <a:rPr lang="en-US" sz="1300" dirty="0">
+                <a:solidFill>
+                  <a:srgbClr val="1A2332"/>
+                </a:solidFill>
+                <a:latin typeface="Times New Roman" pitchFamily="34" charset="0"/>
+                <a:ea typeface="Times New Roman" pitchFamily="34" charset="-122"/>
+                <a:cs typeface="Times New Roman" pitchFamily="34" charset="-120"/>
+              </a:rPr>
+              <a:t>→</a:t>
+            </a:r>
+            <a:r>
+              <a:rPr lang="en-US" sz="1300" i="1" dirty="0">
+                <a:solidFill>
+                  <a:srgbClr val="1A2332"/>
+                </a:solidFill>
+                <a:latin typeface="Times New Roman" pitchFamily="34" charset="0"/>
+                <a:ea typeface="Times New Roman" pitchFamily="34" charset="-122"/>
+                <a:cs typeface="Times New Roman" pitchFamily="34" charset="-120"/>
+              </a:rPr>
+              <a:t> compound nucleus (A</a:t>
+            </a:r>
+            <a:r>
+              <a:rPr lang="en-US" sz="1300" i="1" baseline="-25000" dirty="0">
+                <a:solidFill>
+                  <a:srgbClr val="1A2332"/>
+                </a:solidFill>
+                <a:latin typeface="Times New Roman" pitchFamily="34" charset="0"/>
+                <a:ea typeface="Times New Roman" pitchFamily="34" charset="-122"/>
+                <a:cs typeface="Times New Roman" pitchFamily="34" charset="-120"/>
+              </a:rPr>
+              <a:t>c</a:t>
+            </a:r>
+            <a:r>
+              <a:rPr lang="en-US" sz="1300" i="1" dirty="0">
+                <a:solidFill>
+                  <a:srgbClr val="1A2332"/>
+                </a:solidFill>
+                <a:latin typeface="Times New Roman" pitchFamily="34" charset="0"/>
+                <a:ea typeface="Times New Roman" pitchFamily="34" charset="-122"/>
+                <a:cs typeface="Times New Roman" pitchFamily="34" charset="-120"/>
+              </a:rPr>
+              <a:t>) </a:t>
+            </a:r>
+            <a:r>
+              <a:rPr lang="en-US" sz="1300" dirty="0">
+                <a:solidFill>
+                  <a:srgbClr val="1A2332"/>
+                </a:solidFill>
+                <a:latin typeface="Times New Roman" pitchFamily="34" charset="0"/>
+                <a:ea typeface="Times New Roman" pitchFamily="34" charset="-122"/>
+                <a:cs typeface="Times New Roman" pitchFamily="34" charset="-120"/>
+              </a:rPr>
+              <a:t>→</a:t>
+            </a:r>
+            <a:r>
+              <a:rPr lang="en-US" sz="1300" i="1" dirty="0">
+                <a:solidFill>
+                  <a:srgbClr val="1A2332"/>
+                </a:solidFill>
+                <a:latin typeface="Times New Roman" pitchFamily="34" charset="0"/>
+                <a:ea typeface="Times New Roman" pitchFamily="34" charset="-122"/>
+                <a:cs typeface="Times New Roman" pitchFamily="34" charset="-120"/>
+              </a:rPr>
+              <a:t> residue + a few evaporated n, p, α.</a:t>
+            </a:r>
+            <a:endParaRPr lang="en-US" sz="1300" dirty="0"/>
+          </a:p>
+        </p:txBody>
+      </p:sp>
       <p:sp>
         <p:nvSpPr>
           <p:cNvPr id="8" name="Shape 5"/>
@@ -9390,7 +12041,7 @@
         </p:nvSpPr>
         <p:spPr>
           <a:xfrm>
-            <a:off x="5285232" y="987552"/>
+            <a:off x="5285232" y="1040451"/>
             <a:ext cx="3246120" cy="1417320"/>
           </a:xfrm>
           <a:prstGeom prst="rect">
@@ -9403,11 +12054,10 @@
           <a:bodyPr wrap="square" lIns="0" tIns="0" rIns="0" bIns="0" rtlCol="0" anchor="ctr"/>
           <a:lstStyle/>
           <a:p>
-            <a:pPr marL="0" indent="0">
+            <a:pPr>
               <a:lnSpc>
                 <a:spcPts val="1300"/>
               </a:lnSpc>
-              <a:buNone/>
             </a:pPr>
             <a:r>
               <a:rPr lang="en-US" sz="1100" b="1" i="1" dirty="0">
@@ -9418,7 +12068,7 @@
                 <a:ea typeface="Times New Roman" pitchFamily="34" charset="-122"/>
                 <a:cs typeface="Times New Roman" pitchFamily="34" charset="-120"/>
               </a:rPr>
-              <a:t>Residue</a:t>
+              <a:t>1. Residue</a:t>
             </a:r>
             <a:r>
               <a:rPr lang="en-US" sz="1100" i="1" dirty="0">
@@ -9441,45 +12091,335 @@
                 <a:cs typeface="Times New Roman" pitchFamily="34" charset="-120"/>
               </a:rPr>
               <a:t>
-</a:t>
+2. </a:t>
+            </a:r>
+            <a:r>
+              <a:rPr lang="en-US" sz="1100" b="1" i="1" dirty="0">
+                <a:solidFill>
+                  <a:srgbClr val="0F2F5C"/>
+                </a:solidFill>
+                <a:latin typeface="Times New Roman" pitchFamily="34" charset="0"/>
+                <a:cs typeface="Times New Roman" pitchFamily="34" charset="-120"/>
+              </a:rPr>
+              <a:t>Er = (A</a:t>
+            </a:r>
+            <a:r>
+              <a:rPr lang="en-US" sz="1100" b="1" i="1" baseline="-25000" dirty="0">
+                <a:solidFill>
+                  <a:srgbClr val="0F2F5C"/>
+                </a:solidFill>
+                <a:latin typeface="Times New Roman" pitchFamily="34" charset="0"/>
+                <a:cs typeface="Times New Roman" pitchFamily="34" charset="-120"/>
+              </a:rPr>
+              <a:t>p</a:t>
+            </a:r>
+            <a:r>
+              <a:rPr lang="en-US" sz="1100" b="1" i="1" dirty="0">
+                <a:solidFill>
+                  <a:srgbClr val="0F2F5C"/>
+                </a:solidFill>
+                <a:latin typeface="Times New Roman" pitchFamily="34" charset="0"/>
+                <a:cs typeface="Times New Roman" pitchFamily="34" charset="-120"/>
+              </a:rPr>
+              <a:t>/A</a:t>
+            </a:r>
+            <a:r>
+              <a:rPr lang="en-US" sz="1100" b="1" i="1" baseline="-25000" dirty="0">
+                <a:solidFill>
+                  <a:srgbClr val="0F2F5C"/>
+                </a:solidFill>
+                <a:latin typeface="Times New Roman" pitchFamily="34" charset="0"/>
+                <a:cs typeface="Times New Roman" pitchFamily="34" charset="-120"/>
+              </a:rPr>
+              <a:t>c</a:t>
+            </a:r>
+            <a:r>
+              <a:rPr lang="en-US" sz="1100" b="1" i="1" dirty="0">
+                <a:solidFill>
+                  <a:srgbClr val="0F2F5C"/>
+                </a:solidFill>
+                <a:latin typeface="Times New Roman" pitchFamily="34" charset="0"/>
+                <a:cs typeface="Times New Roman" pitchFamily="34" charset="-120"/>
+              </a:rPr>
+              <a:t>) E</a:t>
+            </a:r>
+            <a:r>
+              <a:rPr lang="en-US" sz="1100" b="1" i="1" baseline="-25000" dirty="0">
+                <a:solidFill>
+                  <a:srgbClr val="0F2F5C"/>
+                </a:solidFill>
+                <a:latin typeface="Times New Roman" pitchFamily="34" charset="0"/>
+                <a:cs typeface="Times New Roman" pitchFamily="34" charset="-120"/>
+              </a:rPr>
+              <a:t>p</a:t>
+            </a:r>
+            <a:r>
+              <a:rPr lang="en-US" sz="1100" b="1" i="1" dirty="0">
+                <a:solidFill>
+                  <a:srgbClr val="0F2F5C"/>
+                </a:solidFill>
+                <a:latin typeface="Times New Roman" pitchFamily="34" charset="0"/>
+                <a:cs typeface="Times New Roman" pitchFamily="34" charset="-120"/>
+              </a:rPr>
+              <a:t> </a:t>
             </a:r>
             <a:r>
               <a:rPr lang="en-US" sz="1100" i="1" dirty="0">
                 <a:solidFill>
+                  <a:srgbClr val="5F6B73"/>
+                </a:solidFill>
+                <a:latin typeface="Times New Roman" pitchFamily="34" charset="0"/>
+                <a:ea typeface="Times New Roman" pitchFamily="34" charset="-122"/>
+                <a:cs typeface="Times New Roman" pitchFamily="34" charset="-120"/>
+              </a:rPr>
+              <a:t>— the residue’s kinetic energy under full momentum transfer: motion at v</a:t>
+            </a:r>
+            <a:r>
+              <a:rPr lang="en-US" sz="1100" i="1" baseline="-25000" dirty="0">
+                <a:solidFill>
+                  <a:srgbClr val="5F6B73"/>
+                </a:solidFill>
+                <a:latin typeface="Times New Roman" pitchFamily="34" charset="0"/>
+                <a:ea typeface="Times New Roman" pitchFamily="34" charset="-122"/>
+                <a:cs typeface="Times New Roman" pitchFamily="34" charset="-120"/>
+              </a:rPr>
+              <a:t>cm</a:t>
+            </a:r>
+            <a:r>
+              <a:rPr lang="en-US" sz="1100" i="1" dirty="0">
+                <a:solidFill>
+                  <a:srgbClr val="5F6B73"/>
+                </a:solidFill>
+                <a:latin typeface="Times New Roman" pitchFamily="34" charset="0"/>
+                <a:ea typeface="Times New Roman" pitchFamily="34" charset="-122"/>
+                <a:cs typeface="Times New Roman" pitchFamily="34" charset="-120"/>
+              </a:rPr>
+              <a:t>, slower than the beam.</a:t>
+            </a:r>
+            <a:r>
+              <a:rPr lang="en-US" sz="1100" dirty="0">
+                <a:solidFill>
+                  <a:srgbClr val="000000"/>
+                </a:solidFill>
+                <a:latin typeface="Times New Roman" pitchFamily="34" charset="0"/>
+                <a:ea typeface="Times New Roman" pitchFamily="34" charset="-122"/>
+                <a:cs typeface="Times New Roman" pitchFamily="34" charset="-120"/>
+              </a:rPr>
+              <a:t>
+3. </a:t>
+            </a:r>
+            <a:r>
+              <a:rPr lang="en-US" sz="1100" b="1" i="1" dirty="0">
+                <a:solidFill>
                   <a:srgbClr val="0F2F5C"/>
                 </a:solidFill>
                 <a:latin typeface="Times New Roman" pitchFamily="34" charset="0"/>
-                <a:ea typeface="Times New Roman" pitchFamily="34" charset="-122"/>
-                <a:cs typeface="Times New Roman" pitchFamily="34" charset="-120"/>
-              </a:rPr>
-              <a:t>E</a:t>
+                <a:cs typeface="Times New Roman" pitchFamily="34" charset="-120"/>
+              </a:rPr>
+              <a:t>A</a:t>
+            </a:r>
+            <a:r>
+              <a:rPr lang="en-US" sz="1100" b="1" i="1" baseline="-25000" dirty="0">
+                <a:solidFill>
+                  <a:srgbClr val="0F2F5C"/>
+                </a:solidFill>
+                <a:latin typeface="Times New Roman" pitchFamily="34" charset="0"/>
+                <a:cs typeface="Times New Roman" pitchFamily="34" charset="-120"/>
+              </a:rPr>
+              <a:t>t</a:t>
+            </a:r>
+            <a:r>
+              <a:rPr lang="en-US" sz="1100" b="1" i="1" dirty="0">
+                <a:solidFill>
+                  <a:srgbClr val="0F2F5C"/>
+                </a:solidFill>
+                <a:latin typeface="Times New Roman" pitchFamily="34" charset="0"/>
+                <a:cs typeface="Times New Roman" pitchFamily="34" charset="-120"/>
+              </a:rPr>
+              <a:t> </a:t>
+            </a:r>
+            <a:r>
+              <a:rPr lang="en-US" sz="1100" i="1" dirty="0">
+                <a:solidFill>
+                  <a:srgbClr val="5F6B73"/>
+                </a:solidFill>
+                <a:latin typeface="Times New Roman" pitchFamily="34" charset="0"/>
+                <a:ea typeface="Times New Roman" pitchFamily="34" charset="-122"/>
+                <a:cs typeface="Times New Roman" pitchFamily="34" charset="-120"/>
+              </a:rPr>
+              <a:t>—</a:t>
+            </a:r>
+            <a:r>
+              <a:rPr lang="en-US" sz="1100" b="1" i="1" dirty="0">
+                <a:solidFill>
+                  <a:srgbClr val="0F2F5C"/>
+                </a:solidFill>
+                <a:latin typeface="Times New Roman" pitchFamily="34" charset="0"/>
+                <a:cs typeface="Times New Roman" pitchFamily="34" charset="-120"/>
+              </a:rPr>
+              <a:t> </a:t>
+            </a:r>
+            <a:r>
+              <a:rPr lang="en-US" sz="1100" i="1" baseline="30000" dirty="0">
+                <a:solidFill>
+                  <a:srgbClr val="5F6B73"/>
+                </a:solidFill>
+                <a:latin typeface="Times New Roman" pitchFamily="34" charset="0"/>
+                <a:ea typeface="Times New Roman" pitchFamily="34" charset="-122"/>
+                <a:cs typeface="Times New Roman" pitchFamily="34" charset="-120"/>
+              </a:rPr>
+              <a:t>208</a:t>
+            </a:r>
+            <a:r>
+              <a:rPr lang="en-US" sz="1100" i="1" dirty="0">
+                <a:solidFill>
+                  <a:srgbClr val="5F6B73"/>
+                </a:solidFill>
+                <a:latin typeface="Times New Roman" pitchFamily="34" charset="0"/>
+                <a:ea typeface="Times New Roman" pitchFamily="34" charset="-122"/>
+                <a:cs typeface="Times New Roman" pitchFamily="34" charset="-120"/>
+              </a:rPr>
+              <a:t>Pb: 208.</a:t>
+            </a:r>
+            <a:r>
+              <a:rPr lang="en-US" sz="1100" dirty="0">
+                <a:solidFill>
+                  <a:srgbClr val="000000"/>
+                </a:solidFill>
+                <a:latin typeface="Times New Roman" pitchFamily="34" charset="0"/>
+                <a:ea typeface="Times New Roman" pitchFamily="34" charset="-122"/>
+                <a:cs typeface="Times New Roman" pitchFamily="34" charset="-120"/>
+              </a:rPr>
+              <a:t>
+4. </a:t>
+            </a:r>
+            <a:r>
+              <a:rPr lang="en-US" sz="1100" b="1" i="1" dirty="0" err="1">
+                <a:solidFill>
+                  <a:srgbClr val="0F2F5C"/>
+                </a:solidFill>
+                <a:latin typeface="Times New Roman" pitchFamily="34" charset="0"/>
+                <a:cs typeface="Times New Roman" pitchFamily="34" charset="-120"/>
+              </a:rPr>
+              <a:t>v</a:t>
+            </a:r>
+            <a:r>
+              <a:rPr lang="en-US" sz="1100" b="1" i="1" baseline="-25000" dirty="0" err="1">
+                <a:solidFill>
+                  <a:srgbClr val="0F2F5C"/>
+                </a:solidFill>
+                <a:latin typeface="Times New Roman" pitchFamily="34" charset="0"/>
+                <a:cs typeface="Times New Roman" pitchFamily="34" charset="-120"/>
+              </a:rPr>
+              <a:t>cm</a:t>
+            </a:r>
+            <a:r>
+              <a:rPr lang="en-US" sz="1100" b="1" i="1" dirty="0">
+                <a:solidFill>
+                  <a:srgbClr val="0F2F5C"/>
+                </a:solidFill>
+                <a:latin typeface="Times New Roman" pitchFamily="34" charset="0"/>
+                <a:cs typeface="Times New Roman" pitchFamily="34" charset="-120"/>
+              </a:rPr>
+              <a:t> = (A</a:t>
+            </a:r>
+            <a:r>
+              <a:rPr lang="en-US" sz="1100" b="1" i="1" baseline="-25000" dirty="0">
+                <a:solidFill>
+                  <a:srgbClr val="0F2F5C"/>
+                </a:solidFill>
+                <a:latin typeface="Times New Roman" pitchFamily="34" charset="0"/>
+                <a:cs typeface="Times New Roman" pitchFamily="34" charset="-120"/>
+              </a:rPr>
+              <a:t>p</a:t>
+            </a:r>
+            <a:r>
+              <a:rPr lang="en-US" sz="1100" b="1" i="1" dirty="0">
+                <a:solidFill>
+                  <a:srgbClr val="0F2F5C"/>
+                </a:solidFill>
+                <a:latin typeface="Times New Roman" pitchFamily="34" charset="0"/>
+                <a:cs typeface="Times New Roman" pitchFamily="34" charset="-120"/>
+              </a:rPr>
+              <a:t>/A</a:t>
+            </a:r>
+            <a:r>
+              <a:rPr lang="en-US" sz="1100" b="1" i="1" baseline="-25000" dirty="0">
+                <a:solidFill>
+                  <a:srgbClr val="0F2F5C"/>
+                </a:solidFill>
+                <a:latin typeface="Times New Roman" pitchFamily="34" charset="0"/>
+                <a:cs typeface="Times New Roman" pitchFamily="34" charset="-120"/>
+              </a:rPr>
+              <a:t>c</a:t>
+            </a:r>
+            <a:r>
+              <a:rPr lang="en-US" sz="1100" b="1" i="1" dirty="0">
+                <a:solidFill>
+                  <a:srgbClr val="0F2F5C"/>
+                </a:solidFill>
+                <a:latin typeface="Times New Roman" pitchFamily="34" charset="0"/>
+                <a:cs typeface="Times New Roman" pitchFamily="34" charset="-120"/>
+              </a:rPr>
+              <a:t>) </a:t>
+            </a:r>
+            <a:r>
+              <a:rPr lang="en-US" sz="1100" b="1" i="1" dirty="0" err="1">
+                <a:solidFill>
+                  <a:srgbClr val="0F2F5C"/>
+                </a:solidFill>
+                <a:latin typeface="Times New Roman" pitchFamily="34" charset="0"/>
+                <a:cs typeface="Times New Roman" pitchFamily="34" charset="-120"/>
+              </a:rPr>
+              <a:t>v</a:t>
+            </a:r>
+            <a:r>
+              <a:rPr lang="en-US" sz="1100" b="1" i="1" baseline="-25000" dirty="0" err="1">
+                <a:solidFill>
+                  <a:srgbClr val="0F2F5C"/>
+                </a:solidFill>
+                <a:latin typeface="Times New Roman" pitchFamily="34" charset="0"/>
+                <a:cs typeface="Times New Roman" pitchFamily="34" charset="-120"/>
+              </a:rPr>
+              <a:t>p</a:t>
+            </a:r>
+            <a:r>
+              <a:rPr lang="en-US" sz="1100" i="1" dirty="0">
+                <a:solidFill>
+                  <a:srgbClr val="5F6B73"/>
+                </a:solidFill>
+                <a:latin typeface="Times New Roman" pitchFamily="34" charset="0"/>
+                <a:ea typeface="Times New Roman" pitchFamily="34" charset="-122"/>
+                <a:cs typeface="Times New Roman" pitchFamily="34" charset="-120"/>
+              </a:rPr>
+              <a:t>, so Δv/v</a:t>
             </a:r>
             <a:r>
               <a:rPr lang="en-US" sz="1100" i="1" baseline="-25000" dirty="0">
                 <a:solidFill>
-                  <a:srgbClr val="0F2F5C"/>
-                </a:solidFill>
-                <a:latin typeface="Times New Roman" pitchFamily="34" charset="0"/>
-                <a:ea typeface="Times New Roman" pitchFamily="34" charset="-122"/>
-                <a:cs typeface="Times New Roman" pitchFamily="34" charset="-120"/>
-              </a:rPr>
-              <a:t>r</a:t>
+                  <a:srgbClr val="5F6B73"/>
+                </a:solidFill>
+                <a:latin typeface="Times New Roman" pitchFamily="34" charset="0"/>
+                <a:ea typeface="Times New Roman" pitchFamily="34" charset="-122"/>
+                <a:cs typeface="Times New Roman" pitchFamily="34" charset="-120"/>
+              </a:rPr>
+              <a:t>p</a:t>
             </a:r>
             <a:r>
               <a:rPr lang="en-US" sz="1100" i="1" dirty="0">
                 <a:solidFill>
-                  <a:srgbClr val="0F2F5C"/>
-                </a:solidFill>
-                <a:latin typeface="Times New Roman" pitchFamily="34" charset="0"/>
-                <a:ea typeface="Times New Roman" pitchFamily="34" charset="-122"/>
-                <a:cs typeface="Times New Roman" pitchFamily="34" charset="-120"/>
-              </a:rPr>
-              <a:t> = (A</a:t>
+                  <a:srgbClr val="5F6B73"/>
+                </a:solidFill>
+                <a:latin typeface="Times New Roman" pitchFamily="34" charset="0"/>
+                <a:ea typeface="Times New Roman" pitchFamily="34" charset="-122"/>
+                <a:cs typeface="Times New Roman" pitchFamily="34" charset="-120"/>
+              </a:rPr>
+              <a:t> = 1 − A</a:t>
             </a:r>
             <a:r>
               <a:rPr lang="en-US" sz="1100" i="1" baseline="-25000" dirty="0">
                 <a:solidFill>
-                  <a:srgbClr val="0F2F5C"/>
+                  <a:srgbClr val="5F6B73"/>
                 </a:solidFill>
                 <a:latin typeface="Times New Roman" pitchFamily="34" charset="0"/>
                 <a:ea typeface="Times New Roman" pitchFamily="34" charset="-122"/>
@@ -9490,7 +12430,7 @@
             <a:r>
               <a:rPr lang="en-US" sz="1100" i="1" dirty="0">
                 <a:solidFill>
-                  <a:srgbClr val="0F2F5C"/>
+                  <a:srgbClr val="5F6B73"/>
                 </a:solidFill>
                 <a:latin typeface="Times New Roman" pitchFamily="34" charset="0"/>
                 <a:ea typeface="Times New Roman" pitchFamily="34" charset="-122"/>
@@ -9501,7 +12441,7 @@
             <a:r>
               <a:rPr lang="en-US" sz="1100" i="1" baseline="-25000" dirty="0">
                 <a:solidFill>
-                  <a:srgbClr val="0F2F5C"/>
+                  <a:srgbClr val="5F6B73"/>
                 </a:solidFill>
                 <a:latin typeface="Times New Roman" pitchFamily="34" charset="0"/>
                 <a:ea typeface="Times New Roman" pitchFamily="34" charset="-122"/>
@@ -9512,24 +12452,24 @@
             <a:r>
               <a:rPr lang="en-US" sz="1100" i="1" dirty="0">
                 <a:solidFill>
-                  <a:srgbClr val="0F2F5C"/>
-                </a:solidFill>
-                <a:latin typeface="Times New Roman" pitchFamily="34" charset="0"/>
-                <a:ea typeface="Times New Roman" pitchFamily="34" charset="-122"/>
-                <a:cs typeface="Times New Roman" pitchFamily="34" charset="-120"/>
-              </a:rPr>
-              <a:t>) E</a:t>
+                  <a:srgbClr val="5F6B73"/>
+                </a:solidFill>
+                <a:latin typeface="Times New Roman" pitchFamily="34" charset="0"/>
+                <a:ea typeface="Times New Roman" pitchFamily="34" charset="-122"/>
+                <a:cs typeface="Times New Roman" pitchFamily="34" charset="-120"/>
+              </a:rPr>
+              <a:t> = A</a:t>
             </a:r>
             <a:r>
               <a:rPr lang="en-US" sz="1100" i="1" baseline="-25000" dirty="0">
                 <a:solidFill>
-                  <a:srgbClr val="0F2F5C"/>
-                </a:solidFill>
-                <a:latin typeface="Times New Roman" pitchFamily="34" charset="0"/>
-                <a:ea typeface="Times New Roman" pitchFamily="34" charset="-122"/>
-                <a:cs typeface="Times New Roman" pitchFamily="34" charset="-120"/>
-              </a:rPr>
-              <a:t>p</a:t>
+                  <a:srgbClr val="5F6B73"/>
+                </a:solidFill>
+                <a:latin typeface="Times New Roman" pitchFamily="34" charset="0"/>
+                <a:ea typeface="Times New Roman" pitchFamily="34" charset="-122"/>
+                <a:cs typeface="Times New Roman" pitchFamily="34" charset="-120"/>
+              </a:rPr>
+              <a:t>t</a:t>
             </a:r>
             <a:r>
               <a:rPr lang="en-US" sz="1100" i="1" dirty="0">
@@ -9540,7 +12480,7 @@
                 <a:ea typeface="Times New Roman" pitchFamily="34" charset="-122"/>
                 <a:cs typeface="Times New Roman" pitchFamily="34" charset="-120"/>
               </a:rPr>
-              <a:t> — the residue’s kinetic energy under full momentum transfer: motion at v</a:t>
+              <a:t>/A</a:t>
             </a:r>
             <a:r>
               <a:rPr lang="en-US" sz="1100" i="1" baseline="-25000" dirty="0">
@@ -9551,7 +12491,7 @@
                 <a:ea typeface="Times New Roman" pitchFamily="34" charset="-122"/>
                 <a:cs typeface="Times New Roman" pitchFamily="34" charset="-120"/>
               </a:rPr>
-              <a:t>cm</a:t>
+              <a:t>c</a:t>
             </a:r>
             <a:r>
               <a:rPr lang="en-US" sz="1100" i="1" dirty="0">
@@ -9562,19 +12502,18 @@
                 <a:ea typeface="Times New Roman" pitchFamily="34" charset="-122"/>
                 <a:cs typeface="Times New Roman" pitchFamily="34" charset="-120"/>
               </a:rPr>
-              <a:t>, slower than the beam.</a:t>
-            </a:r>
-            <a:r>
-              <a:rPr lang="en-US" sz="1100" dirty="0">
-                <a:solidFill>
-                  <a:srgbClr val="000000"/>
-                </a:solidFill>
-                <a:latin typeface="Times New Roman" pitchFamily="34" charset="0"/>
-                <a:ea typeface="Times New Roman" pitchFamily="34" charset="-122"/>
-                <a:cs typeface="Times New Roman" pitchFamily="34" charset="-120"/>
-              </a:rPr>
-              <a:t>
-</a:t>
+              <a:t>: the heavier the target, the slower the residue (</a:t>
+            </a:r>
+            <a:r>
+              <a:rPr lang="en-US" sz="1100" i="1" baseline="30000" dirty="0">
+                <a:solidFill>
+                  <a:srgbClr val="5F6B73"/>
+                </a:solidFill>
+                <a:latin typeface="Times New Roman" pitchFamily="34" charset="0"/>
+                <a:ea typeface="Times New Roman" pitchFamily="34" charset="-122"/>
+                <a:cs typeface="Times New Roman" pitchFamily="34" charset="-120"/>
+              </a:rPr>
+              <a:t>58</a:t>
             </a:r>
             <a:r>
               <a:rPr lang="en-US" sz="1100" i="1" dirty="0">
@@ -9585,10 +12524,10 @@
                 <a:ea typeface="Times New Roman" pitchFamily="34" charset="-122"/>
                 <a:cs typeface="Times New Roman" pitchFamily="34" charset="-120"/>
               </a:rPr>
-              <a:t>A</a:t>
-            </a:r>
-            <a:r>
-              <a:rPr lang="en-US" sz="1100" i="1" dirty="0" baseline="-25000">
+              <a:t>Fe + </a:t>
+            </a:r>
+            <a:r>
+              <a:rPr lang="en-US" sz="1100" i="1" baseline="30000" dirty="0">
                 <a:solidFill>
                   <a:srgbClr val="5F6B73"/>
                 </a:solidFill>
@@ -9596,7 +12535,7 @@
                 <a:ea typeface="Times New Roman" pitchFamily="34" charset="-122"/>
                 <a:cs typeface="Times New Roman" pitchFamily="34" charset="-120"/>
               </a:rPr>
-              <a:t>t</a:t>
+              <a:t>208</a:t>
             </a:r>
             <a:r>
               <a:rPr lang="en-US" sz="1100" i="1" dirty="0">
@@ -9607,297 +12546,10 @@
                 <a:ea typeface="Times New Roman" pitchFamily="34" charset="-122"/>
                 <a:cs typeface="Times New Roman" pitchFamily="34" charset="-120"/>
               </a:rPr>
-              <a:t> = mass number of the target nucleus (</a:t>
-            </a:r>
-            <a:r>
-              <a:rPr lang="en-US" sz="1100" i="1" dirty="0" baseline="30000">
-                <a:solidFill>
-                  <a:srgbClr val="5F6B73"/>
-                </a:solidFill>
-                <a:latin typeface="Times New Roman" pitchFamily="34" charset="0"/>
-                <a:ea typeface="Times New Roman" pitchFamily="34" charset="-122"/>
-                <a:cs typeface="Times New Roman" pitchFamily="34" charset="-120"/>
-              </a:rPr>
-              <a:t>208</a:t>
-            </a:r>
-            <a:r>
-              <a:rPr lang="en-US" sz="1100" i="1" dirty="0">
-                <a:solidFill>
-                  <a:srgbClr val="5F6B73"/>
-                </a:solidFill>
-                <a:latin typeface="Times New Roman" pitchFamily="34" charset="0"/>
-                <a:ea typeface="Times New Roman" pitchFamily="34" charset="-122"/>
-                <a:cs typeface="Times New Roman" pitchFamily="34" charset="-120"/>
-              </a:rPr>
-              <a:t>Pb: 208).</a:t>
-            </a:r>
-            <a:r>
-              <a:rPr lang="en-US" sz="1100" dirty="0">
-                <a:solidFill>
-                  <a:srgbClr val="000000"/>
-                </a:solidFill>
-                <a:latin typeface="Times New Roman" pitchFamily="34" charset="0"/>
-                <a:ea typeface="Times New Roman" pitchFamily="34" charset="-122"/>
-                <a:cs typeface="Times New Roman" pitchFamily="34" charset="-120"/>
-              </a:rPr>
-              <a:t>
-</a:t>
-            </a:r>
-            <a:r>
-              <a:rPr lang="en-US" sz="1100" i="1" dirty="0">
-                <a:solidFill>
-                  <a:srgbClr val="5F6B73"/>
-                </a:solidFill>
-                <a:latin typeface="Times New Roman" pitchFamily="34" charset="0"/>
-                <a:ea typeface="Times New Roman" pitchFamily="34" charset="-122"/>
-                <a:cs typeface="Times New Roman" pitchFamily="34" charset="-120"/>
-              </a:rPr>
-              <a:t>v</a:t>
-            </a:r>
-            <a:r>
-              <a:rPr lang="en-US" sz="1100" i="1" dirty="0" baseline="-25000">
-                <a:solidFill>
-                  <a:srgbClr val="5F6B73"/>
-                </a:solidFill>
-                <a:latin typeface="Times New Roman" pitchFamily="34" charset="0"/>
-                <a:ea typeface="Times New Roman" pitchFamily="34" charset="-122"/>
-                <a:cs typeface="Times New Roman" pitchFamily="34" charset="-120"/>
-              </a:rPr>
-              <a:t>cm</a:t>
-            </a:r>
-            <a:r>
-              <a:rPr lang="en-US" sz="1100" i="1" dirty="0">
-                <a:solidFill>
-                  <a:srgbClr val="5F6B73"/>
-                </a:solidFill>
-                <a:latin typeface="Times New Roman" pitchFamily="34" charset="0"/>
-                <a:ea typeface="Times New Roman" pitchFamily="34" charset="-122"/>
-                <a:cs typeface="Times New Roman" pitchFamily="34" charset="-120"/>
-              </a:rPr>
-              <a:t> = (A</a:t>
-            </a:r>
-            <a:r>
-              <a:rPr lang="en-US" sz="1100" i="1" dirty="0" baseline="-25000">
-                <a:solidFill>
-                  <a:srgbClr val="5F6B73"/>
-                </a:solidFill>
-                <a:latin typeface="Times New Roman" pitchFamily="34" charset="0"/>
-                <a:ea typeface="Times New Roman" pitchFamily="34" charset="-122"/>
-                <a:cs typeface="Times New Roman" pitchFamily="34" charset="-120"/>
-              </a:rPr>
-              <a:t>p</a:t>
-            </a:r>
-            <a:r>
-              <a:rPr lang="en-US" sz="1100" i="1" dirty="0">
-                <a:solidFill>
-                  <a:srgbClr val="5F6B73"/>
-                </a:solidFill>
-                <a:latin typeface="Times New Roman" pitchFamily="34" charset="0"/>
-                <a:ea typeface="Times New Roman" pitchFamily="34" charset="-122"/>
-                <a:cs typeface="Times New Roman" pitchFamily="34" charset="-120"/>
-              </a:rPr>
-              <a:t>/A</a:t>
-            </a:r>
-            <a:r>
-              <a:rPr lang="en-US" sz="1100" i="1" dirty="0" baseline="-25000">
-                <a:solidFill>
-                  <a:srgbClr val="5F6B73"/>
-                </a:solidFill>
-                <a:latin typeface="Times New Roman" pitchFamily="34" charset="0"/>
-                <a:ea typeface="Times New Roman" pitchFamily="34" charset="-122"/>
-                <a:cs typeface="Times New Roman" pitchFamily="34" charset="-120"/>
-              </a:rPr>
-              <a:t>c</a:t>
-            </a:r>
-            <a:r>
-              <a:rPr lang="en-US" sz="1100" i="1" dirty="0">
-                <a:solidFill>
-                  <a:srgbClr val="5F6B73"/>
-                </a:solidFill>
-                <a:latin typeface="Times New Roman" pitchFamily="34" charset="0"/>
-                <a:ea typeface="Times New Roman" pitchFamily="34" charset="-122"/>
-                <a:cs typeface="Times New Roman" pitchFamily="34" charset="-120"/>
-              </a:rPr>
-              <a:t>) v</a:t>
-            </a:r>
-            <a:r>
-              <a:rPr lang="en-US" sz="1100" i="1" dirty="0" baseline="-25000">
-                <a:solidFill>
-                  <a:srgbClr val="5F6B73"/>
-                </a:solidFill>
-                <a:latin typeface="Times New Roman" pitchFamily="34" charset="0"/>
-                <a:ea typeface="Times New Roman" pitchFamily="34" charset="-122"/>
-                <a:cs typeface="Times New Roman" pitchFamily="34" charset="-120"/>
-              </a:rPr>
-              <a:t>p</a:t>
-            </a:r>
-            <a:r>
-              <a:rPr lang="en-US" sz="1100" i="1" dirty="0">
-                <a:solidFill>
-                  <a:srgbClr val="5F6B73"/>
-                </a:solidFill>
-                <a:latin typeface="Times New Roman" pitchFamily="34" charset="0"/>
-                <a:ea typeface="Times New Roman" pitchFamily="34" charset="-122"/>
-                <a:cs typeface="Times New Roman" pitchFamily="34" charset="-120"/>
-              </a:rPr>
-              <a:t>, so Δv/v</a:t>
-            </a:r>
-            <a:r>
-              <a:rPr lang="en-US" sz="1100" i="1" dirty="0" baseline="-25000">
-                <a:solidFill>
-                  <a:srgbClr val="5F6B73"/>
-                </a:solidFill>
-                <a:latin typeface="Times New Roman" pitchFamily="34" charset="0"/>
-                <a:ea typeface="Times New Roman" pitchFamily="34" charset="-122"/>
-                <a:cs typeface="Times New Roman" pitchFamily="34" charset="-120"/>
-              </a:rPr>
-              <a:t>p</a:t>
-            </a:r>
-            <a:r>
-              <a:rPr lang="en-US" sz="1100" i="1" dirty="0">
-                <a:solidFill>
-                  <a:srgbClr val="5F6B73"/>
-                </a:solidFill>
-                <a:latin typeface="Times New Roman" pitchFamily="34" charset="0"/>
-                <a:ea typeface="Times New Roman" pitchFamily="34" charset="-122"/>
-                <a:cs typeface="Times New Roman" pitchFamily="34" charset="-120"/>
-              </a:rPr>
-              <a:t> = 1 − A</a:t>
-            </a:r>
-            <a:r>
-              <a:rPr lang="en-US" sz="1100" i="1" dirty="0" baseline="-25000">
-                <a:solidFill>
-                  <a:srgbClr val="5F6B73"/>
-                </a:solidFill>
-                <a:latin typeface="Times New Roman" pitchFamily="34" charset="0"/>
-                <a:ea typeface="Times New Roman" pitchFamily="34" charset="-122"/>
-                <a:cs typeface="Times New Roman" pitchFamily="34" charset="-120"/>
-              </a:rPr>
-              <a:t>p</a:t>
-            </a:r>
-            <a:r>
-              <a:rPr lang="en-US" sz="1100" i="1" dirty="0">
-                <a:solidFill>
-                  <a:srgbClr val="5F6B73"/>
-                </a:solidFill>
-                <a:latin typeface="Times New Roman" pitchFamily="34" charset="0"/>
-                <a:ea typeface="Times New Roman" pitchFamily="34" charset="-122"/>
-                <a:cs typeface="Times New Roman" pitchFamily="34" charset="-120"/>
-              </a:rPr>
-              <a:t>/A</a:t>
-            </a:r>
-            <a:r>
-              <a:rPr lang="en-US" sz="1100" i="1" dirty="0" baseline="-25000">
-                <a:solidFill>
-                  <a:srgbClr val="5F6B73"/>
-                </a:solidFill>
-                <a:latin typeface="Times New Roman" pitchFamily="34" charset="0"/>
-                <a:ea typeface="Times New Roman" pitchFamily="34" charset="-122"/>
-                <a:cs typeface="Times New Roman" pitchFamily="34" charset="-120"/>
-              </a:rPr>
-              <a:t>c</a:t>
-            </a:r>
-            <a:r>
-              <a:rPr lang="en-US" sz="1100" i="1" dirty="0">
-                <a:solidFill>
-                  <a:srgbClr val="5F6B73"/>
-                </a:solidFill>
-                <a:latin typeface="Times New Roman" pitchFamily="34" charset="0"/>
-                <a:ea typeface="Times New Roman" pitchFamily="34" charset="-122"/>
-                <a:cs typeface="Times New Roman" pitchFamily="34" charset="-120"/>
-              </a:rPr>
-              <a:t> = A</a:t>
-            </a:r>
-            <a:r>
-              <a:rPr lang="en-US" sz="1100" i="1" dirty="0" baseline="-25000">
-                <a:solidFill>
-                  <a:srgbClr val="5F6B73"/>
-                </a:solidFill>
-                <a:latin typeface="Times New Roman" pitchFamily="34" charset="0"/>
-                <a:ea typeface="Times New Roman" pitchFamily="34" charset="-122"/>
-                <a:cs typeface="Times New Roman" pitchFamily="34" charset="-120"/>
-              </a:rPr>
-              <a:t>t</a:t>
-            </a:r>
-            <a:r>
-              <a:rPr lang="en-US" sz="1100" i="1" dirty="0">
-                <a:solidFill>
-                  <a:srgbClr val="5F6B73"/>
-                </a:solidFill>
-                <a:latin typeface="Times New Roman" pitchFamily="34" charset="0"/>
-                <a:ea typeface="Times New Roman" pitchFamily="34" charset="-122"/>
-                <a:cs typeface="Times New Roman" pitchFamily="34" charset="-120"/>
-              </a:rPr>
-              <a:t>/A</a:t>
-            </a:r>
-            <a:r>
-              <a:rPr lang="en-US" sz="1100" i="1" dirty="0" baseline="-25000">
-                <a:solidFill>
-                  <a:srgbClr val="5F6B73"/>
-                </a:solidFill>
-                <a:latin typeface="Times New Roman" pitchFamily="34" charset="0"/>
-                <a:ea typeface="Times New Roman" pitchFamily="34" charset="-122"/>
-                <a:cs typeface="Times New Roman" pitchFamily="34" charset="-120"/>
-              </a:rPr>
-              <a:t>c</a:t>
-            </a:r>
-            <a:r>
-              <a:rPr lang="en-US" sz="1100" i="1" dirty="0">
-                <a:solidFill>
-                  <a:srgbClr val="5F6B73"/>
-                </a:solidFill>
-                <a:latin typeface="Times New Roman" pitchFamily="34" charset="0"/>
-                <a:ea typeface="Times New Roman" pitchFamily="34" charset="-122"/>
-                <a:cs typeface="Times New Roman" pitchFamily="34" charset="-120"/>
-              </a:rPr>
-              <a:t>: the heavier the target, the slower the residue (</a:t>
-            </a:r>
-            <a:r>
-              <a:rPr lang="en-US" sz="1100" i="1" dirty="0" baseline="30000">
-                <a:solidFill>
-                  <a:srgbClr val="5F6B73"/>
-                </a:solidFill>
-                <a:latin typeface="Times New Roman" pitchFamily="34" charset="0"/>
-                <a:ea typeface="Times New Roman" pitchFamily="34" charset="-122"/>
-                <a:cs typeface="Times New Roman" pitchFamily="34" charset="-120"/>
-              </a:rPr>
-              <a:t>58</a:t>
-            </a:r>
-            <a:r>
-              <a:rPr lang="en-US" sz="1100" i="1" dirty="0">
-                <a:solidFill>
-                  <a:srgbClr val="5F6B73"/>
-                </a:solidFill>
-                <a:latin typeface="Times New Roman" pitchFamily="34" charset="0"/>
-                <a:ea typeface="Times New Roman" pitchFamily="34" charset="-122"/>
-                <a:cs typeface="Times New Roman" pitchFamily="34" charset="-120"/>
-              </a:rPr>
-              <a:t>Fe + </a:t>
-            </a:r>
-            <a:r>
-              <a:rPr lang="en-US" sz="1100" i="1" dirty="0" baseline="30000">
-                <a:solidFill>
-                  <a:srgbClr val="5F6B73"/>
-                </a:solidFill>
-                <a:latin typeface="Times New Roman" pitchFamily="34" charset="0"/>
-                <a:ea typeface="Times New Roman" pitchFamily="34" charset="-122"/>
-                <a:cs typeface="Times New Roman" pitchFamily="34" charset="-120"/>
-              </a:rPr>
-              <a:t>208</a:t>
-            </a:r>
-            <a:r>
-              <a:rPr lang="en-US" sz="1100" i="1" dirty="0">
-                <a:solidFill>
-                  <a:srgbClr val="5F6B73"/>
-                </a:solidFill>
-                <a:latin typeface="Times New Roman" pitchFamily="34" charset="0"/>
-                <a:ea typeface="Times New Roman" pitchFamily="34" charset="-122"/>
-                <a:cs typeface="Times New Roman" pitchFamily="34" charset="-120"/>
-              </a:rPr>
               <a:t>Pb: Δv/v</a:t>
             </a:r>
             <a:r>
-              <a:rPr lang="en-US" sz="1100" i="1" dirty="0" baseline="-25000">
+              <a:rPr lang="en-US" sz="1100" i="1" baseline="-25000" dirty="0">
                 <a:solidFill>
                   <a:srgbClr val="5F6B73"/>
                 </a:solidFill>
@@ -9946,30 +12598,133 @@
           </a:prstGeom>
         </p:spPr>
       </p:pic>
-      <p:pic>
-        <p:nvPicPr>
-          <p:cNvPr id="12" name="Image 3" descr="/Users/Reid Hu/OrbitOS/70_Presentations/717_Learning Group-20260916/assets/eq/eq_eq2.png"/>
-          <p:cNvPicPr>
-            <a:picLocks noChangeAspect="1"/>
-          </p:cNvPicPr>
-          <p:nvPr/>
-        </p:nvPicPr>
-        <p:blipFill>
-          <a:blip r:embed="rId6"/>
-          <a:stretch>
-            <a:fillRect/>
-          </a:stretch>
-        </p:blipFill>
-        <p:spPr>
-          <a:xfrm>
-            <a:off x="1143000" y="3101558"/>
-            <a:ext cx="3377184" cy="213360"/>
-          </a:xfrm>
-          <a:prstGeom prst="rect">
-            <a:avLst/>
-          </a:prstGeom>
-        </p:spPr>
-      </p:pic>
+      <p:sp>
+        <p:nvSpPr>
+          <p:cNvPr id="12" name="Text 12"/>
+          <p:cNvSpPr txBox="1"/>
+          <p:nvPr/>
+        </p:nvSpPr>
+        <p:spPr>
+          <a:xfrm>
+            <a:off x="999805" y="3078220"/>
+            <a:ext cx="3651504" cy="213360"/>
+          </a:xfrm>
+          <a:prstGeom prst="rect">
+            <a:avLst/>
+          </a:prstGeom>
+          <a:noFill/>
+          <a:ln/>
+        </p:spPr>
+        <p:txBody>
+          <a:bodyPr wrap="none" lIns="0" tIns="0" rIns="0" bIns="0" rtlCol="0" anchor="t"/>
+          <a:lstStyle/>
+          <a:p>
+            <a:pPr marL="0" indent="0" algn="ctr">
+              <a:buNone/>
+            </a:pPr>
+            <a:r>
+              <a:rPr lang="en-US" sz="1200" dirty="0">
+                <a:solidFill>
+                  <a:srgbClr val="5F6B73"/>
+                </a:solidFill>
+                <a:latin typeface="Times New Roman" pitchFamily="34" charset="0"/>
+                <a:ea typeface="Times New Roman" pitchFamily="34" charset="-122"/>
+                <a:cs typeface="Times New Roman" pitchFamily="34" charset="-120"/>
+              </a:rPr>
+              <a:t>Eq. 2  ·  complete momentum transfer  ·  </a:t>
+            </a:r>
+            <a:r>
+              <a:rPr lang="en-US" sz="1200" i="1" dirty="0">
+                <a:solidFill>
+                  <a:srgbClr val="5F6B73"/>
+                </a:solidFill>
+                <a:latin typeface="Times New Roman" pitchFamily="34" charset="0"/>
+                <a:ea typeface="Times New Roman" pitchFamily="34" charset="-122"/>
+                <a:cs typeface="Times New Roman" pitchFamily="34" charset="-120"/>
+              </a:rPr>
+              <a:t>A</a:t>
+            </a:r>
+            <a:r>
+              <a:rPr lang="en-US" sz="1200" i="1" baseline="-25000" dirty="0">
+                <a:solidFill>
+                  <a:srgbClr val="5F6B73"/>
+                </a:solidFill>
+                <a:latin typeface="Times New Roman" pitchFamily="34" charset="0"/>
+                <a:ea typeface="Times New Roman" pitchFamily="34" charset="-122"/>
+                <a:cs typeface="Times New Roman" pitchFamily="34" charset="-120"/>
+              </a:rPr>
+              <a:t>c</a:t>
+            </a:r>
+            <a:r>
+              <a:rPr lang="en-US" sz="1200" dirty="0">
+                <a:solidFill>
+                  <a:srgbClr val="5F6B73"/>
+                </a:solidFill>
+                <a:latin typeface="Times New Roman" pitchFamily="34" charset="0"/>
+                <a:ea typeface="Times New Roman" pitchFamily="34" charset="-122"/>
+                <a:cs typeface="Times New Roman" pitchFamily="34" charset="-120"/>
+              </a:rPr>
+              <a:t> = </a:t>
+            </a:r>
+            <a:r>
+              <a:rPr lang="en-US" sz="1200" i="1" dirty="0">
+                <a:solidFill>
+                  <a:srgbClr val="5F6B73"/>
+                </a:solidFill>
+                <a:latin typeface="Times New Roman" pitchFamily="34" charset="0"/>
+                <a:ea typeface="Times New Roman" pitchFamily="34" charset="-122"/>
+                <a:cs typeface="Times New Roman" pitchFamily="34" charset="-120"/>
+              </a:rPr>
+              <a:t>A</a:t>
+            </a:r>
+            <a:r>
+              <a:rPr lang="en-US" sz="1200" i="1" baseline="-25000" dirty="0">
+                <a:solidFill>
+                  <a:srgbClr val="5F6B73"/>
+                </a:solidFill>
+                <a:latin typeface="Times New Roman" pitchFamily="34" charset="0"/>
+                <a:ea typeface="Times New Roman" pitchFamily="34" charset="-122"/>
+                <a:cs typeface="Times New Roman" pitchFamily="34" charset="-120"/>
+              </a:rPr>
+              <a:t>p</a:t>
+            </a:r>
+            <a:r>
+              <a:rPr lang="en-US" sz="1200" dirty="0">
+                <a:solidFill>
+                  <a:srgbClr val="5F6B73"/>
+                </a:solidFill>
+                <a:latin typeface="Times New Roman" pitchFamily="34" charset="0"/>
+                <a:ea typeface="Times New Roman" pitchFamily="34" charset="-122"/>
+                <a:cs typeface="Times New Roman" pitchFamily="34" charset="-120"/>
+              </a:rPr>
+              <a:t> + </a:t>
+            </a:r>
+            <a:r>
+              <a:rPr lang="en-US" sz="1200" i="1" dirty="0">
+                <a:solidFill>
+                  <a:srgbClr val="5F6B73"/>
+                </a:solidFill>
+                <a:latin typeface="Times New Roman" pitchFamily="34" charset="0"/>
+                <a:ea typeface="Times New Roman" pitchFamily="34" charset="-122"/>
+                <a:cs typeface="Times New Roman" pitchFamily="34" charset="-120"/>
+              </a:rPr>
+              <a:t>A</a:t>
+            </a:r>
+            <a:r>
+              <a:rPr lang="en-US" sz="1200" i="1" baseline="-25000" dirty="0">
+                <a:solidFill>
+                  <a:srgbClr val="5F6B73"/>
+                </a:solidFill>
+                <a:latin typeface="Times New Roman" pitchFamily="34" charset="0"/>
+                <a:ea typeface="Times New Roman" pitchFamily="34" charset="-122"/>
+                <a:cs typeface="Times New Roman" pitchFamily="34" charset="-120"/>
+              </a:rPr>
+              <a:t>t</a:t>
+            </a:r>
+            <a:endParaRPr lang="en-US" sz="1200" dirty="0"/>
+          </a:p>
+        </p:txBody>
+      </p:sp>
       <p:sp>
         <p:nvSpPr>
           <p:cNvPr id="13" name="Shape 7"/>
@@ -10045,30 +12800,78 @@
           </a:p>
         </p:txBody>
       </p:sp>
-      <p:pic>
-        <p:nvPicPr>
-          <p:cNvPr id="15" name="Image 4" descr="/Users/Reid Hu/OrbitOS/70_Presentations/717_Learning Group-20260916/assets/eq/kine_fusion_b.png"/>
-          <p:cNvPicPr>
-            <a:picLocks noChangeAspect="1"/>
-          </p:cNvPicPr>
-          <p:nvPr/>
-        </p:nvPicPr>
-        <p:blipFill>
-          <a:blip r:embed="rId9"/>
-          <a:stretch>
-            <a:fillRect/>
-          </a:stretch>
-        </p:blipFill>
-        <p:spPr>
-          <a:xfrm>
-            <a:off x="612191" y="4105656"/>
-            <a:ext cx="2296058" cy="373806"/>
-          </a:xfrm>
-          <a:prstGeom prst="rect">
-            <a:avLst/>
-          </a:prstGeom>
-        </p:spPr>
-      </p:pic>
+      <p:sp>
+        <p:nvSpPr>
+          <p:cNvPr id="15" name="Text 15"/>
+          <p:cNvSpPr txBox="1"/>
+          <p:nvPr/>
+        </p:nvSpPr>
+        <p:spPr>
+          <a:xfrm>
+            <a:off x="551658" y="4082318"/>
+            <a:ext cx="2423160" cy="373806"/>
+          </a:xfrm>
+          <a:prstGeom prst="rect">
+            <a:avLst/>
+          </a:prstGeom>
+          <a:noFill/>
+          <a:ln/>
+        </p:spPr>
+        <p:txBody>
+          <a:bodyPr wrap="square" lIns="0" tIns="0" rIns="0" bIns="0" rtlCol="0" anchor="t"/>
+          <a:lstStyle/>
+          <a:p>
+            <a:pPr marL="0" indent="0" algn="ctr">
+              <a:buNone/>
+            </a:pPr>
+            <a:r>
+              <a:rPr lang="en-US" sz="1200" dirty="0">
+                <a:solidFill>
+                  <a:srgbClr val="1A2332"/>
+                </a:solidFill>
+                <a:latin typeface="Times New Roman" pitchFamily="34" charset="0"/>
+                <a:ea typeface="Times New Roman" pitchFamily="34" charset="-122"/>
+                <a:cs typeface="Times New Roman" pitchFamily="34" charset="-120"/>
+              </a:rPr>
+              <a:t>Travel at </a:t>
+            </a:r>
+            <a:r>
+              <a:rPr lang="en-US" sz="1200" i="1" dirty="0">
+                <a:solidFill>
+                  <a:srgbClr val="1A2332"/>
+                </a:solidFill>
+                <a:latin typeface="Times New Roman" pitchFamily="34" charset="0"/>
+                <a:ea typeface="Times New Roman" pitchFamily="34" charset="-122"/>
+                <a:cs typeface="Times New Roman" pitchFamily="34" charset="-120"/>
+              </a:rPr>
+              <a:t>v</a:t>
+            </a:r>
+            <a:r>
+              <a:rPr lang="en-US" sz="1200" baseline="-25000" dirty="0">
+                <a:solidFill>
+                  <a:srgbClr val="1A2332"/>
+                </a:solidFill>
+                <a:latin typeface="Times New Roman" pitchFamily="34" charset="0"/>
+                <a:ea typeface="Times New Roman" pitchFamily="34" charset="-122"/>
+                <a:cs typeface="Times New Roman" pitchFamily="34" charset="-120"/>
+              </a:rPr>
+              <a:t>cm</a:t>
+            </a:r>
+            <a:r>
+              <a:rPr lang="en-US" sz="1200" dirty="0">
+                <a:solidFill>
+                  <a:srgbClr val="1A2332"/>
+                </a:solidFill>
+                <a:latin typeface="Times New Roman" pitchFamily="34" charset="0"/>
+                <a:ea typeface="Times New Roman" pitchFamily="34" charset="-122"/>
+                <a:cs typeface="Times New Roman" pitchFamily="34" charset="-120"/>
+              </a:rPr>
+              <a:t>. This is the velocity the filter is tuned to pass.</a:t>
+            </a:r>
+            <a:endParaRPr lang="en-US" sz="1200" dirty="0"/>
+          </a:p>
+        </p:txBody>
+      </p:sp>
       <p:sp>
         <p:nvSpPr>
           <p:cNvPr id="16" name="Shape 9"/>
@@ -10144,30 +12947,100 @@
           </a:p>
         </p:txBody>
       </p:sp>
-      <p:pic>
-        <p:nvPicPr>
-          <p:cNvPr id="18" name="Image 5" descr="/Users/Reid Hu/OrbitOS/70_Presentations/717_Learning Group-20260916/assets/eq/kine_beam_b.png"/>
-          <p:cNvPicPr>
-            <a:picLocks noChangeAspect="1"/>
-          </p:cNvPicPr>
-          <p:nvPr/>
-        </p:nvPicPr>
-        <p:blipFill>
-          <a:blip r:embed="rId7"/>
-          <a:stretch>
-            <a:fillRect/>
-          </a:stretch>
-        </p:blipFill>
-        <p:spPr>
-          <a:xfrm>
-            <a:off x="3410209" y="4105656"/>
-            <a:ext cx="2369301" cy="373989"/>
-          </a:xfrm>
-          <a:prstGeom prst="rect">
-            <a:avLst/>
-          </a:prstGeom>
-        </p:spPr>
-      </p:pic>
+      <p:sp>
+        <p:nvSpPr>
+          <p:cNvPr id="18" name="Text 18"/>
+          <p:cNvSpPr txBox="1"/>
+          <p:nvPr/>
+        </p:nvSpPr>
+        <p:spPr>
+          <a:xfrm>
+            <a:off x="3380262" y="4082318"/>
+            <a:ext cx="2423160" cy="373989"/>
+          </a:xfrm>
+          <a:prstGeom prst="rect">
+            <a:avLst/>
+          </a:prstGeom>
+          <a:noFill/>
+          <a:ln/>
+        </p:spPr>
+        <p:txBody>
+          <a:bodyPr wrap="square" lIns="0" tIns="0" rIns="0" bIns="0" rtlCol="0" anchor="t"/>
+          <a:lstStyle/>
+          <a:p>
+            <a:pPr marL="0" indent="0" algn="ctr">
+              <a:buNone/>
+            </a:pPr>
+            <a:r>
+              <a:rPr lang="en-US" sz="1200" dirty="0">
+                <a:solidFill>
+                  <a:srgbClr val="1A2332"/>
+                </a:solidFill>
+                <a:latin typeface="Times New Roman" pitchFamily="34" charset="0"/>
+                <a:ea typeface="Times New Roman" pitchFamily="34" charset="-122"/>
+                <a:cs typeface="Times New Roman" pitchFamily="34" charset="-120"/>
+              </a:rPr>
+              <a:t>Stays near </a:t>
+            </a:r>
+            <a:r>
+              <a:rPr lang="en-US" sz="1200" i="1" dirty="0">
+                <a:solidFill>
+                  <a:srgbClr val="1A2332"/>
+                </a:solidFill>
+                <a:latin typeface="Times New Roman" pitchFamily="34" charset="0"/>
+                <a:ea typeface="Times New Roman" pitchFamily="34" charset="-122"/>
+                <a:cs typeface="Times New Roman" pitchFamily="34" charset="-120"/>
+              </a:rPr>
+              <a:t>v</a:t>
+            </a:r>
+            <a:r>
+              <a:rPr lang="en-US" sz="1200" i="1" baseline="-25000" dirty="0">
+                <a:solidFill>
+                  <a:srgbClr val="1A2332"/>
+                </a:solidFill>
+                <a:latin typeface="Times New Roman" pitchFamily="34" charset="0"/>
+                <a:ea typeface="Times New Roman" pitchFamily="34" charset="-122"/>
+                <a:cs typeface="Times New Roman" pitchFamily="34" charset="-120"/>
+              </a:rPr>
+              <a:t>p</a:t>
+            </a:r>
+            <a:r>
+              <a:rPr lang="en-US" sz="1200" dirty="0">
+                <a:solidFill>
+                  <a:srgbClr val="1A2332"/>
+                </a:solidFill>
+                <a:latin typeface="Times New Roman" pitchFamily="34" charset="0"/>
+                <a:ea typeface="Times New Roman" pitchFamily="34" charset="-122"/>
+                <a:cs typeface="Times New Roman" pitchFamily="34" charset="-120"/>
+              </a:rPr>
+              <a:t>. The mismatch Δ</a:t>
+            </a:r>
+            <a:r>
+              <a:rPr lang="en-US" sz="1200" i="1" dirty="0">
+                <a:solidFill>
+                  <a:srgbClr val="1A2332"/>
+                </a:solidFill>
+                <a:latin typeface="Times New Roman" pitchFamily="34" charset="0"/>
+                <a:ea typeface="Times New Roman" pitchFamily="34" charset="-122"/>
+                <a:cs typeface="Times New Roman" pitchFamily="34" charset="-120"/>
+              </a:rPr>
+              <a:t>v</a:t>
+            </a:r>
+            <a:r>
+              <a:rPr lang="en-US" sz="1200" dirty="0">
+                <a:solidFill>
+                  <a:srgbClr val="1A2332"/>
+                </a:solidFill>
+                <a:latin typeface="Times New Roman" pitchFamily="34" charset="0"/>
+                <a:ea typeface="Times New Roman" pitchFamily="34" charset="-122"/>
+                <a:cs typeface="Times New Roman" pitchFamily="34" charset="-120"/>
+              </a:rPr>
+              <a:t> is set only by the mass ratio.</a:t>
+            </a:r>
+            <a:endParaRPr lang="en-US" sz="1200" dirty="0"/>
+          </a:p>
+        </p:txBody>
+      </p:sp>
       <p:sp>
         <p:nvSpPr>
           <p:cNvPr id="19" name="Shape 11"/>
@@ -10440,203 +13313,22 @@
       </p:sp>
       <p:sp>
         <p:nvSpPr>
-          <p:cNvPr id="25" name="User note (keep until confirmed)"/>
-          <p:cNvSpPr txBox="1"/>
-          <p:nvPr/>
-        </p:nvSpPr>
-        <p:spPr>
-          <a:xfrm>
-            <a:off x="5285232" y="2395728"/>
-            <a:ext cx="3310128" cy="1005840"/>
-          </a:xfrm>
-          <a:prstGeom prst="rect">
-            <a:avLst/>
-          </a:prstGeom>
-          <a:noFill/>
-        </p:spPr>
-        <p:txBody>
-          <a:bodyPr wrap="square" rtlCol="0">
-            <a:spAutoFit/>
-          </a:bodyPr>
-          <a:lstStyle/>
-          <a:p>
-            <a:r>
-              <a:rPr lang="en-JP" dirty="0"/>
-              <a:t>What is A_t?</a:t>
-            </a:r>
-            <a:br>
-              <a:rPr lang="en-JP" dirty="0"/>
-            </a:br>
-            <a:r>
-              <a:rPr lang="en-JP" dirty="0"/>
-              <a:t>You have not explained</a:t>
-            </a:r>
-          </a:p>
-          <a:p>
-            <a:pPr>
-              <a:spcBef>
-                <a:spcPts val="400"/>
-              </a:spcBef>
-            </a:pPr>
-            <a:r>
-              <a:rPr lang="en-JP" dirty="0" sz="1100" i="1">
-                <a:solidFill>
-                  <a:srgbClr val="0F2F5C"/>
-                </a:solidFill>
-              </a:rPr>
-              <a:t>↳ </a:t>
-            </a:r>
-            <a:r>
-              <a:rPr lang="en-JP" dirty="0" sz="1100" i="1">
-                <a:solidFill>
-                  <a:srgbClr val="0F2F5C"/>
-                </a:solidFill>
-              </a:rPr>
-              <a:t>A</a:t>
-            </a:r>
-            <a:r>
-              <a:rPr lang="en-JP" dirty="0" sz="1100" i="1" baseline="-25000">
-                <a:solidFill>
-                  <a:srgbClr val="0F2F5C"/>
-                </a:solidFill>
-              </a:rPr>
-              <a:t>t</a:t>
-            </a:r>
-            <a:r>
-              <a:rPr lang="en-JP" dirty="0" sz="1100" i="1">
-                <a:solidFill>
-                  <a:srgbClr val="0F2F5C"/>
-                </a:solidFill>
-              </a:rPr>
-              <a:t> = target mass number (</a:t>
-            </a:r>
-            <a:r>
-              <a:rPr lang="en-JP" dirty="0" sz="1100" i="1" baseline="30000">
-                <a:solidFill>
-                  <a:srgbClr val="0F2F5C"/>
-                </a:solidFill>
-              </a:rPr>
-              <a:t>208</a:t>
-            </a:r>
-            <a:r>
-              <a:rPr lang="en-JP" dirty="0" sz="1100" i="1">
-                <a:solidFill>
-                  <a:srgbClr val="0F2F5C"/>
-                </a:solidFill>
-              </a:rPr>
-              <a:t>Pb: 208). From v</a:t>
-            </a:r>
-            <a:r>
-              <a:rPr lang="en-JP" dirty="0" sz="1100" i="1" baseline="-25000">
-                <a:solidFill>
-                  <a:srgbClr val="0F2F5C"/>
-                </a:solidFill>
-              </a:rPr>
-              <a:t>cm</a:t>
-            </a:r>
-            <a:r>
-              <a:rPr lang="en-JP" dirty="0" sz="1100" i="1">
-                <a:solidFill>
-                  <a:srgbClr val="0F2F5C"/>
-                </a:solidFill>
-              </a:rPr>
-              <a:t> = (A</a:t>
-            </a:r>
-            <a:r>
-              <a:rPr lang="en-JP" dirty="0" sz="1100" i="1" baseline="-25000">
-                <a:solidFill>
-                  <a:srgbClr val="0F2F5C"/>
-                </a:solidFill>
-              </a:rPr>
-              <a:t>p</a:t>
-            </a:r>
-            <a:r>
-              <a:rPr lang="en-JP" dirty="0" sz="1100" i="1">
-                <a:solidFill>
-                  <a:srgbClr val="0F2F5C"/>
-                </a:solidFill>
-              </a:rPr>
-              <a:t>/A</a:t>
-            </a:r>
-            <a:r>
-              <a:rPr lang="en-JP" dirty="0" sz="1100" i="1" baseline="-25000">
-                <a:solidFill>
-                  <a:srgbClr val="0F2F5C"/>
-                </a:solidFill>
-              </a:rPr>
-              <a:t>c</a:t>
-            </a:r>
-            <a:r>
-              <a:rPr lang="en-JP" dirty="0" sz="1100" i="1">
-                <a:solidFill>
-                  <a:srgbClr val="0F2F5C"/>
-                </a:solidFill>
-              </a:rPr>
-              <a:t>) v</a:t>
-            </a:r>
-            <a:r>
-              <a:rPr lang="en-JP" dirty="0" sz="1100" i="1" baseline="-25000">
-                <a:solidFill>
-                  <a:srgbClr val="0F2F5C"/>
-                </a:solidFill>
-              </a:rPr>
-              <a:t>p</a:t>
-            </a:r>
-            <a:r>
-              <a:rPr lang="en-JP" dirty="0" sz="1100" i="1">
-                <a:solidFill>
-                  <a:srgbClr val="0F2F5C"/>
-                </a:solidFill>
-              </a:rPr>
-              <a:t>, Δv/v</a:t>
-            </a:r>
-            <a:r>
-              <a:rPr lang="en-JP" dirty="0" sz="1100" i="1" baseline="-25000">
-                <a:solidFill>
-                  <a:srgbClr val="0F2F5C"/>
-                </a:solidFill>
-              </a:rPr>
-              <a:t>p</a:t>
-            </a:r>
-            <a:r>
-              <a:rPr lang="en-JP" dirty="0" sz="1100" i="1">
-                <a:solidFill>
-                  <a:srgbClr val="0F2F5C"/>
-                </a:solidFill>
-              </a:rPr>
-              <a:t> = A</a:t>
-            </a:r>
-            <a:r>
-              <a:rPr lang="en-JP" dirty="0" sz="1100" i="1" baseline="-25000">
-                <a:solidFill>
-                  <a:srgbClr val="0F2F5C"/>
-                </a:solidFill>
-              </a:rPr>
-              <a:t>t</a:t>
-            </a:r>
-            <a:r>
-              <a:rPr lang="en-JP" dirty="0" sz="1100" i="1">
-                <a:solidFill>
-                  <a:srgbClr val="0F2F5C"/>
-                </a:solidFill>
-              </a:rPr>
-              <a:t>/A</a:t>
-            </a:r>
-            <a:r>
-              <a:rPr lang="en-JP" dirty="0" sz="1100" i="1" baseline="-25000">
-                <a:solidFill>
-                  <a:srgbClr val="0F2F5C"/>
-                </a:solidFill>
-              </a:rPr>
-              <a:t>c</a:t>
-            </a:r>
-            <a:r>
-              <a:rPr lang="en-JP" dirty="0" sz="1100" i="1">
-                <a:solidFill>
-                  <a:srgbClr val="0F2F5C"/>
-                </a:solidFill>
-              </a:rPr>
-              <a:t>; now in the aside.</a:t>
+          <p:cNvPr id="25" name="Date Placeholder 24"/>
+          <p:cNvSpPr>
+            <a:spLocks noGrp="1"/>
+          </p:cNvSpPr>
+          <p:nvPr>
+            <p:ph type="dt" sz="half" idx="10"/>
+          </p:nvPr>
+        </p:nvSpPr>
+        <p:spPr/>
+        <p:txBody>
+          <a:bodyPr/>
+          <a:lstStyle/>
+          <a:p>
+            <a:r>
+              <a:rPr lang="en-US" dirty="0"/>
+              <a:t>29 Sep 2026</a:t>
             </a:r>
           </a:p>
         </p:txBody>
@@ -10649,7 +13341,7 @@
 </p:sld>
 </file>
 
-<file path=ppt/slides/slide6.xml><?xml version="1.0" encoding="utf-8"?>
+<file path=ppt/slides/slide7.xml><?xml version="1.0" encoding="utf-8"?>
 <p:sld xmlns:a="http://schemas.openxmlformats.org/drawingml/2006/main" xmlns:r="http://schemas.openxmlformats.org/officeDocument/2006/relationships" xmlns:p="http://schemas.openxmlformats.org/presentationml/2006/main">
   <p:cSld name="Slide 5">
     <p:bg>
@@ -10731,7 +13423,7 @@
               <a:buNone/>
             </a:pPr>
             <a:r>
-              <a:rPr lang="en-US" sz="1500" b="1" dirty="0">
+              <a:rPr lang="en-US" sz="1800" b="1" dirty="0">
                 <a:solidFill>
                   <a:srgbClr val="FFFFFF"/>
                 </a:solidFill>
@@ -10741,7 +13433,7 @@
               </a:rPr>
               <a:t>Evaporation residues are kinematically focused into a narrow forward cone.</a:t>
             </a:r>
-            <a:endParaRPr lang="en-US" sz="1500" dirty="0"/>
+            <a:endParaRPr lang="en-US" sz="1800" dirty="0"/>
           </a:p>
         </p:txBody>
       </p:sp>
@@ -10849,7 +13541,7 @@
                 <a:ea typeface="Times New Roman" pitchFamily="34" charset="-122"/>
                 <a:cs typeface="Times New Roman" pitchFamily="34" charset="-120"/>
               </a:rPr>
-              <a:t>Content 2 / 10</a:t>
+              <a:t>Content 3 / 11</a:t>
             </a:r>
             <a:endParaRPr lang="en-US" sz="1000" dirty="0"/>
           </a:p>
@@ -10902,7 +13594,7 @@
         </p:nvSpPr>
         <p:spPr>
           <a:xfrm>
-            <a:off x="411480" y="969264"/>
+            <a:off x="397730" y="969264"/>
             <a:ext cx="8321040" cy="1792224"/>
           </a:xfrm>
           <a:prstGeom prst="roundRect">
@@ -10946,7 +13638,7 @@
         </p:blipFill>
         <p:spPr>
           <a:xfrm>
-            <a:off x="548640" y="1063833"/>
+            <a:off x="1084904" y="1063833"/>
             <a:ext cx="3685032" cy="1395984"/>
           </a:xfrm>
           <a:prstGeom prst="rect">
@@ -10954,30 +13646,45 @@
           </a:prstGeom>
         </p:spPr>
       </p:pic>
-      <p:pic>
-        <p:nvPicPr>
-          <p:cNvPr id="10" name="Image 1" descr="/Users/Reid Hu/OrbitOS/70_Presentations/717_Learning Group-20260916/assets/eq/eq_sigma_note.png"/>
-          <p:cNvPicPr>
-            <a:picLocks noChangeAspect="1"/>
-          </p:cNvPicPr>
-          <p:nvPr/>
-        </p:nvPicPr>
-        <p:blipFill>
-          <a:blip r:embed="rId4"/>
-          <a:stretch>
-            <a:fillRect/>
-          </a:stretch>
-        </p:blipFill>
-        <p:spPr>
-          <a:xfrm>
-            <a:off x="2121252" y="2501524"/>
-            <a:ext cx="344454" cy="172456"/>
-          </a:xfrm>
-          <a:prstGeom prst="rect">
-            <a:avLst/>
-          </a:prstGeom>
-        </p:spPr>
-      </p:pic>
+      <p:sp>
+        <p:nvSpPr>
+          <p:cNvPr id="10" name="Text 10"/>
+          <p:cNvSpPr txBox="1"/>
+          <p:nvPr/>
+        </p:nvSpPr>
+        <p:spPr>
+          <a:xfrm>
+            <a:off x="2517247" y="2478186"/>
+            <a:ext cx="618774" cy="172456"/>
+          </a:xfrm>
+          <a:prstGeom prst="rect">
+            <a:avLst/>
+          </a:prstGeom>
+          <a:noFill/>
+          <a:ln/>
+        </p:spPr>
+        <p:txBody>
+          <a:bodyPr wrap="none" lIns="0" tIns="0" rIns="0" bIns="0" rtlCol="0" anchor="t"/>
+          <a:lstStyle/>
+          <a:p>
+            <a:pPr marL="0" indent="0" algn="ctr">
+              <a:buNone/>
+            </a:pPr>
+            <a:r>
+              <a:rPr lang="en-US" sz="1100" dirty="0">
+                <a:solidFill>
+                  <a:srgbClr val="5F6B73"/>
+                </a:solidFill>
+                <a:latin typeface="Times New Roman" pitchFamily="34" charset="0"/>
+                <a:ea typeface="Times New Roman" pitchFamily="34" charset="-122"/>
+                <a:cs typeface="Times New Roman" pitchFamily="34" charset="-120"/>
+              </a:rPr>
+              <a:t>Eq. 5</a:t>
+            </a:r>
+            <a:endParaRPr lang="en-US" sz="1100" dirty="0"/>
+          </a:p>
+        </p:txBody>
+      </p:sp>
       <p:sp>
         <p:nvSpPr>
           <p:cNvPr id="11" name="Shape 7"/>
@@ -11041,30 +13748,45 @@
           </a:p>
         </p:txBody>
       </p:sp>
-      <p:pic>
-        <p:nvPicPr>
-          <p:cNvPr id="13" name="Image 2" descr="/Users/Reid Hu/OrbitOS/70_Presentations/717_Learning Group-20260916/assets/eq/chip_theta.png"/>
-          <p:cNvPicPr>
-            <a:picLocks noChangeAspect="1"/>
-          </p:cNvPicPr>
-          <p:nvPr/>
-        </p:nvPicPr>
-        <p:blipFill>
-          <a:blip r:embed="rId5"/>
-          <a:stretch>
-            <a:fillRect/>
-          </a:stretch>
-        </p:blipFill>
-        <p:spPr>
-          <a:xfrm>
-            <a:off x="1627906" y="3289234"/>
-            <a:ext cx="127467" cy="142372"/>
-          </a:xfrm>
-          <a:prstGeom prst="rect">
-            <a:avLst/>
-          </a:prstGeom>
-        </p:spPr>
-      </p:pic>
+      <p:sp>
+        <p:nvSpPr>
+          <p:cNvPr id="13" name="Text 13"/>
+          <p:cNvSpPr txBox="1"/>
+          <p:nvPr/>
+        </p:nvSpPr>
+        <p:spPr>
+          <a:xfrm>
+            <a:off x="1460022" y="3220242"/>
+            <a:ext cx="457200" cy="274320"/>
+          </a:xfrm>
+          <a:prstGeom prst="rect">
+            <a:avLst/>
+          </a:prstGeom>
+          <a:noFill/>
+          <a:ln/>
+        </p:spPr>
+        <p:txBody>
+          <a:bodyPr wrap="none" lIns="0" tIns="0" rIns="0" bIns="0" rtlCol="0" anchor="ctr"/>
+          <a:lstStyle/>
+          <a:p>
+            <a:pPr marL="0" indent="0" algn="ctr">
+              <a:buNone/>
+            </a:pPr>
+            <a:r>
+              <a:rPr lang="en-US" sz="1400" i="1" dirty="0">
+                <a:solidFill>
+                  <a:srgbClr val="FFFFFF"/>
+                </a:solidFill>
+                <a:latin typeface="Times New Roman" pitchFamily="34" charset="0"/>
+                <a:ea typeface="Times New Roman" pitchFamily="34" charset="-122"/>
+                <a:cs typeface="Times New Roman" pitchFamily="34" charset="-120"/>
+              </a:rPr>
+              <a:t>θ</a:t>
+            </a:r>
+            <a:endParaRPr lang="en-US" sz="1400" dirty="0"/>
+          </a:p>
+        </p:txBody>
+      </p:sp>
       <p:sp>
         <p:nvSpPr>
           <p:cNvPr id="14" name="Text 9"/>
@@ -11104,30 +13826,100 @@
           </a:p>
         </p:txBody>
       </p:sp>
-      <p:pic>
-        <p:nvPicPr>
-          <p:cNvPr id="15" name="Image 3" descr="/Users/Reid Hu/OrbitOS/70_Presentations/717_Learning Group-20260916/assets/eq/focus_theta_d.png"/>
-          <p:cNvPicPr>
-            <a:picLocks noChangeAspect="1"/>
-          </p:cNvPicPr>
-          <p:nvPr/>
-        </p:nvPicPr>
-        <p:blipFill>
-          <a:blip r:embed="rId11"/>
-          <a:stretch>
-            <a:fillRect/>
-          </a:stretch>
-        </p:blipFill>
-        <p:spPr>
-          <a:xfrm>
-            <a:off x="539953" y="3991356"/>
-            <a:ext cx="2440533" cy="373989"/>
-          </a:xfrm>
-          <a:prstGeom prst="rect">
-            <a:avLst/>
-          </a:prstGeom>
-        </p:spPr>
-      </p:pic>
+      <p:sp>
+        <p:nvSpPr>
+          <p:cNvPr id="15" name="Text 15"/>
+          <p:cNvSpPr txBox="1"/>
+          <p:nvPr/>
+        </p:nvSpPr>
+        <p:spPr>
+          <a:xfrm>
+            <a:off x="554766" y="3968018"/>
+            <a:ext cx="2423160" cy="373989"/>
+          </a:xfrm>
+          <a:prstGeom prst="rect">
+            <a:avLst/>
+          </a:prstGeom>
+          <a:noFill/>
+          <a:ln/>
+        </p:spPr>
+        <p:txBody>
+          <a:bodyPr wrap="square" lIns="0" tIns="0" rIns="0" bIns="0" rtlCol="0" anchor="t"/>
+          <a:lstStyle/>
+          <a:p>
+            <a:pPr marL="0" indent="0" algn="ctr">
+              <a:buNone/>
+            </a:pPr>
+            <a:r>
+              <a:rPr lang="en-US" sz="1200" i="1" dirty="0">
+                <a:solidFill>
+                  <a:srgbClr val="1A2332"/>
+                </a:solidFill>
+                <a:latin typeface="Times New Roman" pitchFamily="34" charset="0"/>
+                <a:ea typeface="Times New Roman" pitchFamily="34" charset="-122"/>
+                <a:cs typeface="Times New Roman" pitchFamily="34" charset="-120"/>
+              </a:rPr>
+              <a:t>θ</a:t>
+            </a:r>
+            <a:r>
+              <a:rPr lang="en-US" sz="1200" dirty="0">
+                <a:solidFill>
+                  <a:srgbClr val="1A2332"/>
+                </a:solidFill>
+                <a:latin typeface="Times New Roman" pitchFamily="34" charset="0"/>
+                <a:ea typeface="Times New Roman" pitchFamily="34" charset="-122"/>
+                <a:cs typeface="Times New Roman" pitchFamily="34" charset="-120"/>
+              </a:rPr>
+              <a:t> = lab emission half-angle; Ω &lt; 5 msr gives </a:t>
+            </a:r>
+            <a:r>
+              <a:rPr lang="en-US" sz="1200" i="1" dirty="0">
+                <a:solidFill>
+                  <a:srgbClr val="1A2332"/>
+                </a:solidFill>
+                <a:latin typeface="Times New Roman" pitchFamily="34" charset="0"/>
+                <a:ea typeface="Times New Roman" pitchFamily="34" charset="-122"/>
+                <a:cs typeface="Times New Roman" pitchFamily="34" charset="-120"/>
+              </a:rPr>
+              <a:t>θ</a:t>
+            </a:r>
+            <a:r>
+              <a:rPr lang="en-US" sz="1200" dirty="0">
+                <a:solidFill>
+                  <a:srgbClr val="1A2332"/>
+                </a:solidFill>
+                <a:latin typeface="Times New Roman" pitchFamily="34" charset="0"/>
+                <a:ea typeface="Times New Roman" pitchFamily="34" charset="-122"/>
+                <a:cs typeface="Times New Roman" pitchFamily="34" charset="-120"/>
+              </a:rPr>
+              <a:t> </a:t>
+            </a:r>
+            <a:r>
+              <a:rPr lang="en-US" sz="1200" dirty="0">
+                <a:solidFill>
+                  <a:srgbClr val="1A2332"/>
+                </a:solidFill>
+                <a:latin typeface="Cambria Math" pitchFamily="34" charset="0"/>
+                <a:ea typeface="Cambria Math" pitchFamily="34" charset="-122"/>
+                <a:cs typeface="Cambria Math" pitchFamily="34" charset="-120"/>
+              </a:rPr>
+              <a:t>≲</a:t>
+            </a:r>
+            <a:r>
+              <a:rPr lang="en-US" sz="1200" dirty="0">
+                <a:solidFill>
+                  <a:srgbClr val="1A2332"/>
+                </a:solidFill>
+                <a:latin typeface="Times New Roman" pitchFamily="34" charset="0"/>
+                <a:ea typeface="Times New Roman" pitchFamily="34" charset="-122"/>
+                <a:cs typeface="Times New Roman" pitchFamily="34" charset="-120"/>
+              </a:rPr>
+              <a:t> 2.3°.</a:t>
+            </a:r>
+            <a:endParaRPr lang="en-US" sz="1200" dirty="0"/>
+          </a:p>
+        </p:txBody>
+      </p:sp>
       <p:sp>
         <p:nvSpPr>
           <p:cNvPr id="16" name="Shape 10"/>
@@ -11191,30 +13983,45 @@
           </a:p>
         </p:txBody>
       </p:sp>
-      <p:pic>
-        <p:nvPicPr>
-          <p:cNvPr id="18" name="Image 4" descr="/Users/Reid Hu/OrbitOS/70_Presentations/717_Learning Group-20260916/assets/eq/chip_omega.png"/>
-          <p:cNvPicPr>
-            <a:picLocks noChangeAspect="1"/>
-          </p:cNvPicPr>
-          <p:nvPr/>
-        </p:nvPicPr>
-        <p:blipFill>
-          <a:blip r:embed="rId7"/>
-          <a:stretch>
-            <a:fillRect/>
-          </a:stretch>
-        </p:blipFill>
-        <p:spPr>
-          <a:xfrm>
-            <a:off x="4438086" y="3287908"/>
-            <a:ext cx="176388" cy="145024"/>
-          </a:xfrm>
-          <a:prstGeom prst="rect">
-            <a:avLst/>
-          </a:prstGeom>
-        </p:spPr>
-      </p:pic>
+      <p:sp>
+        <p:nvSpPr>
+          <p:cNvPr id="18" name="Text 18"/>
+          <p:cNvSpPr txBox="1"/>
+          <p:nvPr/>
+        </p:nvSpPr>
+        <p:spPr>
+          <a:xfrm>
+            <a:off x="4294571" y="3207990"/>
+            <a:ext cx="457200" cy="274320"/>
+          </a:xfrm>
+          <a:prstGeom prst="rect">
+            <a:avLst/>
+          </a:prstGeom>
+          <a:noFill/>
+          <a:ln/>
+        </p:spPr>
+        <p:txBody>
+          <a:bodyPr wrap="none" lIns="0" tIns="0" rIns="0" bIns="0" rtlCol="0" anchor="ctr"/>
+          <a:lstStyle/>
+          <a:p>
+            <a:pPr marL="0" indent="0" algn="ctr">
+              <a:buNone/>
+            </a:pPr>
+            <a:r>
+              <a:rPr lang="en-US" sz="1400" dirty="0">
+                <a:solidFill>
+                  <a:srgbClr val="FFFFFF"/>
+                </a:solidFill>
+                <a:latin typeface="Times New Roman" pitchFamily="34" charset="0"/>
+                <a:ea typeface="Times New Roman" pitchFamily="34" charset="-122"/>
+                <a:cs typeface="Times New Roman" pitchFamily="34" charset="-120"/>
+              </a:rPr>
+              <a:t>Ω</a:t>
+            </a:r>
+            <a:endParaRPr lang="en-US" sz="1400" dirty="0"/>
+          </a:p>
+        </p:txBody>
+      </p:sp>
       <p:sp>
         <p:nvSpPr>
           <p:cNvPr id="19" name="Text 12"/>
@@ -11254,30 +14061,67 @@
           </a:p>
         </p:txBody>
       </p:sp>
-      <p:pic>
-        <p:nvPicPr>
-          <p:cNvPr id="20" name="Image 5" descr="/Users/Reid Hu/OrbitOS/70_Presentations/717_Learning Group-20260916/assets/eq/focus_omega_d.png"/>
-          <p:cNvPicPr>
-            <a:picLocks noChangeAspect="1"/>
-          </p:cNvPicPr>
-          <p:nvPr/>
-        </p:nvPicPr>
-        <p:blipFill>
-          <a:blip r:embed="rId6"/>
-          <a:stretch>
-            <a:fillRect/>
-          </a:stretch>
-        </p:blipFill>
-        <p:spPr>
-          <a:xfrm>
-            <a:off x="3401294" y="3991356"/>
-            <a:ext cx="2387132" cy="343540"/>
-          </a:xfrm>
-          <a:prstGeom prst="rect">
-            <a:avLst/>
-          </a:prstGeom>
-        </p:spPr>
-      </p:pic>
+      <p:sp>
+        <p:nvSpPr>
+          <p:cNvPr id="20" name="Text 20"/>
+          <p:cNvSpPr txBox="1"/>
+          <p:nvPr/>
+        </p:nvSpPr>
+        <p:spPr>
+          <a:xfrm>
+            <a:off x="3381726" y="3968018"/>
+            <a:ext cx="2423160" cy="343540"/>
+          </a:xfrm>
+          <a:prstGeom prst="rect">
+            <a:avLst/>
+          </a:prstGeom>
+          <a:noFill/>
+          <a:ln/>
+        </p:spPr>
+        <p:txBody>
+          <a:bodyPr wrap="square" lIns="0" tIns="0" rIns="0" bIns="0" rtlCol="0" anchor="t"/>
+          <a:lstStyle/>
+          <a:p>
+            <a:pPr marL="0" indent="0" algn="ctr">
+              <a:buNone/>
+            </a:pPr>
+            <a:r>
+              <a:rPr lang="en-US" sz="1200" dirty="0">
+                <a:solidFill>
+                  <a:srgbClr val="1A2332"/>
+                </a:solidFill>
+                <a:latin typeface="Times New Roman" pitchFamily="34" charset="0"/>
+                <a:ea typeface="Times New Roman" pitchFamily="34" charset="-122"/>
+                <a:cs typeface="Times New Roman" pitchFamily="34" charset="-120"/>
+              </a:rPr>
+              <a:t>Forward cone below 5 msr for beams with </a:t>
+            </a:r>
+            <a:r>
+              <a:rPr lang="en-US" sz="1200" i="1" dirty="0">
+                <a:solidFill>
+                  <a:srgbClr val="1A2332"/>
+                </a:solidFill>
+                <a:latin typeface="Times New Roman" pitchFamily="34" charset="0"/>
+                <a:ea typeface="Times New Roman" pitchFamily="34" charset="-122"/>
+                <a:cs typeface="Times New Roman" pitchFamily="34" charset="-120"/>
+              </a:rPr>
+              <a:t>A</a:t>
+            </a:r>
+            <a:r>
+              <a:rPr lang="en-US" sz="1200" dirty="0">
+                <a:solidFill>
+                  <a:srgbClr val="1A2332"/>
+                </a:solidFill>
+                <a:latin typeface="Times New Roman" pitchFamily="34" charset="0"/>
+                <a:ea typeface="Times New Roman" pitchFamily="34" charset="-122"/>
+                <a:cs typeface="Times New Roman" pitchFamily="34" charset="-120"/>
+              </a:rPr>
+              <a:t> &gt; 40 near the Coulomb barrier.</a:t>
+            </a:r>
+            <a:endParaRPr lang="en-US" sz="1200" dirty="0"/>
+          </a:p>
+        </p:txBody>
+      </p:sp>
       <p:sp>
         <p:nvSpPr>
           <p:cNvPr id="21" name="Shape 13"/>
@@ -11341,30 +14185,45 @@
           </a:p>
         </p:txBody>
       </p:sp>
-      <p:pic>
-        <p:nvPicPr>
-          <p:cNvPr id="23" name="Image 6" descr="/Users/Reid Hu/OrbitOS/70_Presentations/717_Learning Group-20260916/assets/eq/chip_eps.png"/>
-          <p:cNvPicPr>
-            <a:picLocks noChangeAspect="1"/>
-          </p:cNvPicPr>
-          <p:nvPr/>
-        </p:nvPicPr>
-        <p:blipFill>
-          <a:blip r:embed="rId9"/>
-          <a:stretch>
-            <a:fillRect/>
-          </a:stretch>
-        </p:blipFill>
-        <p:spPr>
-          <a:xfrm>
-            <a:off x="7298009" y="3307385"/>
-            <a:ext cx="125821" cy="106070"/>
-          </a:xfrm>
-          <a:prstGeom prst="rect">
-            <a:avLst/>
-          </a:prstGeom>
-        </p:spPr>
-      </p:pic>
+      <p:sp>
+        <p:nvSpPr>
+          <p:cNvPr id="23" name="Text 23"/>
+          <p:cNvSpPr txBox="1"/>
+          <p:nvPr/>
+        </p:nvSpPr>
+        <p:spPr>
+          <a:xfrm>
+            <a:off x="7129211" y="3192810"/>
+            <a:ext cx="457200" cy="274320"/>
+          </a:xfrm>
+          <a:prstGeom prst="rect">
+            <a:avLst/>
+          </a:prstGeom>
+          <a:noFill/>
+          <a:ln/>
+        </p:spPr>
+        <p:txBody>
+          <a:bodyPr wrap="none" lIns="0" tIns="0" rIns="0" bIns="0" rtlCol="0" anchor="ctr"/>
+          <a:lstStyle/>
+          <a:p>
+            <a:pPr marL="0" indent="0" algn="ctr">
+              <a:buNone/>
+            </a:pPr>
+            <a:r>
+              <a:rPr lang="en-US" sz="1400" i="1" dirty="0">
+                <a:solidFill>
+                  <a:srgbClr val="FFFFFF"/>
+                </a:solidFill>
+                <a:latin typeface="Times New Roman" pitchFamily="34" charset="0"/>
+                <a:ea typeface="Times New Roman" pitchFamily="34" charset="-122"/>
+                <a:cs typeface="Times New Roman" pitchFamily="34" charset="-120"/>
+              </a:rPr>
+              <a:t>ε</a:t>
+            </a:r>
+            <a:endParaRPr lang="en-US" sz="1400" dirty="0"/>
+          </a:p>
+        </p:txBody>
+      </p:sp>
       <p:sp>
         <p:nvSpPr>
           <p:cNvPr id="24" name="Text 15"/>
@@ -11404,30 +14263,45 @@
           </a:p>
         </p:txBody>
       </p:sp>
-      <p:pic>
-        <p:nvPicPr>
-          <p:cNvPr id="25" name="Image 7" descr="/Users/Reid Hu/OrbitOS/70_Presentations/717_Learning Group-20260916/assets/eq/focus_eps_d.png"/>
-          <p:cNvPicPr>
-            <a:picLocks noChangeAspect="1"/>
-          </p:cNvPicPr>
-          <p:nvPr/>
-        </p:nvPicPr>
-        <p:blipFill>
-          <a:blip r:embed="rId10"/>
-          <a:stretch>
-            <a:fillRect/>
-          </a:stretch>
-        </p:blipFill>
-        <p:spPr>
-          <a:xfrm>
-            <a:off x="6222492" y="3991356"/>
-            <a:ext cx="2414016" cy="374904"/>
-          </a:xfrm>
-          <a:prstGeom prst="rect">
-            <a:avLst/>
-          </a:prstGeom>
-        </p:spPr>
-      </p:pic>
+      <p:sp>
+        <p:nvSpPr>
+          <p:cNvPr id="25" name="Text 25"/>
+          <p:cNvSpPr txBox="1"/>
+          <p:nvPr/>
+        </p:nvSpPr>
+        <p:spPr>
+          <a:xfrm>
+            <a:off x="6217920" y="3968018"/>
+            <a:ext cx="2423160" cy="374904"/>
+          </a:xfrm>
+          <a:prstGeom prst="rect">
+            <a:avLst/>
+          </a:prstGeom>
+          <a:noFill/>
+          <a:ln/>
+        </p:spPr>
+        <p:txBody>
+          <a:bodyPr wrap="square" lIns="0" tIns="0" rIns="0" bIns="0" rtlCol="0" anchor="t"/>
+          <a:lstStyle/>
+          <a:p>
+            <a:pPr marL="0" indent="0" algn="ctr">
+              <a:buNone/>
+            </a:pPr>
+            <a:r>
+              <a:rPr lang="en-US" sz="1200" dirty="0">
+                <a:solidFill>
+                  <a:srgbClr val="1A2332"/>
+                </a:solidFill>
+                <a:latin typeface="Times New Roman" pitchFamily="34" charset="0"/>
+                <a:ea typeface="Times New Roman" pitchFamily="34" charset="-122"/>
+                <a:cs typeface="Times New Roman" pitchFamily="34" charset="-120"/>
+              </a:rPr>
+              <a:t>Near the barrier, heavy projectiles give separation efficiencies of 10%–100%.</a:t>
+            </a:r>
+            <a:endParaRPr lang="en-US" sz="1200" dirty="0"/>
+          </a:p>
+        </p:txBody>
+      </p:sp>
       <p:sp>
         <p:nvSpPr>
           <p:cNvPr id="26" name="Aside Evaporation"/>
@@ -11436,8 +14310,8 @@
         </p:nvSpPr>
         <p:spPr>
           <a:xfrm>
-            <a:off x="4572000" y="1060704"/>
-            <a:ext cx="3977639" cy="1572768"/>
+            <a:off x="5261756" y="1401532"/>
+            <a:ext cx="3056364" cy="1572768"/>
           </a:xfrm>
           <a:prstGeom prst="rect">
             <a:avLst/>
@@ -11487,15 +14361,37 @@
 </a:t>
             </a:r>
             <a:r>
+              <a:rPr lang="en-US" sz="1100" b="1" i="1" dirty="0">
+                <a:solidFill>
+                  <a:srgbClr val="0F2F5C"/>
+                </a:solidFill>
+                <a:latin typeface="Times New Roman" pitchFamily="34" charset="0"/>
+                <a:ea typeface="Times New Roman" pitchFamily="34" charset="-122"/>
+                <a:cs typeface="Times New Roman" pitchFamily="34" charset="-120"/>
+              </a:rPr>
+              <a:t>Factor 3</a:t>
+            </a:r>
+            <a:r>
               <a:rPr lang="en-US" sz="1100" i="1" dirty="0">
                 <a:solidFill>
-                  <a:srgbClr val="0F2F5C"/>
-                </a:solidFill>
-                <a:latin typeface="Times New Roman" pitchFamily="34" charset="0"/>
-                <a:ea typeface="Times New Roman" pitchFamily="34" charset="-122"/>
-                <a:cs typeface="Times New Roman" pitchFamily="34" charset="-120"/>
-              </a:rPr>
-              <a:t>Random kicks</a:t>
+                  <a:srgbClr val="5F6B73"/>
+                </a:solidFill>
+                <a:latin typeface="Times New Roman" pitchFamily="34" charset="0"/>
+                <a:ea typeface="Times New Roman" pitchFamily="34" charset="-122"/>
+                <a:cs typeface="Times New Roman" pitchFamily="34" charset="-120"/>
+              </a:rPr>
+              <a:t> = each emission kicks the residue in a random direction. The squared kicks add up, and x, y and z share the sum equally; σ</a:t>
+            </a:r>
+            <a:r>
+              <a:rPr lang="en-US" sz="1100" i="1" baseline="-25000" dirty="0">
+                <a:solidFill>
+                  <a:srgbClr val="5F6B73"/>
+                </a:solidFill>
+                <a:latin typeface="Times New Roman" pitchFamily="34" charset="0"/>
+                <a:ea typeface="Times New Roman" pitchFamily="34" charset="-122"/>
+                <a:cs typeface="Times New Roman" pitchFamily="34" charset="-120"/>
+              </a:rPr>
+              <a:t>r</a:t>
             </a:r>
             <a:r>
               <a:rPr lang="en-US" sz="1100" i="1" dirty="0">
@@ -11506,9 +14402,64 @@
                 <a:ea typeface="Times New Roman" pitchFamily="34" charset="-122"/>
                 <a:cs typeface="Times New Roman" pitchFamily="34" charset="-120"/>
               </a:rPr>
-              <a:t> — each emission recoils the residue in a random direction; the kicks add in quadrature and split equally over x, y and z, so dividing by 3 keeps one axis.</a:t>
+              <a:t> is the spread along one axis, so σ</a:t>
+            </a:r>
+            <a:r>
+              <a:rPr lang="en-US" sz="1100" i="1" baseline="-25000" dirty="0">
+                <a:solidFill>
+                  <a:srgbClr val="5F6B73"/>
+                </a:solidFill>
+                <a:latin typeface="Times New Roman" pitchFamily="34" charset="0"/>
+                <a:ea typeface="Times New Roman" pitchFamily="34" charset="-122"/>
+                <a:cs typeface="Times New Roman" pitchFamily="34" charset="-120"/>
+              </a:rPr>
+              <a:t>r</a:t>
+            </a:r>
+            <a:r>
+              <a:rPr lang="en-US" sz="1100" i="1" baseline="30000" dirty="0">
+                <a:solidFill>
+                  <a:srgbClr val="5F6B73"/>
+                </a:solidFill>
+                <a:latin typeface="Times New Roman" pitchFamily="34" charset="0"/>
+                <a:ea typeface="Times New Roman" pitchFamily="34" charset="-122"/>
+                <a:cs typeface="Times New Roman" pitchFamily="34" charset="-120"/>
+              </a:rPr>
+              <a:t>2</a:t>
+            </a:r>
+            <a:r>
+              <a:rPr lang="en-US" sz="1100" i="1" dirty="0">
+                <a:solidFill>
+                  <a:srgbClr val="5F6B73"/>
+                </a:solidFill>
+                <a:latin typeface="Times New Roman" pitchFamily="34" charset="0"/>
+                <a:ea typeface="Times New Roman" pitchFamily="34" charset="-122"/>
+                <a:cs typeface="Times New Roman" pitchFamily="34" charset="-120"/>
+              </a:rPr>
+              <a:t> gets a third.</a:t>
             </a:r>
             <a:endParaRPr lang="en-US" sz="1100" dirty="0"/>
+          </a:p>
+        </p:txBody>
+      </p:sp>
+      <p:sp>
+        <p:nvSpPr>
+          <p:cNvPr id="27" name="Date Placeholder 26"/>
+          <p:cNvSpPr>
+            <a:spLocks noGrp="1"/>
+          </p:cNvSpPr>
+          <p:nvPr>
+            <p:ph type="dt" sz="half" idx="10"/>
+          </p:nvPr>
+        </p:nvSpPr>
+        <p:spPr/>
+        <p:txBody>
+          <a:bodyPr/>
+          <a:lstStyle/>
+          <a:p>
+            <a:r>
+              <a:rPr lang="en-US" dirty="0"/>
+              <a:t>29 Sep 2026</a:t>
+            </a:r>
           </a:p>
         </p:txBody>
       </p:sp>
@@ -11520,7 +14471,7 @@
 </p:sld>
 </file>
 
-<file path=ppt/slides/slide7.xml><?xml version="1.0" encoding="utf-8"?>
+<file path=ppt/slides/slide8.xml><?xml version="1.0" encoding="utf-8"?>
 <p:sld xmlns:a="http://schemas.openxmlformats.org/drawingml/2006/main" xmlns:r="http://schemas.openxmlformats.org/officeDocument/2006/relationships" xmlns:p="http://schemas.openxmlformats.org/presentationml/2006/main">
   <p:cSld name="Slide 7">
     <p:bg>
@@ -11602,7 +14553,7 @@
               <a:buNone/>
             </a:pPr>
             <a:r>
-              <a:rPr lang="en-US" sz="1600" b="1" dirty="0">
+              <a:rPr lang="en-US" sz="1800" b="1" dirty="0">
                 <a:solidFill>
                   <a:srgbClr val="FFFFFF"/>
                 </a:solidFill>
@@ -11612,7 +14563,7 @@
               </a:rPr>
               <a:t>Mass separators lose most of the yield to charge-state splitting.</a:t>
             </a:r>
-            <a:endParaRPr lang="en-US" sz="1600" dirty="0"/>
+            <a:endParaRPr lang="en-US" sz="1800" dirty="0"/>
           </a:p>
         </p:txBody>
       </p:sp>
@@ -11720,7 +14671,7 @@
                 <a:ea typeface="Times New Roman" pitchFamily="34" charset="-122"/>
                 <a:cs typeface="Times New Roman" pitchFamily="34" charset="-120"/>
               </a:rPr>
-              <a:t>Content 3 / 10</a:t>
+              <a:t>Content 4 / 11</a:t>
             </a:r>
             <a:endParaRPr lang="en-US" sz="1000" dirty="0"/>
           </a:p>
@@ -12336,54 +15287,84 @@
           </a:fontRef>
         </p:style>
       </p:cxnSp>
-      <p:pic>
-        <p:nvPicPr>
-          <p:cNvPr id="23" name="Picture 22" descr="s7_axis.png"/>
-          <p:cNvPicPr>
-            <a:picLocks noChangeAspect="1"/>
-          </p:cNvPicPr>
-          <p:nvPr/>
-        </p:nvPicPr>
-        <p:blipFill>
-          <a:blip r:embed="rId3"/>
-          <a:stretch>
-            <a:fillRect/>
-          </a:stretch>
-        </p:blipFill>
-        <p:spPr>
-          <a:xfrm>
-            <a:off x="2156841" y="4242816"/>
-            <a:ext cx="898398" cy="163403"/>
-          </a:xfrm>
-          <a:prstGeom prst="rect">
-            <a:avLst/>
-          </a:prstGeom>
-        </p:spPr>
-      </p:pic>
-      <p:pic>
-        <p:nvPicPr>
-          <p:cNvPr id="24" name="Picture 23" descr="cap_s7.png"/>
-          <p:cNvPicPr>
-            <a:picLocks noChangeAspect="1"/>
-          </p:cNvPicPr>
-          <p:nvPr/>
-        </p:nvPicPr>
-        <p:blipFill>
-          <a:blip r:embed="rId4"/>
-          <a:stretch>
-            <a:fillRect/>
-          </a:stretch>
-        </p:blipFill>
-        <p:spPr>
-          <a:xfrm>
-            <a:off x="473064" y="4535424"/>
-            <a:ext cx="4265950" cy="140451"/>
-          </a:xfrm>
-          <a:prstGeom prst="rect">
-            <a:avLst/>
-          </a:prstGeom>
-        </p:spPr>
-      </p:pic>
+      <p:sp>
+        <p:nvSpPr>
+          <p:cNvPr id="23" name="Text 23"/>
+          <p:cNvSpPr txBox="1"/>
+          <p:nvPr/>
+        </p:nvSpPr>
+        <p:spPr>
+          <a:xfrm>
+            <a:off x="2018127" y="4209796"/>
+            <a:ext cx="1172718" cy="163403"/>
+          </a:xfrm>
+          <a:prstGeom prst="rect">
+            <a:avLst/>
+          </a:prstGeom>
+          <a:noFill/>
+          <a:ln/>
+        </p:spPr>
+        <p:txBody>
+          <a:bodyPr wrap="none" lIns="0" tIns="0" rIns="0" bIns="0" rtlCol="0" anchor="t"/>
+          <a:lstStyle/>
+          <a:p>
+            <a:pPr marL="0" indent="0" algn="ctr">
+              <a:buNone/>
+            </a:pPr>
+            <a:r>
+              <a:rPr lang="en-US" sz="1200" i="1" dirty="0">
+                <a:solidFill>
+                  <a:srgbClr val="5F6B73"/>
+                </a:solidFill>
+                <a:latin typeface="Times New Roman" pitchFamily="34" charset="0"/>
+                <a:ea typeface="Times New Roman" pitchFamily="34" charset="-122"/>
+                <a:cs typeface="Times New Roman" pitchFamily="34" charset="-120"/>
+              </a:rPr>
+              <a:t>ionic charge q</a:t>
+            </a:r>
+            <a:endParaRPr lang="en-US" sz="1200" dirty="0"/>
+          </a:p>
+        </p:txBody>
+      </p:sp>
+      <p:sp>
+        <p:nvSpPr>
+          <p:cNvPr id="24" name="Text 24"/>
+          <p:cNvSpPr txBox="1"/>
+          <p:nvPr/>
+        </p:nvSpPr>
+        <p:spPr>
+          <a:xfrm>
+            <a:off x="334350" y="4505422"/>
+            <a:ext cx="4540270" cy="140451"/>
+          </a:xfrm>
+          <a:prstGeom prst="rect">
+            <a:avLst/>
+          </a:prstGeom>
+          <a:noFill/>
+          <a:ln/>
+        </p:spPr>
+        <p:txBody>
+          <a:bodyPr wrap="none" lIns="0" tIns="0" rIns="0" bIns="0" rtlCol="0" anchor="t"/>
+          <a:lstStyle/>
+          <a:p>
+            <a:pPr marL="0" indent="0" algn="ctr">
+              <a:buNone/>
+            </a:pPr>
+            <a:r>
+              <a:rPr lang="en-US" sz="1000" dirty="0">
+                <a:solidFill>
+                  <a:srgbClr val="8A96A0"/>
+                </a:solidFill>
+                <a:latin typeface="Times New Roman" pitchFamily="34" charset="0"/>
+                <a:ea typeface="Times New Roman" pitchFamily="34" charset="-122"/>
+                <a:cs typeface="Times New Roman" pitchFamily="34" charset="-120"/>
+              </a:rPr>
+              <a:t>Schematic  ·  one residue species spread over about five charge states (Ch. 11 §III.A)</a:t>
+            </a:r>
+            <a:endParaRPr lang="en-US" sz="1000" dirty="0"/>
+          </a:p>
+        </p:txBody>
+      </p:sp>
       <p:sp>
         <p:nvSpPr>
           <p:cNvPr id="25" name="Shape 4"/>
@@ -12486,30 +15467,89 @@
           </a:p>
         </p:txBody>
       </p:sp>
-      <p:pic>
-        <p:nvPicPr>
-          <p:cNvPr id="28" name="Picture 27" descr="s7_sort_b.png"/>
-          <p:cNvPicPr>
-            <a:picLocks noChangeAspect="1"/>
-          </p:cNvPicPr>
-          <p:nvPr/>
-        </p:nvPicPr>
-        <p:blipFill>
-          <a:blip r:embed="rId5"/>
-          <a:stretch>
-            <a:fillRect/>
-          </a:stretch>
-        </p:blipFill>
-        <p:spPr>
-          <a:xfrm>
-            <a:off x="5303520" y="1024128"/>
-            <a:ext cx="3297783" cy="373806"/>
-          </a:xfrm>
-          <a:prstGeom prst="rect">
-            <a:avLst/>
-          </a:prstGeom>
-        </p:spPr>
-      </p:pic>
+      <p:sp>
+        <p:nvSpPr>
+          <p:cNvPr id="28" name="Text 28"/>
+          <p:cNvSpPr txBox="1"/>
+          <p:nvPr/>
+        </p:nvSpPr>
+        <p:spPr>
+          <a:xfrm>
+            <a:off x="5328920" y="1000790"/>
+            <a:ext cx="3383280" cy="373806"/>
+          </a:xfrm>
+          <a:prstGeom prst="rect">
+            <a:avLst/>
+          </a:prstGeom>
+          <a:noFill/>
+          <a:ln/>
+        </p:spPr>
+        <p:txBody>
+          <a:bodyPr wrap="square" lIns="0" tIns="0" rIns="0" bIns="0" rtlCol="0" anchor="t"/>
+          <a:lstStyle/>
+          <a:p>
+            <a:pPr marL="0" indent="0" algn="l">
+              <a:buNone/>
+            </a:pPr>
+            <a:r>
+              <a:rPr lang="en-US" sz="1200" dirty="0">
+                <a:solidFill>
+                  <a:srgbClr val="1A2332"/>
+                </a:solidFill>
+                <a:latin typeface="Times New Roman" pitchFamily="34" charset="0"/>
+                <a:ea typeface="Times New Roman" pitchFamily="34" charset="-122"/>
+                <a:cs typeface="Times New Roman" pitchFamily="34" charset="-120"/>
+              </a:rPr>
+              <a:t>Electric and magnetic fields send each </a:t>
+            </a:r>
+            <a:r>
+              <a:rPr lang="en-US" sz="1200" i="1" dirty="0">
+                <a:solidFill>
+                  <a:srgbClr val="1A2332"/>
+                </a:solidFill>
+                <a:latin typeface="Times New Roman" pitchFamily="34" charset="0"/>
+                <a:ea typeface="Times New Roman" pitchFamily="34" charset="-122"/>
+                <a:cs typeface="Times New Roman" pitchFamily="34" charset="-120"/>
+              </a:rPr>
+              <a:t>A</a:t>
+            </a:r>
+            <a:r>
+              <a:rPr lang="en-US" sz="1200" dirty="0">
+                <a:solidFill>
+                  <a:srgbClr val="1A2332"/>
+                </a:solidFill>
+                <a:latin typeface="Times New Roman" pitchFamily="34" charset="0"/>
+                <a:ea typeface="Times New Roman" pitchFamily="34" charset="-122"/>
+                <a:cs typeface="Times New Roman" pitchFamily="34" charset="-120"/>
+              </a:rPr>
+              <a:t>/</a:t>
+            </a:r>
+            <a:r>
+              <a:rPr lang="en-US" sz="1200" i="1" dirty="0">
+                <a:solidFill>
+                  <a:srgbClr val="1A2332"/>
+                </a:solidFill>
+                <a:latin typeface="Times New Roman" pitchFamily="34" charset="0"/>
+                <a:ea typeface="Times New Roman" pitchFamily="34" charset="-122"/>
+                <a:cs typeface="Times New Roman" pitchFamily="34" charset="-120"/>
+              </a:rPr>
+              <a:t>q</a:t>
+            </a:r>
+            <a:r>
+              <a:rPr lang="en-US" sz="1200" dirty="0">
+                <a:solidFill>
+                  <a:srgbClr val="1A2332"/>
+                </a:solidFill>
+                <a:latin typeface="Times New Roman" pitchFamily="34" charset="0"/>
+                <a:ea typeface="Times New Roman" pitchFamily="34" charset="-122"/>
+                <a:cs typeface="Times New Roman" pitchFamily="34" charset="-120"/>
+              </a:rPr>
+              <a:t> to its own focal-plane position.</a:t>
+            </a:r>
+            <a:endParaRPr lang="en-US" sz="1200" dirty="0"/>
+          </a:p>
+        </p:txBody>
+      </p:sp>
       <p:sp>
         <p:nvSpPr>
           <p:cNvPr id="29" name="Shape 4"/>
@@ -12612,30 +15652,67 @@
           </a:p>
         </p:txBody>
       </p:sp>
-      <p:pic>
-        <p:nvPicPr>
-          <p:cNvPr id="32" name="Picture 31" descr="s7_five_b.png"/>
-          <p:cNvPicPr>
-            <a:picLocks noChangeAspect="1"/>
-          </p:cNvPicPr>
-          <p:nvPr/>
-        </p:nvPicPr>
-        <p:blipFill>
-          <a:blip r:embed="rId6"/>
-          <a:stretch>
-            <a:fillRect/>
-          </a:stretch>
-        </p:blipFill>
-        <p:spPr>
-          <a:xfrm>
-            <a:off x="5303520" y="1984248"/>
-            <a:ext cx="3390138" cy="343265"/>
-          </a:xfrm>
-          <a:prstGeom prst="rect">
-            <a:avLst/>
-          </a:prstGeom>
-        </p:spPr>
-      </p:pic>
+      <p:sp>
+        <p:nvSpPr>
+          <p:cNvPr id="32" name="Text 32"/>
+          <p:cNvSpPr txBox="1"/>
+          <p:nvPr/>
+        </p:nvSpPr>
+        <p:spPr>
+          <a:xfrm>
+            <a:off x="5328920" y="1960910"/>
+            <a:ext cx="3383280" cy="343265"/>
+          </a:xfrm>
+          <a:prstGeom prst="rect">
+            <a:avLst/>
+          </a:prstGeom>
+          <a:noFill/>
+          <a:ln/>
+        </p:spPr>
+        <p:txBody>
+          <a:bodyPr wrap="square" lIns="0" tIns="0" rIns="0" bIns="0" rtlCol="0" anchor="t"/>
+          <a:lstStyle/>
+          <a:p>
+            <a:pPr marL="0" indent="0" algn="l">
+              <a:buNone/>
+            </a:pPr>
+            <a:r>
+              <a:rPr lang="en-US" sz="1200" dirty="0">
+                <a:solidFill>
+                  <a:srgbClr val="1A2332"/>
+                </a:solidFill>
+                <a:latin typeface="Times New Roman" pitchFamily="34" charset="0"/>
+                <a:ea typeface="Times New Roman" pitchFamily="34" charset="-122"/>
+                <a:cs typeface="Times New Roman" pitchFamily="34" charset="-120"/>
+              </a:rPr>
+              <a:t>Heavy recoils leave the target with </a:t>
+            </a:r>
+            <a:r>
+              <a:rPr lang="en-US" sz="1200" i="1" dirty="0">
+                <a:solidFill>
+                  <a:srgbClr val="1A2332"/>
+                </a:solidFill>
+                <a:latin typeface="Times New Roman" pitchFamily="34" charset="0"/>
+                <a:ea typeface="Times New Roman" pitchFamily="34" charset="-122"/>
+                <a:cs typeface="Times New Roman" pitchFamily="34" charset="-120"/>
+              </a:rPr>
+              <a:t>q</a:t>
+            </a:r>
+            <a:r>
+              <a:rPr lang="en-US" sz="1200" dirty="0">
+                <a:solidFill>
+                  <a:srgbClr val="1A2332"/>
+                </a:solidFill>
+                <a:latin typeface="Times New Roman" pitchFamily="34" charset="0"/>
+                <a:ea typeface="Times New Roman" pitchFamily="34" charset="-122"/>
+                <a:cs typeface="Times New Roman" pitchFamily="34" charset="-120"/>
+              </a:rPr>
+              <a:t> ≈ 20, spread over about five states.</a:t>
+            </a:r>
+            <a:endParaRPr lang="en-US" sz="1200" dirty="0"/>
+          </a:p>
+        </p:txBody>
+      </p:sp>
       <p:sp>
         <p:nvSpPr>
           <p:cNvPr id="33" name="Shape 4"/>
@@ -12738,30 +15815,67 @@
           </a:p>
         </p:txBody>
       </p:sp>
-      <p:pic>
-        <p:nvPicPr>
-          <p:cNvPr id="36" name="Picture 35" descr="s7_qbar_b.png"/>
-          <p:cNvPicPr>
-            <a:picLocks noChangeAspect="1"/>
-          </p:cNvPicPr>
-          <p:nvPr/>
-        </p:nvPicPr>
-        <p:blipFill>
-          <a:blip r:embed="rId7"/>
-          <a:stretch>
-            <a:fillRect/>
-          </a:stretch>
-        </p:blipFill>
-        <p:spPr>
-          <a:xfrm>
-            <a:off x="5303520" y="2944368"/>
-            <a:ext cx="3263767" cy="373989"/>
-          </a:xfrm>
-          <a:prstGeom prst="rect">
-            <a:avLst/>
-          </a:prstGeom>
-        </p:spPr>
-      </p:pic>
+      <p:sp>
+        <p:nvSpPr>
+          <p:cNvPr id="36" name="Text 36"/>
+          <p:cNvSpPr txBox="1"/>
+          <p:nvPr/>
+        </p:nvSpPr>
+        <p:spPr>
+          <a:xfrm>
+            <a:off x="5325902" y="2921030"/>
+            <a:ext cx="3383280" cy="373989"/>
+          </a:xfrm>
+          <a:prstGeom prst="rect">
+            <a:avLst/>
+          </a:prstGeom>
+          <a:noFill/>
+          <a:ln/>
+        </p:spPr>
+        <p:txBody>
+          <a:bodyPr wrap="square" lIns="0" tIns="0" rIns="0" bIns="0" rtlCol="0" anchor="t"/>
+          <a:lstStyle/>
+          <a:p>
+            <a:pPr marL="0" indent="0" algn="l">
+              <a:buNone/>
+            </a:pPr>
+            <a:r>
+              <a:rPr lang="en-US" sz="1200" dirty="0">
+                <a:solidFill>
+                  <a:srgbClr val="1A2332"/>
+                </a:solidFill>
+                <a:latin typeface="Times New Roman" pitchFamily="34" charset="0"/>
+                <a:ea typeface="Times New Roman" pitchFamily="34" charset="-122"/>
+                <a:cs typeface="Times New Roman" pitchFamily="34" charset="-120"/>
+              </a:rPr>
+              <a:t>For an unknown superheavy, even </a:t>
+            </a:r>
+            <a:r>
+              <a:rPr lang="en-US" sz="1200" i="1" dirty="0">
+                <a:solidFill>
+                  <a:srgbClr val="1A2332"/>
+                </a:solidFill>
+                <a:latin typeface="Times New Roman" pitchFamily="34" charset="0"/>
+                <a:ea typeface="Times New Roman" pitchFamily="34" charset="-122"/>
+                <a:cs typeface="Times New Roman" pitchFamily="34" charset="-120"/>
+              </a:rPr>
+              <a:t>q̄</a:t>
+            </a:r>
+            <a:r>
+              <a:rPr lang="en-US" sz="1200" dirty="0">
+                <a:solidFill>
+                  <a:srgbClr val="1A2332"/>
+                </a:solidFill>
+                <a:latin typeface="Times New Roman" pitchFamily="34" charset="0"/>
+                <a:ea typeface="Times New Roman" pitchFamily="34" charset="-122"/>
+                <a:cs typeface="Times New Roman" pitchFamily="34" charset="-120"/>
+              </a:rPr>
+              <a:t> is uncertain: the separator may sit on the wrong peak.</a:t>
+            </a:r>
+            <a:endParaRPr lang="en-US" sz="1200" dirty="0"/>
+          </a:p>
+        </p:txBody>
+      </p:sp>
       <p:sp>
         <p:nvSpPr>
           <p:cNvPr id="37" name="Shape 4"/>
@@ -12900,6 +16014,28 @@
               <a:t>Only one or two states reach the focal plane; the others are thrown away.</a:t>
             </a:r>
             <a:endParaRPr lang="en-US" sz="1200" dirty="0"/>
+          </a:p>
+        </p:txBody>
+      </p:sp>
+      <p:sp>
+        <p:nvSpPr>
+          <p:cNvPr id="41" name="Date Placeholder 40"/>
+          <p:cNvSpPr>
+            <a:spLocks noGrp="1"/>
+          </p:cNvSpPr>
+          <p:nvPr>
+            <p:ph type="dt" sz="half" idx="10"/>
+          </p:nvPr>
+        </p:nvSpPr>
+        <p:spPr/>
+        <p:txBody>
+          <a:bodyPr/>
+          <a:lstStyle/>
+          <a:p>
+            <a:r>
+              <a:rPr lang="en-US" dirty="0"/>
+              <a:t>29 Sep 2026</a:t>
+            </a:r>
           </a:p>
         </p:txBody>
       </p:sp>
@@ -12911,7 +16047,7 @@
 </p:sld>
 </file>
 
-<file path=ppt/slides/slide8.xml><?xml version="1.0" encoding="utf-8"?>
+<file path=ppt/slides/slide9.xml><?xml version="1.0" encoding="utf-8"?>
 <p:sld xmlns:a="http://schemas.openxmlformats.org/drawingml/2006/main" xmlns:r="http://schemas.openxmlformats.org/officeDocument/2006/relationships" xmlns:p="http://schemas.openxmlformats.org/presentationml/2006/main">
   <p:cSld name="Slide 8">
     <p:bg>
@@ -12993,7 +16129,7 @@
               <a:buNone/>
             </a:pPr>
             <a:r>
-              <a:rPr lang="en-US" sz="1500" b="1" dirty="0">
+              <a:rPr lang="en-US" sz="1800" b="1" dirty="0">
                 <a:solidFill>
                   <a:srgbClr val="FFFFFF"/>
                 </a:solidFill>
@@ -13003,7 +16139,7 @@
               </a:rPr>
               <a:t>Pure velocity filters transmit all charge states and isotopes simultaneously.</a:t>
             </a:r>
-            <a:endParaRPr lang="en-US" sz="1500" dirty="0"/>
+            <a:endParaRPr lang="en-US" sz="1800" dirty="0"/>
           </a:p>
         </p:txBody>
       </p:sp>
@@ -13111,7 +16247,7 @@
                 <a:ea typeface="Times New Roman" pitchFamily="34" charset="-122"/>
                 <a:cs typeface="Times New Roman" pitchFamily="34" charset="-120"/>
               </a:rPr>
-              <a:t>Content 4 / 10</a:t>
+              <a:t>Content 5 / 11</a:t>
             </a:r>
             <a:endParaRPr lang="en-US" sz="1000" dirty="0"/>
           </a:p>
@@ -13177,54 +16313,238 @@
           </a:prstGeom>
         </p:spPr>
       </p:pic>
-      <p:pic>
-        <p:nvPicPr>
-          <p:cNvPr id="9" name="Image 1" descr="/Users/Reid Hu/OrbitOS/70_Presentations/717_Learning Group-20260916/assets/eq/eq_veb.png"/>
-          <p:cNvPicPr>
-            <a:picLocks noChangeAspect="1"/>
-          </p:cNvPicPr>
-          <p:nvPr/>
-        </p:nvPicPr>
-        <p:blipFill>
-          <a:blip r:embed="rId4"/>
-          <a:stretch>
-            <a:fillRect/>
-          </a:stretch>
-        </p:blipFill>
-        <p:spPr>
-          <a:xfrm>
-            <a:off x="2363404" y="1985894"/>
-            <a:ext cx="4417192" cy="234452"/>
-          </a:xfrm>
-          <a:prstGeom prst="rect">
-            <a:avLst/>
-          </a:prstGeom>
-        </p:spPr>
-      </p:pic>
-      <p:pic>
-        <p:nvPicPr>
-          <p:cNvPr id="10" name="Image 2" descr="/Users/Reid Hu/OrbitOS/70_Presentations/717_Learning Group-20260916/assets/eq/eq_qcancel.png"/>
-          <p:cNvPicPr>
-            <a:picLocks noChangeAspect="1"/>
-          </p:cNvPicPr>
-          <p:nvPr/>
-        </p:nvPicPr>
-        <p:blipFill>
-          <a:blip r:embed="rId5"/>
-          <a:stretch>
-            <a:fillRect/>
-          </a:stretch>
-        </p:blipFill>
-        <p:spPr>
-          <a:xfrm>
-            <a:off x="1964954" y="2273884"/>
-            <a:ext cx="5214092" cy="188824"/>
-          </a:xfrm>
-          <a:prstGeom prst="rect">
-            <a:avLst/>
-          </a:prstGeom>
-        </p:spPr>
-      </p:pic>
+      <p:sp>
+        <p:nvSpPr>
+          <p:cNvPr id="9" name="Text 9"/>
+          <p:cNvSpPr txBox="1"/>
+          <p:nvPr/>
+        </p:nvSpPr>
+        <p:spPr>
+          <a:xfrm>
+            <a:off x="2223226" y="1950304"/>
+            <a:ext cx="4691512" cy="234452"/>
+          </a:xfrm>
+          <a:prstGeom prst="rect">
+            <a:avLst/>
+          </a:prstGeom>
+          <a:noFill/>
+          <a:ln/>
+        </p:spPr>
+        <p:txBody>
+          <a:bodyPr wrap="none" lIns="0" tIns="0" rIns="0" bIns="0" rtlCol="0" anchor="t"/>
+          <a:lstStyle/>
+          <a:p>
+            <a:pPr marL="0" indent="0" algn="ctr">
+              <a:buNone/>
+            </a:pPr>
+            <a:r>
+              <a:rPr lang="en-US" sz="1600" dirty="0">
+                <a:solidFill>
+                  <a:srgbClr val="174994"/>
+                </a:solidFill>
+                <a:latin typeface="Times New Roman" pitchFamily="34" charset="0"/>
+                <a:ea typeface="Times New Roman" pitchFamily="34" charset="-122"/>
+                <a:cs typeface="Times New Roman" pitchFamily="34" charset="-120"/>
+              </a:rPr>
+              <a:t>undeflected </a:t>
+            </a:r>
+            <a:r>
+              <a:rPr lang="en-US" sz="1600" dirty="0">
+                <a:solidFill>
+                  <a:srgbClr val="174994"/>
+                </a:solidFill>
+                <a:latin typeface="Cambria Math" pitchFamily="34" charset="0"/>
+                <a:ea typeface="Cambria Math" pitchFamily="34" charset="-122"/>
+                <a:cs typeface="Cambria Math" pitchFamily="34" charset="-120"/>
+              </a:rPr>
+              <a:t>⇔</a:t>
+            </a:r>
+            <a:r>
+              <a:rPr lang="en-US" sz="1600" dirty="0">
+                <a:solidFill>
+                  <a:srgbClr val="174994"/>
+                </a:solidFill>
+                <a:latin typeface="Times New Roman" pitchFamily="34" charset="0"/>
+                <a:ea typeface="Times New Roman" pitchFamily="34" charset="-122"/>
+                <a:cs typeface="Times New Roman" pitchFamily="34" charset="-120"/>
+              </a:rPr>
+              <a:t> </a:t>
+            </a:r>
+            <a:r>
+              <a:rPr lang="en-US" sz="1600" i="1" dirty="0">
+                <a:solidFill>
+                  <a:srgbClr val="174994"/>
+                </a:solidFill>
+                <a:latin typeface="Times New Roman" pitchFamily="34" charset="0"/>
+                <a:ea typeface="Times New Roman" pitchFamily="34" charset="-122"/>
+                <a:cs typeface="Times New Roman" pitchFamily="34" charset="-120"/>
+              </a:rPr>
+              <a:t>v</a:t>
+            </a:r>
+            <a:r>
+              <a:rPr lang="en-US" sz="1600" dirty="0">
+                <a:solidFill>
+                  <a:srgbClr val="174994"/>
+                </a:solidFill>
+                <a:latin typeface="Times New Roman" pitchFamily="34" charset="0"/>
+                <a:ea typeface="Times New Roman" pitchFamily="34" charset="-122"/>
+                <a:cs typeface="Times New Roman" pitchFamily="34" charset="-120"/>
+              </a:rPr>
+              <a:t> = </a:t>
+            </a:r>
+            <a:r>
+              <a:rPr lang="en-US" sz="1600" i="1" dirty="0">
+                <a:solidFill>
+                  <a:srgbClr val="174994"/>
+                </a:solidFill>
+                <a:latin typeface="Times New Roman" pitchFamily="34" charset="0"/>
+                <a:ea typeface="Times New Roman" pitchFamily="34" charset="-122"/>
+                <a:cs typeface="Times New Roman" pitchFamily="34" charset="-120"/>
+              </a:rPr>
+              <a:t>E</a:t>
+            </a:r>
+            <a:r>
+              <a:rPr lang="en-US" sz="1600" dirty="0">
+                <a:solidFill>
+                  <a:srgbClr val="174994"/>
+                </a:solidFill>
+                <a:latin typeface="Times New Roman" pitchFamily="34" charset="0"/>
+                <a:ea typeface="Times New Roman" pitchFamily="34" charset="-122"/>
+                <a:cs typeface="Times New Roman" pitchFamily="34" charset="-120"/>
+              </a:rPr>
+              <a:t>/</a:t>
+            </a:r>
+            <a:r>
+              <a:rPr lang="en-US" sz="1600" i="1" dirty="0">
+                <a:solidFill>
+                  <a:srgbClr val="174994"/>
+                </a:solidFill>
+                <a:latin typeface="Times New Roman" pitchFamily="34" charset="0"/>
+                <a:ea typeface="Times New Roman" pitchFamily="34" charset="-122"/>
+                <a:cs typeface="Times New Roman" pitchFamily="34" charset="-120"/>
+              </a:rPr>
+              <a:t>B</a:t>
+            </a:r>
+            <a:r>
+              <a:rPr lang="en-US" sz="1600" dirty="0">
+                <a:solidFill>
+                  <a:srgbClr val="174994"/>
+                </a:solidFill>
+                <a:latin typeface="Times New Roman" pitchFamily="34" charset="0"/>
+                <a:ea typeface="Times New Roman" pitchFamily="34" charset="-122"/>
+                <a:cs typeface="Times New Roman" pitchFamily="34" charset="-120"/>
+              </a:rPr>
+              <a:t>   (independent of </a:t>
+            </a:r>
+            <a:r>
+              <a:rPr lang="en-US" sz="1600" i="1" dirty="0">
+                <a:solidFill>
+                  <a:srgbClr val="174994"/>
+                </a:solidFill>
+                <a:latin typeface="Times New Roman" pitchFamily="34" charset="0"/>
+                <a:ea typeface="Times New Roman" pitchFamily="34" charset="-122"/>
+                <a:cs typeface="Times New Roman" pitchFamily="34" charset="-120"/>
+              </a:rPr>
+              <a:t>q</a:t>
+            </a:r>
+            <a:r>
+              <a:rPr lang="en-US" sz="1600" dirty="0">
+                <a:solidFill>
+                  <a:srgbClr val="174994"/>
+                </a:solidFill>
+                <a:latin typeface="Times New Roman" pitchFamily="34" charset="0"/>
+                <a:ea typeface="Times New Roman" pitchFamily="34" charset="-122"/>
+                <a:cs typeface="Times New Roman" pitchFamily="34" charset="-120"/>
+              </a:rPr>
+              <a:t> and </a:t>
+            </a:r>
+            <a:r>
+              <a:rPr lang="en-US" sz="1600" i="1" dirty="0">
+                <a:solidFill>
+                  <a:srgbClr val="174994"/>
+                </a:solidFill>
+                <a:latin typeface="Times New Roman" pitchFamily="34" charset="0"/>
+                <a:ea typeface="Times New Roman" pitchFamily="34" charset="-122"/>
+                <a:cs typeface="Times New Roman" pitchFamily="34" charset="-120"/>
+              </a:rPr>
+              <a:t>A</a:t>
+            </a:r>
+            <a:r>
+              <a:rPr lang="en-US" sz="1600" dirty="0">
+                <a:solidFill>
+                  <a:srgbClr val="174994"/>
+                </a:solidFill>
+                <a:latin typeface="Times New Roman" pitchFamily="34" charset="0"/>
+                <a:ea typeface="Times New Roman" pitchFamily="34" charset="-122"/>
+                <a:cs typeface="Times New Roman" pitchFamily="34" charset="-120"/>
+              </a:rPr>
+              <a:t>)</a:t>
+            </a:r>
+            <a:endParaRPr lang="en-US" sz="1600" dirty="0"/>
+          </a:p>
+        </p:txBody>
+      </p:sp>
+      <p:sp>
+        <p:nvSpPr>
+          <p:cNvPr id="10" name="Text 10"/>
+          <p:cNvSpPr txBox="1"/>
+          <p:nvPr/>
+        </p:nvSpPr>
+        <p:spPr>
+          <a:xfrm>
+            <a:off x="414498" y="2250546"/>
+            <a:ext cx="8321040" cy="188824"/>
+          </a:xfrm>
+          <a:prstGeom prst="rect">
+            <a:avLst/>
+          </a:prstGeom>
+          <a:noFill/>
+          <a:ln/>
+        </p:spPr>
+        <p:txBody>
+          <a:bodyPr wrap="square" lIns="0" tIns="0" rIns="0" bIns="0" rtlCol="0" anchor="t"/>
+          <a:lstStyle/>
+          <a:p>
+            <a:pPr marL="0" indent="0" algn="ctr">
+              <a:buNone/>
+            </a:pPr>
+            <a:r>
+              <a:rPr lang="en-US" sz="1200" dirty="0">
+                <a:solidFill>
+                  <a:srgbClr val="5F6B73"/>
+                </a:solidFill>
+                <a:latin typeface="Times New Roman" pitchFamily="34" charset="0"/>
+                <a:ea typeface="Times New Roman" pitchFamily="34" charset="-122"/>
+                <a:cs typeface="Times New Roman" pitchFamily="34" charset="-120"/>
+              </a:rPr>
+              <a:t>Both forces scale with </a:t>
+            </a:r>
+            <a:r>
+              <a:rPr lang="en-US" sz="1200" i="1" dirty="0">
+                <a:solidFill>
+                  <a:srgbClr val="5F6B73"/>
+                </a:solidFill>
+                <a:latin typeface="Times New Roman" pitchFamily="34" charset="0"/>
+                <a:ea typeface="Times New Roman" pitchFamily="34" charset="-122"/>
+                <a:cs typeface="Times New Roman" pitchFamily="34" charset="-120"/>
+              </a:rPr>
+              <a:t>q</a:t>
+            </a:r>
+            <a:r>
+              <a:rPr lang="en-US" sz="1200" dirty="0">
+                <a:solidFill>
+                  <a:srgbClr val="5F6B73"/>
+                </a:solidFill>
+                <a:latin typeface="Times New Roman" pitchFamily="34" charset="0"/>
+                <a:ea typeface="Times New Roman" pitchFamily="34" charset="-122"/>
+                <a:cs typeface="Times New Roman" pitchFamily="34" charset="-120"/>
+              </a:rPr>
+              <a:t>, so charge cancels. Mass never enters the balance condition.</a:t>
+            </a:r>
+            <a:endParaRPr lang="en-US" sz="1200" dirty="0"/>
+          </a:p>
+        </p:txBody>
+      </p:sp>
       <p:sp>
         <p:nvSpPr>
           <p:cNvPr id="11" name="Shape 6"/>
@@ -13300,30 +16620,67 @@
           </a:p>
         </p:txBody>
       </p:sp>
-      <p:pic>
-        <p:nvPicPr>
-          <p:cNvPr id="13" name="Image 3" descr="/Users/Reid Hu/OrbitOS/70_Presentations/717_Learning Group-20260916/assets/eq/power_allq_b.png"/>
-          <p:cNvPicPr>
-            <a:picLocks noChangeAspect="1"/>
-          </p:cNvPicPr>
-          <p:nvPr/>
-        </p:nvPicPr>
-        <p:blipFill>
-          <a:blip r:embed="rId6"/>
-          <a:stretch>
-            <a:fillRect/>
-          </a:stretch>
-        </p:blipFill>
-        <p:spPr>
-          <a:xfrm>
-            <a:off x="548640" y="2980944"/>
-            <a:ext cx="2422063" cy="528615"/>
-          </a:xfrm>
-          <a:prstGeom prst="rect">
-            <a:avLst/>
-          </a:prstGeom>
-        </p:spPr>
-      </p:pic>
+      <p:sp>
+        <p:nvSpPr>
+          <p:cNvPr id="13" name="Text 13"/>
+          <p:cNvSpPr txBox="1"/>
+          <p:nvPr/>
+        </p:nvSpPr>
+        <p:spPr>
+          <a:xfrm>
+            <a:off x="577058" y="2957606"/>
+            <a:ext cx="2423160" cy="528615"/>
+          </a:xfrm>
+          <a:prstGeom prst="rect">
+            <a:avLst/>
+          </a:prstGeom>
+          <a:noFill/>
+          <a:ln/>
+        </p:spPr>
+        <p:txBody>
+          <a:bodyPr wrap="square" lIns="0" tIns="0" rIns="0" bIns="0" rtlCol="0" anchor="t"/>
+          <a:lstStyle/>
+          <a:p>
+            <a:pPr marL="0" indent="0" algn="l">
+              <a:buNone/>
+            </a:pPr>
+            <a:r>
+              <a:rPr lang="en-US" sz="1200" dirty="0">
+                <a:solidFill>
+                  <a:srgbClr val="1A2332"/>
+                </a:solidFill>
+                <a:latin typeface="Times New Roman" pitchFamily="34" charset="0"/>
+                <a:ea typeface="Times New Roman" pitchFamily="34" charset="-122"/>
+                <a:cs typeface="Times New Roman" pitchFamily="34" charset="-120"/>
+              </a:rPr>
+              <a:t>Every </a:t>
+            </a:r>
+            <a:r>
+              <a:rPr lang="en-US" sz="1200" i="1" dirty="0">
+                <a:solidFill>
+                  <a:srgbClr val="1A2332"/>
+                </a:solidFill>
+                <a:latin typeface="Times New Roman" pitchFamily="34" charset="0"/>
+                <a:ea typeface="Times New Roman" pitchFamily="34" charset="-122"/>
+                <a:cs typeface="Times New Roman" pitchFamily="34" charset="-120"/>
+              </a:rPr>
+              <a:t>q</a:t>
+            </a:r>
+            <a:r>
+              <a:rPr lang="en-US" sz="1200" dirty="0">
+                <a:solidFill>
+                  <a:srgbClr val="1A2332"/>
+                </a:solidFill>
+                <a:latin typeface="Times New Roman" pitchFamily="34" charset="0"/>
+                <a:ea typeface="Times New Roman" pitchFamily="34" charset="-122"/>
+                <a:cs typeface="Times New Roman" pitchFamily="34" charset="-120"/>
+              </a:rPr>
+              <a:t> of the chosen velocity follows the same trajectory. Near-100% charge transmission.</a:t>
+            </a:r>
+            <a:endParaRPr lang="en-US" sz="1200" dirty="0"/>
+          </a:p>
+        </p:txBody>
+      </p:sp>
       <p:sp>
         <p:nvSpPr>
           <p:cNvPr id="14" name="Shape 8"/>
@@ -13399,30 +16756,89 @@
           </a:p>
         </p:txBody>
       </p:sp>
-      <p:pic>
-        <p:nvPicPr>
-          <p:cNvPr id="16" name="Image 4" descr="/Users/Reid Hu/OrbitOS/70_Presentations/717_Learning Group-20260916/assets/eq/power_iso_b.png"/>
-          <p:cNvPicPr>
-            <a:picLocks noChangeAspect="1"/>
-          </p:cNvPicPr>
-          <p:nvPr/>
-        </p:nvPicPr>
-        <p:blipFill>
-          <a:blip r:embed="rId7"/>
-          <a:stretch>
-            <a:fillRect/>
-          </a:stretch>
-        </p:blipFill>
-        <p:spPr>
-          <a:xfrm>
-            <a:off x="3383280" y="2980944"/>
+      <p:sp>
+        <p:nvSpPr>
+          <p:cNvPr id="16" name="Text 16"/>
+          <p:cNvSpPr txBox="1"/>
+          <p:nvPr/>
+        </p:nvSpPr>
+        <p:spPr>
+          <a:xfrm>
+            <a:off x="3408680" y="2957606"/>
             <a:ext cx="2423160" cy="553077"/>
           </a:xfrm>
           <a:prstGeom prst="rect">
             <a:avLst/>
           </a:prstGeom>
-        </p:spPr>
-      </p:pic>
+          <a:noFill/>
+          <a:ln/>
+        </p:spPr>
+        <p:txBody>
+          <a:bodyPr wrap="square" lIns="0" tIns="0" rIns="0" bIns="0" rtlCol="0" anchor="t"/>
+          <a:lstStyle/>
+          <a:p>
+            <a:pPr marL="0" indent="0" algn="l">
+              <a:buNone/>
+            </a:pPr>
+            <a:r>
+              <a:rPr lang="en-US" sz="1200" dirty="0">
+                <a:solidFill>
+                  <a:srgbClr val="1A2332"/>
+                </a:solidFill>
+                <a:latin typeface="Times New Roman" pitchFamily="34" charset="0"/>
+                <a:ea typeface="Times New Roman" pitchFamily="34" charset="-122"/>
+                <a:cs typeface="Times New Roman" pitchFamily="34" charset="-120"/>
+              </a:rPr>
+              <a:t>Any complete-fusion residue in the velocity window is collected — no </a:t>
+            </a:r>
+            <a:r>
+              <a:rPr lang="en-US" sz="1200" i="1" dirty="0">
+                <a:solidFill>
+                  <a:srgbClr val="1A2332"/>
+                </a:solidFill>
+                <a:latin typeface="Times New Roman" pitchFamily="34" charset="0"/>
+                <a:ea typeface="Times New Roman" pitchFamily="34" charset="-122"/>
+                <a:cs typeface="Times New Roman" pitchFamily="34" charset="-120"/>
+              </a:rPr>
+              <a:t>A</a:t>
+            </a:r>
+            <a:r>
+              <a:rPr lang="en-US" sz="1200" dirty="0">
+                <a:solidFill>
+                  <a:srgbClr val="1A2332"/>
+                </a:solidFill>
+                <a:latin typeface="Times New Roman" pitchFamily="34" charset="0"/>
+                <a:ea typeface="Times New Roman" pitchFamily="34" charset="-122"/>
+                <a:cs typeface="Times New Roman" pitchFamily="34" charset="-120"/>
+              </a:rPr>
+              <a:t>/</a:t>
+            </a:r>
+            <a:r>
+              <a:rPr lang="en-US" sz="1200" i="1" dirty="0">
+                <a:solidFill>
+                  <a:srgbClr val="1A2332"/>
+                </a:solidFill>
+                <a:latin typeface="Times New Roman" pitchFamily="34" charset="0"/>
+                <a:ea typeface="Times New Roman" pitchFamily="34" charset="-122"/>
+                <a:cs typeface="Times New Roman" pitchFamily="34" charset="-120"/>
+              </a:rPr>
+              <a:t>q</a:t>
+            </a:r>
+            <a:r>
+              <a:rPr lang="en-US" sz="1200" dirty="0">
+                <a:solidFill>
+                  <a:srgbClr val="1A2332"/>
+                </a:solidFill>
+                <a:latin typeface="Times New Roman" pitchFamily="34" charset="0"/>
+                <a:ea typeface="Times New Roman" pitchFamily="34" charset="-122"/>
+                <a:cs typeface="Times New Roman" pitchFamily="34" charset="-120"/>
+              </a:rPr>
+              <a:t> splitting.</a:t>
+            </a:r>
+            <a:endParaRPr lang="en-US" sz="1200" dirty="0"/>
+          </a:p>
+        </p:txBody>
+      </p:sp>
       <p:sp>
         <p:nvSpPr>
           <p:cNvPr id="17" name="Shape 10"/>
@@ -13455,7 +16871,7 @@
           <a:bodyPr/>
           <a:lstStyle/>
           <a:p>
-            <a:endParaRPr lang="en-JP"/>
+            <a:endParaRPr lang="en-JP" dirty="0"/>
           </a:p>
         </p:txBody>
       </p:sp>
@@ -13498,30 +16914,89 @@
           </a:p>
         </p:txBody>
       </p:sp>
-      <p:pic>
-        <p:nvPicPr>
-          <p:cNvPr id="19" name="Image 5" descr="/Users/Reid Hu/OrbitOS/70_Presentations/717_Learning Group-20260916/assets/eq/power_beam_b.png"/>
-          <p:cNvPicPr>
-            <a:picLocks noChangeAspect="1"/>
-          </p:cNvPicPr>
-          <p:nvPr/>
-        </p:nvPicPr>
-        <p:blipFill>
-          <a:blip r:embed="rId8"/>
-          <a:stretch>
-            <a:fillRect/>
-          </a:stretch>
-        </p:blipFill>
-        <p:spPr>
-          <a:xfrm>
-            <a:off x="6217920" y="2980944"/>
-            <a:ext cx="2447544" cy="560832"/>
-          </a:xfrm>
-          <a:prstGeom prst="rect">
-            <a:avLst/>
-          </a:prstGeom>
-        </p:spPr>
-      </p:pic>
+      <p:sp>
+        <p:nvSpPr>
+          <p:cNvPr id="19" name="Text 19"/>
+          <p:cNvSpPr txBox="1"/>
+          <p:nvPr/>
+        </p:nvSpPr>
+        <p:spPr>
+          <a:xfrm>
+            <a:off x="6243320" y="2957606"/>
+            <a:ext cx="2423160" cy="560832"/>
+          </a:xfrm>
+          <a:prstGeom prst="rect">
+            <a:avLst/>
+          </a:prstGeom>
+          <a:noFill/>
+          <a:ln/>
+        </p:spPr>
+        <p:txBody>
+          <a:bodyPr wrap="square" lIns="0" tIns="0" rIns="0" bIns="0" rtlCol="0" anchor="t"/>
+          <a:lstStyle/>
+          <a:p>
+            <a:pPr marL="0" indent="0" algn="l">
+              <a:buNone/>
+            </a:pPr>
+            <a:r>
+              <a:rPr lang="en-US" sz="1200" dirty="0">
+                <a:solidFill>
+                  <a:srgbClr val="1A2332"/>
+                </a:solidFill>
+                <a:latin typeface="Times New Roman" pitchFamily="34" charset="0"/>
+                <a:ea typeface="Times New Roman" pitchFamily="34" charset="-122"/>
+                <a:cs typeface="Times New Roman" pitchFamily="34" charset="-120"/>
+              </a:rPr>
+              <a:t>SHIP suppresses full-energy projectiles by &gt;10</a:t>
+            </a:r>
+            <a:r>
+              <a:rPr lang="en-US" sz="1200" baseline="30000" dirty="0">
+                <a:solidFill>
+                  <a:srgbClr val="1A2332"/>
+                </a:solidFill>
+                <a:latin typeface="Times New Roman" pitchFamily="34" charset="0"/>
+                <a:ea typeface="Times New Roman" pitchFamily="34" charset="-122"/>
+                <a:cs typeface="Times New Roman" pitchFamily="34" charset="-120"/>
+              </a:rPr>
+              <a:t>16</a:t>
+            </a:r>
+            <a:r>
+              <a:rPr lang="en-US" sz="1200" dirty="0">
+                <a:solidFill>
+                  <a:srgbClr val="1A2332"/>
+                </a:solidFill>
+                <a:latin typeface="Times New Roman" pitchFamily="34" charset="0"/>
+                <a:ea typeface="Times New Roman" pitchFamily="34" charset="-122"/>
+                <a:cs typeface="Times New Roman" pitchFamily="34" charset="-120"/>
+              </a:rPr>
+              <a:t> and scattered ones by up to 10</a:t>
+            </a:r>
+            <a:r>
+              <a:rPr lang="en-US" sz="1200" baseline="30000" dirty="0">
+                <a:solidFill>
+                  <a:srgbClr val="1A2332"/>
+                </a:solidFill>
+                <a:latin typeface="Times New Roman" pitchFamily="34" charset="0"/>
+                <a:ea typeface="Times New Roman" pitchFamily="34" charset="-122"/>
+                <a:cs typeface="Times New Roman" pitchFamily="34" charset="-120"/>
+              </a:rPr>
+              <a:t>12</a:t>
+            </a:r>
+            <a:r>
+              <a:rPr lang="en-US" sz="1200" dirty="0">
+                <a:solidFill>
+                  <a:srgbClr val="1A2332"/>
+                </a:solidFill>
+                <a:latin typeface="Times New Roman" pitchFamily="34" charset="0"/>
+                <a:ea typeface="Times New Roman" pitchFamily="34" charset="-122"/>
+                <a:cs typeface="Times New Roman" pitchFamily="34" charset="-120"/>
+              </a:rPr>
+              <a:t>.</a:t>
+            </a:r>
+            <a:endParaRPr lang="en-US" sz="1200" dirty="0"/>
+          </a:p>
+        </p:txBody>
+      </p:sp>
       <p:sp>
         <p:nvSpPr>
           <p:cNvPr id="20" name="Shape 12"/>
@@ -13531,7 +17006,7 @@
         <p:spPr>
           <a:xfrm>
             <a:off x="411480" y="3822192"/>
-            <a:ext cx="8321040" cy="804672"/>
+            <a:ext cx="8394192" cy="804672"/>
           </a:xfrm>
           <a:prstGeom prst="roundRect">
             <a:avLst>
@@ -13542,187 +17017,8 @@
             <a:srgbClr val="0F2F5C"/>
           </a:solidFill>
           <a:ln/>
-        </p:spPr>
-        <p:txBody>
-          <a:bodyPr/>
-          <a:lstStyle/>
-          <a:p>
-            <a:endParaRPr lang="en-JP" dirty="0"/>
-          </a:p>
-        </p:txBody>
-      </p:sp>
-      <p:sp>
-        <p:nvSpPr>
-          <p:cNvPr id="21" name="Text 13"/>
-          <p:cNvSpPr/>
-          <p:nvPr/>
-        </p:nvSpPr>
-        <p:spPr>
-          <a:xfrm>
-            <a:off x="594360" y="3931920"/>
-            <a:ext cx="7955280" cy="585216"/>
-          </a:xfrm>
-          <a:prstGeom prst="rect">
-            <a:avLst/>
-          </a:prstGeom>
-          <a:noFill/>
-          <a:ln/>
-        </p:spPr>
-        <p:txBody>
-          <a:bodyPr wrap="square" lIns="0" tIns="0" rIns="0" bIns="0" rtlCol="0" anchor="ctr"/>
-          <a:lstStyle/>
-          <a:p>
-            <a:pPr marL="0" indent="0">
-              <a:buNone/>
-            </a:pPr>
-            <a:r>
-              <a:rPr lang="en-US" sz="1300" dirty="0">
-                <a:solidFill>
-                  <a:srgbClr val="FFFFFF"/>
-                </a:solidFill>
-                <a:latin typeface="Times New Roman" pitchFamily="34" charset="0"/>
-                <a:ea typeface="Times New Roman" pitchFamily="34" charset="-122"/>
-                <a:cs typeface="Times New Roman" pitchFamily="34" charset="-120"/>
-              </a:rPr>
-              <a:t>Trade-off: no mass dispersion. SHIP identifies isotopes by decay; Daresbury adds a spectrometer for mass.</a:t>
-            </a:r>
-            <a:endParaRPr lang="en-US" sz="1300" dirty="0"/>
-          </a:p>
-        </p:txBody>
-      </p:sp>
-    </p:spTree>
-  </p:cSld>
-  <p:clrMapOvr>
-    <a:masterClrMapping/>
-  </p:clrMapOvr>
-</p:sld>
-</file>
-
-<file path=ppt/slides/slide9.xml><?xml version="1.0" encoding="utf-8"?>
-<p:sld xmlns:a="http://schemas.openxmlformats.org/drawingml/2006/main" xmlns:r="http://schemas.openxmlformats.org/officeDocument/2006/relationships" xmlns:p="http://schemas.openxmlformats.org/presentationml/2006/main">
-  <p:cSld name="Slide 9">
-    <p:bg>
-      <p:bgPr>
-        <a:solidFill>
-          <a:srgbClr val="0F2F5C"/>
-        </a:solidFill>
-        <a:effectLst/>
-      </p:bgPr>
-    </p:bg>
-    <p:spTree>
-      <p:nvGrpSpPr>
-        <p:cNvPr id="1" name=""/>
-        <p:cNvGrpSpPr/>
-        <p:nvPr/>
-      </p:nvGrpSpPr>
-      <p:grpSpPr>
-        <a:xfrm>
-          <a:off x="0" y="0"/>
-          <a:ext cx="0" cy="0"/>
-          <a:chOff x="0" y="0"/>
-          <a:chExt cx="0" cy="0"/>
-        </a:xfrm>
-      </p:grpSpPr>
-      <p:sp>
-        <p:nvSpPr>
-          <p:cNvPr id="2" name="Text 0"/>
-          <p:cNvSpPr/>
-          <p:nvPr/>
-        </p:nvSpPr>
-        <p:spPr>
-          <a:xfrm>
-            <a:off x="411480" y="256032"/>
-            <a:ext cx="3657600" cy="457200"/>
-          </a:xfrm>
-          <a:prstGeom prst="rect">
-            <a:avLst/>
-          </a:prstGeom>
-          <a:noFill/>
-          <a:ln/>
-        </p:spPr>
-        <p:txBody>
-          <a:bodyPr wrap="square" lIns="0" tIns="0" rIns="0" bIns="0" rtlCol="0" anchor="ctr"/>
-          <a:lstStyle/>
-          <a:p>
-            <a:pPr marL="0" indent="0">
-              <a:buNone/>
-            </a:pPr>
-            <a:r>
-              <a:rPr lang="en-US" sz="2800" b="1" dirty="0">
-                <a:solidFill>
-                  <a:srgbClr val="FFFFFF"/>
-                </a:solidFill>
-                <a:latin typeface="Times New Roman" pitchFamily="34" charset="0"/>
-                <a:ea typeface="Times New Roman" pitchFamily="34" charset="-122"/>
-                <a:cs typeface="Times New Roman" pitchFamily="34" charset="-120"/>
-              </a:rPr>
-              <a:t>Outline</a:t>
-            </a:r>
-            <a:endParaRPr lang="en-US" sz="2800" dirty="0"/>
-          </a:p>
-        </p:txBody>
-      </p:sp>
-      <p:sp>
-        <p:nvSpPr>
-          <p:cNvPr id="3" name="Text 1"/>
-          <p:cNvSpPr/>
-          <p:nvPr/>
-        </p:nvSpPr>
-        <p:spPr>
-          <a:xfrm>
-            <a:off x="594360" y="960120"/>
-            <a:ext cx="7680960" cy="365760"/>
-          </a:xfrm>
-          <a:prstGeom prst="rect">
-            <a:avLst/>
-          </a:prstGeom>
-          <a:noFill/>
-          <a:ln/>
-        </p:spPr>
-        <p:txBody>
-          <a:bodyPr wrap="square" lIns="0" tIns="0" rIns="0" bIns="0" rtlCol="0" anchor="ctr"/>
-          <a:lstStyle/>
-          <a:p>
-            <a:pPr marL="0" indent="0">
-              <a:buNone/>
-            </a:pPr>
-            <a:r>
-              <a:rPr lang="en-US" sz="1800" dirty="0">
-                <a:solidFill>
-                  <a:srgbClr val="A8C4E8"/>
-                </a:solidFill>
-                <a:latin typeface="Times New Roman" pitchFamily="34" charset="0"/>
-                <a:ea typeface="Times New Roman" pitchFamily="34" charset="-122"/>
-                <a:cs typeface="Times New Roman" pitchFamily="34" charset="-120"/>
-              </a:rPr>
-              <a:t>1. Why not just use a mass spectrometer?</a:t>
-            </a:r>
-            <a:endParaRPr lang="en-US" sz="1800" dirty="0"/>
-          </a:p>
-        </p:txBody>
-      </p:sp>
-      <p:sp>
-        <p:nvSpPr>
-          <p:cNvPr id="5" name="Shape 3"/>
-          <p:cNvSpPr/>
-          <p:nvPr/>
-        </p:nvSpPr>
-        <p:spPr>
-          <a:xfrm>
-            <a:off x="365760" y="1901952"/>
-            <a:ext cx="8046720" cy="566928"/>
-          </a:xfrm>
-          <a:prstGeom prst="roundRect">
-            <a:avLst>
-              <a:gd name="adj" fmla="val 12903"/>
-            </a:avLst>
-          </a:prstGeom>
-          <a:solidFill>
-            <a:srgbClr val="FFFFFF"/>
-          </a:solidFill>
-          <a:ln/>
           <a:effectLst>
-            <a:outerShdw blurRad="101600" dist="25400" dir="8100000" algn="bl" rotWithShape="0">
+            <a:outerShdw blurRad="101600" dist="25400" dir="8100000" algn="ctr" rotWithShape="0">
               <a:srgbClr val="000000">
                 <a:alpha val="12000"/>
               </a:srgbClr>
@@ -13733,20 +17029,20 @@
           <a:bodyPr/>
           <a:lstStyle/>
           <a:p>
-            <a:endParaRPr lang="en-JP"/>
-          </a:p>
-        </p:txBody>
-      </p:sp>
-      <p:sp>
-        <p:nvSpPr>
-          <p:cNvPr id="6" name="Text 4"/>
-          <p:cNvSpPr/>
-          <p:nvPr/>
-        </p:nvSpPr>
-        <p:spPr>
-          <a:xfrm>
-            <a:off x="594360" y="1993392"/>
-            <a:ext cx="7680960" cy="384048"/>
+            <a:endParaRPr lang="en-JP" dirty="0"/>
+          </a:p>
+        </p:txBody>
+      </p:sp>
+      <p:sp>
+        <p:nvSpPr>
+          <p:cNvPr id="21" name="Text 13"/>
+          <p:cNvSpPr/>
+          <p:nvPr/>
+        </p:nvSpPr>
+        <p:spPr>
+          <a:xfrm>
+            <a:off x="594360" y="3931920"/>
+            <a:ext cx="7955280" cy="585216"/>
           </a:xfrm>
           <a:prstGeom prst="rect">
             <a:avLst/>
@@ -13762,95 +17058,39 @@
               <a:buNone/>
             </a:pPr>
             <a:r>
-              <a:rPr lang="en-US" sz="1800" b="1" dirty="0">
-                <a:solidFill>
-                  <a:srgbClr val="0F2F5C"/>
-                </a:solidFill>
-                <a:latin typeface="Times New Roman" pitchFamily="34" charset="0"/>
-                <a:ea typeface="Times New Roman" pitchFamily="34" charset="-122"/>
-                <a:cs typeface="Times New Roman" pitchFamily="34" charset="-120"/>
-              </a:rPr>
-              <a:t>2. How does a filter survive the beam?</a:t>
-            </a:r>
-            <a:endParaRPr lang="en-US" sz="1800" dirty="0"/>
-          </a:p>
-        </p:txBody>
-      </p:sp>
-      <p:sp>
-        <p:nvSpPr>
-          <p:cNvPr id="7" name="Text 5"/>
-          <p:cNvSpPr/>
-          <p:nvPr/>
-        </p:nvSpPr>
-        <p:spPr>
-          <a:xfrm>
-            <a:off x="594360" y="3063240"/>
-            <a:ext cx="7680960" cy="365760"/>
-          </a:xfrm>
-          <a:prstGeom prst="rect">
-            <a:avLst/>
-          </a:prstGeom>
-          <a:noFill/>
-          <a:ln/>
-        </p:spPr>
-        <p:txBody>
-          <a:bodyPr wrap="square" lIns="0" tIns="0" rIns="0" bIns="0" rtlCol="0" anchor="ctr"/>
-          <a:lstStyle/>
-          <a:p>
-            <a:pPr marL="0" indent="0">
-              <a:buNone/>
-            </a:pPr>
-            <a:r>
-              <a:rPr lang="en-US" sz="1800" dirty="0">
-                <a:solidFill>
-                  <a:srgbClr val="A8C4E8"/>
-                </a:solidFill>
-                <a:latin typeface="Times New Roman" pitchFamily="34" charset="0"/>
-                <a:ea typeface="Times New Roman" pitchFamily="34" charset="-122"/>
-                <a:cs typeface="Times New Roman" pitchFamily="34" charset="-120"/>
-              </a:rPr>
-              <a:t>3. Without mass, how do we know what we caught?</a:t>
-            </a:r>
-            <a:endParaRPr lang="en-US" sz="1800" dirty="0"/>
-          </a:p>
-        </p:txBody>
-      </p:sp>
-      <p:sp>
-        <p:nvSpPr>
-          <p:cNvPr id="8" name="Text 6"/>
-          <p:cNvSpPr/>
-          <p:nvPr/>
-        </p:nvSpPr>
-        <p:spPr>
-          <a:xfrm>
-            <a:off x="594360" y="4114799"/>
-            <a:ext cx="7680960" cy="365760"/>
-          </a:xfrm>
-          <a:prstGeom prst="rect">
-            <a:avLst/>
-          </a:prstGeom>
-          <a:noFill/>
-          <a:ln/>
-        </p:spPr>
-        <p:txBody>
-          <a:bodyPr wrap="square" lIns="0" tIns="0" rIns="0" bIns="0" rtlCol="0" anchor="ctr"/>
-          <a:lstStyle/>
-          <a:p>
-            <a:pPr marL="0" indent="0">
-              <a:buNone/>
-            </a:pPr>
-            <a:r>
-              <a:rPr lang="en-US" sz="1800" dirty="0">
-                <a:solidFill>
-                  <a:srgbClr val="A8C4E8"/>
-                </a:solidFill>
-                <a:latin typeface="Times New Roman" pitchFamily="34" charset="0"/>
-                <a:ea typeface="Times New Roman" pitchFamily="34" charset="-122"/>
-                <a:cs typeface="Times New Roman" pitchFamily="34" charset="-120"/>
-              </a:rPr>
-              <a:t>4. When is a velocity filter the wrong tool?</a:t>
-            </a:r>
-            <a:endParaRPr lang="en-US" sz="1800" dirty="0"/>
+              <a:rPr lang="en-US" sz="1300" dirty="0">
+                <a:solidFill>
+                  <a:srgbClr val="FFFFFF"/>
+                </a:solidFill>
+                <a:latin typeface="Times New Roman" pitchFamily="34" charset="0"/>
+                <a:ea typeface="Times New Roman" pitchFamily="34" charset="-122"/>
+                <a:cs typeface="Times New Roman" pitchFamily="34" charset="-120"/>
+              </a:rPr>
+              <a:t>Trade-off: no mass dispersion. SHIP identifies isotopes by decay; Daresbury adds a spectrometer for mass.</a:t>
+            </a:r>
+            <a:endParaRPr lang="en-US" sz="1300" dirty="0"/>
+          </a:p>
+        </p:txBody>
+      </p:sp>
+      <p:sp>
+        <p:nvSpPr>
+          <p:cNvPr id="22" name="Date Placeholder 21"/>
+          <p:cNvSpPr>
+            <a:spLocks noGrp="1"/>
+          </p:cNvSpPr>
+          <p:nvPr>
+            <p:ph type="dt" sz="half" idx="10"/>
+          </p:nvPr>
+        </p:nvSpPr>
+        <p:spPr/>
+        <p:txBody>
+          <a:bodyPr/>
+          <a:lstStyle/>
+          <a:p>
+            <a:r>
+              <a:rPr lang="en-US" dirty="0"/>
+              <a:t>29 Sep 2026</a:t>
+            </a:r>
           </a:p>
         </p:txBody>
       </p:sp>
